--- a/docs/帮扶管理信息系统-操作培训.pptx
+++ b/docs/帮扶管理信息系统-操作培训.pptx
@@ -4494,6 +4494,10 @@
             <a:noFill/>
           </a:ln>
         </p:spPr>
+        <p:txBody>
+          <a:bodyPr/>
+          <a:p/>
+        </p:txBody>
       </p:sp>
       <p:sp>
         <p:nvSpPr>
@@ -4516,6 +4520,10 @@
             <a:noFill/>
           </a:ln>
         </p:spPr>
+        <p:txBody>
+          <a:bodyPr/>
+          <a:p/>
+        </p:txBody>
       </p:sp>
       <p:sp>
         <p:nvSpPr>
@@ -4538,6 +4546,10 @@
             <a:noFill/>
           </a:ln>
         </p:spPr>
+        <p:txBody>
+          <a:bodyPr/>
+          <a:p/>
+        </p:txBody>
       </p:sp>
       <p:sp>
         <p:nvSpPr>
@@ -4562,6 +4574,10 @@
             <a:noFill/>
           </a:ln>
         </p:spPr>
+        <p:txBody>
+          <a:bodyPr/>
+          <a:p/>
+        </p:txBody>
       </p:sp>
       <p:sp>
         <p:nvSpPr>
@@ -4584,6 +4600,10 @@
             <a:noFill/>
           </a:ln>
         </p:spPr>
+        <p:txBody>
+          <a:bodyPr/>
+          <a:p/>
+        </p:txBody>
       </p:sp>
       <p:sp>
         <p:nvSpPr>
@@ -4766,6 +4786,10 @@
             <a:noFill/>
           </a:ln>
         </p:spPr>
+        <p:txBody>
+          <a:bodyPr/>
+          <a:p/>
+        </p:txBody>
       </p:sp>
       <p:sp>
         <p:nvSpPr>
@@ -4964,6 +4988,10 @@
             </a:solidFill>
           </a:ln>
         </p:spPr>
+        <p:txBody>
+          <a:bodyPr/>
+          <a:p/>
+        </p:txBody>
       </p:sp>
       <p:sp>
         <p:nvSpPr>
@@ -5082,6 +5110,10 @@
             </a:solidFill>
           </a:ln>
         </p:spPr>
+        <p:txBody>
+          <a:bodyPr/>
+          <a:p/>
+        </p:txBody>
       </p:sp>
       <p:sp>
         <p:nvSpPr>
@@ -5200,6 +5232,10 @@
             </a:solidFill>
           </a:ln>
         </p:spPr>
+        <p:txBody>
+          <a:bodyPr/>
+          <a:p/>
+        </p:txBody>
       </p:sp>
       <p:sp>
         <p:nvSpPr>
@@ -5316,7 +5352,7 @@
                 <a:ea typeface="+mn-ea"/>
                 <a:cs typeface="+mn-cs"/>
               </a:rPr>
-              <a:t>V1.18.8 | 2026-10-26 | FastAPI + Vue 3 + Electron + SQLite</a:t>
+              <a:t>V1.18.12 | 2026-10-26 | FastAPI + Vue 3 + Electron + SQLite</a:t>
             </a:r>
           </a:p>
         </p:txBody>
@@ -5418,6 +5454,10 @@
             <a:noFill/>
           </a:ln>
         </p:spPr>
+        <p:txBody>
+          <a:bodyPr/>
+          <a:p/>
+        </p:txBody>
       </p:sp>
       <p:sp>
         <p:nvSpPr>
@@ -5440,6 +5480,10 @@
             <a:noFill/>
           </a:ln>
         </p:spPr>
+        <p:txBody>
+          <a:bodyPr/>
+          <a:p/>
+        </p:txBody>
       </p:sp>
       <p:sp>
         <p:nvSpPr>
@@ -5556,6 +5600,10 @@
             </a:solidFill>
           </a:ln>
         </p:spPr>
+        <p:txBody>
+          <a:bodyPr/>
+          <a:p/>
+        </p:txBody>
       </p:sp>
       <p:grpSp>
         <p:nvGrpSpPr>
@@ -6113,7 +6161,7 @@
                 <a:ea typeface="+mn-ea"/>
                 <a:cs typeface="+mn-cs"/>
               </a:rPr>
-              <a:t>帮扶管理信息系统 v1.18.8</a:t>
+              <a:t>帮扶管理信息系统 v1.18.12</a:t>
             </a:r>
           </a:p>
         </p:txBody>
@@ -6215,6 +6263,10 @@
             <a:noFill/>
           </a:ln>
         </p:spPr>
+        <p:txBody>
+          <a:bodyPr/>
+          <a:p/>
+        </p:txBody>
       </p:sp>
       <p:sp>
         <p:nvSpPr>
@@ -6237,6 +6289,10 @@
             <a:noFill/>
           </a:ln>
         </p:spPr>
+        <p:txBody>
+          <a:bodyPr/>
+          <a:p/>
+        </p:txBody>
       </p:sp>
       <p:sp>
         <p:nvSpPr>
@@ -6259,6 +6315,10 @@
             <a:noFill/>
           </a:ln>
         </p:spPr>
+        <p:txBody>
+          <a:bodyPr/>
+          <a:p/>
+        </p:txBody>
       </p:sp>
       <p:sp>
         <p:nvSpPr>
@@ -6403,6 +6463,10 @@
             <a:noFill/>
           </a:ln>
         </p:spPr>
+        <p:txBody>
+          <a:bodyPr/>
+          <a:p/>
+        </p:txBody>
       </p:sp>
       <p:grpSp>
         <p:nvGrpSpPr>
@@ -6902,6 +6966,10 @@
             <a:noFill/>
           </a:ln>
         </p:spPr>
+        <p:txBody>
+          <a:bodyPr/>
+          <a:p/>
+        </p:txBody>
       </p:sp>
       <p:sp>
         <p:nvSpPr>
@@ -6924,6 +6992,10 @@
             <a:noFill/>
           </a:ln>
         </p:spPr>
+        <p:txBody>
+          <a:bodyPr/>
+          <a:p/>
+        </p:txBody>
       </p:sp>
       <p:sp>
         <p:nvSpPr>
@@ -7040,6 +7112,10 @@
             </a:solidFill>
           </a:ln>
         </p:spPr>
+        <p:txBody>
+          <a:bodyPr/>
+          <a:p/>
+        </p:txBody>
       </p:sp>
       <p:grpSp>
         <p:nvGrpSpPr>
@@ -8005,7 +8081,7 @@
                 <a:ea typeface="+mn-ea"/>
                 <a:cs typeface="+mn-cs"/>
               </a:rPr>
-              <a:t>帮扶管理信息系统 v1.18.8</a:t>
+              <a:t>帮扶管理信息系统 v1.18.12</a:t>
             </a:r>
           </a:p>
         </p:txBody>
@@ -8107,6 +8183,10 @@
             <a:noFill/>
           </a:ln>
         </p:spPr>
+        <p:txBody>
+          <a:bodyPr/>
+          <a:p/>
+        </p:txBody>
       </p:sp>
       <p:sp>
         <p:nvSpPr>
@@ -8129,6 +8209,10 @@
             <a:noFill/>
           </a:ln>
         </p:spPr>
+        <p:txBody>
+          <a:bodyPr/>
+          <a:p/>
+        </p:txBody>
       </p:sp>
       <p:sp>
         <p:nvSpPr>
@@ -8245,6 +8329,10 @@
             </a:solidFill>
           </a:ln>
         </p:spPr>
+        <p:txBody>
+          <a:bodyPr/>
+          <a:p/>
+        </p:txBody>
       </p:sp>
       <p:grpSp>
         <p:nvGrpSpPr>
@@ -8864,7 +8952,7 @@
                 <a:ea typeface="+mn-ea"/>
                 <a:cs typeface="+mn-cs"/>
               </a:rPr>
-              <a:t>帮扶管理信息系统 v1.18.8</a:t>
+              <a:t>帮扶管理信息系统 v1.18.12</a:t>
             </a:r>
           </a:p>
         </p:txBody>
@@ -8966,6 +9054,10 @@
             <a:noFill/>
           </a:ln>
         </p:spPr>
+        <p:txBody>
+          <a:bodyPr/>
+          <a:p/>
+        </p:txBody>
       </p:sp>
       <p:sp>
         <p:nvSpPr>
@@ -8988,6 +9080,10 @@
             <a:noFill/>
           </a:ln>
         </p:spPr>
+        <p:txBody>
+          <a:bodyPr/>
+          <a:p/>
+        </p:txBody>
       </p:sp>
       <p:sp>
         <p:nvSpPr>
@@ -9104,6 +9200,10 @@
             </a:solidFill>
           </a:ln>
         </p:spPr>
+        <p:txBody>
+          <a:bodyPr/>
+          <a:p/>
+        </p:txBody>
       </p:sp>
       <p:grpSp>
         <p:nvGrpSpPr>
@@ -9785,7 +9885,7 @@
                 <a:ea typeface="+mn-ea"/>
                 <a:cs typeface="+mn-cs"/>
               </a:rPr>
-              <a:t>帮扶管理信息系统 v1.18.8</a:t>
+              <a:t>帮扶管理信息系统 v1.18.12</a:t>
             </a:r>
           </a:p>
         </p:txBody>
@@ -9887,6 +9987,10 @@
             <a:noFill/>
           </a:ln>
         </p:spPr>
+        <p:txBody>
+          <a:bodyPr/>
+          <a:p/>
+        </p:txBody>
       </p:sp>
       <p:sp>
         <p:nvSpPr>
@@ -9909,6 +10013,10 @@
             <a:noFill/>
           </a:ln>
         </p:spPr>
+        <p:txBody>
+          <a:bodyPr/>
+          <a:p/>
+        </p:txBody>
       </p:sp>
       <p:sp>
         <p:nvSpPr>
@@ -10025,6 +10133,10 @@
             </a:solidFill>
           </a:ln>
         </p:spPr>
+        <p:txBody>
+          <a:bodyPr/>
+          <a:p/>
+        </p:txBody>
       </p:sp>
       <p:grpSp>
         <p:nvGrpSpPr>
@@ -10652,7 +10764,7 @@
                 <a:ea typeface="+mn-ea"/>
                 <a:cs typeface="+mn-cs"/>
               </a:rPr>
-              <a:t>帮扶管理信息系统 v1.18.8</a:t>
+              <a:t>帮扶管理信息系统 v1.18.12</a:t>
             </a:r>
           </a:p>
         </p:txBody>
@@ -10754,6 +10866,10 @@
             <a:noFill/>
           </a:ln>
         </p:spPr>
+        <p:txBody>
+          <a:bodyPr/>
+          <a:p/>
+        </p:txBody>
       </p:sp>
       <p:sp>
         <p:nvSpPr>
@@ -10776,6 +10892,10 @@
             <a:noFill/>
           </a:ln>
         </p:spPr>
+        <p:txBody>
+          <a:bodyPr/>
+          <a:p/>
+        </p:txBody>
       </p:sp>
       <p:sp>
         <p:nvSpPr>
@@ -10892,6 +11012,10 @@
             </a:solidFill>
           </a:ln>
         </p:spPr>
+        <p:txBody>
+          <a:bodyPr/>
+          <a:p/>
+        </p:txBody>
       </p:sp>
       <p:grpSp>
         <p:nvGrpSpPr>
@@ -11575,7 +11699,7 @@
                 <a:ea typeface="+mn-ea"/>
                 <a:cs typeface="+mn-cs"/>
               </a:rPr>
-              <a:t>帮扶管理信息系统 v1.18.8</a:t>
+              <a:t>帮扶管理信息系统 v1.18.12</a:t>
             </a:r>
           </a:p>
         </p:txBody>
@@ -11677,6 +11801,10 @@
             <a:noFill/>
           </a:ln>
         </p:spPr>
+        <p:txBody>
+          <a:bodyPr/>
+          <a:p/>
+        </p:txBody>
       </p:sp>
       <p:sp>
         <p:nvSpPr>
@@ -11699,6 +11827,10 @@
             <a:noFill/>
           </a:ln>
         </p:spPr>
+        <p:txBody>
+          <a:bodyPr/>
+          <a:p/>
+        </p:txBody>
       </p:sp>
       <p:sp>
         <p:nvSpPr>
@@ -11815,6 +11947,10 @@
             </a:solidFill>
           </a:ln>
         </p:spPr>
+        <p:txBody>
+          <a:bodyPr/>
+          <a:p/>
+        </p:txBody>
       </p:sp>
       <p:grpSp>
         <p:nvGrpSpPr>
@@ -12780,7 +12916,7 @@
                 <a:ea typeface="+mn-ea"/>
                 <a:cs typeface="+mn-cs"/>
               </a:rPr>
-              <a:t>帮扶管理信息系统 v1.18.8</a:t>
+              <a:t>帮扶管理信息系统 v1.18.12</a:t>
             </a:r>
           </a:p>
         </p:txBody>
@@ -12882,6 +13018,10 @@
             <a:noFill/>
           </a:ln>
         </p:spPr>
+        <p:txBody>
+          <a:bodyPr/>
+          <a:p/>
+        </p:txBody>
       </p:sp>
       <p:sp>
         <p:nvSpPr>
@@ -12904,6 +13044,10 @@
             <a:noFill/>
           </a:ln>
         </p:spPr>
+        <p:txBody>
+          <a:bodyPr/>
+          <a:p/>
+        </p:txBody>
       </p:sp>
       <p:sp>
         <p:nvSpPr>
@@ -13020,6 +13164,10 @@
             </a:solidFill>
           </a:ln>
         </p:spPr>
+        <p:txBody>
+          <a:bodyPr/>
+          <a:p/>
+        </p:txBody>
       </p:sp>
       <p:grpSp>
         <p:nvGrpSpPr>
@@ -13833,7 +13981,7 @@
                 <a:ea typeface="+mn-ea"/>
                 <a:cs typeface="+mn-cs"/>
               </a:rPr>
-              <a:t>帮扶管理信息系统 v1.18.8</a:t>
+              <a:t>帮扶管理信息系统 v1.18.12</a:t>
             </a:r>
           </a:p>
         </p:txBody>
@@ -13935,6 +14083,10 @@
             <a:noFill/>
           </a:ln>
         </p:spPr>
+        <p:txBody>
+          <a:bodyPr/>
+          <a:p/>
+        </p:txBody>
       </p:sp>
       <p:sp>
         <p:nvSpPr>
@@ -13957,6 +14109,10 @@
             <a:noFill/>
           </a:ln>
         </p:spPr>
+        <p:txBody>
+          <a:bodyPr/>
+          <a:p/>
+        </p:txBody>
       </p:sp>
       <p:sp>
         <p:nvSpPr>
@@ -14073,6 +14229,10 @@
             </a:solidFill>
           </a:ln>
         </p:spPr>
+        <p:txBody>
+          <a:bodyPr/>
+          <a:p/>
+        </p:txBody>
       </p:sp>
       <p:grpSp>
         <p:nvGrpSpPr>
@@ -14684,7 +14844,7 @@
                 <a:ea typeface="+mn-ea"/>
                 <a:cs typeface="+mn-cs"/>
               </a:rPr>
-              <a:t>帮扶管理信息系统 v1.18.8</a:t>
+              <a:t>帮扶管理信息系统 v1.18.12</a:t>
             </a:r>
           </a:p>
         </p:txBody>
@@ -14786,6 +14946,10 @@
             <a:noFill/>
           </a:ln>
         </p:spPr>
+        <p:txBody>
+          <a:bodyPr/>
+          <a:p/>
+        </p:txBody>
       </p:sp>
       <p:sp>
         <p:nvSpPr>
@@ -14808,6 +14972,10 @@
             <a:noFill/>
           </a:ln>
         </p:spPr>
+        <p:txBody>
+          <a:bodyPr/>
+          <a:p/>
+        </p:txBody>
       </p:sp>
       <p:sp>
         <p:nvSpPr>
@@ -14910,6 +15078,10 @@
             <a:noFill/>
           </a:ln>
         </p:spPr>
+        <p:txBody>
+          <a:bodyPr/>
+          <a:p/>
+        </p:txBody>
       </p:sp>
       <p:grpSp>
         <p:nvGrpSpPr>
@@ -16053,7 +16225,7 @@
                 <a:ea typeface="+mn-ea"/>
                 <a:cs typeface="+mn-cs"/>
               </a:rPr>
-              <a:t>帮扶管理信息系统 v1.18.8</a:t>
+              <a:t>帮扶管理信息系统 v1.18.12</a:t>
             </a:r>
           </a:p>
         </p:txBody>
@@ -16155,6 +16327,10 @@
             <a:noFill/>
           </a:ln>
         </p:spPr>
+        <p:txBody>
+          <a:bodyPr/>
+          <a:p/>
+        </p:txBody>
       </p:sp>
       <p:sp>
         <p:nvSpPr>
@@ -16177,6 +16353,10 @@
             <a:noFill/>
           </a:ln>
         </p:spPr>
+        <p:txBody>
+          <a:bodyPr/>
+          <a:p/>
+        </p:txBody>
       </p:sp>
       <p:sp>
         <p:nvSpPr>
@@ -16293,6 +16473,10 @@
             </a:solidFill>
           </a:ln>
         </p:spPr>
+        <p:txBody>
+          <a:bodyPr/>
+          <a:p/>
+        </p:txBody>
       </p:sp>
       <p:grpSp>
         <p:nvGrpSpPr>
@@ -17044,7 +17228,7 @@
                 <a:ea typeface="+mn-ea"/>
                 <a:cs typeface="+mn-cs"/>
               </a:rPr>
-              <a:t>帮扶管理信息系统 v1.18.8</a:t>
+              <a:t>帮扶管理信息系统 v1.18.12</a:t>
             </a:r>
           </a:p>
         </p:txBody>
@@ -17146,6 +17330,10 @@
             <a:noFill/>
           </a:ln>
         </p:spPr>
+        <p:txBody>
+          <a:bodyPr/>
+          <a:p/>
+        </p:txBody>
       </p:sp>
       <p:sp>
         <p:nvSpPr>
@@ -17168,6 +17356,10 @@
             <a:noFill/>
           </a:ln>
         </p:spPr>
+        <p:txBody>
+          <a:bodyPr/>
+          <a:p/>
+        </p:txBody>
       </p:sp>
       <p:sp>
         <p:nvSpPr>
@@ -17190,6 +17382,10 @@
             <a:noFill/>
           </a:ln>
         </p:spPr>
+        <p:txBody>
+          <a:bodyPr/>
+          <a:p/>
+        </p:txBody>
       </p:sp>
       <p:sp>
         <p:nvSpPr>
@@ -17334,6 +17530,10 @@
             <a:noFill/>
           </a:ln>
         </p:spPr>
+        <p:txBody>
+          <a:bodyPr/>
+          <a:p/>
+        </p:txBody>
       </p:sp>
       <p:grpSp>
         <p:nvGrpSpPr>
@@ -17771,6 +17971,10 @@
             <a:noFill/>
           </a:ln>
         </p:spPr>
+        <p:txBody>
+          <a:bodyPr/>
+          <a:p/>
+        </p:txBody>
       </p:sp>
       <p:sp>
         <p:nvSpPr>
@@ -17793,6 +17997,10 @@
             <a:noFill/>
           </a:ln>
         </p:spPr>
+        <p:txBody>
+          <a:bodyPr/>
+          <a:p/>
+        </p:txBody>
       </p:sp>
       <p:sp>
         <p:nvSpPr>
@@ -17909,6 +18117,10 @@
             </a:solidFill>
           </a:ln>
         </p:spPr>
+        <p:txBody>
+          <a:bodyPr/>
+          <a:p/>
+        </p:txBody>
       </p:sp>
       <p:grpSp>
         <p:nvGrpSpPr>
@@ -18994,7 +19206,7 @@
                 <a:ea typeface="+mn-ea"/>
                 <a:cs typeface="+mn-cs"/>
               </a:rPr>
-              <a:t>帮扶管理信息系统 v1.18.8</a:t>
+              <a:t>帮扶管理信息系统 v1.18.12</a:t>
             </a:r>
           </a:p>
         </p:txBody>
@@ -19096,6 +19308,10 @@
             <a:noFill/>
           </a:ln>
         </p:spPr>
+        <p:txBody>
+          <a:bodyPr/>
+          <a:p/>
+        </p:txBody>
       </p:sp>
       <p:sp>
         <p:nvSpPr>
@@ -19118,6 +19334,10 @@
             <a:noFill/>
           </a:ln>
         </p:spPr>
+        <p:txBody>
+          <a:bodyPr/>
+          <a:p/>
+        </p:txBody>
       </p:sp>
       <p:sp>
         <p:nvSpPr>
@@ -19234,6 +19454,10 @@
             </a:solidFill>
           </a:ln>
         </p:spPr>
+        <p:txBody>
+          <a:bodyPr/>
+          <a:p/>
+        </p:txBody>
       </p:sp>
       <p:grpSp>
         <p:nvGrpSpPr>
@@ -20079,7 +20303,7 @@
                 <a:ea typeface="+mn-ea"/>
                 <a:cs typeface="+mn-cs"/>
               </a:rPr>
-              <a:t>帮扶管理信息系统 v1.18.8</a:t>
+              <a:t>帮扶管理信息系统 v1.18.12</a:t>
             </a:r>
           </a:p>
         </p:txBody>
@@ -20181,6 +20405,10 @@
             <a:noFill/>
           </a:ln>
         </p:spPr>
+        <p:txBody>
+          <a:bodyPr/>
+          <a:p/>
+        </p:txBody>
       </p:sp>
       <p:sp>
         <p:nvSpPr>
@@ -20203,6 +20431,10 @@
             <a:noFill/>
           </a:ln>
         </p:spPr>
+        <p:txBody>
+          <a:bodyPr/>
+          <a:p/>
+        </p:txBody>
       </p:sp>
       <p:sp>
         <p:nvSpPr>
@@ -20319,6 +20551,10 @@
             </a:solidFill>
           </a:ln>
         </p:spPr>
+        <p:txBody>
+          <a:bodyPr/>
+          <a:p/>
+        </p:txBody>
       </p:sp>
       <p:grpSp>
         <p:nvGrpSpPr>
@@ -20956,7 +21192,7 @@
                 <a:ea typeface="+mn-ea"/>
                 <a:cs typeface="+mn-cs"/>
               </a:rPr>
-              <a:t>帮扶管理信息系统 v1.18.8</a:t>
+              <a:t>帮扶管理信息系统 v1.18.12</a:t>
             </a:r>
           </a:p>
         </p:txBody>
@@ -21058,6 +21294,10 @@
             <a:noFill/>
           </a:ln>
         </p:spPr>
+        <p:txBody>
+          <a:bodyPr/>
+          <a:p/>
+        </p:txBody>
       </p:sp>
       <p:sp>
         <p:nvSpPr>
@@ -21080,6 +21320,10 @@
             <a:noFill/>
           </a:ln>
         </p:spPr>
+        <p:txBody>
+          <a:bodyPr/>
+          <a:p/>
+        </p:txBody>
       </p:sp>
       <p:sp>
         <p:nvSpPr>
@@ -21196,6 +21440,10 @@
             </a:solidFill>
           </a:ln>
         </p:spPr>
+        <p:txBody>
+          <a:bodyPr/>
+          <a:p/>
+        </p:txBody>
       </p:sp>
       <p:grpSp>
         <p:nvGrpSpPr>
@@ -21879,7 +22127,7 @@
                 <a:ea typeface="+mn-ea"/>
                 <a:cs typeface="+mn-cs"/>
               </a:rPr>
-              <a:t>帮扶管理信息系统 v1.18.8</a:t>
+              <a:t>帮扶管理信息系统 v1.18.12</a:t>
             </a:r>
           </a:p>
         </p:txBody>
@@ -21981,6 +22229,10 @@
             <a:noFill/>
           </a:ln>
         </p:spPr>
+        <p:txBody>
+          <a:bodyPr/>
+          <a:p/>
+        </p:txBody>
       </p:sp>
       <p:sp>
         <p:nvSpPr>
@@ -22003,6 +22255,10 @@
             <a:noFill/>
           </a:ln>
         </p:spPr>
+        <p:txBody>
+          <a:bodyPr/>
+          <a:p/>
+        </p:txBody>
       </p:sp>
       <p:sp>
         <p:nvSpPr>
@@ -22119,6 +22375,10 @@
             </a:solidFill>
           </a:ln>
         </p:spPr>
+        <p:txBody>
+          <a:bodyPr/>
+          <a:p/>
+        </p:txBody>
       </p:sp>
       <p:grpSp>
         <p:nvGrpSpPr>
@@ -22800,7 +23060,7 @@
                 <a:ea typeface="+mn-ea"/>
                 <a:cs typeface="+mn-cs"/>
               </a:rPr>
-              <a:t>帮扶管理信息系统 v1.18.8</a:t>
+              <a:t>帮扶管理信息系统 v1.18.12</a:t>
             </a:r>
           </a:p>
         </p:txBody>
@@ -22902,6 +23162,10 @@
             <a:noFill/>
           </a:ln>
         </p:spPr>
+        <p:txBody>
+          <a:bodyPr/>
+          <a:p/>
+        </p:txBody>
       </p:sp>
       <p:sp>
         <p:nvSpPr>
@@ -22924,6 +23188,10 @@
             <a:noFill/>
           </a:ln>
         </p:spPr>
+        <p:txBody>
+          <a:bodyPr/>
+          <a:p/>
+        </p:txBody>
       </p:sp>
       <p:sp>
         <p:nvSpPr>
@@ -23040,6 +23308,10 @@
             </a:solidFill>
           </a:ln>
         </p:spPr>
+        <p:txBody>
+          <a:bodyPr/>
+          <a:p/>
+        </p:txBody>
       </p:sp>
       <p:grpSp>
         <p:nvGrpSpPr>
@@ -24005,7 +24277,7 @@
                 <a:ea typeface="+mn-ea"/>
                 <a:cs typeface="+mn-cs"/>
               </a:rPr>
-              <a:t>帮扶管理信息系统 v1.18.8</a:t>
+              <a:t>帮扶管理信息系统 v1.18.12</a:t>
             </a:r>
           </a:p>
         </p:txBody>
@@ -24107,6 +24379,10 @@
             <a:noFill/>
           </a:ln>
         </p:spPr>
+        <p:txBody>
+          <a:bodyPr/>
+          <a:p/>
+        </p:txBody>
       </p:sp>
       <p:sp>
         <p:nvSpPr>
@@ -24129,6 +24405,10 @@
             <a:noFill/>
           </a:ln>
         </p:spPr>
+        <p:txBody>
+          <a:bodyPr/>
+          <a:p/>
+        </p:txBody>
       </p:sp>
       <p:sp>
         <p:nvSpPr>
@@ -24245,6 +24525,10 @@
             </a:solidFill>
           </a:ln>
         </p:spPr>
+        <p:txBody>
+          <a:bodyPr/>
+          <a:p/>
+        </p:txBody>
       </p:sp>
       <p:grpSp>
         <p:nvGrpSpPr>
@@ -24872,7 +25156,7 @@
                 <a:ea typeface="+mn-ea"/>
                 <a:cs typeface="+mn-cs"/>
               </a:rPr>
-              <a:t>帮扶管理信息系统 v1.18.8</a:t>
+              <a:t>帮扶管理信息系统 v1.18.12</a:t>
             </a:r>
           </a:p>
         </p:txBody>
@@ -24974,6 +25258,10 @@
             <a:noFill/>
           </a:ln>
         </p:spPr>
+        <p:txBody>
+          <a:bodyPr/>
+          <a:p/>
+        </p:txBody>
       </p:sp>
       <p:sp>
         <p:nvSpPr>
@@ -24996,6 +25284,10 @@
             <a:noFill/>
           </a:ln>
         </p:spPr>
+        <p:txBody>
+          <a:bodyPr/>
+          <a:p/>
+        </p:txBody>
       </p:sp>
       <p:sp>
         <p:nvSpPr>
@@ -25112,6 +25404,10 @@
             </a:solidFill>
           </a:ln>
         </p:spPr>
+        <p:txBody>
+          <a:bodyPr/>
+          <a:p/>
+        </p:txBody>
       </p:sp>
       <p:grpSp>
         <p:nvGrpSpPr>
@@ -25589,7 +25885,7 @@
                 <a:ea typeface="+mn-ea"/>
                 <a:cs typeface="+mn-cs"/>
               </a:rPr>
-              <a:t>帮扶管理信息系统 v1.18.8</a:t>
+              <a:t>帮扶管理信息系统 v1.18.12</a:t>
             </a:r>
           </a:p>
         </p:txBody>
@@ -25691,6 +25987,10 @@
             <a:noFill/>
           </a:ln>
         </p:spPr>
+        <p:txBody>
+          <a:bodyPr/>
+          <a:p/>
+        </p:txBody>
       </p:sp>
       <p:sp>
         <p:nvSpPr>
@@ -25713,6 +26013,10 @@
             <a:noFill/>
           </a:ln>
         </p:spPr>
+        <p:txBody>
+          <a:bodyPr/>
+          <a:p/>
+        </p:txBody>
       </p:sp>
       <p:sp>
         <p:nvSpPr>
@@ -25829,6 +26133,10 @@
             </a:solidFill>
           </a:ln>
         </p:spPr>
+        <p:txBody>
+          <a:bodyPr/>
+          <a:p/>
+        </p:txBody>
       </p:sp>
       <p:grpSp>
         <p:nvGrpSpPr>
@@ -26636,7 +26944,7 @@
                 <a:ea typeface="+mn-ea"/>
                 <a:cs typeface="+mn-cs"/>
               </a:rPr>
-              <a:t>帮扶管理信息系统 v1.18.8</a:t>
+              <a:t>帮扶管理信息系统 v1.18.12</a:t>
             </a:r>
           </a:p>
         </p:txBody>
@@ -26738,6 +27046,10 @@
             <a:noFill/>
           </a:ln>
         </p:spPr>
+        <p:txBody>
+          <a:bodyPr/>
+          <a:p/>
+        </p:txBody>
       </p:sp>
       <p:sp>
         <p:nvSpPr>
@@ -26760,6 +27072,10 @@
             <a:noFill/>
           </a:ln>
         </p:spPr>
+        <p:txBody>
+          <a:bodyPr/>
+          <a:p/>
+        </p:txBody>
       </p:sp>
       <p:sp>
         <p:nvSpPr>
@@ -26876,6 +27192,10 @@
             </a:solidFill>
           </a:ln>
         </p:spPr>
+        <p:txBody>
+          <a:bodyPr/>
+          <a:p/>
+        </p:txBody>
       </p:sp>
       <p:grpSp>
         <p:nvGrpSpPr>
@@ -27557,7 +27877,7 @@
                 <a:ea typeface="+mn-ea"/>
                 <a:cs typeface="+mn-cs"/>
               </a:rPr>
-              <a:t>帮扶管理信息系统 v1.18.8</a:t>
+              <a:t>帮扶管理信息系统 v1.18.12</a:t>
             </a:r>
           </a:p>
         </p:txBody>
@@ -27659,6 +27979,10 @@
             <a:noFill/>
           </a:ln>
         </p:spPr>
+        <p:txBody>
+          <a:bodyPr/>
+          <a:p/>
+        </p:txBody>
       </p:sp>
       <p:sp>
         <p:nvSpPr>
@@ -27681,6 +28005,10 @@
             <a:noFill/>
           </a:ln>
         </p:spPr>
+        <p:txBody>
+          <a:bodyPr/>
+          <a:p/>
+        </p:txBody>
       </p:sp>
       <p:sp>
         <p:nvSpPr>
@@ -27797,6 +28125,10 @@
             </a:solidFill>
           </a:ln>
         </p:spPr>
+        <p:txBody>
+          <a:bodyPr/>
+          <a:p/>
+        </p:txBody>
       </p:sp>
       <p:grpSp>
         <p:nvGrpSpPr>
@@ -28338,7 +28670,7 @@
                 <a:ea typeface="+mn-ea"/>
                 <a:cs typeface="+mn-cs"/>
               </a:rPr>
-              <a:t>帮扶管理信息系统 v1.18.8</a:t>
+              <a:t>帮扶管理信息系统 v1.18.12</a:t>
             </a:r>
           </a:p>
         </p:txBody>
@@ -28440,6 +28772,10 @@
             <a:noFill/>
           </a:ln>
         </p:spPr>
+        <p:txBody>
+          <a:bodyPr/>
+          <a:p/>
+        </p:txBody>
       </p:sp>
       <p:sp>
         <p:nvSpPr>
@@ -28462,6 +28798,10 @@
             <a:noFill/>
           </a:ln>
         </p:spPr>
+        <p:txBody>
+          <a:bodyPr/>
+          <a:p/>
+        </p:txBody>
       </p:sp>
       <p:sp>
         <p:nvSpPr>
@@ -28578,6 +28918,10 @@
             </a:solidFill>
           </a:ln>
         </p:spPr>
+        <p:txBody>
+          <a:bodyPr/>
+          <a:p/>
+        </p:txBody>
       </p:sp>
       <p:grpSp>
         <p:nvGrpSpPr>
@@ -29449,7 +29793,7 @@
                 <a:ea typeface="+mn-ea"/>
                 <a:cs typeface="+mn-cs"/>
               </a:rPr>
-              <a:t>帮扶管理信息系统 v1.18.8</a:t>
+              <a:t>帮扶管理信息系统 v1.18.12</a:t>
             </a:r>
           </a:p>
         </p:txBody>
@@ -29551,6 +29895,10 @@
             <a:noFill/>
           </a:ln>
         </p:spPr>
+        <p:txBody>
+          <a:bodyPr/>
+          <a:p/>
+        </p:txBody>
       </p:sp>
       <p:sp>
         <p:nvSpPr>
@@ -29573,6 +29921,10 @@
             <a:noFill/>
           </a:ln>
         </p:spPr>
+        <p:txBody>
+          <a:bodyPr/>
+          <a:p/>
+        </p:txBody>
       </p:sp>
       <p:sp>
         <p:nvSpPr>
@@ -29595,6 +29947,10 @@
             <a:noFill/>
           </a:ln>
         </p:spPr>
+        <p:txBody>
+          <a:bodyPr/>
+          <a:p/>
+        </p:txBody>
       </p:sp>
       <p:sp>
         <p:nvSpPr>
@@ -29739,6 +30095,10 @@
             <a:noFill/>
           </a:ln>
         </p:spPr>
+        <p:txBody>
+          <a:bodyPr/>
+          <a:p/>
+        </p:txBody>
       </p:sp>
       <p:grpSp>
         <p:nvGrpSpPr>
@@ -30176,6 +30536,10 @@
             <a:noFill/>
           </a:ln>
         </p:spPr>
+        <p:txBody>
+          <a:bodyPr/>
+          <a:p/>
+        </p:txBody>
       </p:sp>
       <p:sp>
         <p:nvSpPr>
@@ -30198,6 +30562,10 @@
             <a:noFill/>
           </a:ln>
         </p:spPr>
+        <p:txBody>
+          <a:bodyPr/>
+          <a:p/>
+        </p:txBody>
       </p:sp>
       <p:sp>
         <p:nvSpPr>
@@ -30314,6 +30682,10 @@
             </a:solidFill>
           </a:ln>
         </p:spPr>
+        <p:txBody>
+          <a:bodyPr/>
+          <a:p/>
+        </p:txBody>
       </p:sp>
       <p:grpSp>
         <p:nvGrpSpPr>
@@ -30759,7 +31131,7 @@
                 <a:ea typeface="+mn-ea"/>
                 <a:cs typeface="+mn-cs"/>
               </a:rPr>
-              <a:t>帮扶管理信息系统 v1.18.8</a:t>
+              <a:t>帮扶管理信息系统 v1.18.12</a:t>
             </a:r>
           </a:p>
         </p:txBody>
@@ -30861,6 +31233,10 @@
             <a:noFill/>
           </a:ln>
         </p:spPr>
+        <p:txBody>
+          <a:bodyPr/>
+          <a:p/>
+        </p:txBody>
       </p:sp>
       <p:sp>
         <p:nvSpPr>
@@ -30883,6 +31259,10 @@
             <a:noFill/>
           </a:ln>
         </p:spPr>
+        <p:txBody>
+          <a:bodyPr/>
+          <a:p/>
+        </p:txBody>
       </p:sp>
       <p:sp>
         <p:nvSpPr>
@@ -30999,6 +31379,10 @@
             </a:solidFill>
           </a:ln>
         </p:spPr>
+        <p:txBody>
+          <a:bodyPr/>
+          <a:p/>
+        </p:txBody>
       </p:sp>
       <p:grpSp>
         <p:nvGrpSpPr>
@@ -31540,7 +31924,7 @@
                 <a:ea typeface="+mn-ea"/>
                 <a:cs typeface="+mn-cs"/>
               </a:rPr>
-              <a:t>帮扶管理信息系统 v1.18.8</a:t>
+              <a:t>帮扶管理信息系统 v1.18.12</a:t>
             </a:r>
           </a:p>
         </p:txBody>
@@ -31642,6 +32026,10 @@
             <a:noFill/>
           </a:ln>
         </p:spPr>
+        <p:txBody>
+          <a:bodyPr/>
+          <a:p/>
+        </p:txBody>
       </p:sp>
       <p:sp>
         <p:nvSpPr>
@@ -31664,6 +32052,10 @@
             <a:noFill/>
           </a:ln>
         </p:spPr>
+        <p:txBody>
+          <a:bodyPr/>
+          <a:p/>
+        </p:txBody>
       </p:sp>
       <p:sp>
         <p:nvSpPr>
@@ -31780,6 +32172,10 @@
             </a:solidFill>
           </a:ln>
         </p:spPr>
+        <p:txBody>
+          <a:bodyPr/>
+          <a:p/>
+        </p:txBody>
       </p:sp>
       <p:grpSp>
         <p:nvGrpSpPr>
@@ -32463,7 +32859,7 @@
                 <a:ea typeface="+mn-ea"/>
                 <a:cs typeface="+mn-cs"/>
               </a:rPr>
-              <a:t>帮扶管理信息系统 v1.18.8</a:t>
+              <a:t>帮扶管理信息系统 v1.18.12</a:t>
             </a:r>
           </a:p>
         </p:txBody>
@@ -32565,6 +32961,10 @@
             <a:noFill/>
           </a:ln>
         </p:spPr>
+        <p:txBody>
+          <a:bodyPr/>
+          <a:p/>
+        </p:txBody>
       </p:sp>
       <p:sp>
         <p:nvSpPr>
@@ -32587,6 +32987,10 @@
             <a:noFill/>
           </a:ln>
         </p:spPr>
+        <p:txBody>
+          <a:bodyPr/>
+          <a:p/>
+        </p:txBody>
       </p:sp>
       <p:sp>
         <p:nvSpPr>
@@ -32703,6 +33107,10 @@
             </a:solidFill>
           </a:ln>
         </p:spPr>
+        <p:txBody>
+          <a:bodyPr/>
+          <a:p/>
+        </p:txBody>
       </p:sp>
       <p:grpSp>
         <p:nvGrpSpPr>
@@ -33574,7 +33982,7 @@
                 <a:ea typeface="+mn-ea"/>
                 <a:cs typeface="+mn-cs"/>
               </a:rPr>
-              <a:t>帮扶管理信息系统 v1.18.8</a:t>
+              <a:t>帮扶管理信息系统 v1.18.12</a:t>
             </a:r>
           </a:p>
         </p:txBody>
@@ -33676,6 +34084,10 @@
             <a:noFill/>
           </a:ln>
         </p:spPr>
+        <p:txBody>
+          <a:bodyPr/>
+          <a:p/>
+        </p:txBody>
       </p:sp>
       <p:sp>
         <p:nvSpPr>
@@ -33698,6 +34110,10 @@
             <a:noFill/>
           </a:ln>
         </p:spPr>
+        <p:txBody>
+          <a:bodyPr/>
+          <a:p/>
+        </p:txBody>
       </p:sp>
       <p:sp>
         <p:nvSpPr>
@@ -33814,6 +34230,10 @@
             </a:solidFill>
           </a:ln>
         </p:spPr>
+        <p:txBody>
+          <a:bodyPr/>
+          <a:p/>
+        </p:txBody>
       </p:sp>
       <p:grpSp>
         <p:nvGrpSpPr>
@@ -34355,7 +34775,7 @@
                 <a:ea typeface="+mn-ea"/>
                 <a:cs typeface="+mn-cs"/>
               </a:rPr>
-              <a:t>帮扶管理信息系统 v1.18.8</a:t>
+              <a:t>帮扶管理信息系统 v1.18.12</a:t>
             </a:r>
           </a:p>
         </p:txBody>
@@ -34457,6 +34877,10 @@
             <a:noFill/>
           </a:ln>
         </p:spPr>
+        <p:txBody>
+          <a:bodyPr/>
+          <a:p/>
+        </p:txBody>
       </p:sp>
       <p:sp>
         <p:nvSpPr>
@@ -34479,6 +34903,10 @@
             <a:noFill/>
           </a:ln>
         </p:spPr>
+        <p:txBody>
+          <a:bodyPr/>
+          <a:p/>
+        </p:txBody>
       </p:sp>
       <p:sp>
         <p:nvSpPr>
@@ -34595,6 +35023,10 @@
             </a:solidFill>
           </a:ln>
         </p:spPr>
+        <p:txBody>
+          <a:bodyPr/>
+          <a:p/>
+        </p:txBody>
       </p:sp>
       <p:grpSp>
         <p:nvGrpSpPr>
@@ -35072,7 +35504,7 @@
                 <a:ea typeface="+mn-ea"/>
                 <a:cs typeface="+mn-cs"/>
               </a:rPr>
-              <a:t>帮扶管理信息系统 v1.18.8</a:t>
+              <a:t>帮扶管理信息系统 v1.18.12</a:t>
             </a:r>
           </a:p>
         </p:txBody>
@@ -35174,6 +35606,10 @@
             <a:noFill/>
           </a:ln>
         </p:spPr>
+        <p:txBody>
+          <a:bodyPr/>
+          <a:p/>
+        </p:txBody>
       </p:sp>
       <p:sp>
         <p:nvSpPr>
@@ -35196,6 +35632,10 @@
             <a:noFill/>
           </a:ln>
         </p:spPr>
+        <p:txBody>
+          <a:bodyPr/>
+          <a:p/>
+        </p:txBody>
       </p:sp>
       <p:sp>
         <p:nvSpPr>
@@ -35312,6 +35752,10 @@
             </a:solidFill>
           </a:ln>
         </p:spPr>
+        <p:txBody>
+          <a:bodyPr/>
+          <a:p/>
+        </p:txBody>
       </p:sp>
       <p:grpSp>
         <p:nvGrpSpPr>
@@ -36249,7 +36693,7 @@
                 <a:ea typeface="+mn-ea"/>
                 <a:cs typeface="+mn-cs"/>
               </a:rPr>
-              <a:t>帮扶管理信息系统 v1.18.8</a:t>
+              <a:t>帮扶管理信息系统 v1.18.12</a:t>
             </a:r>
           </a:p>
         </p:txBody>
@@ -36351,6 +36795,10 @@
             <a:noFill/>
           </a:ln>
         </p:spPr>
+        <p:txBody>
+          <a:bodyPr/>
+          <a:p/>
+        </p:txBody>
       </p:sp>
       <p:sp>
         <p:nvSpPr>
@@ -36373,6 +36821,10 @@
             <a:noFill/>
           </a:ln>
         </p:spPr>
+        <p:txBody>
+          <a:bodyPr/>
+          <a:p/>
+        </p:txBody>
       </p:sp>
       <p:sp>
         <p:nvSpPr>
@@ -36489,6 +36941,10 @@
             </a:solidFill>
           </a:ln>
         </p:spPr>
+        <p:txBody>
+          <a:bodyPr/>
+          <a:p/>
+        </p:txBody>
       </p:sp>
       <p:grpSp>
         <p:nvGrpSpPr>
@@ -37030,7 +37486,7 @@
                 <a:ea typeface="+mn-ea"/>
                 <a:cs typeface="+mn-cs"/>
               </a:rPr>
-              <a:t>帮扶管理信息系统 v1.18.8</a:t>
+              <a:t>帮扶管理信息系统 v1.18.12</a:t>
             </a:r>
           </a:p>
         </p:txBody>
@@ -37132,6 +37588,10 @@
             <a:noFill/>
           </a:ln>
         </p:spPr>
+        <p:txBody>
+          <a:bodyPr/>
+          <a:p/>
+        </p:txBody>
       </p:sp>
       <p:sp>
         <p:nvSpPr>
@@ -37154,6 +37614,10 @@
             <a:noFill/>
           </a:ln>
         </p:spPr>
+        <p:txBody>
+          <a:bodyPr/>
+          <a:p/>
+        </p:txBody>
       </p:sp>
       <p:sp>
         <p:nvSpPr>
@@ -37270,6 +37734,10 @@
             </a:solidFill>
           </a:ln>
         </p:spPr>
+        <p:txBody>
+          <a:bodyPr/>
+          <a:p/>
+        </p:txBody>
       </p:sp>
       <p:grpSp>
         <p:nvGrpSpPr>
@@ -38233,7 +38701,7 @@
                 <a:ea typeface="+mn-ea"/>
                 <a:cs typeface="+mn-cs"/>
               </a:rPr>
-              <a:t>帮扶管理信息系统 v1.18.8</a:t>
+              <a:t>帮扶管理信息系统 v1.18.12</a:t>
             </a:r>
           </a:p>
         </p:txBody>
@@ -38335,6 +38803,10 @@
             <a:noFill/>
           </a:ln>
         </p:spPr>
+        <p:txBody>
+          <a:bodyPr/>
+          <a:p/>
+        </p:txBody>
       </p:sp>
       <p:sp>
         <p:nvSpPr>
@@ -38357,6 +38829,10 @@
             <a:noFill/>
           </a:ln>
         </p:spPr>
+        <p:txBody>
+          <a:bodyPr/>
+          <a:p/>
+        </p:txBody>
       </p:sp>
       <p:sp>
         <p:nvSpPr>
@@ -38473,6 +38949,10 @@
             </a:solidFill>
           </a:ln>
         </p:spPr>
+        <p:txBody>
+          <a:bodyPr/>
+          <a:p/>
+        </p:txBody>
       </p:sp>
       <p:grpSp>
         <p:nvGrpSpPr>
@@ -39100,7 +39580,7 @@
                 <a:ea typeface="+mn-ea"/>
                 <a:cs typeface="+mn-cs"/>
               </a:rPr>
-              <a:t>帮扶管理信息系统 v1.18.8</a:t>
+              <a:t>帮扶管理信息系统 v1.18.12</a:t>
             </a:r>
           </a:p>
         </p:txBody>
@@ -39202,6 +39682,10 @@
             <a:noFill/>
           </a:ln>
         </p:spPr>
+        <p:txBody>
+          <a:bodyPr/>
+          <a:p/>
+        </p:txBody>
       </p:sp>
       <p:sp>
         <p:nvSpPr>
@@ -39224,6 +39708,10 @@
             <a:noFill/>
           </a:ln>
         </p:spPr>
+        <p:txBody>
+          <a:bodyPr/>
+          <a:p/>
+        </p:txBody>
       </p:sp>
       <p:sp>
         <p:nvSpPr>
@@ -39246,6 +39734,10 @@
             <a:noFill/>
           </a:ln>
         </p:spPr>
+        <p:txBody>
+          <a:bodyPr/>
+          <a:p/>
+        </p:txBody>
       </p:sp>
       <p:sp>
         <p:nvSpPr>
@@ -39390,6 +39882,10 @@
             <a:noFill/>
           </a:ln>
         </p:spPr>
+        <p:txBody>
+          <a:bodyPr/>
+          <a:p/>
+        </p:txBody>
       </p:sp>
       <p:grpSp>
         <p:nvGrpSpPr>
@@ -39827,6 +40323,10 @@
             <a:noFill/>
           </a:ln>
         </p:spPr>
+        <p:txBody>
+          <a:bodyPr/>
+          <a:p/>
+        </p:txBody>
       </p:sp>
       <p:sp>
         <p:nvSpPr>
@@ -39849,6 +40349,10 @@
             <a:noFill/>
           </a:ln>
         </p:spPr>
+        <p:txBody>
+          <a:bodyPr/>
+          <a:p/>
+        </p:txBody>
       </p:sp>
       <p:sp>
         <p:nvSpPr>
@@ -39965,6 +40469,10 @@
             </a:solidFill>
           </a:ln>
         </p:spPr>
+        <p:txBody>
+          <a:bodyPr/>
+          <a:p/>
+        </p:txBody>
       </p:sp>
       <p:grpSp>
         <p:nvGrpSpPr>
@@ -40506,7 +41014,7 @@
                 <a:ea typeface="+mn-ea"/>
                 <a:cs typeface="+mn-cs"/>
               </a:rPr>
-              <a:t>帮扶管理信息系统 v1.18.8</a:t>
+              <a:t>帮扶管理信息系统 v1.18.12</a:t>
             </a:r>
           </a:p>
         </p:txBody>
@@ -40608,6 +41116,10 @@
             <a:noFill/>
           </a:ln>
         </p:spPr>
+        <p:txBody>
+          <a:bodyPr/>
+          <a:p/>
+        </p:txBody>
       </p:sp>
       <p:sp>
         <p:nvSpPr>
@@ -40630,6 +41142,10 @@
             <a:noFill/>
           </a:ln>
         </p:spPr>
+        <p:txBody>
+          <a:bodyPr/>
+          <a:p/>
+        </p:txBody>
       </p:sp>
       <p:sp>
         <p:nvSpPr>
@@ -40746,6 +41262,10 @@
             </a:solidFill>
           </a:ln>
         </p:spPr>
+        <p:txBody>
+          <a:bodyPr/>
+          <a:p/>
+        </p:txBody>
       </p:sp>
       <p:grpSp>
         <p:nvGrpSpPr>
@@ -41709,7 +42229,7 @@
                 <a:ea typeface="+mn-ea"/>
                 <a:cs typeface="+mn-cs"/>
               </a:rPr>
-              <a:t>帮扶管理信息系统 v1.18.8</a:t>
+              <a:t>帮扶管理信息系统 v1.18.12</a:t>
             </a:r>
           </a:p>
         </p:txBody>
@@ -41811,6 +42331,10 @@
             <a:noFill/>
           </a:ln>
         </p:spPr>
+        <p:txBody>
+          <a:bodyPr/>
+          <a:p/>
+        </p:txBody>
       </p:sp>
       <p:sp>
         <p:nvSpPr>
@@ -41833,6 +42357,10 @@
             <a:noFill/>
           </a:ln>
         </p:spPr>
+        <p:txBody>
+          <a:bodyPr/>
+          <a:p/>
+        </p:txBody>
       </p:sp>
       <p:sp>
         <p:nvSpPr>
@@ -41949,6 +42477,10 @@
             </a:solidFill>
           </a:ln>
         </p:spPr>
+        <p:txBody>
+          <a:bodyPr/>
+          <a:p/>
+        </p:txBody>
       </p:sp>
       <p:grpSp>
         <p:nvGrpSpPr>
@@ -42700,7 +43232,7 @@
                 <a:ea typeface="+mn-ea"/>
                 <a:cs typeface="+mn-cs"/>
               </a:rPr>
-              <a:t>帮扶管理信息系统 v1.18.8</a:t>
+              <a:t>帮扶管理信息系统 v1.18.12</a:t>
             </a:r>
           </a:p>
         </p:txBody>
@@ -42802,6 +43334,10 @@
             <a:noFill/>
           </a:ln>
         </p:spPr>
+        <p:txBody>
+          <a:bodyPr/>
+          <a:p/>
+        </p:txBody>
       </p:sp>
       <p:sp>
         <p:nvSpPr>
@@ -42824,6 +43360,10 @@
             <a:noFill/>
           </a:ln>
         </p:spPr>
+        <p:txBody>
+          <a:bodyPr/>
+          <a:p/>
+        </p:txBody>
       </p:sp>
       <p:sp>
         <p:nvSpPr>
@@ -42940,6 +43480,10 @@
             </a:solidFill>
           </a:ln>
         </p:spPr>
+        <p:txBody>
+          <a:bodyPr/>
+          <a:p/>
+        </p:txBody>
       </p:sp>
       <p:grpSp>
         <p:nvGrpSpPr>
@@ -43551,7 +44095,7 @@
                 <a:ea typeface="+mn-ea"/>
                 <a:cs typeface="+mn-cs"/>
               </a:rPr>
-              <a:t>帮扶管理信息系统 v1.18.8</a:t>
+              <a:t>帮扶管理信息系统 v1.18.12</a:t>
             </a:r>
           </a:p>
         </p:txBody>
@@ -43653,6 +44197,10 @@
             <a:noFill/>
           </a:ln>
         </p:spPr>
+        <p:txBody>
+          <a:bodyPr/>
+          <a:p/>
+        </p:txBody>
       </p:sp>
       <p:sp>
         <p:nvSpPr>
@@ -43675,6 +44223,10 @@
             <a:noFill/>
           </a:ln>
         </p:spPr>
+        <p:txBody>
+          <a:bodyPr/>
+          <a:p/>
+        </p:txBody>
       </p:sp>
       <p:sp>
         <p:nvSpPr>
@@ -43791,6 +44343,10 @@
             </a:solidFill>
           </a:ln>
         </p:spPr>
+        <p:txBody>
+          <a:bodyPr/>
+          <a:p/>
+        </p:txBody>
       </p:sp>
       <p:grpSp>
         <p:nvGrpSpPr>
@@ -44410,7 +44966,7 @@
                 <a:ea typeface="+mn-ea"/>
                 <a:cs typeface="+mn-cs"/>
               </a:rPr>
-              <a:t>帮扶管理信息系统 v1.18.8</a:t>
+              <a:t>帮扶管理信息系统 v1.18.12</a:t>
             </a:r>
           </a:p>
         </p:txBody>
@@ -44512,6 +45068,10 @@
             <a:noFill/>
           </a:ln>
         </p:spPr>
+        <p:txBody>
+          <a:bodyPr/>
+          <a:p/>
+        </p:txBody>
       </p:sp>
       <p:sp>
         <p:nvSpPr>
@@ -44534,6 +45094,10 @@
             <a:noFill/>
           </a:ln>
         </p:spPr>
+        <p:txBody>
+          <a:bodyPr/>
+          <a:p/>
+        </p:txBody>
       </p:sp>
       <p:sp>
         <p:nvSpPr>
@@ -44650,6 +45214,10 @@
             </a:solidFill>
           </a:ln>
         </p:spPr>
+        <p:txBody>
+          <a:bodyPr/>
+          <a:p/>
+        </p:txBody>
       </p:sp>
       <p:grpSp>
         <p:nvGrpSpPr>
@@ -45401,7 +45969,7 @@
                 <a:ea typeface="+mn-ea"/>
                 <a:cs typeface="+mn-cs"/>
               </a:rPr>
-              <a:t>帮扶管理信息系统 v1.18.8</a:t>
+              <a:t>帮扶管理信息系统 v1.18.12</a:t>
             </a:r>
           </a:p>
         </p:txBody>
@@ -45503,6 +46071,10 @@
             <a:noFill/>
           </a:ln>
         </p:spPr>
+        <p:txBody>
+          <a:bodyPr/>
+          <a:p/>
+        </p:txBody>
       </p:sp>
       <p:sp>
         <p:nvSpPr>
@@ -45525,6 +46097,10 @@
             <a:noFill/>
           </a:ln>
         </p:spPr>
+        <p:txBody>
+          <a:bodyPr/>
+          <a:p/>
+        </p:txBody>
       </p:sp>
       <p:sp>
         <p:nvSpPr>
@@ -45547,6 +46123,10 @@
             <a:noFill/>
           </a:ln>
         </p:spPr>
+        <p:txBody>
+          <a:bodyPr/>
+          <a:p/>
+        </p:txBody>
       </p:sp>
       <p:sp>
         <p:nvSpPr>
@@ -45691,6 +46271,10 @@
             <a:noFill/>
           </a:ln>
         </p:spPr>
+        <p:txBody>
+          <a:bodyPr/>
+          <a:p/>
+        </p:txBody>
       </p:sp>
       <p:grpSp>
         <p:nvGrpSpPr>
@@ -46190,6 +46774,10 @@
             <a:noFill/>
           </a:ln>
         </p:spPr>
+        <p:txBody>
+          <a:bodyPr/>
+          <a:p/>
+        </p:txBody>
       </p:sp>
       <p:sp>
         <p:nvSpPr>
@@ -46212,6 +46800,10 @@
             <a:noFill/>
           </a:ln>
         </p:spPr>
+        <p:txBody>
+          <a:bodyPr/>
+          <a:p/>
+        </p:txBody>
       </p:sp>
       <p:sp>
         <p:nvSpPr>
@@ -46234,6 +46826,10 @@
             <a:noFill/>
           </a:ln>
         </p:spPr>
+        <p:txBody>
+          <a:bodyPr/>
+          <a:p/>
+        </p:txBody>
       </p:sp>
       <p:sp>
         <p:nvSpPr>
@@ -46378,6 +46974,10 @@
             <a:noFill/>
           </a:ln>
         </p:spPr>
+        <p:txBody>
+          <a:bodyPr/>
+          <a:p/>
+        </p:txBody>
       </p:sp>
       <p:grpSp>
         <p:nvGrpSpPr>
@@ -46877,6 +47477,10 @@
             <a:noFill/>
           </a:ln>
         </p:spPr>
+        <p:txBody>
+          <a:bodyPr/>
+          <a:p/>
+        </p:txBody>
       </p:sp>
       <p:sp>
         <p:nvSpPr>
@@ -46899,6 +47503,10 @@
             <a:noFill/>
           </a:ln>
         </p:spPr>
+        <p:txBody>
+          <a:bodyPr/>
+          <a:p/>
+        </p:txBody>
       </p:sp>
       <p:sp>
         <p:nvSpPr>
@@ -47015,6 +47623,10 @@
             </a:solidFill>
           </a:ln>
         </p:spPr>
+        <p:txBody>
+          <a:bodyPr/>
+          <a:p/>
+        </p:txBody>
       </p:sp>
       <p:grpSp>
         <p:nvGrpSpPr>
@@ -47556,7 +48168,7 @@
                 <a:ea typeface="+mn-ea"/>
                 <a:cs typeface="+mn-cs"/>
               </a:rPr>
-              <a:t>帮扶管理信息系统 v1.18.8</a:t>
+              <a:t>帮扶管理信息系统 v1.18.12</a:t>
             </a:r>
           </a:p>
         </p:txBody>
@@ -47658,6 +48270,10 @@
             <a:noFill/>
           </a:ln>
         </p:spPr>
+        <p:txBody>
+          <a:bodyPr/>
+          <a:p/>
+        </p:txBody>
       </p:sp>
       <p:sp>
         <p:nvSpPr>
@@ -47680,6 +48296,10 @@
             <a:noFill/>
           </a:ln>
         </p:spPr>
+        <p:txBody>
+          <a:bodyPr/>
+          <a:p/>
+        </p:txBody>
       </p:sp>
       <p:sp>
         <p:nvSpPr>
@@ -47796,6 +48416,10 @@
             </a:solidFill>
           </a:ln>
         </p:spPr>
+        <p:txBody>
+          <a:bodyPr/>
+          <a:p/>
+        </p:txBody>
       </p:sp>
       <p:grpSp>
         <p:nvGrpSpPr>
@@ -48337,7 +48961,7 @@
                 <a:ea typeface="+mn-ea"/>
                 <a:cs typeface="+mn-cs"/>
               </a:rPr>
-              <a:t>帮扶管理信息系统 v1.18.8</a:t>
+              <a:t>帮扶管理信息系统 v1.18.12</a:t>
             </a:r>
           </a:p>
         </p:txBody>
@@ -48439,6 +49063,10 @@
             <a:noFill/>
           </a:ln>
         </p:spPr>
+        <p:txBody>
+          <a:bodyPr/>
+          <a:p/>
+        </p:txBody>
       </p:sp>
       <p:sp>
         <p:nvSpPr>
@@ -48461,6 +49089,10 @@
             <a:noFill/>
           </a:ln>
         </p:spPr>
+        <p:txBody>
+          <a:bodyPr/>
+          <a:p/>
+        </p:txBody>
       </p:sp>
       <p:sp>
         <p:nvSpPr>
@@ -48577,6 +49209,10 @@
             </a:solidFill>
           </a:ln>
         </p:spPr>
+        <p:txBody>
+          <a:bodyPr/>
+          <a:p/>
+        </p:txBody>
       </p:sp>
       <p:grpSp>
         <p:nvGrpSpPr>
@@ -49054,7 +49690,7 @@
                 <a:ea typeface="+mn-ea"/>
                 <a:cs typeface="+mn-cs"/>
               </a:rPr>
-              <a:t>帮扶管理信息系统 v1.18.8</a:t>
+              <a:t>帮扶管理信息系统 v1.18.12</a:t>
             </a:r>
           </a:p>
         </p:txBody>
@@ -49156,6 +49792,10 @@
             <a:noFill/>
           </a:ln>
         </p:spPr>
+        <p:txBody>
+          <a:bodyPr/>
+          <a:p/>
+        </p:txBody>
       </p:sp>
       <p:sp>
         <p:nvSpPr>
@@ -49178,6 +49818,10 @@
             <a:noFill/>
           </a:ln>
         </p:spPr>
+        <p:txBody>
+          <a:bodyPr/>
+          <a:p/>
+        </p:txBody>
       </p:sp>
       <p:sp>
         <p:nvSpPr>
@@ -49294,6 +49938,10 @@
             </a:solidFill>
           </a:ln>
         </p:spPr>
+        <p:txBody>
+          <a:bodyPr/>
+          <a:p/>
+        </p:txBody>
       </p:sp>
       <p:grpSp>
         <p:nvGrpSpPr>
@@ -49921,7 +50569,7 @@
                 <a:ea typeface="+mn-ea"/>
                 <a:cs typeface="+mn-cs"/>
               </a:rPr>
-              <a:t>帮扶管理信息系统 v1.18.8</a:t>
+              <a:t>帮扶管理信息系统 v1.18.12</a:t>
             </a:r>
           </a:p>
         </p:txBody>
@@ -50023,6 +50671,10 @@
             <a:noFill/>
           </a:ln>
         </p:spPr>
+        <p:txBody>
+          <a:bodyPr/>
+          <a:p/>
+        </p:txBody>
       </p:sp>
       <p:sp>
         <p:nvSpPr>
@@ -50045,6 +50697,10 @@
             <a:noFill/>
           </a:ln>
         </p:spPr>
+        <p:txBody>
+          <a:bodyPr/>
+          <a:p/>
+        </p:txBody>
       </p:sp>
       <p:sp>
         <p:nvSpPr>
@@ -50161,6 +50817,10 @@
             </a:solidFill>
           </a:ln>
         </p:spPr>
+        <p:txBody>
+          <a:bodyPr/>
+          <a:p/>
+        </p:txBody>
       </p:sp>
       <p:grpSp>
         <p:nvGrpSpPr>
@@ -50912,7 +51572,7 @@
                 <a:ea typeface="+mn-ea"/>
                 <a:cs typeface="+mn-cs"/>
               </a:rPr>
-              <a:t>帮扶管理信息系统 v1.18.8</a:t>
+              <a:t>帮扶管理信息系统 v1.18.12</a:t>
             </a:r>
           </a:p>
         </p:txBody>
@@ -51014,6 +51674,10 @@
             <a:noFill/>
           </a:ln>
         </p:spPr>
+        <p:txBody>
+          <a:bodyPr/>
+          <a:p/>
+        </p:txBody>
       </p:sp>
       <p:sp>
         <p:nvSpPr>
@@ -51036,6 +51700,10 @@
             <a:noFill/>
           </a:ln>
         </p:spPr>
+        <p:txBody>
+          <a:bodyPr/>
+          <a:p/>
+        </p:txBody>
       </p:sp>
       <p:sp>
         <p:nvSpPr>
@@ -51152,6 +51820,10 @@
             </a:solidFill>
           </a:ln>
         </p:spPr>
+        <p:txBody>
+          <a:bodyPr/>
+          <a:p/>
+        </p:txBody>
       </p:sp>
       <p:grpSp>
         <p:nvGrpSpPr>
@@ -51835,7 +52507,7 @@
                 <a:ea typeface="+mn-ea"/>
                 <a:cs typeface="+mn-cs"/>
               </a:rPr>
-              <a:t>帮扶管理信息系统 v1.18.8</a:t>
+              <a:t>帮扶管理信息系统 v1.18.12</a:t>
             </a:r>
           </a:p>
         </p:txBody>
@@ -51937,6 +52609,10 @@
             <a:noFill/>
           </a:ln>
         </p:spPr>
+        <p:txBody>
+          <a:bodyPr/>
+          <a:p/>
+        </p:txBody>
       </p:sp>
       <p:sp>
         <p:nvSpPr>
@@ -51959,6 +52635,10 @@
             <a:noFill/>
           </a:ln>
         </p:spPr>
+        <p:txBody>
+          <a:bodyPr/>
+          <a:p/>
+        </p:txBody>
       </p:sp>
       <p:sp>
         <p:nvSpPr>
@@ -52075,6 +52755,10 @@
             </a:solidFill>
           </a:ln>
         </p:spPr>
+        <p:txBody>
+          <a:bodyPr/>
+          <a:p/>
+        </p:txBody>
       </p:sp>
       <p:grpSp>
         <p:nvGrpSpPr>
@@ -52552,7 +53236,7 @@
                 <a:ea typeface="+mn-ea"/>
                 <a:cs typeface="+mn-cs"/>
               </a:rPr>
-              <a:t>帮扶管理信息系统 v1.18.8</a:t>
+              <a:t>帮扶管理信息系统 v1.18.12</a:t>
             </a:r>
           </a:p>
         </p:txBody>
@@ -52654,6 +53338,10 @@
             <a:noFill/>
           </a:ln>
         </p:spPr>
+        <p:txBody>
+          <a:bodyPr/>
+          <a:p/>
+        </p:txBody>
       </p:sp>
       <p:sp>
         <p:nvSpPr>
@@ -52676,6 +53364,10 @@
             <a:noFill/>
           </a:ln>
         </p:spPr>
+        <p:txBody>
+          <a:bodyPr/>
+          <a:p/>
+        </p:txBody>
       </p:sp>
       <p:sp>
         <p:nvSpPr>
@@ -52792,6 +53484,10 @@
             </a:solidFill>
           </a:ln>
         </p:spPr>
+        <p:txBody>
+          <a:bodyPr/>
+          <a:p/>
+        </p:txBody>
       </p:sp>
       <p:grpSp>
         <p:nvGrpSpPr>
@@ -53547,7 +54243,7 @@
                 <a:ea typeface="+mn-ea"/>
                 <a:cs typeface="+mn-cs"/>
               </a:rPr>
-              <a:t>帮扶管理信息系统 v1.18.8</a:t>
+              <a:t>帮扶管理信息系统 v1.18.12</a:t>
             </a:r>
           </a:p>
         </p:txBody>
@@ -53649,6 +54345,10 @@
             <a:noFill/>
           </a:ln>
         </p:spPr>
+        <p:txBody>
+          <a:bodyPr/>
+          <a:p/>
+        </p:txBody>
       </p:sp>
       <p:sp>
         <p:nvSpPr>
@@ -53671,6 +54371,10 @@
             <a:noFill/>
           </a:ln>
         </p:spPr>
+        <p:txBody>
+          <a:bodyPr/>
+          <a:p/>
+        </p:txBody>
       </p:sp>
       <p:sp>
         <p:nvSpPr>
@@ -53787,6 +54491,10 @@
             </a:solidFill>
           </a:ln>
         </p:spPr>
+        <p:txBody>
+          <a:bodyPr/>
+          <a:p/>
+        </p:txBody>
       </p:sp>
       <p:grpSp>
         <p:nvGrpSpPr>
@@ -54600,7 +55308,7 @@
                 <a:ea typeface="+mn-ea"/>
                 <a:cs typeface="+mn-cs"/>
               </a:rPr>
-              <a:t>帮扶管理信息系统 v1.18.8</a:t>
+              <a:t>帮扶管理信息系统 v1.18.12</a:t>
             </a:r>
           </a:p>
         </p:txBody>
@@ -54702,6 +55410,10 @@
             <a:noFill/>
           </a:ln>
         </p:spPr>
+        <p:txBody>
+          <a:bodyPr/>
+          <a:p/>
+        </p:txBody>
       </p:sp>
       <p:sp>
         <p:nvSpPr>
@@ -54724,6 +55436,10 @@
             <a:noFill/>
           </a:ln>
         </p:spPr>
+        <p:txBody>
+          <a:bodyPr/>
+          <a:p/>
+        </p:txBody>
       </p:sp>
       <p:sp>
         <p:nvSpPr>
@@ -54840,6 +55556,10 @@
             </a:solidFill>
           </a:ln>
         </p:spPr>
+        <p:txBody>
+          <a:bodyPr/>
+          <a:p/>
+        </p:txBody>
       </p:sp>
       <p:grpSp>
         <p:nvGrpSpPr>
@@ -55513,7 +56233,7 @@
                 <a:ea typeface="+mn-ea"/>
                 <a:cs typeface="+mn-cs"/>
               </a:rPr>
-              <a:t>帮扶管理信息系统 v1.18.8</a:t>
+              <a:t>帮扶管理信息系统 v1.18.12</a:t>
             </a:r>
           </a:p>
         </p:txBody>
@@ -55615,6 +56335,10 @@
             <a:noFill/>
           </a:ln>
         </p:spPr>
+        <p:txBody>
+          <a:bodyPr/>
+          <a:p/>
+        </p:txBody>
       </p:sp>
       <p:sp>
         <p:nvSpPr>
@@ -55637,6 +56361,10 @@
             <a:noFill/>
           </a:ln>
         </p:spPr>
+        <p:txBody>
+          <a:bodyPr/>
+          <a:p/>
+        </p:txBody>
       </p:sp>
       <p:sp>
         <p:nvSpPr>
@@ -55659,6 +56387,10 @@
             <a:noFill/>
           </a:ln>
         </p:spPr>
+        <p:txBody>
+          <a:bodyPr/>
+          <a:p/>
+        </p:txBody>
       </p:sp>
       <p:sp>
         <p:nvSpPr>
@@ -55761,6 +56493,10 @@
             <a:noFill/>
           </a:ln>
         </p:spPr>
+        <p:txBody>
+          <a:bodyPr/>
+          <a:p/>
+        </p:txBody>
       </p:sp>
       <p:sp>
         <p:nvSpPr>
@@ -55837,7 +56573,7 @@
                 <a:ea typeface="+mn-ea"/>
                 <a:cs typeface="+mn-cs"/>
               </a:rPr>
-              <a:t>帮扶管理信息系统 v1.18.8 · 仓库：github.com/lzh745200/MRRS · 完整文档见 docs/ 目录</a:t>
+              <a:t>帮扶管理信息系统 v1.18.12 · 仓库：github.com/lzh745200/MRRS · 完整文档见 docs/ 目录</a:t>
             </a:r>
           </a:p>
         </p:txBody>
@@ -55877,7 +56613,7 @@
                 <a:ea typeface="+mn-ea"/>
                 <a:cs typeface="+mn-cs"/>
               </a:rPr>
-              <a:t>V1.18.8 | 2026-10-26</a:t>
+              <a:t>V1.18.12 | 2026-10-26</a:t>
             </a:r>
           </a:p>
         </p:txBody>
@@ -55979,6 +56715,10 @@
             <a:noFill/>
           </a:ln>
         </p:spPr>
+        <p:txBody>
+          <a:bodyPr/>
+          <a:p/>
+        </p:txBody>
       </p:sp>
       <p:sp>
         <p:nvSpPr>
@@ -56001,6 +56741,10 @@
             <a:noFill/>
           </a:ln>
         </p:spPr>
+        <p:txBody>
+          <a:bodyPr/>
+          <a:p/>
+        </p:txBody>
       </p:sp>
       <p:sp>
         <p:nvSpPr>
@@ -56117,6 +56861,10 @@
             </a:solidFill>
           </a:ln>
         </p:spPr>
+        <p:txBody>
+          <a:bodyPr/>
+          <a:p/>
+        </p:txBody>
       </p:sp>
       <p:grpSp>
         <p:nvGrpSpPr>
@@ -56754,7 +57502,7 @@
                 <a:ea typeface="+mn-ea"/>
                 <a:cs typeface="+mn-cs"/>
               </a:rPr>
-              <a:t>帮扶管理信息系统 v1.18.8</a:t>
+              <a:t>帮扶管理信息系统 v1.18.12</a:t>
             </a:r>
           </a:p>
         </p:txBody>
@@ -56856,6 +57604,10 @@
             <a:noFill/>
           </a:ln>
         </p:spPr>
+        <p:txBody>
+          <a:bodyPr/>
+          <a:p/>
+        </p:txBody>
       </p:sp>
       <p:sp>
         <p:nvSpPr>
@@ -56878,6 +57630,10 @@
             <a:noFill/>
           </a:ln>
         </p:spPr>
+        <p:txBody>
+          <a:bodyPr/>
+          <a:p/>
+        </p:txBody>
       </p:sp>
       <p:sp>
         <p:nvSpPr>
@@ -56994,6 +57750,10 @@
             </a:solidFill>
           </a:ln>
         </p:spPr>
+        <p:txBody>
+          <a:bodyPr/>
+          <a:p/>
+        </p:txBody>
       </p:sp>
       <p:grpSp>
         <p:nvGrpSpPr>
@@ -58205,7 +58965,7 @@
                 <a:ea typeface="+mn-ea"/>
                 <a:cs typeface="+mn-cs"/>
               </a:rPr>
-              <a:t>帮扶管理信息系统 v1.18.8</a:t>
+              <a:t>帮扶管理信息系统 v1.18.12</a:t>
             </a:r>
           </a:p>
         </p:txBody>
@@ -58307,6 +59067,10 @@
             <a:noFill/>
           </a:ln>
         </p:spPr>
+        <p:txBody>
+          <a:bodyPr/>
+          <a:p/>
+        </p:txBody>
       </p:sp>
       <p:sp>
         <p:nvSpPr>
@@ -58329,6 +59093,10 @@
             <a:noFill/>
           </a:ln>
         </p:spPr>
+        <p:txBody>
+          <a:bodyPr/>
+          <a:p/>
+        </p:txBody>
       </p:sp>
       <p:sp>
         <p:nvSpPr>
@@ -58445,6 +59213,10 @@
             </a:solidFill>
           </a:ln>
         </p:spPr>
+        <p:txBody>
+          <a:bodyPr/>
+          <a:p/>
+        </p:txBody>
       </p:sp>
       <p:grpSp>
         <p:nvGrpSpPr>
@@ -59568,7 +60340,7 @@
                 <a:ea typeface="+mn-ea"/>
                 <a:cs typeface="+mn-cs"/>
               </a:rPr>
-              <a:t>帮扶管理信息系统 v1.18.8</a:t>
+              <a:t>帮扶管理信息系统 v1.18.12</a:t>
             </a:r>
           </a:p>
         </p:txBody>

--- a/docs/帮扶管理信息系统-操作培训.pptx
+++ b/docs/帮扶管理信息系统-操作培训.pptx
@@ -5352,7 +5352,7 @@
                 <a:ea typeface="+mn-ea"/>
                 <a:cs typeface="+mn-cs"/>
               </a:rPr>
-              <a:t>V1.18.12 | 2026-10-26 | FastAPI + Vue 3 + Electron + SQLite</a:t>
+              <a:t>V1.18.13 | 2026-10-26 | FastAPI + Vue 3 + Electron + SQLite</a:t>
             </a:r>
           </a:p>
         </p:txBody>
@@ -6161,7 +6161,7 @@
                 <a:ea typeface="+mn-ea"/>
                 <a:cs typeface="+mn-cs"/>
               </a:rPr>
-              <a:t>帮扶管理信息系统 v1.18.12</a:t>
+              <a:t>帮扶管理信息系统 v1.18.13</a:t>
             </a:r>
           </a:p>
         </p:txBody>
@@ -8081,7 +8081,7 @@
                 <a:ea typeface="+mn-ea"/>
                 <a:cs typeface="+mn-cs"/>
               </a:rPr>
-              <a:t>帮扶管理信息系统 v1.18.12</a:t>
+              <a:t>帮扶管理信息系统 v1.18.13</a:t>
             </a:r>
           </a:p>
         </p:txBody>
@@ -8952,7 +8952,7 @@
                 <a:ea typeface="+mn-ea"/>
                 <a:cs typeface="+mn-cs"/>
               </a:rPr>
-              <a:t>帮扶管理信息系统 v1.18.12</a:t>
+              <a:t>帮扶管理信息系统 v1.18.13</a:t>
             </a:r>
           </a:p>
         </p:txBody>
@@ -9885,7 +9885,7 @@
                 <a:ea typeface="+mn-ea"/>
                 <a:cs typeface="+mn-cs"/>
               </a:rPr>
-              <a:t>帮扶管理信息系统 v1.18.12</a:t>
+              <a:t>帮扶管理信息系统 v1.18.13</a:t>
             </a:r>
           </a:p>
         </p:txBody>
@@ -10764,7 +10764,7 @@
                 <a:ea typeface="+mn-ea"/>
                 <a:cs typeface="+mn-cs"/>
               </a:rPr>
-              <a:t>帮扶管理信息系统 v1.18.12</a:t>
+              <a:t>帮扶管理信息系统 v1.18.13</a:t>
             </a:r>
           </a:p>
         </p:txBody>
@@ -11699,7 +11699,7 @@
                 <a:ea typeface="+mn-ea"/>
                 <a:cs typeface="+mn-cs"/>
               </a:rPr>
-              <a:t>帮扶管理信息系统 v1.18.12</a:t>
+              <a:t>帮扶管理信息系统 v1.18.13</a:t>
             </a:r>
           </a:p>
         </p:txBody>
@@ -12916,7 +12916,7 @@
                 <a:ea typeface="+mn-ea"/>
                 <a:cs typeface="+mn-cs"/>
               </a:rPr>
-              <a:t>帮扶管理信息系统 v1.18.12</a:t>
+              <a:t>帮扶管理信息系统 v1.18.13</a:t>
             </a:r>
           </a:p>
         </p:txBody>
@@ -13981,7 +13981,7 @@
                 <a:ea typeface="+mn-ea"/>
                 <a:cs typeface="+mn-cs"/>
               </a:rPr>
-              <a:t>帮扶管理信息系统 v1.18.12</a:t>
+              <a:t>帮扶管理信息系统 v1.18.13</a:t>
             </a:r>
           </a:p>
         </p:txBody>
@@ -14844,7 +14844,7 @@
                 <a:ea typeface="+mn-ea"/>
                 <a:cs typeface="+mn-cs"/>
               </a:rPr>
-              <a:t>帮扶管理信息系统 v1.18.12</a:t>
+              <a:t>帮扶管理信息系统 v1.18.13</a:t>
             </a:r>
           </a:p>
         </p:txBody>
@@ -16225,7 +16225,7 @@
                 <a:ea typeface="+mn-ea"/>
                 <a:cs typeface="+mn-cs"/>
               </a:rPr>
-              <a:t>帮扶管理信息系统 v1.18.12</a:t>
+              <a:t>帮扶管理信息系统 v1.18.13</a:t>
             </a:r>
           </a:p>
         </p:txBody>
@@ -17228,7 +17228,7 @@
                 <a:ea typeface="+mn-ea"/>
                 <a:cs typeface="+mn-cs"/>
               </a:rPr>
-              <a:t>帮扶管理信息系统 v1.18.12</a:t>
+              <a:t>帮扶管理信息系统 v1.18.13</a:t>
             </a:r>
           </a:p>
         </p:txBody>
@@ -19206,7 +19206,7 @@
                 <a:ea typeface="+mn-ea"/>
                 <a:cs typeface="+mn-cs"/>
               </a:rPr>
-              <a:t>帮扶管理信息系统 v1.18.12</a:t>
+              <a:t>帮扶管理信息系统 v1.18.13</a:t>
             </a:r>
           </a:p>
         </p:txBody>
@@ -20303,7 +20303,7 @@
                 <a:ea typeface="+mn-ea"/>
                 <a:cs typeface="+mn-cs"/>
               </a:rPr>
-              <a:t>帮扶管理信息系统 v1.18.12</a:t>
+              <a:t>帮扶管理信息系统 v1.18.13</a:t>
             </a:r>
           </a:p>
         </p:txBody>
@@ -21192,7 +21192,7 @@
                 <a:ea typeface="+mn-ea"/>
                 <a:cs typeface="+mn-cs"/>
               </a:rPr>
-              <a:t>帮扶管理信息系统 v1.18.12</a:t>
+              <a:t>帮扶管理信息系统 v1.18.13</a:t>
             </a:r>
           </a:p>
         </p:txBody>
@@ -22127,7 +22127,7 @@
                 <a:ea typeface="+mn-ea"/>
                 <a:cs typeface="+mn-cs"/>
               </a:rPr>
-              <a:t>帮扶管理信息系统 v1.18.12</a:t>
+              <a:t>帮扶管理信息系统 v1.18.13</a:t>
             </a:r>
           </a:p>
         </p:txBody>
@@ -23060,7 +23060,7 @@
                 <a:ea typeface="+mn-ea"/>
                 <a:cs typeface="+mn-cs"/>
               </a:rPr>
-              <a:t>帮扶管理信息系统 v1.18.12</a:t>
+              <a:t>帮扶管理信息系统 v1.18.13</a:t>
             </a:r>
           </a:p>
         </p:txBody>
@@ -24277,7 +24277,7 @@
                 <a:ea typeface="+mn-ea"/>
                 <a:cs typeface="+mn-cs"/>
               </a:rPr>
-              <a:t>帮扶管理信息系统 v1.18.12</a:t>
+              <a:t>帮扶管理信息系统 v1.18.13</a:t>
             </a:r>
           </a:p>
         </p:txBody>
@@ -25156,7 +25156,7 @@
                 <a:ea typeface="+mn-ea"/>
                 <a:cs typeface="+mn-cs"/>
               </a:rPr>
-              <a:t>帮扶管理信息系统 v1.18.12</a:t>
+              <a:t>帮扶管理信息系统 v1.18.13</a:t>
             </a:r>
           </a:p>
         </p:txBody>
@@ -25885,7 +25885,7 @@
                 <a:ea typeface="+mn-ea"/>
                 <a:cs typeface="+mn-cs"/>
               </a:rPr>
-              <a:t>帮扶管理信息系统 v1.18.12</a:t>
+              <a:t>帮扶管理信息系统 v1.18.13</a:t>
             </a:r>
           </a:p>
         </p:txBody>
@@ -26944,7 +26944,7 @@
                 <a:ea typeface="+mn-ea"/>
                 <a:cs typeface="+mn-cs"/>
               </a:rPr>
-              <a:t>帮扶管理信息系统 v1.18.12</a:t>
+              <a:t>帮扶管理信息系统 v1.18.13</a:t>
             </a:r>
           </a:p>
         </p:txBody>
@@ -27877,7 +27877,7 @@
                 <a:ea typeface="+mn-ea"/>
                 <a:cs typeface="+mn-cs"/>
               </a:rPr>
-              <a:t>帮扶管理信息系统 v1.18.12</a:t>
+              <a:t>帮扶管理信息系统 v1.18.13</a:t>
             </a:r>
           </a:p>
         </p:txBody>
@@ -28670,7 +28670,7 @@
                 <a:ea typeface="+mn-ea"/>
                 <a:cs typeface="+mn-cs"/>
               </a:rPr>
-              <a:t>帮扶管理信息系统 v1.18.12</a:t>
+              <a:t>帮扶管理信息系统 v1.18.13</a:t>
             </a:r>
           </a:p>
         </p:txBody>
@@ -29793,7 +29793,7 @@
                 <a:ea typeface="+mn-ea"/>
                 <a:cs typeface="+mn-cs"/>
               </a:rPr>
-              <a:t>帮扶管理信息系统 v1.18.12</a:t>
+              <a:t>帮扶管理信息系统 v1.18.13</a:t>
             </a:r>
           </a:p>
         </p:txBody>
@@ -31131,7 +31131,7 @@
                 <a:ea typeface="+mn-ea"/>
                 <a:cs typeface="+mn-cs"/>
               </a:rPr>
-              <a:t>帮扶管理信息系统 v1.18.12</a:t>
+              <a:t>帮扶管理信息系统 v1.18.13</a:t>
             </a:r>
           </a:p>
         </p:txBody>
@@ -31924,7 +31924,7 @@
                 <a:ea typeface="+mn-ea"/>
                 <a:cs typeface="+mn-cs"/>
               </a:rPr>
-              <a:t>帮扶管理信息系统 v1.18.12</a:t>
+              <a:t>帮扶管理信息系统 v1.18.13</a:t>
             </a:r>
           </a:p>
         </p:txBody>
@@ -32859,7 +32859,7 @@
                 <a:ea typeface="+mn-ea"/>
                 <a:cs typeface="+mn-cs"/>
               </a:rPr>
-              <a:t>帮扶管理信息系统 v1.18.12</a:t>
+              <a:t>帮扶管理信息系统 v1.18.13</a:t>
             </a:r>
           </a:p>
         </p:txBody>
@@ -33982,7 +33982,7 @@
                 <a:ea typeface="+mn-ea"/>
                 <a:cs typeface="+mn-cs"/>
               </a:rPr>
-              <a:t>帮扶管理信息系统 v1.18.12</a:t>
+              <a:t>帮扶管理信息系统 v1.18.13</a:t>
             </a:r>
           </a:p>
         </p:txBody>
@@ -34775,7 +34775,7 @@
                 <a:ea typeface="+mn-ea"/>
                 <a:cs typeface="+mn-cs"/>
               </a:rPr>
-              <a:t>帮扶管理信息系统 v1.18.12</a:t>
+              <a:t>帮扶管理信息系统 v1.18.13</a:t>
             </a:r>
           </a:p>
         </p:txBody>
@@ -35504,7 +35504,7 @@
                 <a:ea typeface="+mn-ea"/>
                 <a:cs typeface="+mn-cs"/>
               </a:rPr>
-              <a:t>帮扶管理信息系统 v1.18.12</a:t>
+              <a:t>帮扶管理信息系统 v1.18.13</a:t>
             </a:r>
           </a:p>
         </p:txBody>
@@ -36693,7 +36693,7 @@
                 <a:ea typeface="+mn-ea"/>
                 <a:cs typeface="+mn-cs"/>
               </a:rPr>
-              <a:t>帮扶管理信息系统 v1.18.12</a:t>
+              <a:t>帮扶管理信息系统 v1.18.13</a:t>
             </a:r>
           </a:p>
         </p:txBody>
@@ -37486,7 +37486,7 @@
                 <a:ea typeface="+mn-ea"/>
                 <a:cs typeface="+mn-cs"/>
               </a:rPr>
-              <a:t>帮扶管理信息系统 v1.18.12</a:t>
+              <a:t>帮扶管理信息系统 v1.18.13</a:t>
             </a:r>
           </a:p>
         </p:txBody>
@@ -38701,7 +38701,7 @@
                 <a:ea typeface="+mn-ea"/>
                 <a:cs typeface="+mn-cs"/>
               </a:rPr>
-              <a:t>帮扶管理信息系统 v1.18.12</a:t>
+              <a:t>帮扶管理信息系统 v1.18.13</a:t>
             </a:r>
           </a:p>
         </p:txBody>
@@ -39580,7 +39580,7 @@
                 <a:ea typeface="+mn-ea"/>
                 <a:cs typeface="+mn-cs"/>
               </a:rPr>
-              <a:t>帮扶管理信息系统 v1.18.12</a:t>
+              <a:t>帮扶管理信息系统 v1.18.13</a:t>
             </a:r>
           </a:p>
         </p:txBody>
@@ -41014,7 +41014,7 @@
                 <a:ea typeface="+mn-ea"/>
                 <a:cs typeface="+mn-cs"/>
               </a:rPr>
-              <a:t>帮扶管理信息系统 v1.18.12</a:t>
+              <a:t>帮扶管理信息系统 v1.18.13</a:t>
             </a:r>
           </a:p>
         </p:txBody>
@@ -42229,7 +42229,7 @@
                 <a:ea typeface="+mn-ea"/>
                 <a:cs typeface="+mn-cs"/>
               </a:rPr>
-              <a:t>帮扶管理信息系统 v1.18.12</a:t>
+              <a:t>帮扶管理信息系统 v1.18.13</a:t>
             </a:r>
           </a:p>
         </p:txBody>
@@ -43232,7 +43232,7 @@
                 <a:ea typeface="+mn-ea"/>
                 <a:cs typeface="+mn-cs"/>
               </a:rPr>
-              <a:t>帮扶管理信息系统 v1.18.12</a:t>
+              <a:t>帮扶管理信息系统 v1.18.13</a:t>
             </a:r>
           </a:p>
         </p:txBody>
@@ -44095,7 +44095,7 @@
                 <a:ea typeface="+mn-ea"/>
                 <a:cs typeface="+mn-cs"/>
               </a:rPr>
-              <a:t>帮扶管理信息系统 v1.18.12</a:t>
+              <a:t>帮扶管理信息系统 v1.18.13</a:t>
             </a:r>
           </a:p>
         </p:txBody>
@@ -44966,7 +44966,7 @@
                 <a:ea typeface="+mn-ea"/>
                 <a:cs typeface="+mn-cs"/>
               </a:rPr>
-              <a:t>帮扶管理信息系统 v1.18.12</a:t>
+              <a:t>帮扶管理信息系统 v1.18.13</a:t>
             </a:r>
           </a:p>
         </p:txBody>
@@ -45969,7 +45969,7 @@
                 <a:ea typeface="+mn-ea"/>
                 <a:cs typeface="+mn-cs"/>
               </a:rPr>
-              <a:t>帮扶管理信息系统 v1.18.12</a:t>
+              <a:t>帮扶管理信息系统 v1.18.13</a:t>
             </a:r>
           </a:p>
         </p:txBody>
@@ -48168,7 +48168,7 @@
                 <a:ea typeface="+mn-ea"/>
                 <a:cs typeface="+mn-cs"/>
               </a:rPr>
-              <a:t>帮扶管理信息系统 v1.18.12</a:t>
+              <a:t>帮扶管理信息系统 v1.18.13</a:t>
             </a:r>
           </a:p>
         </p:txBody>
@@ -48961,7 +48961,7 @@
                 <a:ea typeface="+mn-ea"/>
                 <a:cs typeface="+mn-cs"/>
               </a:rPr>
-              <a:t>帮扶管理信息系统 v1.18.12</a:t>
+              <a:t>帮扶管理信息系统 v1.18.13</a:t>
             </a:r>
           </a:p>
         </p:txBody>
@@ -49690,7 +49690,7 @@
                 <a:ea typeface="+mn-ea"/>
                 <a:cs typeface="+mn-cs"/>
               </a:rPr>
-              <a:t>帮扶管理信息系统 v1.18.12</a:t>
+              <a:t>帮扶管理信息系统 v1.18.13</a:t>
             </a:r>
           </a:p>
         </p:txBody>
@@ -50569,7 +50569,7 @@
                 <a:ea typeface="+mn-ea"/>
                 <a:cs typeface="+mn-cs"/>
               </a:rPr>
-              <a:t>帮扶管理信息系统 v1.18.12</a:t>
+              <a:t>帮扶管理信息系统 v1.18.13</a:t>
             </a:r>
           </a:p>
         </p:txBody>
@@ -51572,7 +51572,7 @@
                 <a:ea typeface="+mn-ea"/>
                 <a:cs typeface="+mn-cs"/>
               </a:rPr>
-              <a:t>帮扶管理信息系统 v1.18.12</a:t>
+              <a:t>帮扶管理信息系统 v1.18.13</a:t>
             </a:r>
           </a:p>
         </p:txBody>
@@ -52507,7 +52507,7 @@
                 <a:ea typeface="+mn-ea"/>
                 <a:cs typeface="+mn-cs"/>
               </a:rPr>
-              <a:t>帮扶管理信息系统 v1.18.12</a:t>
+              <a:t>帮扶管理信息系统 v1.18.13</a:t>
             </a:r>
           </a:p>
         </p:txBody>
@@ -53236,7 +53236,7 @@
                 <a:ea typeface="+mn-ea"/>
                 <a:cs typeface="+mn-cs"/>
               </a:rPr>
-              <a:t>帮扶管理信息系统 v1.18.12</a:t>
+              <a:t>帮扶管理信息系统 v1.18.13</a:t>
             </a:r>
           </a:p>
         </p:txBody>
@@ -54243,7 +54243,7 @@
                 <a:ea typeface="+mn-ea"/>
                 <a:cs typeface="+mn-cs"/>
               </a:rPr>
-              <a:t>帮扶管理信息系统 v1.18.12</a:t>
+              <a:t>帮扶管理信息系统 v1.18.13</a:t>
             </a:r>
           </a:p>
         </p:txBody>
@@ -55308,7 +55308,7 @@
                 <a:ea typeface="+mn-ea"/>
                 <a:cs typeface="+mn-cs"/>
               </a:rPr>
-              <a:t>帮扶管理信息系统 v1.18.12</a:t>
+              <a:t>帮扶管理信息系统 v1.18.13</a:t>
             </a:r>
           </a:p>
         </p:txBody>
@@ -56233,7 +56233,7 @@
                 <a:ea typeface="+mn-ea"/>
                 <a:cs typeface="+mn-cs"/>
               </a:rPr>
-              <a:t>帮扶管理信息系统 v1.18.12</a:t>
+              <a:t>帮扶管理信息系统 v1.18.13</a:t>
             </a:r>
           </a:p>
         </p:txBody>
@@ -56573,7 +56573,7 @@
                 <a:ea typeface="+mn-ea"/>
                 <a:cs typeface="+mn-cs"/>
               </a:rPr>
-              <a:t>帮扶管理信息系统 v1.18.12 · 仓库：github.com/lzh745200/MRRS · 完整文档见 docs/ 目录</a:t>
+              <a:t>帮扶管理信息系统 v1.18.13 · 仓库：github.com/lzh745200/MRRS · 完整文档见 docs/ 目录</a:t>
             </a:r>
           </a:p>
         </p:txBody>
@@ -56613,7 +56613,7 @@
                 <a:ea typeface="+mn-ea"/>
                 <a:cs typeface="+mn-cs"/>
               </a:rPr>
-              <a:t>V1.18.12 | 2026-10-26</a:t>
+              <a:t>V1.18.13 | 2026-10-26</a:t>
             </a:r>
           </a:p>
         </p:txBody>
@@ -57502,7 +57502,7 @@
                 <a:ea typeface="+mn-ea"/>
                 <a:cs typeface="+mn-cs"/>
               </a:rPr>
-              <a:t>帮扶管理信息系统 v1.18.12</a:t>
+              <a:t>帮扶管理信息系统 v1.18.13</a:t>
             </a:r>
           </a:p>
         </p:txBody>
@@ -58965,7 +58965,7 @@
                 <a:ea typeface="+mn-ea"/>
                 <a:cs typeface="+mn-cs"/>
               </a:rPr>
-              <a:t>帮扶管理信息系统 v1.18.12</a:t>
+              <a:t>帮扶管理信息系统 v1.18.13</a:t>
             </a:r>
           </a:p>
         </p:txBody>
@@ -60340,7 +60340,7 @@
                 <a:ea typeface="+mn-ea"/>
                 <a:cs typeface="+mn-cs"/>
               </a:rPr>
-              <a:t>帮扶管理信息系统 v1.18.12</a:t>
+              <a:t>帮扶管理信息系统 v1.18.13</a:t>
             </a:r>
           </a:p>
         </p:txBody>

--- a/docs/帮扶管理信息系统-操作培训.pptx
+++ b/docs/帮扶管理信息系统-操作培训.pptx
@@ -5352,7 +5352,7 @@
                 <a:ea typeface="+mn-ea"/>
                 <a:cs typeface="+mn-cs"/>
               </a:rPr>
-              <a:t>V1.18.13 | 2026-10-26 | FastAPI + Vue 3 + Electron + SQLite</a:t>
+              <a:t>V1.18.14 | 2026-10-26 | FastAPI + Vue 3 + Electron + SQLite</a:t>
             </a:r>
           </a:p>
         </p:txBody>
@@ -6161,7 +6161,7 @@
                 <a:ea typeface="+mn-ea"/>
                 <a:cs typeface="+mn-cs"/>
               </a:rPr>
-              <a:t>帮扶管理信息系统 v1.18.13</a:t>
+              <a:t>帮扶管理信息系统 v1.18.14</a:t>
             </a:r>
           </a:p>
         </p:txBody>
@@ -8081,7 +8081,7 @@
                 <a:ea typeface="+mn-ea"/>
                 <a:cs typeface="+mn-cs"/>
               </a:rPr>
-              <a:t>帮扶管理信息系统 v1.18.13</a:t>
+              <a:t>帮扶管理信息系统 v1.18.14</a:t>
             </a:r>
           </a:p>
         </p:txBody>
@@ -8952,7 +8952,7 @@
                 <a:ea typeface="+mn-ea"/>
                 <a:cs typeface="+mn-cs"/>
               </a:rPr>
-              <a:t>帮扶管理信息系统 v1.18.13</a:t>
+              <a:t>帮扶管理信息系统 v1.18.14</a:t>
             </a:r>
           </a:p>
         </p:txBody>
@@ -9885,7 +9885,7 @@
                 <a:ea typeface="+mn-ea"/>
                 <a:cs typeface="+mn-cs"/>
               </a:rPr>
-              <a:t>帮扶管理信息系统 v1.18.13</a:t>
+              <a:t>帮扶管理信息系统 v1.18.14</a:t>
             </a:r>
           </a:p>
         </p:txBody>
@@ -10764,7 +10764,7 @@
                 <a:ea typeface="+mn-ea"/>
                 <a:cs typeface="+mn-cs"/>
               </a:rPr>
-              <a:t>帮扶管理信息系统 v1.18.13</a:t>
+              <a:t>帮扶管理信息系统 v1.18.14</a:t>
             </a:r>
           </a:p>
         </p:txBody>
@@ -11699,7 +11699,7 @@
                 <a:ea typeface="+mn-ea"/>
                 <a:cs typeface="+mn-cs"/>
               </a:rPr>
-              <a:t>帮扶管理信息系统 v1.18.13</a:t>
+              <a:t>帮扶管理信息系统 v1.18.14</a:t>
             </a:r>
           </a:p>
         </p:txBody>
@@ -12916,7 +12916,7 @@
                 <a:ea typeface="+mn-ea"/>
                 <a:cs typeface="+mn-cs"/>
               </a:rPr>
-              <a:t>帮扶管理信息系统 v1.18.13</a:t>
+              <a:t>帮扶管理信息系统 v1.18.14</a:t>
             </a:r>
           </a:p>
         </p:txBody>
@@ -13981,7 +13981,7 @@
                 <a:ea typeface="+mn-ea"/>
                 <a:cs typeface="+mn-cs"/>
               </a:rPr>
-              <a:t>帮扶管理信息系统 v1.18.13</a:t>
+              <a:t>帮扶管理信息系统 v1.18.14</a:t>
             </a:r>
           </a:p>
         </p:txBody>
@@ -14844,7 +14844,7 @@
                 <a:ea typeface="+mn-ea"/>
                 <a:cs typeface="+mn-cs"/>
               </a:rPr>
-              <a:t>帮扶管理信息系统 v1.18.13</a:t>
+              <a:t>帮扶管理信息系统 v1.18.14</a:t>
             </a:r>
           </a:p>
         </p:txBody>
@@ -16225,7 +16225,7 @@
                 <a:ea typeface="+mn-ea"/>
                 <a:cs typeface="+mn-cs"/>
               </a:rPr>
-              <a:t>帮扶管理信息系统 v1.18.13</a:t>
+              <a:t>帮扶管理信息系统 v1.18.14</a:t>
             </a:r>
           </a:p>
         </p:txBody>
@@ -17228,7 +17228,7 @@
                 <a:ea typeface="+mn-ea"/>
                 <a:cs typeface="+mn-cs"/>
               </a:rPr>
-              <a:t>帮扶管理信息系统 v1.18.13</a:t>
+              <a:t>帮扶管理信息系统 v1.18.14</a:t>
             </a:r>
           </a:p>
         </p:txBody>
@@ -19206,7 +19206,7 @@
                 <a:ea typeface="+mn-ea"/>
                 <a:cs typeface="+mn-cs"/>
               </a:rPr>
-              <a:t>帮扶管理信息系统 v1.18.13</a:t>
+              <a:t>帮扶管理信息系统 v1.18.14</a:t>
             </a:r>
           </a:p>
         </p:txBody>
@@ -20303,7 +20303,7 @@
                 <a:ea typeface="+mn-ea"/>
                 <a:cs typeface="+mn-cs"/>
               </a:rPr>
-              <a:t>帮扶管理信息系统 v1.18.13</a:t>
+              <a:t>帮扶管理信息系统 v1.18.14</a:t>
             </a:r>
           </a:p>
         </p:txBody>
@@ -21192,7 +21192,7 @@
                 <a:ea typeface="+mn-ea"/>
                 <a:cs typeface="+mn-cs"/>
               </a:rPr>
-              <a:t>帮扶管理信息系统 v1.18.13</a:t>
+              <a:t>帮扶管理信息系统 v1.18.14</a:t>
             </a:r>
           </a:p>
         </p:txBody>
@@ -22127,7 +22127,7 @@
                 <a:ea typeface="+mn-ea"/>
                 <a:cs typeface="+mn-cs"/>
               </a:rPr>
-              <a:t>帮扶管理信息系统 v1.18.13</a:t>
+              <a:t>帮扶管理信息系统 v1.18.14</a:t>
             </a:r>
           </a:p>
         </p:txBody>
@@ -23060,7 +23060,7 @@
                 <a:ea typeface="+mn-ea"/>
                 <a:cs typeface="+mn-cs"/>
               </a:rPr>
-              <a:t>帮扶管理信息系统 v1.18.13</a:t>
+              <a:t>帮扶管理信息系统 v1.18.14</a:t>
             </a:r>
           </a:p>
         </p:txBody>
@@ -24277,7 +24277,7 @@
                 <a:ea typeface="+mn-ea"/>
                 <a:cs typeface="+mn-cs"/>
               </a:rPr>
-              <a:t>帮扶管理信息系统 v1.18.13</a:t>
+              <a:t>帮扶管理信息系统 v1.18.14</a:t>
             </a:r>
           </a:p>
         </p:txBody>
@@ -25156,7 +25156,7 @@
                 <a:ea typeface="+mn-ea"/>
                 <a:cs typeface="+mn-cs"/>
               </a:rPr>
-              <a:t>帮扶管理信息系统 v1.18.13</a:t>
+              <a:t>帮扶管理信息系统 v1.18.14</a:t>
             </a:r>
           </a:p>
         </p:txBody>
@@ -25885,7 +25885,7 @@
                 <a:ea typeface="+mn-ea"/>
                 <a:cs typeface="+mn-cs"/>
               </a:rPr>
-              <a:t>帮扶管理信息系统 v1.18.13</a:t>
+              <a:t>帮扶管理信息系统 v1.18.14</a:t>
             </a:r>
           </a:p>
         </p:txBody>
@@ -26944,7 +26944,7 @@
                 <a:ea typeface="+mn-ea"/>
                 <a:cs typeface="+mn-cs"/>
               </a:rPr>
-              <a:t>帮扶管理信息系统 v1.18.13</a:t>
+              <a:t>帮扶管理信息系统 v1.18.14</a:t>
             </a:r>
           </a:p>
         </p:txBody>
@@ -27877,7 +27877,7 @@
                 <a:ea typeface="+mn-ea"/>
                 <a:cs typeface="+mn-cs"/>
               </a:rPr>
-              <a:t>帮扶管理信息系统 v1.18.13</a:t>
+              <a:t>帮扶管理信息系统 v1.18.14</a:t>
             </a:r>
           </a:p>
         </p:txBody>
@@ -28670,7 +28670,7 @@
                 <a:ea typeface="+mn-ea"/>
                 <a:cs typeface="+mn-cs"/>
               </a:rPr>
-              <a:t>帮扶管理信息系统 v1.18.13</a:t>
+              <a:t>帮扶管理信息系统 v1.18.14</a:t>
             </a:r>
           </a:p>
         </p:txBody>
@@ -29793,7 +29793,7 @@
                 <a:ea typeface="+mn-ea"/>
                 <a:cs typeface="+mn-cs"/>
               </a:rPr>
-              <a:t>帮扶管理信息系统 v1.18.13</a:t>
+              <a:t>帮扶管理信息系统 v1.18.14</a:t>
             </a:r>
           </a:p>
         </p:txBody>
@@ -31131,7 +31131,7 @@
                 <a:ea typeface="+mn-ea"/>
                 <a:cs typeface="+mn-cs"/>
               </a:rPr>
-              <a:t>帮扶管理信息系统 v1.18.13</a:t>
+              <a:t>帮扶管理信息系统 v1.18.14</a:t>
             </a:r>
           </a:p>
         </p:txBody>
@@ -31924,7 +31924,7 @@
                 <a:ea typeface="+mn-ea"/>
                 <a:cs typeface="+mn-cs"/>
               </a:rPr>
-              <a:t>帮扶管理信息系统 v1.18.13</a:t>
+              <a:t>帮扶管理信息系统 v1.18.14</a:t>
             </a:r>
           </a:p>
         </p:txBody>
@@ -32859,7 +32859,7 @@
                 <a:ea typeface="+mn-ea"/>
                 <a:cs typeface="+mn-cs"/>
               </a:rPr>
-              <a:t>帮扶管理信息系统 v1.18.13</a:t>
+              <a:t>帮扶管理信息系统 v1.18.14</a:t>
             </a:r>
           </a:p>
         </p:txBody>
@@ -33982,7 +33982,7 @@
                 <a:ea typeface="+mn-ea"/>
                 <a:cs typeface="+mn-cs"/>
               </a:rPr>
-              <a:t>帮扶管理信息系统 v1.18.13</a:t>
+              <a:t>帮扶管理信息系统 v1.18.14</a:t>
             </a:r>
           </a:p>
         </p:txBody>
@@ -34775,7 +34775,7 @@
                 <a:ea typeface="+mn-ea"/>
                 <a:cs typeface="+mn-cs"/>
               </a:rPr>
-              <a:t>帮扶管理信息系统 v1.18.13</a:t>
+              <a:t>帮扶管理信息系统 v1.18.14</a:t>
             </a:r>
           </a:p>
         </p:txBody>
@@ -35504,7 +35504,7 @@
                 <a:ea typeface="+mn-ea"/>
                 <a:cs typeface="+mn-cs"/>
               </a:rPr>
-              <a:t>帮扶管理信息系统 v1.18.13</a:t>
+              <a:t>帮扶管理信息系统 v1.18.14</a:t>
             </a:r>
           </a:p>
         </p:txBody>
@@ -36693,7 +36693,7 @@
                 <a:ea typeface="+mn-ea"/>
                 <a:cs typeface="+mn-cs"/>
               </a:rPr>
-              <a:t>帮扶管理信息系统 v1.18.13</a:t>
+              <a:t>帮扶管理信息系统 v1.18.14</a:t>
             </a:r>
           </a:p>
         </p:txBody>
@@ -37486,7 +37486,7 @@
                 <a:ea typeface="+mn-ea"/>
                 <a:cs typeface="+mn-cs"/>
               </a:rPr>
-              <a:t>帮扶管理信息系统 v1.18.13</a:t>
+              <a:t>帮扶管理信息系统 v1.18.14</a:t>
             </a:r>
           </a:p>
         </p:txBody>
@@ -38701,7 +38701,7 @@
                 <a:ea typeface="+mn-ea"/>
                 <a:cs typeface="+mn-cs"/>
               </a:rPr>
-              <a:t>帮扶管理信息系统 v1.18.13</a:t>
+              <a:t>帮扶管理信息系统 v1.18.14</a:t>
             </a:r>
           </a:p>
         </p:txBody>
@@ -39580,7 +39580,7 @@
                 <a:ea typeface="+mn-ea"/>
                 <a:cs typeface="+mn-cs"/>
               </a:rPr>
-              <a:t>帮扶管理信息系统 v1.18.13</a:t>
+              <a:t>帮扶管理信息系统 v1.18.14</a:t>
             </a:r>
           </a:p>
         </p:txBody>
@@ -41014,7 +41014,7 @@
                 <a:ea typeface="+mn-ea"/>
                 <a:cs typeface="+mn-cs"/>
               </a:rPr>
-              <a:t>帮扶管理信息系统 v1.18.13</a:t>
+              <a:t>帮扶管理信息系统 v1.18.14</a:t>
             </a:r>
           </a:p>
         </p:txBody>
@@ -42229,7 +42229,7 @@
                 <a:ea typeface="+mn-ea"/>
                 <a:cs typeface="+mn-cs"/>
               </a:rPr>
-              <a:t>帮扶管理信息系统 v1.18.13</a:t>
+              <a:t>帮扶管理信息系统 v1.18.14</a:t>
             </a:r>
           </a:p>
         </p:txBody>
@@ -43232,7 +43232,7 @@
                 <a:ea typeface="+mn-ea"/>
                 <a:cs typeface="+mn-cs"/>
               </a:rPr>
-              <a:t>帮扶管理信息系统 v1.18.13</a:t>
+              <a:t>帮扶管理信息系统 v1.18.14</a:t>
             </a:r>
           </a:p>
         </p:txBody>
@@ -44095,7 +44095,7 @@
                 <a:ea typeface="+mn-ea"/>
                 <a:cs typeface="+mn-cs"/>
               </a:rPr>
-              <a:t>帮扶管理信息系统 v1.18.13</a:t>
+              <a:t>帮扶管理信息系统 v1.18.14</a:t>
             </a:r>
           </a:p>
         </p:txBody>
@@ -44966,7 +44966,7 @@
                 <a:ea typeface="+mn-ea"/>
                 <a:cs typeface="+mn-cs"/>
               </a:rPr>
-              <a:t>帮扶管理信息系统 v1.18.13</a:t>
+              <a:t>帮扶管理信息系统 v1.18.14</a:t>
             </a:r>
           </a:p>
         </p:txBody>
@@ -45969,7 +45969,7 @@
                 <a:ea typeface="+mn-ea"/>
                 <a:cs typeface="+mn-cs"/>
               </a:rPr>
-              <a:t>帮扶管理信息系统 v1.18.13</a:t>
+              <a:t>帮扶管理信息系统 v1.18.14</a:t>
             </a:r>
           </a:p>
         </p:txBody>
@@ -48168,7 +48168,7 @@
                 <a:ea typeface="+mn-ea"/>
                 <a:cs typeface="+mn-cs"/>
               </a:rPr>
-              <a:t>帮扶管理信息系统 v1.18.13</a:t>
+              <a:t>帮扶管理信息系统 v1.18.14</a:t>
             </a:r>
           </a:p>
         </p:txBody>
@@ -48961,7 +48961,7 @@
                 <a:ea typeface="+mn-ea"/>
                 <a:cs typeface="+mn-cs"/>
               </a:rPr>
-              <a:t>帮扶管理信息系统 v1.18.13</a:t>
+              <a:t>帮扶管理信息系统 v1.18.14</a:t>
             </a:r>
           </a:p>
         </p:txBody>
@@ -49690,7 +49690,7 @@
                 <a:ea typeface="+mn-ea"/>
                 <a:cs typeface="+mn-cs"/>
               </a:rPr>
-              <a:t>帮扶管理信息系统 v1.18.13</a:t>
+              <a:t>帮扶管理信息系统 v1.18.14</a:t>
             </a:r>
           </a:p>
         </p:txBody>
@@ -50569,7 +50569,7 @@
                 <a:ea typeface="+mn-ea"/>
                 <a:cs typeface="+mn-cs"/>
               </a:rPr>
-              <a:t>帮扶管理信息系统 v1.18.13</a:t>
+              <a:t>帮扶管理信息系统 v1.18.14</a:t>
             </a:r>
           </a:p>
         </p:txBody>
@@ -51572,7 +51572,7 @@
                 <a:ea typeface="+mn-ea"/>
                 <a:cs typeface="+mn-cs"/>
               </a:rPr>
-              <a:t>帮扶管理信息系统 v1.18.13</a:t>
+              <a:t>帮扶管理信息系统 v1.18.14</a:t>
             </a:r>
           </a:p>
         </p:txBody>
@@ -52507,7 +52507,7 @@
                 <a:ea typeface="+mn-ea"/>
                 <a:cs typeface="+mn-cs"/>
               </a:rPr>
-              <a:t>帮扶管理信息系统 v1.18.13</a:t>
+              <a:t>帮扶管理信息系统 v1.18.14</a:t>
             </a:r>
           </a:p>
         </p:txBody>
@@ -53236,7 +53236,7 @@
                 <a:ea typeface="+mn-ea"/>
                 <a:cs typeface="+mn-cs"/>
               </a:rPr>
-              <a:t>帮扶管理信息系统 v1.18.13</a:t>
+              <a:t>帮扶管理信息系统 v1.18.14</a:t>
             </a:r>
           </a:p>
         </p:txBody>
@@ -54243,7 +54243,7 @@
                 <a:ea typeface="+mn-ea"/>
                 <a:cs typeface="+mn-cs"/>
               </a:rPr>
-              <a:t>帮扶管理信息系统 v1.18.13</a:t>
+              <a:t>帮扶管理信息系统 v1.18.14</a:t>
             </a:r>
           </a:p>
         </p:txBody>
@@ -55308,7 +55308,7 @@
                 <a:ea typeface="+mn-ea"/>
                 <a:cs typeface="+mn-cs"/>
               </a:rPr>
-              <a:t>帮扶管理信息系统 v1.18.13</a:t>
+              <a:t>帮扶管理信息系统 v1.18.14</a:t>
             </a:r>
           </a:p>
         </p:txBody>
@@ -56233,7 +56233,7 @@
                 <a:ea typeface="+mn-ea"/>
                 <a:cs typeface="+mn-cs"/>
               </a:rPr>
-              <a:t>帮扶管理信息系统 v1.18.13</a:t>
+              <a:t>帮扶管理信息系统 v1.18.14</a:t>
             </a:r>
           </a:p>
         </p:txBody>
@@ -56573,7 +56573,7 @@
                 <a:ea typeface="+mn-ea"/>
                 <a:cs typeface="+mn-cs"/>
               </a:rPr>
-              <a:t>帮扶管理信息系统 v1.18.13 · 仓库：github.com/lzh745200/MRRS · 完整文档见 docs/ 目录</a:t>
+              <a:t>帮扶管理信息系统 v1.18.14 · 仓库：github.com/lzh745200/MRRS · 完整文档见 docs/ 目录</a:t>
             </a:r>
           </a:p>
         </p:txBody>
@@ -56613,7 +56613,7 @@
                 <a:ea typeface="+mn-ea"/>
                 <a:cs typeface="+mn-cs"/>
               </a:rPr>
-              <a:t>V1.18.13 | 2026-10-26</a:t>
+              <a:t>V1.18.14 | 2026-10-26</a:t>
             </a:r>
           </a:p>
         </p:txBody>
@@ -57502,7 +57502,7 @@
                 <a:ea typeface="+mn-ea"/>
                 <a:cs typeface="+mn-cs"/>
               </a:rPr>
-              <a:t>帮扶管理信息系统 v1.18.13</a:t>
+              <a:t>帮扶管理信息系统 v1.18.14</a:t>
             </a:r>
           </a:p>
         </p:txBody>
@@ -58965,7 +58965,7 @@
                 <a:ea typeface="+mn-ea"/>
                 <a:cs typeface="+mn-cs"/>
               </a:rPr>
-              <a:t>帮扶管理信息系统 v1.18.13</a:t>
+              <a:t>帮扶管理信息系统 v1.18.14</a:t>
             </a:r>
           </a:p>
         </p:txBody>
@@ -60340,7 +60340,7 @@
                 <a:ea typeface="+mn-ea"/>
                 <a:cs typeface="+mn-cs"/>
               </a:rPr>
-              <a:t>帮扶管理信息系统 v1.18.13</a:t>
+              <a:t>帮扶管理信息系统 v1.18.14</a:t>
             </a:r>
           </a:p>
         </p:txBody>

--- a/docs/帮扶管理信息系统-操作培训.pptx
+++ b/docs/帮扶管理信息系统-操作培训.pptx
@@ -5352,7 +5352,7 @@
                 <a:ea typeface="+mn-ea"/>
                 <a:cs typeface="+mn-cs"/>
               </a:rPr>
-              <a:t>V1.18.14 | 2026-10-26 | FastAPI + Vue 3 + Electron + SQLite</a:t>
+              <a:t>V1.18.14 | 2026-10-27 | FastAPI + Vue 3 + Electron + SQLite</a:t>
             </a:r>
           </a:p>
         </p:txBody>
@@ -5640,6 +5640,10 @@
               <a:noFill/>
             </a:ln>
           </p:spPr>
+          <p:txBody>
+            <a:bodyPr/>
+            <a:p/>
+          </p:txBody>
         </p:sp>
         <p:sp>
           <p:nvSpPr>
@@ -5782,6 +5786,10 @@
               <a:noFill/>
             </a:ln>
           </p:spPr>
+          <p:txBody>
+            <a:bodyPr/>
+            <a:p/>
+          </p:txBody>
         </p:sp>
         <p:sp>
           <p:nvSpPr>
@@ -5938,6 +5946,10 @@
               </a:solidFill>
             </a:ln>
           </p:spPr>
+          <p:txBody>
+            <a:bodyPr/>
+            <a:p/>
+          </p:txBody>
         </p:sp>
         <p:sp>
           <p:nvSpPr>
@@ -5960,6 +5972,10 @@
               <a:noFill/>
             </a:ln>
           </p:spPr>
+          <p:txBody>
+            <a:bodyPr/>
+            <a:p/>
+          </p:txBody>
         </p:sp>
         <p:sp>
           <p:nvSpPr>
@@ -6022,6 +6038,10 @@
               <a:noFill/>
             </a:ln>
           </p:spPr>
+          <p:txBody>
+            <a:bodyPr/>
+            <a:p/>
+          </p:txBody>
         </p:sp>
         <p:sp>
           <p:nvSpPr>
@@ -6084,6 +6104,10 @@
               <a:noFill/>
             </a:ln>
           </p:spPr>
+          <p:txBody>
+            <a:bodyPr/>
+            <a:p/>
+          </p:txBody>
         </p:sp>
         <p:sp>
           <p:nvSpPr>
@@ -6503,6 +6527,10 @@
               <a:noFill/>
             </a:ln>
           </p:spPr>
+          <p:txBody>
+            <a:bodyPr/>
+            <a:p/>
+          </p:txBody>
         </p:sp>
         <p:sp>
           <p:nvSpPr>
@@ -6565,6 +6593,10 @@
               <a:noFill/>
             </a:ln>
           </p:spPr>
+          <p:txBody>
+            <a:bodyPr/>
+            <a:p/>
+          </p:txBody>
         </p:sp>
         <p:sp>
           <p:nvSpPr>
@@ -6627,6 +6659,10 @@
               <a:noFill/>
             </a:ln>
           </p:spPr>
+          <p:txBody>
+            <a:bodyPr/>
+            <a:p/>
+          </p:txBody>
         </p:sp>
         <p:sp>
           <p:nvSpPr>
@@ -6689,6 +6725,10 @@
               <a:noFill/>
             </a:ln>
           </p:spPr>
+          <p:txBody>
+            <a:bodyPr/>
+            <a:p/>
+          </p:txBody>
         </p:sp>
         <p:sp>
           <p:nvSpPr>
@@ -6751,6 +6791,10 @@
               <a:noFill/>
             </a:ln>
           </p:spPr>
+          <p:txBody>
+            <a:bodyPr/>
+            <a:p/>
+          </p:txBody>
         </p:sp>
         <p:sp>
           <p:nvSpPr>
@@ -6827,6 +6871,10 @@
               </a:solidFill>
             </a:ln>
           </p:spPr>
+          <p:txBody>
+            <a:bodyPr/>
+            <a:p/>
+          </p:txBody>
         </p:sp>
       </p:grpSp>
       <p:sp>
@@ -7152,6 +7200,10 @@
               <a:noFill/>
             </a:ln>
           </p:spPr>
+          <p:txBody>
+            <a:bodyPr/>
+            <a:p/>
+          </p:txBody>
         </p:sp>
         <p:sp>
           <p:nvSpPr>
@@ -7296,6 +7348,10 @@
               <a:noFill/>
             </a:ln>
           </p:spPr>
+          <p:txBody>
+            <a:bodyPr/>
+            <a:p/>
+          </p:txBody>
         </p:sp>
         <p:sp>
           <p:nvSpPr>
@@ -7560,6 +7616,10 @@
               <a:noFill/>
             </a:ln>
           </p:spPr>
+          <p:txBody>
+            <a:bodyPr/>
+            <a:p/>
+          </p:txBody>
         </p:sp>
         <p:sp>
           <p:nvSpPr>
@@ -7824,6 +7884,10 @@
               <a:noFill/>
             </a:ln>
           </p:spPr>
+          <p:txBody>
+            <a:bodyPr/>
+            <a:p/>
+          </p:txBody>
         </p:sp>
         <p:sp>
           <p:nvSpPr>
@@ -7980,6 +8044,10 @@
               </a:solidFill>
             </a:ln>
           </p:spPr>
+          <p:txBody>
+            <a:bodyPr/>
+            <a:p/>
+          </p:txBody>
         </p:sp>
         <p:sp>
           <p:nvSpPr>
@@ -8004,6 +8072,10 @@
               <a:noFill/>
             </a:ln>
           </p:spPr>
+          <p:txBody>
+            <a:bodyPr/>
+            <a:p/>
+          </p:txBody>
         </p:sp>
         <p:sp>
           <p:nvSpPr>
@@ -8369,6 +8441,10 @@
               <a:noFill/>
             </a:ln>
           </p:spPr>
+          <p:txBody>
+            <a:bodyPr/>
+            <a:p/>
+          </p:txBody>
         </p:sp>
         <p:sp>
           <p:nvSpPr>
@@ -8511,6 +8587,10 @@
               <a:noFill/>
             </a:ln>
           </p:spPr>
+          <p:txBody>
+            <a:bodyPr/>
+            <a:p/>
+          </p:txBody>
         </p:sp>
         <p:sp>
           <p:nvSpPr>
@@ -8653,6 +8733,10 @@
               <a:noFill/>
             </a:ln>
           </p:spPr>
+          <p:txBody>
+            <a:bodyPr/>
+            <a:p/>
+          </p:txBody>
         </p:sp>
         <p:sp>
           <p:nvSpPr>
@@ -8795,6 +8879,10 @@
               <a:noFill/>
             </a:ln>
           </p:spPr>
+          <p:txBody>
+            <a:bodyPr/>
+            <a:p/>
+          </p:txBody>
         </p:sp>
         <p:sp>
           <p:nvSpPr>
@@ -9254,6 +9342,10 @@
               </a:solidFill>
             </a:ln>
           </p:spPr>
+          <p:txBody>
+            <a:bodyPr/>
+            <a:p/>
+          </p:txBody>
         </p:sp>
         <p:sp>
           <p:nvSpPr>
@@ -9276,6 +9368,10 @@
               <a:noFill/>
             </a:ln>
           </p:spPr>
+          <p:txBody>
+            <a:bodyPr/>
+            <a:p/>
+          </p:txBody>
         </p:sp>
         <p:sp>
           <p:nvSpPr>
@@ -9378,6 +9474,10 @@
               <a:noFill/>
             </a:ln>
           </p:spPr>
+          <p:txBody>
+            <a:bodyPr/>
+            <a:p/>
+          </p:txBody>
         </p:sp>
         <p:sp>
           <p:nvSpPr>
@@ -9480,6 +9580,10 @@
               <a:noFill/>
             </a:ln>
           </p:spPr>
+          <p:txBody>
+            <a:bodyPr/>
+            <a:p/>
+          </p:txBody>
         </p:sp>
         <p:sp>
           <p:nvSpPr>
@@ -9582,6 +9686,10 @@
               <a:noFill/>
             </a:ln>
           </p:spPr>
+          <p:txBody>
+            <a:bodyPr/>
+            <a:p/>
+          </p:txBody>
         </p:sp>
         <p:sp>
           <p:nvSpPr>
@@ -9684,6 +9792,10 @@
               <a:noFill/>
             </a:ln>
           </p:spPr>
+          <p:txBody>
+            <a:bodyPr/>
+            <a:p/>
+          </p:txBody>
         </p:sp>
         <p:sp>
           <p:nvSpPr>
@@ -9746,6 +9858,10 @@
               <a:noFill/>
             </a:ln>
           </p:spPr>
+          <p:txBody>
+            <a:bodyPr/>
+            <a:p/>
+          </p:txBody>
         </p:sp>
         <p:sp>
           <p:nvSpPr>
@@ -9808,6 +9924,10 @@
               <a:noFill/>
             </a:ln>
           </p:spPr>
+          <p:txBody>
+            <a:bodyPr/>
+            <a:p/>
+          </p:txBody>
         </p:sp>
         <p:sp>
           <p:nvSpPr>
@@ -10177,6 +10297,10 @@
               </a:solidFill>
             </a:ln>
           </p:spPr>
+          <p:txBody>
+            <a:bodyPr/>
+            <a:p/>
+          </p:txBody>
         </p:sp>
         <p:sp>
           <p:nvSpPr>
@@ -10199,6 +10323,10 @@
               <a:noFill/>
             </a:ln>
           </p:spPr>
+          <p:txBody>
+            <a:bodyPr/>
+            <a:p/>
+          </p:txBody>
         </p:sp>
         <p:sp>
           <p:nvSpPr>
@@ -10305,6 +10433,10 @@
               </a:solidFill>
             </a:ln>
           </p:spPr>
+          <p:txBody>
+            <a:bodyPr/>
+            <a:p/>
+          </p:txBody>
         </p:sp>
         <p:sp>
           <p:nvSpPr>
@@ -10327,6 +10459,10 @@
               <a:noFill/>
             </a:ln>
           </p:spPr>
+          <p:txBody>
+            <a:bodyPr/>
+            <a:p/>
+          </p:txBody>
         </p:sp>
         <p:sp>
           <p:nvSpPr>
@@ -10433,6 +10569,10 @@
               </a:solidFill>
             </a:ln>
           </p:spPr>
+          <p:txBody>
+            <a:bodyPr/>
+            <a:p/>
+          </p:txBody>
         </p:sp>
         <p:sp>
           <p:nvSpPr>
@@ -10455,6 +10595,10 @@
               <a:noFill/>
             </a:ln>
           </p:spPr>
+          <p:txBody>
+            <a:bodyPr/>
+            <a:p/>
+          </p:txBody>
         </p:sp>
         <p:sp>
           <p:nvSpPr>
@@ -10561,6 +10705,10 @@
               </a:solidFill>
             </a:ln>
           </p:spPr>
+          <p:txBody>
+            <a:bodyPr/>
+            <a:p/>
+          </p:txBody>
         </p:sp>
         <p:sp>
           <p:nvSpPr>
@@ -10583,6 +10731,10 @@
               <a:noFill/>
             </a:ln>
           </p:spPr>
+          <p:txBody>
+            <a:bodyPr/>
+            <a:p/>
+          </p:txBody>
         </p:sp>
         <p:sp>
           <p:nvSpPr>
@@ -10687,6 +10839,10 @@
               <a:noFill/>
             </a:ln>
           </p:spPr>
+          <p:txBody>
+            <a:bodyPr/>
+            <a:p/>
+          </p:txBody>
         </p:sp>
         <p:sp>
           <p:nvSpPr>
@@ -11052,6 +11208,10 @@
               <a:noFill/>
             </a:ln>
           </p:spPr>
+          <p:txBody>
+            <a:bodyPr/>
+            <a:p/>
+          </p:txBody>
         </p:sp>
         <p:sp>
           <p:nvSpPr>
@@ -11194,6 +11354,10 @@
               <a:noFill/>
             </a:ln>
           </p:spPr>
+          <p:txBody>
+            <a:bodyPr/>
+            <a:p/>
+          </p:txBody>
         </p:sp>
         <p:sp>
           <p:nvSpPr>
@@ -11336,6 +11500,10 @@
               <a:noFill/>
             </a:ln>
           </p:spPr>
+          <p:txBody>
+            <a:bodyPr/>
+            <a:p/>
+          </p:txBody>
         </p:sp>
         <p:sp>
           <p:nvSpPr>
@@ -11478,6 +11646,10 @@
               <a:noFill/>
             </a:ln>
           </p:spPr>
+          <p:txBody>
+            <a:bodyPr/>
+            <a:p/>
+          </p:txBody>
         </p:sp>
         <p:sp>
           <p:nvSpPr>
@@ -11622,6 +11794,10 @@
               <a:noFill/>
             </a:ln>
           </p:spPr>
+          <p:txBody>
+            <a:bodyPr/>
+            <a:p/>
+          </p:txBody>
         </p:sp>
         <p:sp>
           <p:nvSpPr>
@@ -11987,6 +12163,10 @@
               <a:noFill/>
             </a:ln>
           </p:spPr>
+          <p:txBody>
+            <a:bodyPr/>
+            <a:p/>
+          </p:txBody>
         </p:sp>
         <p:sp>
           <p:nvSpPr>
@@ -12131,6 +12311,10 @@
               <a:noFill/>
             </a:ln>
           </p:spPr>
+          <p:txBody>
+            <a:bodyPr/>
+            <a:p/>
+          </p:txBody>
         </p:sp>
         <p:sp>
           <p:nvSpPr>
@@ -12395,6 +12579,10 @@
               <a:noFill/>
             </a:ln>
           </p:spPr>
+          <p:txBody>
+            <a:bodyPr/>
+            <a:p/>
+          </p:txBody>
         </p:sp>
         <p:sp>
           <p:nvSpPr>
@@ -12659,6 +12847,10 @@
               <a:noFill/>
             </a:ln>
           </p:spPr>
+          <p:txBody>
+            <a:bodyPr/>
+            <a:p/>
+          </p:txBody>
         </p:sp>
         <p:sp>
           <p:nvSpPr>
@@ -12815,6 +13007,10 @@
               </a:solidFill>
             </a:ln>
           </p:spPr>
+          <p:txBody>
+            <a:bodyPr/>
+            <a:p/>
+          </p:txBody>
         </p:sp>
         <p:sp>
           <p:nvSpPr>
@@ -12839,6 +13035,10 @@
               <a:noFill/>
             </a:ln>
           </p:spPr>
+          <p:txBody>
+            <a:bodyPr/>
+            <a:p/>
+          </p:txBody>
         </p:sp>
         <p:sp>
           <p:nvSpPr>
@@ -13208,6 +13408,10 @@
               </a:solidFill>
             </a:ln>
           </p:spPr>
+          <p:txBody>
+            <a:bodyPr/>
+            <a:p/>
+          </p:txBody>
         </p:sp>
         <p:sp>
           <p:nvSpPr>
@@ -13230,6 +13434,10 @@
               <a:noFill/>
             </a:ln>
           </p:spPr>
+          <p:txBody>
+            <a:bodyPr/>
+            <a:p/>
+          </p:txBody>
         </p:sp>
         <p:sp>
           <p:nvSpPr>
@@ -13292,6 +13500,10 @@
               <a:noFill/>
             </a:ln>
           </p:spPr>
+          <p:txBody>
+            <a:bodyPr/>
+            <a:p/>
+          </p:txBody>
         </p:sp>
         <p:sp>
           <p:nvSpPr>
@@ -13354,6 +13566,10 @@
               <a:noFill/>
             </a:ln>
           </p:spPr>
+          <p:txBody>
+            <a:bodyPr/>
+            <a:p/>
+          </p:txBody>
         </p:sp>
         <p:sp>
           <p:nvSpPr>
@@ -13420,6 +13636,10 @@
               </a:solidFill>
             </a:ln>
           </p:spPr>
+          <p:txBody>
+            <a:bodyPr/>
+            <a:p/>
+          </p:txBody>
         </p:sp>
         <p:sp>
           <p:nvSpPr>
@@ -13442,6 +13662,10 @@
               <a:noFill/>
             </a:ln>
           </p:spPr>
+          <p:txBody>
+            <a:bodyPr/>
+            <a:p/>
+          </p:txBody>
         </p:sp>
         <p:sp>
           <p:nvSpPr>
@@ -13504,6 +13728,10 @@
               <a:noFill/>
             </a:ln>
           </p:spPr>
+          <p:txBody>
+            <a:bodyPr/>
+            <a:p/>
+          </p:txBody>
         </p:sp>
         <p:sp>
           <p:nvSpPr>
@@ -13566,6 +13794,10 @@
               <a:noFill/>
             </a:ln>
           </p:spPr>
+          <p:txBody>
+            <a:bodyPr/>
+            <a:p/>
+          </p:txBody>
         </p:sp>
         <p:sp>
           <p:nvSpPr>
@@ -13628,6 +13860,10 @@
               <a:noFill/>
             </a:ln>
           </p:spPr>
+          <p:txBody>
+            <a:bodyPr/>
+            <a:p/>
+          </p:txBody>
         </p:sp>
         <p:sp>
           <p:nvSpPr>
@@ -13694,6 +13930,10 @@
               </a:solidFill>
             </a:ln>
           </p:spPr>
+          <p:txBody>
+            <a:bodyPr/>
+            <a:p/>
+          </p:txBody>
         </p:sp>
         <p:sp>
           <p:nvSpPr>
@@ -13716,6 +13956,10 @@
               <a:noFill/>
             </a:ln>
           </p:spPr>
+          <p:txBody>
+            <a:bodyPr/>
+            <a:p/>
+          </p:txBody>
         </p:sp>
         <p:sp>
           <p:nvSpPr>
@@ -13778,6 +14022,10 @@
               <a:noFill/>
             </a:ln>
           </p:spPr>
+          <p:txBody>
+            <a:bodyPr/>
+            <a:p/>
+          </p:txBody>
         </p:sp>
         <p:sp>
           <p:nvSpPr>
@@ -13840,6 +14088,10 @@
               <a:noFill/>
             </a:ln>
           </p:spPr>
+          <p:txBody>
+            <a:bodyPr/>
+            <a:p/>
+          </p:txBody>
         </p:sp>
         <p:sp>
           <p:nvSpPr>
@@ -13904,6 +14156,10 @@
               <a:noFill/>
             </a:ln>
           </p:spPr>
+          <p:txBody>
+            <a:bodyPr/>
+            <a:p/>
+          </p:txBody>
         </p:sp>
         <p:sp>
           <p:nvSpPr>
@@ -14309,6 +14565,10 @@
               <a:noFill/>
             </a:ln>
           </p:spPr>
+          <p:txBody>
+            <a:bodyPr/>
+            <a:p/>
+          </p:txBody>
         </p:sp>
         <p:sp>
           <p:nvSpPr>
@@ -14331,6 +14591,10 @@
               <a:noFill/>
             </a:ln>
           </p:spPr>
+          <p:txBody>
+            <a:bodyPr/>
+            <a:p/>
+          </p:txBody>
         </p:sp>
         <p:sp>
           <p:nvSpPr>
@@ -14393,6 +14657,10 @@
               <a:noFill/>
             </a:ln>
           </p:spPr>
+          <p:txBody>
+            <a:bodyPr/>
+            <a:p/>
+          </p:txBody>
         </p:sp>
         <p:sp>
           <p:nvSpPr>
@@ -14455,6 +14723,10 @@
               <a:noFill/>
             </a:ln>
           </p:spPr>
+          <p:txBody>
+            <a:bodyPr/>
+            <a:p/>
+          </p:txBody>
         </p:sp>
         <p:sp>
           <p:nvSpPr>
@@ -14557,6 +14829,10 @@
               <a:noFill/>
             </a:ln>
           </p:spPr>
+          <p:txBody>
+            <a:bodyPr/>
+            <a:p/>
+          </p:txBody>
         </p:sp>
         <p:sp>
           <p:nvSpPr>
@@ -14579,6 +14855,10 @@
               <a:noFill/>
             </a:ln>
           </p:spPr>
+          <p:txBody>
+            <a:bodyPr/>
+            <a:p/>
+          </p:txBody>
         </p:sp>
         <p:sp>
           <p:nvSpPr>
@@ -14641,6 +14921,10 @@
               <a:noFill/>
             </a:ln>
           </p:spPr>
+          <p:txBody>
+            <a:bodyPr/>
+            <a:p/>
+          </p:txBody>
         </p:sp>
         <p:sp>
           <p:nvSpPr>
@@ -14703,6 +14987,10 @@
               <a:noFill/>
             </a:ln>
           </p:spPr>
+          <p:txBody>
+            <a:bodyPr/>
+            <a:p/>
+          </p:txBody>
         </p:sp>
         <p:sp>
           <p:nvSpPr>
@@ -14767,6 +15055,10 @@
               <a:noFill/>
             </a:ln>
           </p:spPr>
+          <p:txBody>
+            <a:bodyPr/>
+            <a:p/>
+          </p:txBody>
         </p:sp>
         <p:sp>
           <p:nvSpPr>
@@ -15252,6 +15544,10 @@
               </a:solidFill>
             </a:ln>
           </p:spPr>
+          <p:txBody>
+            <a:bodyPr/>
+            <a:p/>
+          </p:txBody>
         </p:sp>
         <p:sp>
           <p:nvSpPr>
@@ -15408,6 +15704,10 @@
               </a:solidFill>
             </a:ln>
           </p:spPr>
+          <p:txBody>
+            <a:bodyPr/>
+            <a:p/>
+          </p:txBody>
         </p:sp>
         <p:sp>
           <p:nvSpPr>
@@ -15564,6 +15864,10 @@
               </a:solidFill>
             </a:ln>
           </p:spPr>
+          <p:txBody>
+            <a:bodyPr/>
+            <a:p/>
+          </p:txBody>
         </p:sp>
         <p:sp>
           <p:nvSpPr>
@@ -15720,6 +16024,10 @@
               </a:solidFill>
             </a:ln>
           </p:spPr>
+          <p:txBody>
+            <a:bodyPr/>
+            <a:p/>
+          </p:txBody>
         </p:sp>
         <p:sp>
           <p:nvSpPr>
@@ -15876,6 +16184,10 @@
               </a:solidFill>
             </a:ln>
           </p:spPr>
+          <p:txBody>
+            <a:bodyPr/>
+            <a:p/>
+          </p:txBody>
         </p:sp>
         <p:sp>
           <p:nvSpPr>
@@ -16032,6 +16344,10 @@
               </a:solidFill>
             </a:ln>
           </p:spPr>
+          <p:txBody>
+            <a:bodyPr/>
+            <a:p/>
+          </p:txBody>
         </p:sp>
         <p:sp>
           <p:nvSpPr>
@@ -16188,6 +16504,10 @@
               </a:solidFill>
             </a:ln>
           </p:spPr>
+          <p:txBody>
+            <a:bodyPr/>
+            <a:p/>
+          </p:txBody>
         </p:sp>
       </p:grpSp>
       <p:sp>
@@ -16517,6 +16837,10 @@
               </a:solidFill>
             </a:ln>
           </p:spPr>
+          <p:txBody>
+            <a:bodyPr/>
+            <a:p/>
+          </p:txBody>
         </p:sp>
         <p:sp>
           <p:nvSpPr>
@@ -16539,6 +16863,10 @@
               <a:noFill/>
             </a:ln>
           </p:spPr>
+          <p:txBody>
+            <a:bodyPr/>
+            <a:p/>
+          </p:txBody>
         </p:sp>
         <p:sp>
           <p:nvSpPr>
@@ -16601,6 +16929,10 @@
               <a:noFill/>
             </a:ln>
           </p:spPr>
+          <p:txBody>
+            <a:bodyPr/>
+            <a:p/>
+          </p:txBody>
         </p:sp>
         <p:sp>
           <p:nvSpPr>
@@ -16663,6 +16995,10 @@
               <a:noFill/>
             </a:ln>
           </p:spPr>
+          <p:txBody>
+            <a:bodyPr/>
+            <a:p/>
+          </p:txBody>
         </p:sp>
         <p:sp>
           <p:nvSpPr>
@@ -16729,6 +17065,10 @@
               </a:solidFill>
             </a:ln>
           </p:spPr>
+          <p:txBody>
+            <a:bodyPr/>
+            <a:p/>
+          </p:txBody>
         </p:sp>
         <p:sp>
           <p:nvSpPr>
@@ -16751,6 +17091,10 @@
               <a:noFill/>
             </a:ln>
           </p:spPr>
+          <p:txBody>
+            <a:bodyPr/>
+            <a:p/>
+          </p:txBody>
         </p:sp>
         <p:sp>
           <p:nvSpPr>
@@ -16813,6 +17157,10 @@
               <a:noFill/>
             </a:ln>
           </p:spPr>
+          <p:txBody>
+            <a:bodyPr/>
+            <a:p/>
+          </p:txBody>
         </p:sp>
         <p:sp>
           <p:nvSpPr>
@@ -16875,6 +17223,10 @@
               <a:noFill/>
             </a:ln>
           </p:spPr>
+          <p:txBody>
+            <a:bodyPr/>
+            <a:p/>
+          </p:txBody>
         </p:sp>
         <p:sp>
           <p:nvSpPr>
@@ -16941,6 +17293,10 @@
               </a:solidFill>
             </a:ln>
           </p:spPr>
+          <p:txBody>
+            <a:bodyPr/>
+            <a:p/>
+          </p:txBody>
         </p:sp>
         <p:sp>
           <p:nvSpPr>
@@ -16963,6 +17319,10 @@
               <a:noFill/>
             </a:ln>
           </p:spPr>
+          <p:txBody>
+            <a:bodyPr/>
+            <a:p/>
+          </p:txBody>
         </p:sp>
         <p:sp>
           <p:nvSpPr>
@@ -17025,6 +17385,10 @@
               <a:noFill/>
             </a:ln>
           </p:spPr>
+          <p:txBody>
+            <a:bodyPr/>
+            <a:p/>
+          </p:txBody>
         </p:sp>
         <p:sp>
           <p:nvSpPr>
@@ -17087,6 +17451,10 @@
               <a:noFill/>
             </a:ln>
           </p:spPr>
+          <p:txBody>
+            <a:bodyPr/>
+            <a:p/>
+          </p:txBody>
         </p:sp>
         <p:sp>
           <p:nvSpPr>
@@ -17151,6 +17519,10 @@
               <a:noFill/>
             </a:ln>
           </p:spPr>
+          <p:txBody>
+            <a:bodyPr/>
+            <a:p/>
+          </p:txBody>
         </p:sp>
         <p:sp>
           <p:nvSpPr>
@@ -17570,6 +17942,10 @@
               <a:noFill/>
             </a:ln>
           </p:spPr>
+          <p:txBody>
+            <a:bodyPr/>
+            <a:p/>
+          </p:txBody>
         </p:sp>
         <p:sp>
           <p:nvSpPr>
@@ -17632,6 +18008,10 @@
               <a:noFill/>
             </a:ln>
           </p:spPr>
+          <p:txBody>
+            <a:bodyPr/>
+            <a:p/>
+          </p:txBody>
         </p:sp>
         <p:sp>
           <p:nvSpPr>
@@ -17694,6 +18074,10 @@
               <a:noFill/>
             </a:ln>
           </p:spPr>
+          <p:txBody>
+            <a:bodyPr/>
+            <a:p/>
+          </p:txBody>
         </p:sp>
         <p:sp>
           <p:nvSpPr>
@@ -17756,6 +18140,10 @@
               <a:noFill/>
             </a:ln>
           </p:spPr>
+          <p:txBody>
+            <a:bodyPr/>
+            <a:p/>
+          </p:txBody>
         </p:sp>
         <p:sp>
           <p:nvSpPr>
@@ -17832,6 +18220,10 @@
               </a:solidFill>
             </a:ln>
           </p:spPr>
+          <p:txBody>
+            <a:bodyPr/>
+            <a:p/>
+          </p:txBody>
         </p:sp>
       </p:grpSp>
       <p:sp>
@@ -18157,6 +18549,10 @@
               <a:noFill/>
             </a:ln>
           </p:spPr>
+          <p:txBody>
+            <a:bodyPr/>
+            <a:p/>
+          </p:txBody>
         </p:sp>
         <p:sp>
           <p:nvSpPr>
@@ -18301,6 +18697,10 @@
               <a:noFill/>
             </a:ln>
           </p:spPr>
+          <p:txBody>
+            <a:bodyPr/>
+            <a:p/>
+          </p:txBody>
         </p:sp>
         <p:sp>
           <p:nvSpPr>
@@ -18565,6 +18965,10 @@
               <a:noFill/>
             </a:ln>
           </p:spPr>
+          <p:txBody>
+            <a:bodyPr/>
+            <a:p/>
+          </p:txBody>
         </p:sp>
         <p:sp>
           <p:nvSpPr>
@@ -18829,6 +19233,10 @@
               <a:noFill/>
             </a:ln>
           </p:spPr>
+          <p:txBody>
+            <a:bodyPr/>
+            <a:p/>
+          </p:txBody>
         </p:sp>
         <p:sp>
           <p:nvSpPr>
@@ -19105,6 +19513,10 @@
               </a:solidFill>
             </a:ln>
           </p:spPr>
+          <p:txBody>
+            <a:bodyPr/>
+            <a:p/>
+          </p:txBody>
         </p:sp>
         <p:sp>
           <p:nvSpPr>
@@ -19129,6 +19541,10 @@
               <a:noFill/>
             </a:ln>
           </p:spPr>
+          <p:txBody>
+            <a:bodyPr/>
+            <a:p/>
+          </p:txBody>
         </p:sp>
         <p:sp>
           <p:nvSpPr>
@@ -19508,6 +19924,10 @@
               </a:solidFill>
             </a:ln>
           </p:spPr>
+          <p:txBody>
+            <a:bodyPr/>
+            <a:p/>
+          </p:txBody>
         </p:sp>
         <p:sp>
           <p:nvSpPr>
@@ -19530,6 +19950,10 @@
               <a:noFill/>
             </a:ln>
           </p:spPr>
+          <p:txBody>
+            <a:bodyPr/>
+            <a:p/>
+          </p:txBody>
         </p:sp>
         <p:sp>
           <p:nvSpPr>
@@ -19632,6 +20056,10 @@
               <a:noFill/>
             </a:ln>
           </p:spPr>
+          <p:txBody>
+            <a:bodyPr/>
+            <a:p/>
+          </p:txBody>
         </p:sp>
         <p:sp>
           <p:nvSpPr>
@@ -19734,6 +20162,10 @@
               <a:noFill/>
             </a:ln>
           </p:spPr>
+          <p:txBody>
+            <a:bodyPr/>
+            <a:p/>
+          </p:txBody>
         </p:sp>
         <p:sp>
           <p:nvSpPr>
@@ -19836,6 +20268,10 @@
               <a:noFill/>
             </a:ln>
           </p:spPr>
+          <p:txBody>
+            <a:bodyPr/>
+            <a:p/>
+          </p:txBody>
         </p:sp>
         <p:sp>
           <p:nvSpPr>
@@ -19938,6 +20374,10 @@
               <a:noFill/>
             </a:ln>
           </p:spPr>
+          <p:txBody>
+            <a:bodyPr/>
+            <a:p/>
+          </p:txBody>
         </p:sp>
         <p:sp>
           <p:nvSpPr>
@@ -20040,6 +20480,10 @@
               <a:noFill/>
             </a:ln>
           </p:spPr>
+          <p:txBody>
+            <a:bodyPr/>
+            <a:p/>
+          </p:txBody>
         </p:sp>
         <p:sp>
           <p:nvSpPr>
@@ -20102,6 +20546,10 @@
               <a:noFill/>
             </a:ln>
           </p:spPr>
+          <p:txBody>
+            <a:bodyPr/>
+            <a:p/>
+          </p:txBody>
         </p:sp>
         <p:sp>
           <p:nvSpPr>
@@ -20164,6 +20612,10 @@
               <a:noFill/>
             </a:ln>
           </p:spPr>
+          <p:txBody>
+            <a:bodyPr/>
+            <a:p/>
+          </p:txBody>
         </p:sp>
         <p:sp>
           <p:nvSpPr>
@@ -20226,6 +20678,10 @@
               <a:noFill/>
             </a:ln>
           </p:spPr>
+          <p:txBody>
+            <a:bodyPr/>
+            <a:p/>
+          </p:txBody>
         </p:sp>
         <p:sp>
           <p:nvSpPr>
@@ -20591,6 +21047,10 @@
               <a:noFill/>
             </a:ln>
           </p:spPr>
+          <p:txBody>
+            <a:bodyPr/>
+            <a:p/>
+          </p:txBody>
         </p:sp>
         <p:sp>
           <p:nvSpPr>
@@ -20733,6 +21193,10 @@
               <a:noFill/>
             </a:ln>
           </p:spPr>
+          <p:txBody>
+            <a:bodyPr/>
+            <a:p/>
+          </p:txBody>
         </p:sp>
         <p:sp>
           <p:nvSpPr>
@@ -20875,6 +21339,10 @@
               <a:noFill/>
             </a:ln>
           </p:spPr>
+          <p:txBody>
+            <a:bodyPr/>
+            <a:p/>
+          </p:txBody>
         </p:sp>
         <p:sp>
           <p:nvSpPr>
@@ -21031,6 +21499,10 @@
               </a:solidFill>
             </a:ln>
           </p:spPr>
+          <p:txBody>
+            <a:bodyPr/>
+            <a:p/>
+          </p:txBody>
         </p:sp>
         <p:sp>
           <p:nvSpPr>
@@ -21053,6 +21525,10 @@
               <a:noFill/>
             </a:ln>
           </p:spPr>
+          <p:txBody>
+            <a:bodyPr/>
+            <a:p/>
+          </p:txBody>
         </p:sp>
         <p:sp>
           <p:nvSpPr>
@@ -21115,6 +21591,10 @@
               <a:noFill/>
             </a:ln>
           </p:spPr>
+          <p:txBody>
+            <a:bodyPr/>
+            <a:p/>
+          </p:txBody>
         </p:sp>
         <p:sp>
           <p:nvSpPr>
@@ -21480,6 +21960,10 @@
               <a:noFill/>
             </a:ln>
           </p:spPr>
+          <p:txBody>
+            <a:bodyPr/>
+            <a:p/>
+          </p:txBody>
         </p:sp>
         <p:sp>
           <p:nvSpPr>
@@ -21622,6 +22106,10 @@
               <a:noFill/>
             </a:ln>
           </p:spPr>
+          <p:txBody>
+            <a:bodyPr/>
+            <a:p/>
+          </p:txBody>
         </p:sp>
         <p:sp>
           <p:nvSpPr>
@@ -21764,6 +22252,10 @@
               <a:noFill/>
             </a:ln>
           </p:spPr>
+          <p:txBody>
+            <a:bodyPr/>
+            <a:p/>
+          </p:txBody>
         </p:sp>
         <p:sp>
           <p:nvSpPr>
@@ -21906,6 +22398,10 @@
               <a:noFill/>
             </a:ln>
           </p:spPr>
+          <p:txBody>
+            <a:bodyPr/>
+            <a:p/>
+          </p:txBody>
         </p:sp>
         <p:sp>
           <p:nvSpPr>
@@ -22050,6 +22546,10 @@
               <a:noFill/>
             </a:ln>
           </p:spPr>
+          <p:txBody>
+            <a:bodyPr/>
+            <a:p/>
+          </p:txBody>
         </p:sp>
         <p:sp>
           <p:nvSpPr>
@@ -22429,6 +22929,10 @@
               </a:solidFill>
             </a:ln>
           </p:spPr>
+          <p:txBody>
+            <a:bodyPr/>
+            <a:p/>
+          </p:txBody>
         </p:sp>
         <p:sp>
           <p:nvSpPr>
@@ -22451,6 +22955,10 @@
               <a:noFill/>
             </a:ln>
           </p:spPr>
+          <p:txBody>
+            <a:bodyPr/>
+            <a:p/>
+          </p:txBody>
         </p:sp>
         <p:sp>
           <p:nvSpPr>
@@ -22553,6 +23061,10 @@
               <a:noFill/>
             </a:ln>
           </p:spPr>
+          <p:txBody>
+            <a:bodyPr/>
+            <a:p/>
+          </p:txBody>
         </p:sp>
         <p:sp>
           <p:nvSpPr>
@@ -22655,6 +23167,10 @@
               <a:noFill/>
             </a:ln>
           </p:spPr>
+          <p:txBody>
+            <a:bodyPr/>
+            <a:p/>
+          </p:txBody>
         </p:sp>
         <p:sp>
           <p:nvSpPr>
@@ -22757,6 +23273,10 @@
               <a:noFill/>
             </a:ln>
           </p:spPr>
+          <p:txBody>
+            <a:bodyPr/>
+            <a:p/>
+          </p:txBody>
         </p:sp>
         <p:sp>
           <p:nvSpPr>
@@ -22859,6 +23379,10 @@
               <a:noFill/>
             </a:ln>
           </p:spPr>
+          <p:txBody>
+            <a:bodyPr/>
+            <a:p/>
+          </p:txBody>
         </p:sp>
         <p:sp>
           <p:nvSpPr>
@@ -22921,6 +23445,10 @@
               <a:noFill/>
             </a:ln>
           </p:spPr>
+          <p:txBody>
+            <a:bodyPr/>
+            <a:p/>
+          </p:txBody>
         </p:sp>
         <p:sp>
           <p:nvSpPr>
@@ -22983,6 +23511,10 @@
               <a:noFill/>
             </a:ln>
           </p:spPr>
+          <p:txBody>
+            <a:bodyPr/>
+            <a:p/>
+          </p:txBody>
         </p:sp>
         <p:sp>
           <p:nvSpPr>
@@ -23348,6 +23880,10 @@
               <a:noFill/>
             </a:ln>
           </p:spPr>
+          <p:txBody>
+            <a:bodyPr/>
+            <a:p/>
+          </p:txBody>
         </p:sp>
         <p:sp>
           <p:nvSpPr>
@@ -23492,6 +24028,10 @@
               <a:noFill/>
             </a:ln>
           </p:spPr>
+          <p:txBody>
+            <a:bodyPr/>
+            <a:p/>
+          </p:txBody>
         </p:sp>
         <p:sp>
           <p:nvSpPr>
@@ -23756,6 +24296,10 @@
               <a:noFill/>
             </a:ln>
           </p:spPr>
+          <p:txBody>
+            <a:bodyPr/>
+            <a:p/>
+          </p:txBody>
         </p:sp>
         <p:sp>
           <p:nvSpPr>
@@ -24020,6 +24564,10 @@
               <a:noFill/>
             </a:ln>
           </p:spPr>
+          <p:txBody>
+            <a:bodyPr/>
+            <a:p/>
+          </p:txBody>
         </p:sp>
         <p:sp>
           <p:nvSpPr>
@@ -24176,6 +24724,10 @@
               </a:solidFill>
             </a:ln>
           </p:spPr>
+          <p:txBody>
+            <a:bodyPr/>
+            <a:p/>
+          </p:txBody>
         </p:sp>
         <p:sp>
           <p:nvSpPr>
@@ -24200,6 +24752,10 @@
               <a:noFill/>
             </a:ln>
           </p:spPr>
+          <p:txBody>
+            <a:bodyPr/>
+            <a:p/>
+          </p:txBody>
         </p:sp>
         <p:sp>
           <p:nvSpPr>
@@ -24569,6 +25125,10 @@
               </a:solidFill>
             </a:ln>
           </p:spPr>
+          <p:txBody>
+            <a:bodyPr/>
+            <a:p/>
+          </p:txBody>
         </p:sp>
         <p:sp>
           <p:nvSpPr>
@@ -24591,6 +25151,10 @@
               <a:noFill/>
             </a:ln>
           </p:spPr>
+          <p:txBody>
+            <a:bodyPr/>
+            <a:p/>
+          </p:txBody>
         </p:sp>
         <p:sp>
           <p:nvSpPr>
@@ -24697,6 +25261,10 @@
               </a:solidFill>
             </a:ln>
           </p:spPr>
+          <p:txBody>
+            <a:bodyPr/>
+            <a:p/>
+          </p:txBody>
         </p:sp>
         <p:sp>
           <p:nvSpPr>
@@ -24719,6 +25287,10 @@
               <a:noFill/>
             </a:ln>
           </p:spPr>
+          <p:txBody>
+            <a:bodyPr/>
+            <a:p/>
+          </p:txBody>
         </p:sp>
         <p:sp>
           <p:nvSpPr>
@@ -24825,6 +25397,10 @@
               </a:solidFill>
             </a:ln>
           </p:spPr>
+          <p:txBody>
+            <a:bodyPr/>
+            <a:p/>
+          </p:txBody>
         </p:sp>
         <p:sp>
           <p:nvSpPr>
@@ -24847,6 +25423,10 @@
               <a:noFill/>
             </a:ln>
           </p:spPr>
+          <p:txBody>
+            <a:bodyPr/>
+            <a:p/>
+          </p:txBody>
         </p:sp>
         <p:sp>
           <p:nvSpPr>
@@ -24953,6 +25533,10 @@
               </a:solidFill>
             </a:ln>
           </p:spPr>
+          <p:txBody>
+            <a:bodyPr/>
+            <a:p/>
+          </p:txBody>
         </p:sp>
         <p:sp>
           <p:nvSpPr>
@@ -24975,6 +25559,10 @@
               <a:noFill/>
             </a:ln>
           </p:spPr>
+          <p:txBody>
+            <a:bodyPr/>
+            <a:p/>
+          </p:txBody>
         </p:sp>
         <p:sp>
           <p:nvSpPr>
@@ -25079,6 +25667,10 @@
               <a:noFill/>
             </a:ln>
           </p:spPr>
+          <p:txBody>
+            <a:bodyPr/>
+            <a:p/>
+          </p:txBody>
         </p:sp>
         <p:sp>
           <p:nvSpPr>
@@ -25444,6 +26036,10 @@
               <a:noFill/>
             </a:ln>
           </p:spPr>
+          <p:txBody>
+            <a:bodyPr/>
+            <a:p/>
+          </p:txBody>
         </p:sp>
         <p:sp>
           <p:nvSpPr>
@@ -25586,6 +26182,10 @@
               <a:noFill/>
             </a:ln>
           </p:spPr>
+          <p:txBody>
+            <a:bodyPr/>
+            <a:p/>
+          </p:txBody>
         </p:sp>
         <p:sp>
           <p:nvSpPr>
@@ -25728,6 +26328,10 @@
               <a:noFill/>
             </a:ln>
           </p:spPr>
+          <p:txBody>
+            <a:bodyPr/>
+            <a:p/>
+          </p:txBody>
         </p:sp>
         <p:sp>
           <p:nvSpPr>
@@ -26177,6 +26781,10 @@
               </a:solidFill>
             </a:ln>
           </p:spPr>
+          <p:txBody>
+            <a:bodyPr/>
+            <a:p/>
+          </p:txBody>
         </p:sp>
         <p:sp>
           <p:nvSpPr>
@@ -26199,6 +26807,10 @@
               <a:noFill/>
             </a:ln>
           </p:spPr>
+          <p:txBody>
+            <a:bodyPr/>
+            <a:p/>
+          </p:txBody>
         </p:sp>
         <p:sp>
           <p:nvSpPr>
@@ -26301,6 +26913,10 @@
               <a:noFill/>
             </a:ln>
           </p:spPr>
+          <p:txBody>
+            <a:bodyPr/>
+            <a:p/>
+          </p:txBody>
         </p:sp>
         <p:sp>
           <p:nvSpPr>
@@ -26363,6 +26979,10 @@
               <a:noFill/>
             </a:ln>
           </p:spPr>
+          <p:txBody>
+            <a:bodyPr/>
+            <a:p/>
+          </p:txBody>
         </p:sp>
         <p:sp>
           <p:nvSpPr>
@@ -26429,6 +27049,10 @@
               </a:solidFill>
             </a:ln>
           </p:spPr>
+          <p:txBody>
+            <a:bodyPr/>
+            <a:p/>
+          </p:txBody>
         </p:sp>
         <p:sp>
           <p:nvSpPr>
@@ -26451,6 +27075,10 @@
               <a:noFill/>
             </a:ln>
           </p:spPr>
+          <p:txBody>
+            <a:bodyPr/>
+            <a:p/>
+          </p:txBody>
         </p:sp>
         <p:sp>
           <p:nvSpPr>
@@ -26553,6 +27181,10 @@
               <a:noFill/>
             </a:ln>
           </p:spPr>
+          <p:txBody>
+            <a:bodyPr/>
+            <a:p/>
+          </p:txBody>
         </p:sp>
         <p:sp>
           <p:nvSpPr>
@@ -26615,6 +27247,10 @@
               <a:noFill/>
             </a:ln>
           </p:spPr>
+          <p:txBody>
+            <a:bodyPr/>
+            <a:p/>
+          </p:txBody>
         </p:sp>
         <p:sp>
           <p:nvSpPr>
@@ -26681,6 +27317,10 @@
               </a:solidFill>
             </a:ln>
           </p:spPr>
+          <p:txBody>
+            <a:bodyPr/>
+            <a:p/>
+          </p:txBody>
         </p:sp>
         <p:sp>
           <p:nvSpPr>
@@ -26703,6 +27343,10 @@
               <a:noFill/>
             </a:ln>
           </p:spPr>
+          <p:txBody>
+            <a:bodyPr/>
+            <a:p/>
+          </p:txBody>
         </p:sp>
         <p:sp>
           <p:nvSpPr>
@@ -26805,6 +27449,10 @@
               <a:noFill/>
             </a:ln>
           </p:spPr>
+          <p:txBody>
+            <a:bodyPr/>
+            <a:p/>
+          </p:txBody>
         </p:sp>
         <p:sp>
           <p:nvSpPr>
@@ -26867,6 +27515,10 @@
               <a:noFill/>
             </a:ln>
           </p:spPr>
+          <p:txBody>
+            <a:bodyPr/>
+            <a:p/>
+          </p:txBody>
         </p:sp>
         <p:sp>
           <p:nvSpPr>
@@ -27246,6 +27898,10 @@
               </a:solidFill>
             </a:ln>
           </p:spPr>
+          <p:txBody>
+            <a:bodyPr/>
+            <a:p/>
+          </p:txBody>
         </p:sp>
         <p:sp>
           <p:nvSpPr>
@@ -27268,6 +27924,10 @@
               <a:noFill/>
             </a:ln>
           </p:spPr>
+          <p:txBody>
+            <a:bodyPr/>
+            <a:p/>
+          </p:txBody>
         </p:sp>
         <p:sp>
           <p:nvSpPr>
@@ -27370,6 +28030,10 @@
               <a:noFill/>
             </a:ln>
           </p:spPr>
+          <p:txBody>
+            <a:bodyPr/>
+            <a:p/>
+          </p:txBody>
         </p:sp>
         <p:sp>
           <p:nvSpPr>
@@ -27472,6 +28136,10 @@
               <a:noFill/>
             </a:ln>
           </p:spPr>
+          <p:txBody>
+            <a:bodyPr/>
+            <a:p/>
+          </p:txBody>
         </p:sp>
         <p:sp>
           <p:nvSpPr>
@@ -27574,6 +28242,10 @@
               <a:noFill/>
             </a:ln>
           </p:spPr>
+          <p:txBody>
+            <a:bodyPr/>
+            <a:p/>
+          </p:txBody>
         </p:sp>
         <p:sp>
           <p:nvSpPr>
@@ -27676,6 +28348,10 @@
               <a:noFill/>
             </a:ln>
           </p:spPr>
+          <p:txBody>
+            <a:bodyPr/>
+            <a:p/>
+          </p:txBody>
         </p:sp>
         <p:sp>
           <p:nvSpPr>
@@ -27738,6 +28414,10 @@
               <a:noFill/>
             </a:ln>
           </p:spPr>
+          <p:txBody>
+            <a:bodyPr/>
+            <a:p/>
+          </p:txBody>
         </p:sp>
         <p:sp>
           <p:nvSpPr>
@@ -27800,6 +28480,10 @@
               <a:noFill/>
             </a:ln>
           </p:spPr>
+          <p:txBody>
+            <a:bodyPr/>
+            <a:p/>
+          </p:txBody>
         </p:sp>
         <p:sp>
           <p:nvSpPr>
@@ -28165,6 +28849,10 @@
               <a:noFill/>
             </a:ln>
           </p:spPr>
+          <p:txBody>
+            <a:bodyPr/>
+            <a:p/>
+          </p:txBody>
         </p:sp>
         <p:sp>
           <p:nvSpPr>
@@ -28307,6 +28995,10 @@
               <a:noFill/>
             </a:ln>
           </p:spPr>
+          <p:txBody>
+            <a:bodyPr/>
+            <a:p/>
+          </p:txBody>
         </p:sp>
         <p:sp>
           <p:nvSpPr>
@@ -28449,6 +29141,10 @@
               <a:noFill/>
             </a:ln>
           </p:spPr>
+          <p:txBody>
+            <a:bodyPr/>
+            <a:p/>
+          </p:txBody>
         </p:sp>
         <p:sp>
           <p:nvSpPr>
@@ -28593,6 +29289,10 @@
               <a:noFill/>
             </a:ln>
           </p:spPr>
+          <p:txBody>
+            <a:bodyPr/>
+            <a:p/>
+          </p:txBody>
         </p:sp>
         <p:sp>
           <p:nvSpPr>
@@ -28962,6 +29662,10 @@
               </a:solidFill>
             </a:ln>
           </p:spPr>
+          <p:txBody>
+            <a:bodyPr/>
+            <a:p/>
+          </p:txBody>
         </p:sp>
         <p:sp>
           <p:nvSpPr>
@@ -28984,6 +29688,10 @@
               <a:noFill/>
             </a:ln>
           </p:spPr>
+          <p:txBody>
+            <a:bodyPr/>
+            <a:p/>
+          </p:txBody>
         </p:sp>
         <p:sp>
           <p:nvSpPr>
@@ -29086,6 +29794,10 @@
               <a:noFill/>
             </a:ln>
           </p:spPr>
+          <p:txBody>
+            <a:bodyPr/>
+            <a:p/>
+          </p:txBody>
         </p:sp>
         <p:sp>
           <p:nvSpPr>
@@ -29148,6 +29860,10 @@
               <a:noFill/>
             </a:ln>
           </p:spPr>
+          <p:txBody>
+            <a:bodyPr/>
+            <a:p/>
+          </p:txBody>
         </p:sp>
         <p:sp>
           <p:nvSpPr>
@@ -29214,6 +29930,10 @@
               </a:solidFill>
             </a:ln>
           </p:spPr>
+          <p:txBody>
+            <a:bodyPr/>
+            <a:p/>
+          </p:txBody>
         </p:sp>
         <p:sp>
           <p:nvSpPr>
@@ -29236,6 +29956,10 @@
               <a:noFill/>
             </a:ln>
           </p:spPr>
+          <p:txBody>
+            <a:bodyPr/>
+            <a:p/>
+          </p:txBody>
         </p:sp>
         <p:sp>
           <p:nvSpPr>
@@ -29338,6 +30062,10 @@
               <a:noFill/>
             </a:ln>
           </p:spPr>
+          <p:txBody>
+            <a:bodyPr/>
+            <a:p/>
+          </p:txBody>
         </p:sp>
         <p:sp>
           <p:nvSpPr>
@@ -29400,6 +30128,10 @@
               <a:noFill/>
             </a:ln>
           </p:spPr>
+          <p:txBody>
+            <a:bodyPr/>
+            <a:p/>
+          </p:txBody>
         </p:sp>
         <p:sp>
           <p:nvSpPr>
@@ -29466,6 +30198,10 @@
               </a:solidFill>
             </a:ln>
           </p:spPr>
+          <p:txBody>
+            <a:bodyPr/>
+            <a:p/>
+          </p:txBody>
         </p:sp>
         <p:sp>
           <p:nvSpPr>
@@ -29488,6 +30224,10 @@
               <a:noFill/>
             </a:ln>
           </p:spPr>
+          <p:txBody>
+            <a:bodyPr/>
+            <a:p/>
+          </p:txBody>
         </p:sp>
         <p:sp>
           <p:nvSpPr>
@@ -29590,6 +30330,10 @@
               <a:noFill/>
             </a:ln>
           </p:spPr>
+          <p:txBody>
+            <a:bodyPr/>
+            <a:p/>
+          </p:txBody>
         </p:sp>
         <p:sp>
           <p:nvSpPr>
@@ -29652,6 +30396,10 @@
               <a:noFill/>
             </a:ln>
           </p:spPr>
+          <p:txBody>
+            <a:bodyPr/>
+            <a:p/>
+          </p:txBody>
         </p:sp>
         <p:sp>
           <p:nvSpPr>
@@ -29716,6 +30464,10 @@
               <a:noFill/>
             </a:ln>
           </p:spPr>
+          <p:txBody>
+            <a:bodyPr/>
+            <a:p/>
+          </p:txBody>
         </p:sp>
         <p:sp>
           <p:nvSpPr>
@@ -30135,6 +30887,10 @@
               <a:noFill/>
             </a:ln>
           </p:spPr>
+          <p:txBody>
+            <a:bodyPr/>
+            <a:p/>
+          </p:txBody>
         </p:sp>
         <p:sp>
           <p:nvSpPr>
@@ -30197,6 +30953,10 @@
               <a:noFill/>
             </a:ln>
           </p:spPr>
+          <p:txBody>
+            <a:bodyPr/>
+            <a:p/>
+          </p:txBody>
         </p:sp>
         <p:sp>
           <p:nvSpPr>
@@ -30259,6 +31019,10 @@
               <a:noFill/>
             </a:ln>
           </p:spPr>
+          <p:txBody>
+            <a:bodyPr/>
+            <a:p/>
+          </p:txBody>
         </p:sp>
         <p:sp>
           <p:nvSpPr>
@@ -30321,6 +31085,10 @@
               <a:noFill/>
             </a:ln>
           </p:spPr>
+          <p:txBody>
+            <a:bodyPr/>
+            <a:p/>
+          </p:txBody>
         </p:sp>
         <p:sp>
           <p:nvSpPr>
@@ -30397,6 +31165,10 @@
               </a:solidFill>
             </a:ln>
           </p:spPr>
+          <p:txBody>
+            <a:bodyPr/>
+            <a:p/>
+          </p:txBody>
         </p:sp>
       </p:grpSp>
       <p:sp>
@@ -30726,6 +31498,10 @@
               </a:solidFill>
             </a:ln>
           </p:spPr>
+          <p:txBody>
+            <a:bodyPr/>
+            <a:p/>
+          </p:txBody>
         </p:sp>
         <p:sp>
           <p:nvSpPr>
@@ -30792,6 +31568,10 @@
               </a:solidFill>
             </a:ln>
           </p:spPr>
+          <p:txBody>
+            <a:bodyPr/>
+            <a:p/>
+          </p:txBody>
         </p:sp>
         <p:sp>
           <p:nvSpPr>
@@ -30858,6 +31638,10 @@
               </a:solidFill>
             </a:ln>
           </p:spPr>
+          <p:txBody>
+            <a:bodyPr/>
+            <a:p/>
+          </p:txBody>
         </p:sp>
         <p:sp>
           <p:nvSpPr>
@@ -30924,6 +31708,10 @@
               </a:solidFill>
             </a:ln>
           </p:spPr>
+          <p:txBody>
+            <a:bodyPr/>
+            <a:p/>
+          </p:txBody>
         </p:sp>
         <p:sp>
           <p:nvSpPr>
@@ -30990,6 +31778,10 @@
               </a:solidFill>
             </a:ln>
           </p:spPr>
+          <p:txBody>
+            <a:bodyPr/>
+            <a:p/>
+          </p:txBody>
         </p:sp>
         <p:sp>
           <p:nvSpPr>
@@ -31054,6 +31846,10 @@
               <a:noFill/>
             </a:ln>
           </p:spPr>
+          <p:txBody>
+            <a:bodyPr/>
+            <a:p/>
+          </p:txBody>
         </p:sp>
         <p:sp>
           <p:nvSpPr>
@@ -31419,6 +32215,10 @@
               <a:noFill/>
             </a:ln>
           </p:spPr>
+          <p:txBody>
+            <a:bodyPr/>
+            <a:p/>
+          </p:txBody>
         </p:sp>
         <p:sp>
           <p:nvSpPr>
@@ -31561,6 +32361,10 @@
               <a:noFill/>
             </a:ln>
           </p:spPr>
+          <p:txBody>
+            <a:bodyPr/>
+            <a:p/>
+          </p:txBody>
         </p:sp>
         <p:sp>
           <p:nvSpPr>
@@ -31703,6 +32507,10 @@
               <a:noFill/>
             </a:ln>
           </p:spPr>
+          <p:txBody>
+            <a:bodyPr/>
+            <a:p/>
+          </p:txBody>
         </p:sp>
         <p:sp>
           <p:nvSpPr>
@@ -31847,6 +32655,10 @@
               <a:noFill/>
             </a:ln>
           </p:spPr>
+          <p:txBody>
+            <a:bodyPr/>
+            <a:p/>
+          </p:txBody>
         </p:sp>
         <p:sp>
           <p:nvSpPr>
@@ -32212,6 +33024,10 @@
               <a:noFill/>
             </a:ln>
           </p:spPr>
+          <p:txBody>
+            <a:bodyPr/>
+            <a:p/>
+          </p:txBody>
         </p:sp>
         <p:sp>
           <p:nvSpPr>
@@ -32354,6 +33170,10 @@
               <a:noFill/>
             </a:ln>
           </p:spPr>
+          <p:txBody>
+            <a:bodyPr/>
+            <a:p/>
+          </p:txBody>
         </p:sp>
         <p:sp>
           <p:nvSpPr>
@@ -32496,6 +33316,10 @@
               <a:noFill/>
             </a:ln>
           </p:spPr>
+          <p:txBody>
+            <a:bodyPr/>
+            <a:p/>
+          </p:txBody>
         </p:sp>
         <p:sp>
           <p:nvSpPr>
@@ -32638,6 +33462,10 @@
               <a:noFill/>
             </a:ln>
           </p:spPr>
+          <p:txBody>
+            <a:bodyPr/>
+            <a:p/>
+          </p:txBody>
         </p:sp>
         <p:sp>
           <p:nvSpPr>
@@ -32782,6 +33610,10 @@
               <a:noFill/>
             </a:ln>
           </p:spPr>
+          <p:txBody>
+            <a:bodyPr/>
+            <a:p/>
+          </p:txBody>
         </p:sp>
         <p:sp>
           <p:nvSpPr>
@@ -33151,6 +33983,10 @@
               </a:solidFill>
             </a:ln>
           </p:spPr>
+          <p:txBody>
+            <a:bodyPr/>
+            <a:p/>
+          </p:txBody>
         </p:sp>
         <p:sp>
           <p:nvSpPr>
@@ -33173,6 +34009,10 @@
               <a:noFill/>
             </a:ln>
           </p:spPr>
+          <p:txBody>
+            <a:bodyPr/>
+            <a:p/>
+          </p:txBody>
         </p:sp>
         <p:sp>
           <p:nvSpPr>
@@ -33275,6 +34115,10 @@
               <a:noFill/>
             </a:ln>
           </p:spPr>
+          <p:txBody>
+            <a:bodyPr/>
+            <a:p/>
+          </p:txBody>
         </p:sp>
         <p:sp>
           <p:nvSpPr>
@@ -33337,6 +34181,10 @@
               <a:noFill/>
             </a:ln>
           </p:spPr>
+          <p:txBody>
+            <a:bodyPr/>
+            <a:p/>
+          </p:txBody>
         </p:sp>
         <p:sp>
           <p:nvSpPr>
@@ -33403,6 +34251,10 @@
               </a:solidFill>
             </a:ln>
           </p:spPr>
+          <p:txBody>
+            <a:bodyPr/>
+            <a:p/>
+          </p:txBody>
         </p:sp>
         <p:sp>
           <p:nvSpPr>
@@ -33425,6 +34277,10 @@
               <a:noFill/>
             </a:ln>
           </p:spPr>
+          <p:txBody>
+            <a:bodyPr/>
+            <a:p/>
+          </p:txBody>
         </p:sp>
         <p:sp>
           <p:nvSpPr>
@@ -33527,6 +34383,10 @@
               <a:noFill/>
             </a:ln>
           </p:spPr>
+          <p:txBody>
+            <a:bodyPr/>
+            <a:p/>
+          </p:txBody>
         </p:sp>
         <p:sp>
           <p:nvSpPr>
@@ -33589,6 +34449,10 @@
               <a:noFill/>
             </a:ln>
           </p:spPr>
+          <p:txBody>
+            <a:bodyPr/>
+            <a:p/>
+          </p:txBody>
         </p:sp>
         <p:sp>
           <p:nvSpPr>
@@ -33655,6 +34519,10 @@
               </a:solidFill>
             </a:ln>
           </p:spPr>
+          <p:txBody>
+            <a:bodyPr/>
+            <a:p/>
+          </p:txBody>
         </p:sp>
         <p:sp>
           <p:nvSpPr>
@@ -33677,6 +34545,10 @@
               <a:noFill/>
             </a:ln>
           </p:spPr>
+          <p:txBody>
+            <a:bodyPr/>
+            <a:p/>
+          </p:txBody>
         </p:sp>
         <p:sp>
           <p:nvSpPr>
@@ -33779,6 +34651,10 @@
               <a:noFill/>
             </a:ln>
           </p:spPr>
+          <p:txBody>
+            <a:bodyPr/>
+            <a:p/>
+          </p:txBody>
         </p:sp>
         <p:sp>
           <p:nvSpPr>
@@ -33841,6 +34717,10 @@
               <a:noFill/>
             </a:ln>
           </p:spPr>
+          <p:txBody>
+            <a:bodyPr/>
+            <a:p/>
+          </p:txBody>
         </p:sp>
         <p:sp>
           <p:nvSpPr>
@@ -33905,6 +34785,10 @@
               <a:noFill/>
             </a:ln>
           </p:spPr>
+          <p:txBody>
+            <a:bodyPr/>
+            <a:p/>
+          </p:txBody>
         </p:sp>
         <p:sp>
           <p:nvSpPr>
@@ -34270,6 +35154,10 @@
               <a:noFill/>
             </a:ln>
           </p:spPr>
+          <p:txBody>
+            <a:bodyPr/>
+            <a:p/>
+          </p:txBody>
         </p:sp>
         <p:sp>
           <p:nvSpPr>
@@ -34412,6 +35300,10 @@
               <a:noFill/>
             </a:ln>
           </p:spPr>
+          <p:txBody>
+            <a:bodyPr/>
+            <a:p/>
+          </p:txBody>
         </p:sp>
         <p:sp>
           <p:nvSpPr>
@@ -34554,6 +35446,10 @@
               <a:noFill/>
             </a:ln>
           </p:spPr>
+          <p:txBody>
+            <a:bodyPr/>
+            <a:p/>
+          </p:txBody>
         </p:sp>
         <p:sp>
           <p:nvSpPr>
@@ -34698,6 +35594,10 @@
               <a:noFill/>
             </a:ln>
           </p:spPr>
+          <p:txBody>
+            <a:bodyPr/>
+            <a:p/>
+          </p:txBody>
         </p:sp>
         <p:sp>
           <p:nvSpPr>
@@ -35063,6 +35963,10 @@
               <a:noFill/>
             </a:ln>
           </p:spPr>
+          <p:txBody>
+            <a:bodyPr/>
+            <a:p/>
+          </p:txBody>
         </p:sp>
         <p:sp>
           <p:nvSpPr>
@@ -35205,6 +36109,10 @@
               <a:noFill/>
             </a:ln>
           </p:spPr>
+          <p:txBody>
+            <a:bodyPr/>
+            <a:p/>
+          </p:txBody>
         </p:sp>
         <p:sp>
           <p:nvSpPr>
@@ -35347,6 +36255,10 @@
               <a:noFill/>
             </a:ln>
           </p:spPr>
+          <p:txBody>
+            <a:bodyPr/>
+            <a:p/>
+          </p:txBody>
         </p:sp>
         <p:sp>
           <p:nvSpPr>
@@ -35796,6 +36708,10 @@
               </a:solidFill>
             </a:ln>
           </p:spPr>
+          <p:txBody>
+            <a:bodyPr/>
+            <a:p/>
+          </p:txBody>
         </p:sp>
         <p:sp>
           <p:nvSpPr>
@@ -35818,6 +36734,10 @@
               <a:noFill/>
             </a:ln>
           </p:spPr>
+          <p:txBody>
+            <a:bodyPr/>
+            <a:p/>
+          </p:txBody>
         </p:sp>
         <p:sp>
           <p:nvSpPr>
@@ -35880,6 +36800,10 @@
               <a:noFill/>
             </a:ln>
           </p:spPr>
+          <p:txBody>
+            <a:bodyPr/>
+            <a:p/>
+          </p:txBody>
         </p:sp>
         <p:sp>
           <p:nvSpPr>
@@ -35942,6 +36866,10 @@
               <a:noFill/>
             </a:ln>
           </p:spPr>
+          <p:txBody>
+            <a:bodyPr/>
+            <a:p/>
+          </p:txBody>
         </p:sp>
         <p:sp>
           <p:nvSpPr>
@@ -36004,6 +36932,10 @@
               <a:noFill/>
             </a:ln>
           </p:spPr>
+          <p:txBody>
+            <a:bodyPr/>
+            <a:p/>
+          </p:txBody>
         </p:sp>
         <p:sp>
           <p:nvSpPr>
@@ -36070,6 +37002,10 @@
               </a:solidFill>
             </a:ln>
           </p:spPr>
+          <p:txBody>
+            <a:bodyPr/>
+            <a:p/>
+          </p:txBody>
         </p:sp>
         <p:sp>
           <p:nvSpPr>
@@ -36092,6 +37028,10 @@
               <a:noFill/>
             </a:ln>
           </p:spPr>
+          <p:txBody>
+            <a:bodyPr/>
+            <a:p/>
+          </p:txBody>
         </p:sp>
         <p:sp>
           <p:nvSpPr>
@@ -36154,6 +37094,10 @@
               <a:noFill/>
             </a:ln>
           </p:spPr>
+          <p:txBody>
+            <a:bodyPr/>
+            <a:p/>
+          </p:txBody>
         </p:sp>
         <p:sp>
           <p:nvSpPr>
@@ -36216,6 +37160,10 @@
               <a:noFill/>
             </a:ln>
           </p:spPr>
+          <p:txBody>
+            <a:bodyPr/>
+            <a:p/>
+          </p:txBody>
         </p:sp>
         <p:sp>
           <p:nvSpPr>
@@ -36278,6 +37226,10 @@
               <a:noFill/>
             </a:ln>
           </p:spPr>
+          <p:txBody>
+            <a:bodyPr/>
+            <a:p/>
+          </p:txBody>
         </p:sp>
         <p:sp>
           <p:nvSpPr>
@@ -36344,6 +37296,10 @@
               </a:solidFill>
             </a:ln>
           </p:spPr>
+          <p:txBody>
+            <a:bodyPr/>
+            <a:p/>
+          </p:txBody>
         </p:sp>
         <p:sp>
           <p:nvSpPr>
@@ -36366,6 +37322,10 @@
               <a:noFill/>
             </a:ln>
           </p:spPr>
+          <p:txBody>
+            <a:bodyPr/>
+            <a:p/>
+          </p:txBody>
         </p:sp>
         <p:sp>
           <p:nvSpPr>
@@ -36428,6 +37388,10 @@
               <a:noFill/>
             </a:ln>
           </p:spPr>
+          <p:txBody>
+            <a:bodyPr/>
+            <a:p/>
+          </p:txBody>
         </p:sp>
         <p:sp>
           <p:nvSpPr>
@@ -36490,6 +37454,10 @@
               <a:noFill/>
             </a:ln>
           </p:spPr>
+          <p:txBody>
+            <a:bodyPr/>
+            <a:p/>
+          </p:txBody>
         </p:sp>
         <p:sp>
           <p:nvSpPr>
@@ -36552,6 +37520,10 @@
               <a:noFill/>
             </a:ln>
           </p:spPr>
+          <p:txBody>
+            <a:bodyPr/>
+            <a:p/>
+          </p:txBody>
         </p:sp>
         <p:sp>
           <p:nvSpPr>
@@ -36616,6 +37588,10 @@
               <a:noFill/>
             </a:ln>
           </p:spPr>
+          <p:txBody>
+            <a:bodyPr/>
+            <a:p/>
+          </p:txBody>
         </p:sp>
         <p:sp>
           <p:nvSpPr>
@@ -36981,6 +37957,10 @@
               <a:noFill/>
             </a:ln>
           </p:spPr>
+          <p:txBody>
+            <a:bodyPr/>
+            <a:p/>
+          </p:txBody>
         </p:sp>
         <p:sp>
           <p:nvSpPr>
@@ -37123,6 +38103,10 @@
               <a:noFill/>
             </a:ln>
           </p:spPr>
+          <p:txBody>
+            <a:bodyPr/>
+            <a:p/>
+          </p:txBody>
         </p:sp>
         <p:sp>
           <p:nvSpPr>
@@ -37265,6 +38249,10 @@
               <a:noFill/>
             </a:ln>
           </p:spPr>
+          <p:txBody>
+            <a:bodyPr/>
+            <a:p/>
+          </p:txBody>
         </p:sp>
         <p:sp>
           <p:nvSpPr>
@@ -37409,6 +38397,10 @@
               <a:noFill/>
             </a:ln>
           </p:spPr>
+          <p:txBody>
+            <a:bodyPr/>
+            <a:p/>
+          </p:txBody>
         </p:sp>
         <p:sp>
           <p:nvSpPr>
@@ -37778,6 +38770,10 @@
               </a:solidFill>
             </a:ln>
           </p:spPr>
+          <p:txBody>
+            <a:bodyPr/>
+            <a:p/>
+          </p:txBody>
         </p:sp>
         <p:sp>
           <p:nvSpPr>
@@ -37800,6 +38796,10 @@
               <a:noFill/>
             </a:ln>
           </p:spPr>
+          <p:txBody>
+            <a:bodyPr/>
+            <a:p/>
+          </p:txBody>
         </p:sp>
         <p:sp>
           <p:nvSpPr>
@@ -37862,6 +38862,10 @@
               <a:noFill/>
             </a:ln>
           </p:spPr>
+          <p:txBody>
+            <a:bodyPr/>
+            <a:p/>
+          </p:txBody>
         </p:sp>
         <p:sp>
           <p:nvSpPr>
@@ -37924,6 +38928,10 @@
               <a:noFill/>
             </a:ln>
           </p:spPr>
+          <p:txBody>
+            <a:bodyPr/>
+            <a:p/>
+          </p:txBody>
         </p:sp>
         <p:sp>
           <p:nvSpPr>
@@ -37990,6 +38998,10 @@
               </a:solidFill>
             </a:ln>
           </p:spPr>
+          <p:txBody>
+            <a:bodyPr/>
+            <a:p/>
+          </p:txBody>
         </p:sp>
         <p:sp>
           <p:nvSpPr>
@@ -38012,6 +39024,10 @@
               <a:noFill/>
             </a:ln>
           </p:spPr>
+          <p:txBody>
+            <a:bodyPr/>
+            <a:p/>
+          </p:txBody>
         </p:sp>
         <p:sp>
           <p:nvSpPr>
@@ -38074,6 +39090,10 @@
               <a:noFill/>
             </a:ln>
           </p:spPr>
+          <p:txBody>
+            <a:bodyPr/>
+            <a:p/>
+          </p:txBody>
         </p:sp>
         <p:sp>
           <p:nvSpPr>
@@ -38136,6 +39156,10 @@
               <a:noFill/>
             </a:ln>
           </p:spPr>
+          <p:txBody>
+            <a:bodyPr/>
+            <a:p/>
+          </p:txBody>
         </p:sp>
         <p:sp>
           <p:nvSpPr>
@@ -38202,6 +39226,10 @@
               </a:solidFill>
             </a:ln>
           </p:spPr>
+          <p:txBody>
+            <a:bodyPr/>
+            <a:p/>
+          </p:txBody>
         </p:sp>
         <p:sp>
           <p:nvSpPr>
@@ -38224,6 +39252,10 @@
               <a:noFill/>
             </a:ln>
           </p:spPr>
+          <p:txBody>
+            <a:bodyPr/>
+            <a:p/>
+          </p:txBody>
         </p:sp>
         <p:sp>
           <p:nvSpPr>
@@ -38286,6 +39318,10 @@
               <a:noFill/>
             </a:ln>
           </p:spPr>
+          <p:txBody>
+            <a:bodyPr/>
+            <a:p/>
+          </p:txBody>
         </p:sp>
         <p:sp>
           <p:nvSpPr>
@@ -38348,6 +39384,10 @@
               <a:noFill/>
             </a:ln>
           </p:spPr>
+          <p:txBody>
+            <a:bodyPr/>
+            <a:p/>
+          </p:txBody>
         </p:sp>
         <p:sp>
           <p:nvSpPr>
@@ -38414,6 +39454,10 @@
               </a:solidFill>
             </a:ln>
           </p:spPr>
+          <p:txBody>
+            <a:bodyPr/>
+            <a:p/>
+          </p:txBody>
         </p:sp>
         <p:sp>
           <p:nvSpPr>
@@ -38436,6 +39480,10 @@
               <a:noFill/>
             </a:ln>
           </p:spPr>
+          <p:txBody>
+            <a:bodyPr/>
+            <a:p/>
+          </p:txBody>
         </p:sp>
         <p:sp>
           <p:nvSpPr>
@@ -38498,6 +39546,10 @@
               <a:noFill/>
             </a:ln>
           </p:spPr>
+          <p:txBody>
+            <a:bodyPr/>
+            <a:p/>
+          </p:txBody>
         </p:sp>
         <p:sp>
           <p:nvSpPr>
@@ -38560,6 +39612,10 @@
               <a:noFill/>
             </a:ln>
           </p:spPr>
+          <p:txBody>
+            <a:bodyPr/>
+            <a:p/>
+          </p:txBody>
         </p:sp>
         <p:sp>
           <p:nvSpPr>
@@ -38624,6 +39680,10 @@
               <a:noFill/>
             </a:ln>
           </p:spPr>
+          <p:txBody>
+            <a:bodyPr/>
+            <a:p/>
+          </p:txBody>
         </p:sp>
         <p:sp>
           <p:nvSpPr>
@@ -38993,6 +40053,10 @@
               </a:solidFill>
             </a:ln>
           </p:spPr>
+          <p:txBody>
+            <a:bodyPr/>
+            <a:p/>
+          </p:txBody>
         </p:sp>
         <p:sp>
           <p:nvSpPr>
@@ -39015,6 +40079,10 @@
               <a:noFill/>
             </a:ln>
           </p:spPr>
+          <p:txBody>
+            <a:bodyPr/>
+            <a:p/>
+          </p:txBody>
         </p:sp>
         <p:sp>
           <p:nvSpPr>
@@ -39121,6 +40189,10 @@
               </a:solidFill>
             </a:ln>
           </p:spPr>
+          <p:txBody>
+            <a:bodyPr/>
+            <a:p/>
+          </p:txBody>
         </p:sp>
         <p:sp>
           <p:nvSpPr>
@@ -39143,6 +40215,10 @@
               <a:noFill/>
             </a:ln>
           </p:spPr>
+          <p:txBody>
+            <a:bodyPr/>
+            <a:p/>
+          </p:txBody>
         </p:sp>
         <p:sp>
           <p:nvSpPr>
@@ -39249,6 +40325,10 @@
               </a:solidFill>
             </a:ln>
           </p:spPr>
+          <p:txBody>
+            <a:bodyPr/>
+            <a:p/>
+          </p:txBody>
         </p:sp>
         <p:sp>
           <p:nvSpPr>
@@ -39271,6 +40351,10 @@
               <a:noFill/>
             </a:ln>
           </p:spPr>
+          <p:txBody>
+            <a:bodyPr/>
+            <a:p/>
+          </p:txBody>
         </p:sp>
         <p:sp>
           <p:nvSpPr>
@@ -39377,6 +40461,10 @@
               </a:solidFill>
             </a:ln>
           </p:spPr>
+          <p:txBody>
+            <a:bodyPr/>
+            <a:p/>
+          </p:txBody>
         </p:sp>
         <p:sp>
           <p:nvSpPr>
@@ -39399,6 +40487,10 @@
               <a:noFill/>
             </a:ln>
           </p:spPr>
+          <p:txBody>
+            <a:bodyPr/>
+            <a:p/>
+          </p:txBody>
         </p:sp>
         <p:sp>
           <p:nvSpPr>
@@ -39503,6 +40595,10 @@
               <a:noFill/>
             </a:ln>
           </p:spPr>
+          <p:txBody>
+            <a:bodyPr/>
+            <a:p/>
+          </p:txBody>
         </p:sp>
         <p:sp>
           <p:nvSpPr>
@@ -39922,6 +41018,10 @@
               <a:noFill/>
             </a:ln>
           </p:spPr>
+          <p:txBody>
+            <a:bodyPr/>
+            <a:p/>
+          </p:txBody>
         </p:sp>
         <p:sp>
           <p:nvSpPr>
@@ -39984,6 +41084,10 @@
               <a:noFill/>
             </a:ln>
           </p:spPr>
+          <p:txBody>
+            <a:bodyPr/>
+            <a:p/>
+          </p:txBody>
         </p:sp>
         <p:sp>
           <p:nvSpPr>
@@ -40046,6 +41150,10 @@
               <a:noFill/>
             </a:ln>
           </p:spPr>
+          <p:txBody>
+            <a:bodyPr/>
+            <a:p/>
+          </p:txBody>
         </p:sp>
         <p:sp>
           <p:nvSpPr>
@@ -40108,6 +41216,10 @@
               <a:noFill/>
             </a:ln>
           </p:spPr>
+          <p:txBody>
+            <a:bodyPr/>
+            <a:p/>
+          </p:txBody>
         </p:sp>
         <p:sp>
           <p:nvSpPr>
@@ -40184,6 +41296,10 @@
               </a:solidFill>
             </a:ln>
           </p:spPr>
+          <p:txBody>
+            <a:bodyPr/>
+            <a:p/>
+          </p:txBody>
         </p:sp>
       </p:grpSp>
       <p:sp>
@@ -40509,6 +41625,10 @@
               <a:noFill/>
             </a:ln>
           </p:spPr>
+          <p:txBody>
+            <a:bodyPr/>
+            <a:p/>
+          </p:txBody>
         </p:sp>
         <p:sp>
           <p:nvSpPr>
@@ -40651,6 +41771,10 @@
               <a:noFill/>
             </a:ln>
           </p:spPr>
+          <p:txBody>
+            <a:bodyPr/>
+            <a:p/>
+          </p:txBody>
         </p:sp>
         <p:sp>
           <p:nvSpPr>
@@ -40793,6 +41917,10 @@
               <a:noFill/>
             </a:ln>
           </p:spPr>
+          <p:txBody>
+            <a:bodyPr/>
+            <a:p/>
+          </p:txBody>
         </p:sp>
         <p:sp>
           <p:nvSpPr>
@@ -40937,6 +42065,10 @@
               <a:noFill/>
             </a:ln>
           </p:spPr>
+          <p:txBody>
+            <a:bodyPr/>
+            <a:p/>
+          </p:txBody>
         </p:sp>
         <p:sp>
           <p:nvSpPr>
@@ -41306,6 +42438,10 @@
               </a:solidFill>
             </a:ln>
           </p:spPr>
+          <p:txBody>
+            <a:bodyPr/>
+            <a:p/>
+          </p:txBody>
         </p:sp>
         <p:sp>
           <p:nvSpPr>
@@ -41328,6 +42464,10 @@
               <a:noFill/>
             </a:ln>
           </p:spPr>
+          <p:txBody>
+            <a:bodyPr/>
+            <a:p/>
+          </p:txBody>
         </p:sp>
         <p:sp>
           <p:nvSpPr>
@@ -41390,6 +42530,10 @@
               <a:noFill/>
             </a:ln>
           </p:spPr>
+          <p:txBody>
+            <a:bodyPr/>
+            <a:p/>
+          </p:txBody>
         </p:sp>
         <p:sp>
           <p:nvSpPr>
@@ -41452,6 +42596,10 @@
               <a:noFill/>
             </a:ln>
           </p:spPr>
+          <p:txBody>
+            <a:bodyPr/>
+            <a:p/>
+          </p:txBody>
         </p:sp>
         <p:sp>
           <p:nvSpPr>
@@ -41518,6 +42666,10 @@
               </a:solidFill>
             </a:ln>
           </p:spPr>
+          <p:txBody>
+            <a:bodyPr/>
+            <a:p/>
+          </p:txBody>
         </p:sp>
         <p:sp>
           <p:nvSpPr>
@@ -41540,6 +42692,10 @@
               <a:noFill/>
             </a:ln>
           </p:spPr>
+          <p:txBody>
+            <a:bodyPr/>
+            <a:p/>
+          </p:txBody>
         </p:sp>
         <p:sp>
           <p:nvSpPr>
@@ -41602,6 +42758,10 @@
               <a:noFill/>
             </a:ln>
           </p:spPr>
+          <p:txBody>
+            <a:bodyPr/>
+            <a:p/>
+          </p:txBody>
         </p:sp>
         <p:sp>
           <p:nvSpPr>
@@ -41664,6 +42824,10 @@
               <a:noFill/>
             </a:ln>
           </p:spPr>
+          <p:txBody>
+            <a:bodyPr/>
+            <a:p/>
+          </p:txBody>
         </p:sp>
         <p:sp>
           <p:nvSpPr>
@@ -41730,6 +42894,10 @@
               </a:solidFill>
             </a:ln>
           </p:spPr>
+          <p:txBody>
+            <a:bodyPr/>
+            <a:p/>
+          </p:txBody>
         </p:sp>
         <p:sp>
           <p:nvSpPr>
@@ -41752,6 +42920,10 @@
               <a:noFill/>
             </a:ln>
           </p:spPr>
+          <p:txBody>
+            <a:bodyPr/>
+            <a:p/>
+          </p:txBody>
         </p:sp>
         <p:sp>
           <p:nvSpPr>
@@ -41814,6 +42986,10 @@
               <a:noFill/>
             </a:ln>
           </p:spPr>
+          <p:txBody>
+            <a:bodyPr/>
+            <a:p/>
+          </p:txBody>
         </p:sp>
         <p:sp>
           <p:nvSpPr>
@@ -41876,6 +43052,10 @@
               <a:noFill/>
             </a:ln>
           </p:spPr>
+          <p:txBody>
+            <a:bodyPr/>
+            <a:p/>
+          </p:txBody>
         </p:sp>
         <p:sp>
           <p:nvSpPr>
@@ -41942,6 +43122,10 @@
               </a:solidFill>
             </a:ln>
           </p:spPr>
+          <p:txBody>
+            <a:bodyPr/>
+            <a:p/>
+          </p:txBody>
         </p:sp>
         <p:sp>
           <p:nvSpPr>
@@ -41964,6 +43148,10 @@
               <a:noFill/>
             </a:ln>
           </p:spPr>
+          <p:txBody>
+            <a:bodyPr/>
+            <a:p/>
+          </p:txBody>
         </p:sp>
         <p:sp>
           <p:nvSpPr>
@@ -42026,6 +43214,10 @@
               <a:noFill/>
             </a:ln>
           </p:spPr>
+          <p:txBody>
+            <a:bodyPr/>
+            <a:p/>
+          </p:txBody>
         </p:sp>
         <p:sp>
           <p:nvSpPr>
@@ -42088,6 +43280,10 @@
               <a:noFill/>
             </a:ln>
           </p:spPr>
+          <p:txBody>
+            <a:bodyPr/>
+            <a:p/>
+          </p:txBody>
         </p:sp>
         <p:sp>
           <p:nvSpPr>
@@ -42152,6 +43348,10 @@
               <a:noFill/>
             </a:ln>
           </p:spPr>
+          <p:txBody>
+            <a:bodyPr/>
+            <a:p/>
+          </p:txBody>
         </p:sp>
         <p:sp>
           <p:nvSpPr>
@@ -42521,6 +43721,10 @@
               </a:solidFill>
             </a:ln>
           </p:spPr>
+          <p:txBody>
+            <a:bodyPr/>
+            <a:p/>
+          </p:txBody>
         </p:sp>
         <p:sp>
           <p:nvSpPr>
@@ -42543,6 +43747,10 @@
               <a:noFill/>
             </a:ln>
           </p:spPr>
+          <p:txBody>
+            <a:bodyPr/>
+            <a:p/>
+          </p:txBody>
         </p:sp>
         <p:sp>
           <p:nvSpPr>
@@ -42605,6 +43813,10 @@
               <a:noFill/>
             </a:ln>
           </p:spPr>
+          <p:txBody>
+            <a:bodyPr/>
+            <a:p/>
+          </p:txBody>
         </p:sp>
         <p:sp>
           <p:nvSpPr>
@@ -42667,6 +43879,10 @@
               <a:noFill/>
             </a:ln>
           </p:spPr>
+          <p:txBody>
+            <a:bodyPr/>
+            <a:p/>
+          </p:txBody>
         </p:sp>
         <p:sp>
           <p:nvSpPr>
@@ -42733,6 +43949,10 @@
               </a:solidFill>
             </a:ln>
           </p:spPr>
+          <p:txBody>
+            <a:bodyPr/>
+            <a:p/>
+          </p:txBody>
         </p:sp>
         <p:sp>
           <p:nvSpPr>
@@ -42755,6 +43975,10 @@
               <a:noFill/>
             </a:ln>
           </p:spPr>
+          <p:txBody>
+            <a:bodyPr/>
+            <a:p/>
+          </p:txBody>
         </p:sp>
         <p:sp>
           <p:nvSpPr>
@@ -42817,6 +44041,10 @@
               <a:noFill/>
             </a:ln>
           </p:spPr>
+          <p:txBody>
+            <a:bodyPr/>
+            <a:p/>
+          </p:txBody>
         </p:sp>
         <p:sp>
           <p:nvSpPr>
@@ -42879,6 +44107,10 @@
               <a:noFill/>
             </a:ln>
           </p:spPr>
+          <p:txBody>
+            <a:bodyPr/>
+            <a:p/>
+          </p:txBody>
         </p:sp>
         <p:sp>
           <p:nvSpPr>
@@ -42945,6 +44177,10 @@
               </a:solidFill>
             </a:ln>
           </p:spPr>
+          <p:txBody>
+            <a:bodyPr/>
+            <a:p/>
+          </p:txBody>
         </p:sp>
         <p:sp>
           <p:nvSpPr>
@@ -42967,6 +44203,10 @@
               <a:noFill/>
             </a:ln>
           </p:spPr>
+          <p:txBody>
+            <a:bodyPr/>
+            <a:p/>
+          </p:txBody>
         </p:sp>
         <p:sp>
           <p:nvSpPr>
@@ -43029,6 +44269,10 @@
               <a:noFill/>
             </a:ln>
           </p:spPr>
+          <p:txBody>
+            <a:bodyPr/>
+            <a:p/>
+          </p:txBody>
         </p:sp>
         <p:sp>
           <p:nvSpPr>
@@ -43091,6 +44335,10 @@
               <a:noFill/>
             </a:ln>
           </p:spPr>
+          <p:txBody>
+            <a:bodyPr/>
+            <a:p/>
+          </p:txBody>
         </p:sp>
         <p:sp>
           <p:nvSpPr>
@@ -43155,6 +44403,10 @@
               <a:noFill/>
             </a:ln>
           </p:spPr>
+          <p:txBody>
+            <a:bodyPr/>
+            <a:p/>
+          </p:txBody>
         </p:sp>
         <p:sp>
           <p:nvSpPr>
@@ -43560,6 +44812,10 @@
               <a:noFill/>
             </a:ln>
           </p:spPr>
+          <p:txBody>
+            <a:bodyPr/>
+            <a:p/>
+          </p:txBody>
         </p:sp>
         <p:sp>
           <p:nvSpPr>
@@ -43582,6 +44838,10 @@
               <a:noFill/>
             </a:ln>
           </p:spPr>
+          <p:txBody>
+            <a:bodyPr/>
+            <a:p/>
+          </p:txBody>
         </p:sp>
         <p:sp>
           <p:nvSpPr>
@@ -43644,6 +44904,10 @@
               <a:noFill/>
             </a:ln>
           </p:spPr>
+          <p:txBody>
+            <a:bodyPr/>
+            <a:p/>
+          </p:txBody>
         </p:sp>
         <p:sp>
           <p:nvSpPr>
@@ -43706,6 +44970,10 @@
               <a:noFill/>
             </a:ln>
           </p:spPr>
+          <p:txBody>
+            <a:bodyPr/>
+            <a:p/>
+          </p:txBody>
         </p:sp>
         <p:sp>
           <p:nvSpPr>
@@ -43808,6 +45076,10 @@
               <a:noFill/>
             </a:ln>
           </p:spPr>
+          <p:txBody>
+            <a:bodyPr/>
+            <a:p/>
+          </p:txBody>
         </p:sp>
         <p:sp>
           <p:nvSpPr>
@@ -43830,6 +45102,10 @@
               <a:noFill/>
             </a:ln>
           </p:spPr>
+          <p:txBody>
+            <a:bodyPr/>
+            <a:p/>
+          </p:txBody>
         </p:sp>
         <p:sp>
           <p:nvSpPr>
@@ -43892,6 +45168,10 @@
               <a:noFill/>
             </a:ln>
           </p:spPr>
+          <p:txBody>
+            <a:bodyPr/>
+            <a:p/>
+          </p:txBody>
         </p:sp>
         <p:sp>
           <p:nvSpPr>
@@ -43954,6 +45234,10 @@
               <a:noFill/>
             </a:ln>
           </p:spPr>
+          <p:txBody>
+            <a:bodyPr/>
+            <a:p/>
+          </p:txBody>
         </p:sp>
         <p:sp>
           <p:nvSpPr>
@@ -44018,6 +45302,10 @@
               <a:noFill/>
             </a:ln>
           </p:spPr>
+          <p:txBody>
+            <a:bodyPr/>
+            <a:p/>
+          </p:txBody>
         </p:sp>
         <p:sp>
           <p:nvSpPr>
@@ -44383,6 +45671,10 @@
               <a:noFill/>
             </a:ln>
           </p:spPr>
+          <p:txBody>
+            <a:bodyPr/>
+            <a:p/>
+          </p:txBody>
         </p:sp>
         <p:sp>
           <p:nvSpPr>
@@ -44525,6 +45817,10 @@
               <a:noFill/>
             </a:ln>
           </p:spPr>
+          <p:txBody>
+            <a:bodyPr/>
+            <a:p/>
+          </p:txBody>
         </p:sp>
         <p:sp>
           <p:nvSpPr>
@@ -44667,6 +45963,10 @@
               <a:noFill/>
             </a:ln>
           </p:spPr>
+          <p:txBody>
+            <a:bodyPr/>
+            <a:p/>
+          </p:txBody>
         </p:sp>
         <p:sp>
           <p:nvSpPr>
@@ -44809,6 +46109,10 @@
               <a:noFill/>
             </a:ln>
           </p:spPr>
+          <p:txBody>
+            <a:bodyPr/>
+            <a:p/>
+          </p:txBody>
         </p:sp>
         <p:sp>
           <p:nvSpPr>
@@ -45258,6 +46562,10 @@
               </a:solidFill>
             </a:ln>
           </p:spPr>
+          <p:txBody>
+            <a:bodyPr/>
+            <a:p/>
+          </p:txBody>
         </p:sp>
         <p:sp>
           <p:nvSpPr>
@@ -45280,6 +46588,10 @@
               <a:noFill/>
             </a:ln>
           </p:spPr>
+          <p:txBody>
+            <a:bodyPr/>
+            <a:p/>
+          </p:txBody>
         </p:sp>
         <p:sp>
           <p:nvSpPr>
@@ -45342,6 +46654,10 @@
               <a:noFill/>
             </a:ln>
           </p:spPr>
+          <p:txBody>
+            <a:bodyPr/>
+            <a:p/>
+          </p:txBody>
         </p:sp>
         <p:sp>
           <p:nvSpPr>
@@ -45404,6 +46720,10 @@
               <a:noFill/>
             </a:ln>
           </p:spPr>
+          <p:txBody>
+            <a:bodyPr/>
+            <a:p/>
+          </p:txBody>
         </p:sp>
         <p:sp>
           <p:nvSpPr>
@@ -45470,6 +46790,10 @@
               </a:solidFill>
             </a:ln>
           </p:spPr>
+          <p:txBody>
+            <a:bodyPr/>
+            <a:p/>
+          </p:txBody>
         </p:sp>
         <p:sp>
           <p:nvSpPr>
@@ -45492,6 +46816,10 @@
               <a:noFill/>
             </a:ln>
           </p:spPr>
+          <p:txBody>
+            <a:bodyPr/>
+            <a:p/>
+          </p:txBody>
         </p:sp>
         <p:sp>
           <p:nvSpPr>
@@ -45554,6 +46882,10 @@
               <a:noFill/>
             </a:ln>
           </p:spPr>
+          <p:txBody>
+            <a:bodyPr/>
+            <a:p/>
+          </p:txBody>
         </p:sp>
         <p:sp>
           <p:nvSpPr>
@@ -45616,6 +46948,10 @@
               <a:noFill/>
             </a:ln>
           </p:spPr>
+          <p:txBody>
+            <a:bodyPr/>
+            <a:p/>
+          </p:txBody>
         </p:sp>
         <p:sp>
           <p:nvSpPr>
@@ -45682,6 +47018,10 @@
               </a:solidFill>
             </a:ln>
           </p:spPr>
+          <p:txBody>
+            <a:bodyPr/>
+            <a:p/>
+          </p:txBody>
         </p:sp>
         <p:sp>
           <p:nvSpPr>
@@ -45704,6 +47044,10 @@
               <a:noFill/>
             </a:ln>
           </p:spPr>
+          <p:txBody>
+            <a:bodyPr/>
+            <a:p/>
+          </p:txBody>
         </p:sp>
         <p:sp>
           <p:nvSpPr>
@@ -45766,6 +47110,10 @@
               <a:noFill/>
             </a:ln>
           </p:spPr>
+          <p:txBody>
+            <a:bodyPr/>
+            <a:p/>
+          </p:txBody>
         </p:sp>
         <p:sp>
           <p:nvSpPr>
@@ -45828,6 +47176,10 @@
               <a:noFill/>
             </a:ln>
           </p:spPr>
+          <p:txBody>
+            <a:bodyPr/>
+            <a:p/>
+          </p:txBody>
         </p:sp>
         <p:sp>
           <p:nvSpPr>
@@ -45892,6 +47244,10 @@
               <a:noFill/>
             </a:ln>
           </p:spPr>
+          <p:txBody>
+            <a:bodyPr/>
+            <a:p/>
+          </p:txBody>
         </p:sp>
         <p:sp>
           <p:nvSpPr>
@@ -46311,6 +47667,10 @@
               <a:noFill/>
             </a:ln>
           </p:spPr>
+          <p:txBody>
+            <a:bodyPr/>
+            <a:p/>
+          </p:txBody>
         </p:sp>
         <p:sp>
           <p:nvSpPr>
@@ -46373,6 +47733,10 @@
               <a:noFill/>
             </a:ln>
           </p:spPr>
+          <p:txBody>
+            <a:bodyPr/>
+            <a:p/>
+          </p:txBody>
         </p:sp>
         <p:sp>
           <p:nvSpPr>
@@ -46435,6 +47799,10 @@
               <a:noFill/>
             </a:ln>
           </p:spPr>
+          <p:txBody>
+            <a:bodyPr/>
+            <a:p/>
+          </p:txBody>
         </p:sp>
         <p:sp>
           <p:nvSpPr>
@@ -46497,6 +47865,10 @@
               <a:noFill/>
             </a:ln>
           </p:spPr>
+          <p:txBody>
+            <a:bodyPr/>
+            <a:p/>
+          </p:txBody>
         </p:sp>
         <p:sp>
           <p:nvSpPr>
@@ -46559,6 +47931,10 @@
               <a:noFill/>
             </a:ln>
           </p:spPr>
+          <p:txBody>
+            <a:bodyPr/>
+            <a:p/>
+          </p:txBody>
         </p:sp>
         <p:sp>
           <p:nvSpPr>
@@ -46635,6 +48011,10 @@
               </a:solidFill>
             </a:ln>
           </p:spPr>
+          <p:txBody>
+            <a:bodyPr/>
+            <a:p/>
+          </p:txBody>
         </p:sp>
       </p:grpSp>
       <p:sp>
@@ -47014,6 +48394,10 @@
               <a:noFill/>
             </a:ln>
           </p:spPr>
+          <p:txBody>
+            <a:bodyPr/>
+            <a:p/>
+          </p:txBody>
         </p:sp>
         <p:sp>
           <p:nvSpPr>
@@ -47076,6 +48460,10 @@
               <a:noFill/>
             </a:ln>
           </p:spPr>
+          <p:txBody>
+            <a:bodyPr/>
+            <a:p/>
+          </p:txBody>
         </p:sp>
         <p:sp>
           <p:nvSpPr>
@@ -47138,6 +48526,10 @@
               <a:noFill/>
             </a:ln>
           </p:spPr>
+          <p:txBody>
+            <a:bodyPr/>
+            <a:p/>
+          </p:txBody>
         </p:sp>
         <p:sp>
           <p:nvSpPr>
@@ -47200,6 +48592,10 @@
               <a:noFill/>
             </a:ln>
           </p:spPr>
+          <p:txBody>
+            <a:bodyPr/>
+            <a:p/>
+          </p:txBody>
         </p:sp>
         <p:sp>
           <p:nvSpPr>
@@ -47262,6 +48658,10 @@
               <a:noFill/>
             </a:ln>
           </p:spPr>
+          <p:txBody>
+            <a:bodyPr/>
+            <a:p/>
+          </p:txBody>
         </p:sp>
         <p:sp>
           <p:nvSpPr>
@@ -47338,6 +48738,10 @@
               </a:solidFill>
             </a:ln>
           </p:spPr>
+          <p:txBody>
+            <a:bodyPr/>
+            <a:p/>
+          </p:txBody>
         </p:sp>
       </p:grpSp>
       <p:sp>
@@ -47663,6 +49067,10 @@
               <a:noFill/>
             </a:ln>
           </p:spPr>
+          <p:txBody>
+            <a:bodyPr/>
+            <a:p/>
+          </p:txBody>
         </p:sp>
         <p:sp>
           <p:nvSpPr>
@@ -47805,6 +49213,10 @@
               <a:noFill/>
             </a:ln>
           </p:spPr>
+          <p:txBody>
+            <a:bodyPr/>
+            <a:p/>
+          </p:txBody>
         </p:sp>
         <p:sp>
           <p:nvSpPr>
@@ -47947,6 +49359,10 @@
               <a:noFill/>
             </a:ln>
           </p:spPr>
+          <p:txBody>
+            <a:bodyPr/>
+            <a:p/>
+          </p:txBody>
         </p:sp>
         <p:sp>
           <p:nvSpPr>
@@ -48091,6 +49507,10 @@
               <a:noFill/>
             </a:ln>
           </p:spPr>
+          <p:txBody>
+            <a:bodyPr/>
+            <a:p/>
+          </p:txBody>
         </p:sp>
         <p:sp>
           <p:nvSpPr>
@@ -48456,6 +49876,10 @@
               <a:noFill/>
             </a:ln>
           </p:spPr>
+          <p:txBody>
+            <a:bodyPr/>
+            <a:p/>
+          </p:txBody>
         </p:sp>
         <p:sp>
           <p:nvSpPr>
@@ -48598,6 +50022,10 @@
               <a:noFill/>
             </a:ln>
           </p:spPr>
+          <p:txBody>
+            <a:bodyPr/>
+            <a:p/>
+          </p:txBody>
         </p:sp>
         <p:sp>
           <p:nvSpPr>
@@ -48740,6 +50168,10 @@
               <a:noFill/>
             </a:ln>
           </p:spPr>
+          <p:txBody>
+            <a:bodyPr/>
+            <a:p/>
+          </p:txBody>
         </p:sp>
         <p:sp>
           <p:nvSpPr>
@@ -48884,6 +50316,10 @@
               <a:noFill/>
             </a:ln>
           </p:spPr>
+          <p:txBody>
+            <a:bodyPr/>
+            <a:p/>
+          </p:txBody>
         </p:sp>
         <p:sp>
           <p:nvSpPr>
@@ -49249,6 +50685,10 @@
               <a:noFill/>
             </a:ln>
           </p:spPr>
+          <p:txBody>
+            <a:bodyPr/>
+            <a:p/>
+          </p:txBody>
         </p:sp>
         <p:sp>
           <p:nvSpPr>
@@ -49391,6 +50831,10 @@
               <a:noFill/>
             </a:ln>
           </p:spPr>
+          <p:txBody>
+            <a:bodyPr/>
+            <a:p/>
+          </p:txBody>
         </p:sp>
         <p:sp>
           <p:nvSpPr>
@@ -49533,6 +50977,10 @@
               <a:noFill/>
             </a:ln>
           </p:spPr>
+          <p:txBody>
+            <a:bodyPr/>
+            <a:p/>
+          </p:txBody>
         </p:sp>
         <p:sp>
           <p:nvSpPr>
@@ -49982,6 +51430,10 @@
               </a:solidFill>
             </a:ln>
           </p:spPr>
+          <p:txBody>
+            <a:bodyPr/>
+            <a:p/>
+          </p:txBody>
         </p:sp>
         <p:sp>
           <p:nvSpPr>
@@ -50004,6 +51456,10 @@
               <a:noFill/>
             </a:ln>
           </p:spPr>
+          <p:txBody>
+            <a:bodyPr/>
+            <a:p/>
+          </p:txBody>
         </p:sp>
         <p:sp>
           <p:nvSpPr>
@@ -50110,6 +51566,10 @@
               </a:solidFill>
             </a:ln>
           </p:spPr>
+          <p:txBody>
+            <a:bodyPr/>
+            <a:p/>
+          </p:txBody>
         </p:sp>
         <p:sp>
           <p:nvSpPr>
@@ -50132,6 +51592,10 @@
               <a:noFill/>
             </a:ln>
           </p:spPr>
+          <p:txBody>
+            <a:bodyPr/>
+            <a:p/>
+          </p:txBody>
         </p:sp>
         <p:sp>
           <p:nvSpPr>
@@ -50238,6 +51702,10 @@
               </a:solidFill>
             </a:ln>
           </p:spPr>
+          <p:txBody>
+            <a:bodyPr/>
+            <a:p/>
+          </p:txBody>
         </p:sp>
         <p:sp>
           <p:nvSpPr>
@@ -50260,6 +51728,10 @@
               <a:noFill/>
             </a:ln>
           </p:spPr>
+          <p:txBody>
+            <a:bodyPr/>
+            <a:p/>
+          </p:txBody>
         </p:sp>
         <p:sp>
           <p:nvSpPr>
@@ -50366,6 +51838,10 @@
               </a:solidFill>
             </a:ln>
           </p:spPr>
+          <p:txBody>
+            <a:bodyPr/>
+            <a:p/>
+          </p:txBody>
         </p:sp>
         <p:sp>
           <p:nvSpPr>
@@ -50388,6 +51864,10 @@
               <a:noFill/>
             </a:ln>
           </p:spPr>
+          <p:txBody>
+            <a:bodyPr/>
+            <a:p/>
+          </p:txBody>
         </p:sp>
         <p:sp>
           <p:nvSpPr>
@@ -50492,6 +51972,10 @@
               <a:noFill/>
             </a:ln>
           </p:spPr>
+          <p:txBody>
+            <a:bodyPr/>
+            <a:p/>
+          </p:txBody>
         </p:sp>
         <p:sp>
           <p:nvSpPr>
@@ -50861,6 +52345,10 @@
               </a:solidFill>
             </a:ln>
           </p:spPr>
+          <p:txBody>
+            <a:bodyPr/>
+            <a:p/>
+          </p:txBody>
         </p:sp>
         <p:sp>
           <p:nvSpPr>
@@ -50883,6 +52371,10 @@
               <a:noFill/>
             </a:ln>
           </p:spPr>
+          <p:txBody>
+            <a:bodyPr/>
+            <a:p/>
+          </p:txBody>
         </p:sp>
         <p:sp>
           <p:nvSpPr>
@@ -50945,6 +52437,10 @@
               <a:noFill/>
             </a:ln>
           </p:spPr>
+          <p:txBody>
+            <a:bodyPr/>
+            <a:p/>
+          </p:txBody>
         </p:sp>
         <p:sp>
           <p:nvSpPr>
@@ -51007,6 +52503,10 @@
               <a:noFill/>
             </a:ln>
           </p:spPr>
+          <p:txBody>
+            <a:bodyPr/>
+            <a:p/>
+          </p:txBody>
         </p:sp>
         <p:sp>
           <p:nvSpPr>
@@ -51073,6 +52573,10 @@
               </a:solidFill>
             </a:ln>
           </p:spPr>
+          <p:txBody>
+            <a:bodyPr/>
+            <a:p/>
+          </p:txBody>
         </p:sp>
         <p:sp>
           <p:nvSpPr>
@@ -51095,6 +52599,10 @@
               <a:noFill/>
             </a:ln>
           </p:spPr>
+          <p:txBody>
+            <a:bodyPr/>
+            <a:p/>
+          </p:txBody>
         </p:sp>
         <p:sp>
           <p:nvSpPr>
@@ -51157,6 +52665,10 @@
               <a:noFill/>
             </a:ln>
           </p:spPr>
+          <p:txBody>
+            <a:bodyPr/>
+            <a:p/>
+          </p:txBody>
         </p:sp>
         <p:sp>
           <p:nvSpPr>
@@ -51219,6 +52731,10 @@
               <a:noFill/>
             </a:ln>
           </p:spPr>
+          <p:txBody>
+            <a:bodyPr/>
+            <a:p/>
+          </p:txBody>
         </p:sp>
         <p:sp>
           <p:nvSpPr>
@@ -51285,6 +52801,10 @@
               </a:solidFill>
             </a:ln>
           </p:spPr>
+          <p:txBody>
+            <a:bodyPr/>
+            <a:p/>
+          </p:txBody>
         </p:sp>
         <p:sp>
           <p:nvSpPr>
@@ -51307,6 +52827,10 @@
               <a:noFill/>
             </a:ln>
           </p:spPr>
+          <p:txBody>
+            <a:bodyPr/>
+            <a:p/>
+          </p:txBody>
         </p:sp>
         <p:sp>
           <p:nvSpPr>
@@ -51369,6 +52893,10 @@
               <a:noFill/>
             </a:ln>
           </p:spPr>
+          <p:txBody>
+            <a:bodyPr/>
+            <a:p/>
+          </p:txBody>
         </p:sp>
         <p:sp>
           <p:nvSpPr>
@@ -51431,6 +52959,10 @@
               <a:noFill/>
             </a:ln>
           </p:spPr>
+          <p:txBody>
+            <a:bodyPr/>
+            <a:p/>
+          </p:txBody>
         </p:sp>
         <p:sp>
           <p:nvSpPr>
@@ -51495,6 +53027,10 @@
               <a:noFill/>
             </a:ln>
           </p:spPr>
+          <p:txBody>
+            <a:bodyPr/>
+            <a:p/>
+          </p:txBody>
         </p:sp>
         <p:sp>
           <p:nvSpPr>
@@ -51860,6 +53396,10 @@
               <a:noFill/>
             </a:ln>
           </p:spPr>
+          <p:txBody>
+            <a:bodyPr/>
+            <a:p/>
+          </p:txBody>
         </p:sp>
         <p:sp>
           <p:nvSpPr>
@@ -52002,6 +53542,10 @@
               <a:noFill/>
             </a:ln>
           </p:spPr>
+          <p:txBody>
+            <a:bodyPr/>
+            <a:p/>
+          </p:txBody>
         </p:sp>
         <p:sp>
           <p:nvSpPr>
@@ -52144,6 +53688,10 @@
               <a:noFill/>
             </a:ln>
           </p:spPr>
+          <p:txBody>
+            <a:bodyPr/>
+            <a:p/>
+          </p:txBody>
         </p:sp>
         <p:sp>
           <p:nvSpPr>
@@ -52286,6 +53834,10 @@
               <a:noFill/>
             </a:ln>
           </p:spPr>
+          <p:txBody>
+            <a:bodyPr/>
+            <a:p/>
+          </p:txBody>
         </p:sp>
         <p:sp>
           <p:nvSpPr>
@@ -52430,6 +53982,10 @@
               <a:noFill/>
             </a:ln>
           </p:spPr>
+          <p:txBody>
+            <a:bodyPr/>
+            <a:p/>
+          </p:txBody>
         </p:sp>
         <p:sp>
           <p:nvSpPr>
@@ -52795,6 +54351,10 @@
               <a:noFill/>
             </a:ln>
           </p:spPr>
+          <p:txBody>
+            <a:bodyPr/>
+            <a:p/>
+          </p:txBody>
         </p:sp>
         <p:sp>
           <p:nvSpPr>
@@ -52937,6 +54497,10 @@
               <a:noFill/>
             </a:ln>
           </p:spPr>
+          <p:txBody>
+            <a:bodyPr/>
+            <a:p/>
+          </p:txBody>
         </p:sp>
         <p:sp>
           <p:nvSpPr>
@@ -53079,6 +54643,10 @@
               <a:noFill/>
             </a:ln>
           </p:spPr>
+          <p:txBody>
+            <a:bodyPr/>
+            <a:p/>
+          </p:txBody>
         </p:sp>
         <p:sp>
           <p:nvSpPr>
@@ -53528,6 +55096,10 @@
               </a:solidFill>
             </a:ln>
           </p:spPr>
+          <p:txBody>
+            <a:bodyPr/>
+            <a:p/>
+          </p:txBody>
         </p:sp>
         <p:sp>
           <p:nvSpPr>
@@ -53550,6 +55122,10 @@
               <a:noFill/>
             </a:ln>
           </p:spPr>
+          <p:txBody>
+            <a:bodyPr/>
+            <a:p/>
+          </p:txBody>
         </p:sp>
         <p:sp>
           <p:nvSpPr>
@@ -53656,6 +55232,10 @@
               </a:solidFill>
             </a:ln>
           </p:spPr>
+          <p:txBody>
+            <a:bodyPr/>
+            <a:p/>
+          </p:txBody>
         </p:sp>
         <p:sp>
           <p:nvSpPr>
@@ -53678,6 +55258,10 @@
               <a:noFill/>
             </a:ln>
           </p:spPr>
+          <p:txBody>
+            <a:bodyPr/>
+            <a:p/>
+          </p:txBody>
         </p:sp>
         <p:sp>
           <p:nvSpPr>
@@ -53784,6 +55368,10 @@
               </a:solidFill>
             </a:ln>
           </p:spPr>
+          <p:txBody>
+            <a:bodyPr/>
+            <a:p/>
+          </p:txBody>
         </p:sp>
         <p:sp>
           <p:nvSpPr>
@@ -53806,6 +55394,10 @@
               <a:noFill/>
             </a:ln>
           </p:spPr>
+          <p:txBody>
+            <a:bodyPr/>
+            <a:p/>
+          </p:txBody>
         </p:sp>
         <p:sp>
           <p:nvSpPr>
@@ -53912,6 +55504,10 @@
               </a:solidFill>
             </a:ln>
           </p:spPr>
+          <p:txBody>
+            <a:bodyPr/>
+            <a:p/>
+          </p:txBody>
         </p:sp>
         <p:sp>
           <p:nvSpPr>
@@ -53934,6 +55530,10 @@
               <a:noFill/>
             </a:ln>
           </p:spPr>
+          <p:txBody>
+            <a:bodyPr/>
+            <a:p/>
+          </p:txBody>
         </p:sp>
         <p:sp>
           <p:nvSpPr>
@@ -54040,6 +55640,10 @@
               </a:solidFill>
             </a:ln>
           </p:spPr>
+          <p:txBody>
+            <a:bodyPr/>
+            <a:p/>
+          </p:txBody>
         </p:sp>
         <p:sp>
           <p:nvSpPr>
@@ -54062,6 +55666,10 @@
               <a:noFill/>
             </a:ln>
           </p:spPr>
+          <p:txBody>
+            <a:bodyPr/>
+            <a:p/>
+          </p:txBody>
         </p:sp>
         <p:sp>
           <p:nvSpPr>
@@ -54166,6 +55774,10 @@
               <a:noFill/>
             </a:ln>
           </p:spPr>
+          <p:txBody>
+            <a:bodyPr/>
+            <a:p/>
+          </p:txBody>
         </p:sp>
         <p:sp>
           <p:nvSpPr>
@@ -54535,6 +56147,10 @@
               </a:solidFill>
             </a:ln>
           </p:spPr>
+          <p:txBody>
+            <a:bodyPr/>
+            <a:p/>
+          </p:txBody>
         </p:sp>
         <p:sp>
           <p:nvSpPr>
@@ -54557,6 +56173,10 @@
               <a:noFill/>
             </a:ln>
           </p:spPr>
+          <p:txBody>
+            <a:bodyPr/>
+            <a:p/>
+          </p:txBody>
         </p:sp>
         <p:sp>
           <p:nvSpPr>
@@ -54619,6 +56239,10 @@
               <a:noFill/>
             </a:ln>
           </p:spPr>
+          <p:txBody>
+            <a:bodyPr/>
+            <a:p/>
+          </p:txBody>
         </p:sp>
         <p:sp>
           <p:nvSpPr>
@@ -54681,6 +56305,10 @@
               <a:noFill/>
             </a:ln>
           </p:spPr>
+          <p:txBody>
+            <a:bodyPr/>
+            <a:p/>
+          </p:txBody>
         </p:sp>
         <p:sp>
           <p:nvSpPr>
@@ -54747,6 +56375,10 @@
               </a:solidFill>
             </a:ln>
           </p:spPr>
+          <p:txBody>
+            <a:bodyPr/>
+            <a:p/>
+          </p:txBody>
         </p:sp>
         <p:sp>
           <p:nvSpPr>
@@ -54769,6 +56401,10 @@
               <a:noFill/>
             </a:ln>
           </p:spPr>
+          <p:txBody>
+            <a:bodyPr/>
+            <a:p/>
+          </p:txBody>
         </p:sp>
         <p:sp>
           <p:nvSpPr>
@@ -54831,6 +56467,10 @@
               <a:noFill/>
             </a:ln>
           </p:spPr>
+          <p:txBody>
+            <a:bodyPr/>
+            <a:p/>
+          </p:txBody>
         </p:sp>
         <p:sp>
           <p:nvSpPr>
@@ -54893,6 +56533,10 @@
               <a:noFill/>
             </a:ln>
           </p:spPr>
+          <p:txBody>
+            <a:bodyPr/>
+            <a:p/>
+          </p:txBody>
         </p:sp>
         <p:sp>
           <p:nvSpPr>
@@ -54959,6 +56603,10 @@
               </a:solidFill>
             </a:ln>
           </p:spPr>
+          <p:txBody>
+            <a:bodyPr/>
+            <a:p/>
+          </p:txBody>
         </p:sp>
         <p:sp>
           <p:nvSpPr>
@@ -54981,6 +56629,10 @@
               <a:noFill/>
             </a:ln>
           </p:spPr>
+          <p:txBody>
+            <a:bodyPr/>
+            <a:p/>
+          </p:txBody>
         </p:sp>
         <p:sp>
           <p:nvSpPr>
@@ -55043,6 +56695,10 @@
               <a:noFill/>
             </a:ln>
           </p:spPr>
+          <p:txBody>
+            <a:bodyPr/>
+            <a:p/>
+          </p:txBody>
         </p:sp>
         <p:sp>
           <p:nvSpPr>
@@ -55105,6 +56761,10 @@
               <a:noFill/>
             </a:ln>
           </p:spPr>
+          <p:txBody>
+            <a:bodyPr/>
+            <a:p/>
+          </p:txBody>
         </p:sp>
         <p:sp>
           <p:nvSpPr>
@@ -55167,6 +56827,10 @@
               <a:noFill/>
             </a:ln>
           </p:spPr>
+          <p:txBody>
+            <a:bodyPr/>
+            <a:p/>
+          </p:txBody>
         </p:sp>
         <p:sp>
           <p:nvSpPr>
@@ -55231,6 +56895,10 @@
               <a:noFill/>
             </a:ln>
           </p:spPr>
+          <p:txBody>
+            <a:bodyPr/>
+            <a:p/>
+          </p:txBody>
         </p:sp>
         <p:sp>
           <p:nvSpPr>
@@ -55636,6 +57304,10 @@
               <a:noFill/>
             </a:ln>
           </p:spPr>
+          <p:txBody>
+            <a:bodyPr/>
+            <a:p/>
+          </p:txBody>
         </p:sp>
         <p:sp>
           <p:nvSpPr>
@@ -55658,6 +57330,10 @@
               <a:noFill/>
             </a:ln>
           </p:spPr>
+          <p:txBody>
+            <a:bodyPr/>
+            <a:p/>
+          </p:txBody>
         </p:sp>
         <p:sp>
           <p:nvSpPr>
@@ -55720,6 +57396,10 @@
               <a:noFill/>
             </a:ln>
           </p:spPr>
+          <p:txBody>
+            <a:bodyPr/>
+            <a:p/>
+          </p:txBody>
         </p:sp>
         <p:sp>
           <p:nvSpPr>
@@ -55782,6 +57462,10 @@
               <a:noFill/>
             </a:ln>
           </p:spPr>
+          <p:txBody>
+            <a:bodyPr/>
+            <a:p/>
+          </p:txBody>
         </p:sp>
         <p:sp>
           <p:nvSpPr>
@@ -55884,6 +57568,10 @@
               <a:noFill/>
             </a:ln>
           </p:spPr>
+          <p:txBody>
+            <a:bodyPr/>
+            <a:p/>
+          </p:txBody>
         </p:sp>
         <p:sp>
           <p:nvSpPr>
@@ -55906,6 +57594,10 @@
               <a:noFill/>
             </a:ln>
           </p:spPr>
+          <p:txBody>
+            <a:bodyPr/>
+            <a:p/>
+          </p:txBody>
         </p:sp>
         <p:sp>
           <p:nvSpPr>
@@ -55968,6 +57660,10 @@
               <a:noFill/>
             </a:ln>
           </p:spPr>
+          <p:txBody>
+            <a:bodyPr/>
+            <a:p/>
+          </p:txBody>
         </p:sp>
         <p:sp>
           <p:nvSpPr>
@@ -56030,6 +57726,10 @@
               <a:noFill/>
             </a:ln>
           </p:spPr>
+          <p:txBody>
+            <a:bodyPr/>
+            <a:p/>
+          </p:txBody>
         </p:sp>
         <p:sp>
           <p:nvSpPr>
@@ -56092,6 +57792,10 @@
               <a:noFill/>
             </a:ln>
           </p:spPr>
+          <p:txBody>
+            <a:bodyPr/>
+            <a:p/>
+          </p:txBody>
         </p:sp>
         <p:sp>
           <p:nvSpPr>
@@ -56156,6 +57860,10 @@
               <a:noFill/>
             </a:ln>
           </p:spPr>
+          <p:txBody>
+            <a:bodyPr/>
+            <a:p/>
+          </p:txBody>
         </p:sp>
         <p:sp>
           <p:nvSpPr>
@@ -56613,7 +58321,7 @@
                 <a:ea typeface="+mn-ea"/>
                 <a:cs typeface="+mn-cs"/>
               </a:rPr>
-              <a:t>V1.18.14 | 2026-10-26</a:t>
+              <a:t>V1.18.14 | 2026-10-27</a:t>
             </a:r>
           </a:p>
         </p:txBody>
@@ -56901,6 +58609,10 @@
               <a:noFill/>
             </a:ln>
           </p:spPr>
+          <p:txBody>
+            <a:bodyPr/>
+            <a:p/>
+          </p:txBody>
         </p:sp>
         <p:sp>
           <p:nvSpPr>
@@ -57043,6 +58755,10 @@
               <a:noFill/>
             </a:ln>
           </p:spPr>
+          <p:txBody>
+            <a:bodyPr/>
+            <a:p/>
+          </p:txBody>
         </p:sp>
         <p:sp>
           <p:nvSpPr>
@@ -57185,6 +58901,10 @@
               <a:noFill/>
             </a:ln>
           </p:spPr>
+          <p:txBody>
+            <a:bodyPr/>
+            <a:p/>
+          </p:txBody>
         </p:sp>
         <p:sp>
           <p:nvSpPr>
@@ -57341,6 +59061,10 @@
               </a:solidFill>
             </a:ln>
           </p:spPr>
+          <p:txBody>
+            <a:bodyPr/>
+            <a:p/>
+          </p:txBody>
         </p:sp>
         <p:sp>
           <p:nvSpPr>
@@ -57363,6 +59087,10 @@
               <a:noFill/>
             </a:ln>
           </p:spPr>
+          <p:txBody>
+            <a:bodyPr/>
+            <a:p/>
+          </p:txBody>
         </p:sp>
         <p:sp>
           <p:nvSpPr>
@@ -57425,6 +59153,10 @@
               <a:noFill/>
             </a:ln>
           </p:spPr>
+          <p:txBody>
+            <a:bodyPr/>
+            <a:p/>
+          </p:txBody>
         </p:sp>
         <p:sp>
           <p:nvSpPr>
@@ -57794,6 +59526,10 @@
               </a:solidFill>
             </a:ln>
           </p:spPr>
+          <p:txBody>
+            <a:bodyPr/>
+            <a:p/>
+          </p:txBody>
         </p:sp>
         <p:sp>
           <p:nvSpPr>
@@ -57816,6 +59552,10 @@
               <a:noFill/>
             </a:ln>
           </p:spPr>
+          <p:txBody>
+            <a:bodyPr/>
+            <a:p/>
+          </p:txBody>
         </p:sp>
         <p:sp>
           <p:nvSpPr>
@@ -57878,6 +59618,10 @@
               <a:noFill/>
             </a:ln>
           </p:spPr>
+          <p:txBody>
+            <a:bodyPr/>
+            <a:p/>
+          </p:txBody>
         </p:sp>
         <p:sp>
           <p:nvSpPr>
@@ -57940,6 +59684,10 @@
               <a:noFill/>
             </a:ln>
           </p:spPr>
+          <p:txBody>
+            <a:bodyPr/>
+            <a:p/>
+          </p:txBody>
         </p:sp>
         <p:sp>
           <p:nvSpPr>
@@ -58002,6 +59750,10 @@
               <a:noFill/>
             </a:ln>
           </p:spPr>
+          <p:txBody>
+            <a:bodyPr/>
+            <a:p/>
+          </p:txBody>
         </p:sp>
         <p:sp>
           <p:nvSpPr>
@@ -58068,6 +59820,10 @@
               </a:solidFill>
             </a:ln>
           </p:spPr>
+          <p:txBody>
+            <a:bodyPr/>
+            <a:p/>
+          </p:txBody>
         </p:sp>
         <p:sp>
           <p:nvSpPr>
@@ -58090,6 +59846,10 @@
               <a:noFill/>
             </a:ln>
           </p:spPr>
+          <p:txBody>
+            <a:bodyPr/>
+            <a:p/>
+          </p:txBody>
         </p:sp>
         <p:sp>
           <p:nvSpPr>
@@ -58152,6 +59912,10 @@
               <a:noFill/>
             </a:ln>
           </p:spPr>
+          <p:txBody>
+            <a:bodyPr/>
+            <a:p/>
+          </p:txBody>
         </p:sp>
         <p:sp>
           <p:nvSpPr>
@@ -58214,6 +59978,10 @@
               <a:noFill/>
             </a:ln>
           </p:spPr>
+          <p:txBody>
+            <a:bodyPr/>
+            <a:p/>
+          </p:txBody>
         </p:sp>
         <p:sp>
           <p:nvSpPr>
@@ -58276,6 +60044,10 @@
               <a:noFill/>
             </a:ln>
           </p:spPr>
+          <p:txBody>
+            <a:bodyPr/>
+            <a:p/>
+          </p:txBody>
         </p:sp>
         <p:sp>
           <p:nvSpPr>
@@ -58342,6 +60114,10 @@
               </a:solidFill>
             </a:ln>
           </p:spPr>
+          <p:txBody>
+            <a:bodyPr/>
+            <a:p/>
+          </p:txBody>
         </p:sp>
         <p:sp>
           <p:nvSpPr>
@@ -58364,6 +60140,10 @@
               <a:noFill/>
             </a:ln>
           </p:spPr>
+          <p:txBody>
+            <a:bodyPr/>
+            <a:p/>
+          </p:txBody>
         </p:sp>
         <p:sp>
           <p:nvSpPr>
@@ -58426,6 +60206,10 @@
               <a:noFill/>
             </a:ln>
           </p:spPr>
+          <p:txBody>
+            <a:bodyPr/>
+            <a:p/>
+          </p:txBody>
         </p:sp>
         <p:sp>
           <p:nvSpPr>
@@ -58488,6 +60272,10 @@
               <a:noFill/>
             </a:ln>
           </p:spPr>
+          <p:txBody>
+            <a:bodyPr/>
+            <a:p/>
+          </p:txBody>
         </p:sp>
         <p:sp>
           <p:nvSpPr>
@@ -58550,6 +60338,10 @@
               <a:noFill/>
             </a:ln>
           </p:spPr>
+          <p:txBody>
+            <a:bodyPr/>
+            <a:p/>
+          </p:txBody>
         </p:sp>
         <p:sp>
           <p:nvSpPr>
@@ -58616,6 +60408,10 @@
               </a:solidFill>
             </a:ln>
           </p:spPr>
+          <p:txBody>
+            <a:bodyPr/>
+            <a:p/>
+          </p:txBody>
         </p:sp>
         <p:sp>
           <p:nvSpPr>
@@ -58638,6 +60434,10 @@
               <a:noFill/>
             </a:ln>
           </p:spPr>
+          <p:txBody>
+            <a:bodyPr/>
+            <a:p/>
+          </p:txBody>
         </p:sp>
         <p:sp>
           <p:nvSpPr>
@@ -58700,6 +60500,10 @@
               <a:noFill/>
             </a:ln>
           </p:spPr>
+          <p:txBody>
+            <a:bodyPr/>
+            <a:p/>
+          </p:txBody>
         </p:sp>
         <p:sp>
           <p:nvSpPr>
@@ -58762,6 +60566,10 @@
               <a:noFill/>
             </a:ln>
           </p:spPr>
+          <p:txBody>
+            <a:bodyPr/>
+            <a:p/>
+          </p:txBody>
         </p:sp>
         <p:sp>
           <p:nvSpPr>
@@ -58824,6 +60632,10 @@
               <a:noFill/>
             </a:ln>
           </p:spPr>
+          <p:txBody>
+            <a:bodyPr/>
+            <a:p/>
+          </p:txBody>
         </p:sp>
         <p:sp>
           <p:nvSpPr>
@@ -58888,6 +60700,10 @@
               <a:noFill/>
             </a:ln>
           </p:spPr>
+          <p:txBody>
+            <a:bodyPr/>
+            <a:p/>
+          </p:txBody>
         </p:sp>
         <p:sp>
           <p:nvSpPr>
@@ -59257,6 +61073,10 @@
               </a:solidFill>
             </a:ln>
           </p:spPr>
+          <p:txBody>
+            <a:bodyPr/>
+            <a:p/>
+          </p:txBody>
         </p:sp>
         <p:sp>
           <p:nvSpPr>
@@ -59279,6 +61099,10 @@
               <a:noFill/>
             </a:ln>
           </p:spPr>
+          <p:txBody>
+            <a:bodyPr/>
+            <a:p/>
+          </p:txBody>
         </p:sp>
         <p:sp>
           <p:nvSpPr>
@@ -59381,6 +61205,10 @@
               <a:noFill/>
             </a:ln>
           </p:spPr>
+          <p:txBody>
+            <a:bodyPr/>
+            <a:p/>
+          </p:txBody>
         </p:sp>
         <p:sp>
           <p:nvSpPr>
@@ -59443,6 +61271,10 @@
               <a:noFill/>
             </a:ln>
           </p:spPr>
+          <p:txBody>
+            <a:bodyPr/>
+            <a:p/>
+          </p:txBody>
         </p:sp>
         <p:sp>
           <p:nvSpPr>
@@ -59509,6 +61341,10 @@
               </a:solidFill>
             </a:ln>
           </p:spPr>
+          <p:txBody>
+            <a:bodyPr/>
+            <a:p/>
+          </p:txBody>
         </p:sp>
         <p:sp>
           <p:nvSpPr>
@@ -59531,6 +61367,10 @@
               <a:noFill/>
             </a:ln>
           </p:spPr>
+          <p:txBody>
+            <a:bodyPr/>
+            <a:p/>
+          </p:txBody>
         </p:sp>
         <p:sp>
           <p:nvSpPr>
@@ -59633,6 +61473,10 @@
               <a:noFill/>
             </a:ln>
           </p:spPr>
+          <p:txBody>
+            <a:bodyPr/>
+            <a:p/>
+          </p:txBody>
         </p:sp>
         <p:sp>
           <p:nvSpPr>
@@ -59695,6 +61539,10 @@
               <a:noFill/>
             </a:ln>
           </p:spPr>
+          <p:txBody>
+            <a:bodyPr/>
+            <a:p/>
+          </p:txBody>
         </p:sp>
         <p:sp>
           <p:nvSpPr>
@@ -59761,6 +61609,10 @@
               </a:solidFill>
             </a:ln>
           </p:spPr>
+          <p:txBody>
+            <a:bodyPr/>
+            <a:p/>
+          </p:txBody>
         </p:sp>
         <p:sp>
           <p:nvSpPr>
@@ -59783,6 +61635,10 @@
               <a:noFill/>
             </a:ln>
           </p:spPr>
+          <p:txBody>
+            <a:bodyPr/>
+            <a:p/>
+          </p:txBody>
         </p:sp>
         <p:sp>
           <p:nvSpPr>
@@ -59885,6 +61741,10 @@
               <a:noFill/>
             </a:ln>
           </p:spPr>
+          <p:txBody>
+            <a:bodyPr/>
+            <a:p/>
+          </p:txBody>
         </p:sp>
         <p:sp>
           <p:nvSpPr>
@@ -59947,6 +61807,10 @@
               <a:noFill/>
             </a:ln>
           </p:spPr>
+          <p:txBody>
+            <a:bodyPr/>
+            <a:p/>
+          </p:txBody>
         </p:sp>
         <p:sp>
           <p:nvSpPr>
@@ -60013,6 +61877,10 @@
               </a:solidFill>
             </a:ln>
           </p:spPr>
+          <p:txBody>
+            <a:bodyPr/>
+            <a:p/>
+          </p:txBody>
         </p:sp>
         <p:sp>
           <p:nvSpPr>
@@ -60035,6 +61903,10 @@
               <a:noFill/>
             </a:ln>
           </p:spPr>
+          <p:txBody>
+            <a:bodyPr/>
+            <a:p/>
+          </p:txBody>
         </p:sp>
         <p:sp>
           <p:nvSpPr>
@@ -60137,6 +62009,10 @@
               <a:noFill/>
             </a:ln>
           </p:spPr>
+          <p:txBody>
+            <a:bodyPr/>
+            <a:p/>
+          </p:txBody>
         </p:sp>
         <p:sp>
           <p:nvSpPr>
@@ -60199,6 +62075,10 @@
               <a:noFill/>
             </a:ln>
           </p:spPr>
+          <p:txBody>
+            <a:bodyPr/>
+            <a:p/>
+          </p:txBody>
         </p:sp>
         <p:sp>
           <p:nvSpPr>
@@ -60263,6 +62143,10 @@
               <a:noFill/>
             </a:ln>
           </p:spPr>
+          <p:txBody>
+            <a:bodyPr/>
+            <a:p/>
+          </p:txBody>
         </p:sp>
         <p:sp>
           <p:nvSpPr>

--- a/docs/帮扶管理信息系统-操作培训.pptx
+++ b/docs/帮扶管理信息系统-操作培训.pptx
@@ -5352,7 +5352,7 @@
                 <a:ea typeface="+mn-ea"/>
                 <a:cs typeface="+mn-cs"/>
               </a:rPr>
-              <a:t>V1.18.14 | 2026-10-27 | FastAPI + Vue 3 + Electron + SQLite</a:t>
+              <a:t>V1.18.15 | 2026-10-27 | FastAPI + Vue 3 + Electron + SQLite</a:t>
             </a:r>
           </a:p>
         </p:txBody>
@@ -6185,7 +6185,7 @@
                 <a:ea typeface="+mn-ea"/>
                 <a:cs typeface="+mn-cs"/>
               </a:rPr>
-              <a:t>帮扶管理信息系统 v1.18.14</a:t>
+              <a:t>帮扶管理信息系统 v1.18.15</a:t>
             </a:r>
           </a:p>
         </p:txBody>
@@ -8153,7 +8153,7 @@
                 <a:ea typeface="+mn-ea"/>
                 <a:cs typeface="+mn-cs"/>
               </a:rPr>
-              <a:t>帮扶管理信息系统 v1.18.14</a:t>
+              <a:t>帮扶管理信息系统 v1.18.15</a:t>
             </a:r>
           </a:p>
         </p:txBody>
@@ -9040,7 +9040,7 @@
                 <a:ea typeface="+mn-ea"/>
                 <a:cs typeface="+mn-cs"/>
               </a:rPr>
-              <a:t>帮扶管理信息系统 v1.18.14</a:t>
+              <a:t>帮扶管理信息系统 v1.18.15</a:t>
             </a:r>
           </a:p>
         </p:txBody>
@@ -10005,7 +10005,7 @@
                 <a:ea typeface="+mn-ea"/>
                 <a:cs typeface="+mn-cs"/>
               </a:rPr>
-              <a:t>帮扶管理信息系统 v1.18.14</a:t>
+              <a:t>帮扶管理信息系统 v1.18.15</a:t>
             </a:r>
           </a:p>
         </p:txBody>
@@ -10920,7 +10920,7 @@
                 <a:ea typeface="+mn-ea"/>
                 <a:cs typeface="+mn-cs"/>
               </a:rPr>
-              <a:t>帮扶管理信息系统 v1.18.14</a:t>
+              <a:t>帮扶管理信息系统 v1.18.15</a:t>
             </a:r>
           </a:p>
         </p:txBody>
@@ -11875,7 +11875,7 @@
                 <a:ea typeface="+mn-ea"/>
                 <a:cs typeface="+mn-cs"/>
               </a:rPr>
-              <a:t>帮扶管理信息系统 v1.18.14</a:t>
+              <a:t>帮扶管理信息系统 v1.18.15</a:t>
             </a:r>
           </a:p>
         </p:txBody>
@@ -13116,7 +13116,7 @@
                 <a:ea typeface="+mn-ea"/>
                 <a:cs typeface="+mn-cs"/>
               </a:rPr>
-              <a:t>帮扶管理信息系统 v1.18.14</a:t>
+              <a:t>帮扶管理信息系统 v1.18.15</a:t>
             </a:r>
           </a:p>
         </p:txBody>
@@ -14237,7 +14237,7 @@
                 <a:ea typeface="+mn-ea"/>
                 <a:cs typeface="+mn-cs"/>
               </a:rPr>
-              <a:t>帮扶管理信息系统 v1.18.14</a:t>
+              <a:t>帮扶管理信息系统 v1.18.15</a:t>
             </a:r>
           </a:p>
         </p:txBody>
@@ -15136,7 +15136,7 @@
                 <a:ea typeface="+mn-ea"/>
                 <a:cs typeface="+mn-cs"/>
               </a:rPr>
-              <a:t>帮扶管理信息系统 v1.18.14</a:t>
+              <a:t>帮扶管理信息系统 v1.18.15</a:t>
             </a:r>
           </a:p>
         </p:txBody>
@@ -16545,7 +16545,7 @@
                 <a:ea typeface="+mn-ea"/>
                 <a:cs typeface="+mn-cs"/>
               </a:rPr>
-              <a:t>帮扶管理信息系统 v1.18.14</a:t>
+              <a:t>帮扶管理信息系统 v1.18.15</a:t>
             </a:r>
           </a:p>
         </p:txBody>
@@ -17600,7 +17600,7 @@
                 <a:ea typeface="+mn-ea"/>
                 <a:cs typeface="+mn-cs"/>
               </a:rPr>
-              <a:t>帮扶管理信息系统 v1.18.14</a:t>
+              <a:t>帮扶管理信息系统 v1.18.15</a:t>
             </a:r>
           </a:p>
         </p:txBody>
@@ -19622,7 +19622,7 @@
                 <a:ea typeface="+mn-ea"/>
                 <a:cs typeface="+mn-cs"/>
               </a:rPr>
-              <a:t>帮扶管理信息系统 v1.18.14</a:t>
+              <a:t>帮扶管理信息系统 v1.18.15</a:t>
             </a:r>
           </a:p>
         </p:txBody>
@@ -20759,7 +20759,7 @@
                 <a:ea typeface="+mn-ea"/>
                 <a:cs typeface="+mn-cs"/>
               </a:rPr>
-              <a:t>帮扶管理信息系统 v1.18.14</a:t>
+              <a:t>帮扶管理信息系统 v1.18.15</a:t>
             </a:r>
           </a:p>
         </p:txBody>
@@ -21672,7 +21672,7 @@
                 <a:ea typeface="+mn-ea"/>
                 <a:cs typeface="+mn-cs"/>
               </a:rPr>
-              <a:t>帮扶管理信息系统 v1.18.14</a:t>
+              <a:t>帮扶管理信息系统 v1.18.15</a:t>
             </a:r>
           </a:p>
         </p:txBody>
@@ -22627,7 +22627,7 @@
                 <a:ea typeface="+mn-ea"/>
                 <a:cs typeface="+mn-cs"/>
               </a:rPr>
-              <a:t>帮扶管理信息系统 v1.18.14</a:t>
+              <a:t>帮扶管理信息系统 v1.18.15</a:t>
             </a:r>
           </a:p>
         </p:txBody>
@@ -23592,7 +23592,7 @@
                 <a:ea typeface="+mn-ea"/>
                 <a:cs typeface="+mn-cs"/>
               </a:rPr>
-              <a:t>帮扶管理信息系统 v1.18.14</a:t>
+              <a:t>帮扶管理信息系统 v1.18.15</a:t>
             </a:r>
           </a:p>
         </p:txBody>
@@ -24833,7 +24833,7 @@
                 <a:ea typeface="+mn-ea"/>
                 <a:cs typeface="+mn-cs"/>
               </a:rPr>
-              <a:t>帮扶管理信息系统 v1.18.14</a:t>
+              <a:t>帮扶管理信息系统 v1.18.15</a:t>
             </a:r>
           </a:p>
         </p:txBody>
@@ -25748,7 +25748,7 @@
                 <a:ea typeface="+mn-ea"/>
                 <a:cs typeface="+mn-cs"/>
               </a:rPr>
-              <a:t>帮扶管理信息系统 v1.18.14</a:t>
+              <a:t>帮扶管理信息系统 v1.18.15</a:t>
             </a:r>
           </a:p>
         </p:txBody>
@@ -26489,7 +26489,7 @@
                 <a:ea typeface="+mn-ea"/>
                 <a:cs typeface="+mn-cs"/>
               </a:rPr>
-              <a:t>帮扶管理信息系统 v1.18.14</a:t>
+              <a:t>帮扶管理信息系统 v1.18.15</a:t>
             </a:r>
           </a:p>
         </p:txBody>
@@ -27596,7 +27596,7 @@
                 <a:ea typeface="+mn-ea"/>
                 <a:cs typeface="+mn-cs"/>
               </a:rPr>
-              <a:t>帮扶管理信息系统 v1.18.14</a:t>
+              <a:t>帮扶管理信息系统 v1.18.15</a:t>
             </a:r>
           </a:p>
         </p:txBody>
@@ -28561,7 +28561,7 @@
                 <a:ea typeface="+mn-ea"/>
                 <a:cs typeface="+mn-cs"/>
               </a:rPr>
-              <a:t>帮扶管理信息系统 v1.18.14</a:t>
+              <a:t>帮扶管理信息系统 v1.18.15</a:t>
             </a:r>
           </a:p>
         </p:txBody>
@@ -29370,7 +29370,7 @@
                 <a:ea typeface="+mn-ea"/>
                 <a:cs typeface="+mn-cs"/>
               </a:rPr>
-              <a:t>帮扶管理信息系统 v1.18.14</a:t>
+              <a:t>帮扶管理信息系统 v1.18.15</a:t>
             </a:r>
           </a:p>
         </p:txBody>
@@ -30545,7 +30545,7 @@
                 <a:ea typeface="+mn-ea"/>
                 <a:cs typeface="+mn-cs"/>
               </a:rPr>
-              <a:t>帮扶管理信息系统 v1.18.14</a:t>
+              <a:t>帮扶管理信息系统 v1.18.15</a:t>
             </a:r>
           </a:p>
         </p:txBody>
@@ -31927,7 +31927,7 @@
                 <a:ea typeface="+mn-ea"/>
                 <a:cs typeface="+mn-cs"/>
               </a:rPr>
-              <a:t>帮扶管理信息系统 v1.18.14</a:t>
+              <a:t>帮扶管理信息系统 v1.18.15</a:t>
             </a:r>
           </a:p>
         </p:txBody>
@@ -32736,7 +32736,7 @@
                 <a:ea typeface="+mn-ea"/>
                 <a:cs typeface="+mn-cs"/>
               </a:rPr>
-              <a:t>帮扶管理信息系统 v1.18.14</a:t>
+              <a:t>帮扶管理信息系统 v1.18.15</a:t>
             </a:r>
           </a:p>
         </p:txBody>
@@ -33691,7 +33691,7 @@
                 <a:ea typeface="+mn-ea"/>
                 <a:cs typeface="+mn-cs"/>
               </a:rPr>
-              <a:t>帮扶管理信息系统 v1.18.14</a:t>
+              <a:t>帮扶管理信息系统 v1.18.15</a:t>
             </a:r>
           </a:p>
         </p:txBody>
@@ -34866,7 +34866,7 @@
                 <a:ea typeface="+mn-ea"/>
                 <a:cs typeface="+mn-cs"/>
               </a:rPr>
-              <a:t>帮扶管理信息系统 v1.18.14</a:t>
+              <a:t>帮扶管理信息系统 v1.18.15</a:t>
             </a:r>
           </a:p>
         </p:txBody>
@@ -35675,7 +35675,7 @@
                 <a:ea typeface="+mn-ea"/>
                 <a:cs typeface="+mn-cs"/>
               </a:rPr>
-              <a:t>帮扶管理信息系统 v1.18.14</a:t>
+              <a:t>帮扶管理信息系统 v1.18.15</a:t>
             </a:r>
           </a:p>
         </p:txBody>
@@ -36416,7 +36416,7 @@
                 <a:ea typeface="+mn-ea"/>
                 <a:cs typeface="+mn-cs"/>
               </a:rPr>
-              <a:t>帮扶管理信息系统 v1.18.14</a:t>
+              <a:t>帮扶管理信息系统 v1.18.15</a:t>
             </a:r>
           </a:p>
         </p:txBody>
@@ -37669,7 +37669,7 @@
                 <a:ea typeface="+mn-ea"/>
                 <a:cs typeface="+mn-cs"/>
               </a:rPr>
-              <a:t>帮扶管理信息系统 v1.18.14</a:t>
+              <a:t>帮扶管理信息系统 v1.18.15</a:t>
             </a:r>
           </a:p>
         </p:txBody>
@@ -38478,7 +38478,7 @@
                 <a:ea typeface="+mn-ea"/>
                 <a:cs typeface="+mn-cs"/>
               </a:rPr>
-              <a:t>帮扶管理信息系统 v1.18.14</a:t>
+              <a:t>帮扶管理信息系统 v1.18.15</a:t>
             </a:r>
           </a:p>
         </p:txBody>
@@ -39761,7 +39761,7 @@
                 <a:ea typeface="+mn-ea"/>
                 <a:cs typeface="+mn-cs"/>
               </a:rPr>
-              <a:t>帮扶管理信息系统 v1.18.14</a:t>
+              <a:t>帮扶管理信息系统 v1.18.15</a:t>
             </a:r>
           </a:p>
         </p:txBody>
@@ -40676,7 +40676,7 @@
                 <a:ea typeface="+mn-ea"/>
                 <a:cs typeface="+mn-cs"/>
               </a:rPr>
-              <a:t>帮扶管理信息系统 v1.18.14</a:t>
+              <a:t>帮扶管理信息系统 v1.18.15</a:t>
             </a:r>
           </a:p>
         </p:txBody>
@@ -42146,7 +42146,7 @@
                 <a:ea typeface="+mn-ea"/>
                 <a:cs typeface="+mn-cs"/>
               </a:rPr>
-              <a:t>帮扶管理信息系统 v1.18.14</a:t>
+              <a:t>帮扶管理信息系统 v1.18.15</a:t>
             </a:r>
           </a:p>
         </p:txBody>
@@ -43429,7 +43429,7 @@
                 <a:ea typeface="+mn-ea"/>
                 <a:cs typeface="+mn-cs"/>
               </a:rPr>
-              <a:t>帮扶管理信息系统 v1.18.14</a:t>
+              <a:t>帮扶管理信息系统 v1.18.15</a:t>
             </a:r>
           </a:p>
         </p:txBody>
@@ -44484,7 +44484,7 @@
                 <a:ea typeface="+mn-ea"/>
                 <a:cs typeface="+mn-cs"/>
               </a:rPr>
-              <a:t>帮扶管理信息系统 v1.18.14</a:t>
+              <a:t>帮扶管理信息系统 v1.18.15</a:t>
             </a:r>
           </a:p>
         </p:txBody>
@@ -45383,7 +45383,7 @@
                 <a:ea typeface="+mn-ea"/>
                 <a:cs typeface="+mn-cs"/>
               </a:rPr>
-              <a:t>帮扶管理信息系统 v1.18.14</a:t>
+              <a:t>帮扶管理信息系统 v1.18.15</a:t>
             </a:r>
           </a:p>
         </p:txBody>
@@ -46270,7 +46270,7 @@
                 <a:ea typeface="+mn-ea"/>
                 <a:cs typeface="+mn-cs"/>
               </a:rPr>
-              <a:t>帮扶管理信息系统 v1.18.14</a:t>
+              <a:t>帮扶管理信息系统 v1.18.15</a:t>
             </a:r>
           </a:p>
         </p:txBody>
@@ -47325,7 +47325,7 @@
                 <a:ea typeface="+mn-ea"/>
                 <a:cs typeface="+mn-cs"/>
               </a:rPr>
-              <a:t>帮扶管理信息系统 v1.18.14</a:t>
+              <a:t>帮扶管理信息系统 v1.18.15</a:t>
             </a:r>
           </a:p>
         </p:txBody>
@@ -49588,7 +49588,7 @@
                 <a:ea typeface="+mn-ea"/>
                 <a:cs typeface="+mn-cs"/>
               </a:rPr>
-              <a:t>帮扶管理信息系统 v1.18.14</a:t>
+              <a:t>帮扶管理信息系统 v1.18.15</a:t>
             </a:r>
           </a:p>
         </p:txBody>
@@ -50397,7 +50397,7 @@
                 <a:ea typeface="+mn-ea"/>
                 <a:cs typeface="+mn-cs"/>
               </a:rPr>
-              <a:t>帮扶管理信息系统 v1.18.14</a:t>
+              <a:t>帮扶管理信息系统 v1.18.15</a:t>
             </a:r>
           </a:p>
         </p:txBody>
@@ -51138,7 +51138,7 @@
                 <a:ea typeface="+mn-ea"/>
                 <a:cs typeface="+mn-cs"/>
               </a:rPr>
-              <a:t>帮扶管理信息系统 v1.18.14</a:t>
+              <a:t>帮扶管理信息系统 v1.18.15</a:t>
             </a:r>
           </a:p>
         </p:txBody>
@@ -52053,7 +52053,7 @@
                 <a:ea typeface="+mn-ea"/>
                 <a:cs typeface="+mn-cs"/>
               </a:rPr>
-              <a:t>帮扶管理信息系统 v1.18.14</a:t>
+              <a:t>帮扶管理信息系统 v1.18.15</a:t>
             </a:r>
           </a:p>
         </p:txBody>
@@ -53108,7 +53108,7 @@
                 <a:ea typeface="+mn-ea"/>
                 <a:cs typeface="+mn-cs"/>
               </a:rPr>
-              <a:t>帮扶管理信息系统 v1.18.14</a:t>
+              <a:t>帮扶管理信息系统 v1.18.15</a:t>
             </a:r>
           </a:p>
         </p:txBody>
@@ -54063,7 +54063,7 @@
                 <a:ea typeface="+mn-ea"/>
                 <a:cs typeface="+mn-cs"/>
               </a:rPr>
-              <a:t>帮扶管理信息系统 v1.18.14</a:t>
+              <a:t>帮扶管理信息系统 v1.18.15</a:t>
             </a:r>
           </a:p>
         </p:txBody>
@@ -54804,7 +54804,7 @@
                 <a:ea typeface="+mn-ea"/>
                 <a:cs typeface="+mn-cs"/>
               </a:rPr>
-              <a:t>帮扶管理信息系统 v1.18.14</a:t>
+              <a:t>帮扶管理信息系统 v1.18.15</a:t>
             </a:r>
           </a:p>
         </p:txBody>
@@ -55855,7 +55855,7 @@
                 <a:ea typeface="+mn-ea"/>
                 <a:cs typeface="+mn-cs"/>
               </a:rPr>
-              <a:t>帮扶管理信息系统 v1.18.14</a:t>
+              <a:t>帮扶管理信息系统 v1.18.15</a:t>
             </a:r>
           </a:p>
         </p:txBody>
@@ -56976,7 +56976,7 @@
                 <a:ea typeface="+mn-ea"/>
                 <a:cs typeface="+mn-cs"/>
               </a:rPr>
-              <a:t>帮扶管理信息系统 v1.18.14</a:t>
+              <a:t>帮扶管理信息系统 v1.18.15</a:t>
             </a:r>
           </a:p>
         </p:txBody>
@@ -57941,7 +57941,7 @@
                 <a:ea typeface="+mn-ea"/>
                 <a:cs typeface="+mn-cs"/>
               </a:rPr>
-              <a:t>帮扶管理信息系统 v1.18.14</a:t>
+              <a:t>帮扶管理信息系统 v1.18.15</a:t>
             </a:r>
           </a:p>
         </p:txBody>
@@ -58281,7 +58281,7 @@
                 <a:ea typeface="+mn-ea"/>
                 <a:cs typeface="+mn-cs"/>
               </a:rPr>
-              <a:t>帮扶管理信息系统 v1.18.14 · 仓库：github.com/lzh745200/MRRS · 完整文档见 docs/ 目录</a:t>
+              <a:t>帮扶管理信息系统 v1.18.15 · 仓库：github.com/lzh745200/MRRS · 完整文档见 docs/ 目录</a:t>
             </a:r>
           </a:p>
         </p:txBody>
@@ -58321,7 +58321,7 @@
                 <a:ea typeface="+mn-ea"/>
                 <a:cs typeface="+mn-cs"/>
               </a:rPr>
-              <a:t>V1.18.14 | 2026-10-27</a:t>
+              <a:t>V1.18.15 | 2026-10-27</a:t>
             </a:r>
           </a:p>
         </p:txBody>
@@ -59234,7 +59234,7 @@
                 <a:ea typeface="+mn-ea"/>
                 <a:cs typeface="+mn-cs"/>
               </a:rPr>
-              <a:t>帮扶管理信息系统 v1.18.14</a:t>
+              <a:t>帮扶管理信息系统 v1.18.15</a:t>
             </a:r>
           </a:p>
         </p:txBody>
@@ -60781,7 +60781,7 @@
                 <a:ea typeface="+mn-ea"/>
                 <a:cs typeface="+mn-cs"/>
               </a:rPr>
-              <a:t>帮扶管理信息系统 v1.18.14</a:t>
+              <a:t>帮扶管理信息系统 v1.18.15</a:t>
             </a:r>
           </a:p>
         </p:txBody>
@@ -62224,7 +62224,7 @@
                 <a:ea typeface="+mn-ea"/>
                 <a:cs typeface="+mn-cs"/>
               </a:rPr>
-              <a:t>帮扶管理信息系统 v1.18.14</a:t>
+              <a:t>帮扶管理信息系统 v1.18.15</a:t>
             </a:r>
           </a:p>
         </p:txBody>

--- a/docs/帮扶管理信息系统-操作培训.pptx
+++ b/docs/帮扶管理信息系统-操作培训.pptx
@@ -5352,7 +5352,7 @@
                 <a:ea typeface="+mn-ea"/>
                 <a:cs typeface="+mn-cs"/>
               </a:rPr>
-              <a:t>V1.18.15 | 2026-10-27 | FastAPI + Vue 3 + Electron + SQLite</a:t>
+              <a:t>V1.18.16 | 2026-10-27 | FastAPI + Vue 3 + Electron + SQLite</a:t>
             </a:r>
           </a:p>
         </p:txBody>
@@ -6185,7 +6185,7 @@
                 <a:ea typeface="+mn-ea"/>
                 <a:cs typeface="+mn-cs"/>
               </a:rPr>
-              <a:t>帮扶管理信息系统 v1.18.15</a:t>
+              <a:t>帮扶管理信息系统 v1.18.16</a:t>
             </a:r>
           </a:p>
         </p:txBody>
@@ -8153,7 +8153,7 @@
                 <a:ea typeface="+mn-ea"/>
                 <a:cs typeface="+mn-cs"/>
               </a:rPr>
-              <a:t>帮扶管理信息系统 v1.18.15</a:t>
+              <a:t>帮扶管理信息系统 v1.18.16</a:t>
             </a:r>
           </a:p>
         </p:txBody>
@@ -9040,7 +9040,7 @@
                 <a:ea typeface="+mn-ea"/>
                 <a:cs typeface="+mn-cs"/>
               </a:rPr>
-              <a:t>帮扶管理信息系统 v1.18.15</a:t>
+              <a:t>帮扶管理信息系统 v1.18.16</a:t>
             </a:r>
           </a:p>
         </p:txBody>
@@ -10005,7 +10005,7 @@
                 <a:ea typeface="+mn-ea"/>
                 <a:cs typeface="+mn-cs"/>
               </a:rPr>
-              <a:t>帮扶管理信息系统 v1.18.15</a:t>
+              <a:t>帮扶管理信息系统 v1.18.16</a:t>
             </a:r>
           </a:p>
         </p:txBody>
@@ -10920,7 +10920,7 @@
                 <a:ea typeface="+mn-ea"/>
                 <a:cs typeface="+mn-cs"/>
               </a:rPr>
-              <a:t>帮扶管理信息系统 v1.18.15</a:t>
+              <a:t>帮扶管理信息系统 v1.18.16</a:t>
             </a:r>
           </a:p>
         </p:txBody>
@@ -11875,7 +11875,7 @@
                 <a:ea typeface="+mn-ea"/>
                 <a:cs typeface="+mn-cs"/>
               </a:rPr>
-              <a:t>帮扶管理信息系统 v1.18.15</a:t>
+              <a:t>帮扶管理信息系统 v1.18.16</a:t>
             </a:r>
           </a:p>
         </p:txBody>
@@ -13116,7 +13116,7 @@
                 <a:ea typeface="+mn-ea"/>
                 <a:cs typeface="+mn-cs"/>
               </a:rPr>
-              <a:t>帮扶管理信息系统 v1.18.15</a:t>
+              <a:t>帮扶管理信息系统 v1.18.16</a:t>
             </a:r>
           </a:p>
         </p:txBody>
@@ -14237,7 +14237,7 @@
                 <a:ea typeface="+mn-ea"/>
                 <a:cs typeface="+mn-cs"/>
               </a:rPr>
-              <a:t>帮扶管理信息系统 v1.18.15</a:t>
+              <a:t>帮扶管理信息系统 v1.18.16</a:t>
             </a:r>
           </a:p>
         </p:txBody>
@@ -15136,7 +15136,7 @@
                 <a:ea typeface="+mn-ea"/>
                 <a:cs typeface="+mn-cs"/>
               </a:rPr>
-              <a:t>帮扶管理信息系统 v1.18.15</a:t>
+              <a:t>帮扶管理信息系统 v1.18.16</a:t>
             </a:r>
           </a:p>
         </p:txBody>
@@ -16545,7 +16545,7 @@
                 <a:ea typeface="+mn-ea"/>
                 <a:cs typeface="+mn-cs"/>
               </a:rPr>
-              <a:t>帮扶管理信息系统 v1.18.15</a:t>
+              <a:t>帮扶管理信息系统 v1.18.16</a:t>
             </a:r>
           </a:p>
         </p:txBody>
@@ -17600,7 +17600,7 @@
                 <a:ea typeface="+mn-ea"/>
                 <a:cs typeface="+mn-cs"/>
               </a:rPr>
-              <a:t>帮扶管理信息系统 v1.18.15</a:t>
+              <a:t>帮扶管理信息系统 v1.18.16</a:t>
             </a:r>
           </a:p>
         </p:txBody>
@@ -19622,7 +19622,7 @@
                 <a:ea typeface="+mn-ea"/>
                 <a:cs typeface="+mn-cs"/>
               </a:rPr>
-              <a:t>帮扶管理信息系统 v1.18.15</a:t>
+              <a:t>帮扶管理信息系统 v1.18.16</a:t>
             </a:r>
           </a:p>
         </p:txBody>
@@ -20759,7 +20759,7 @@
                 <a:ea typeface="+mn-ea"/>
                 <a:cs typeface="+mn-cs"/>
               </a:rPr>
-              <a:t>帮扶管理信息系统 v1.18.15</a:t>
+              <a:t>帮扶管理信息系统 v1.18.16</a:t>
             </a:r>
           </a:p>
         </p:txBody>
@@ -21672,7 +21672,7 @@
                 <a:ea typeface="+mn-ea"/>
                 <a:cs typeface="+mn-cs"/>
               </a:rPr>
-              <a:t>帮扶管理信息系统 v1.18.15</a:t>
+              <a:t>帮扶管理信息系统 v1.18.16</a:t>
             </a:r>
           </a:p>
         </p:txBody>
@@ -22627,7 +22627,7 @@
                 <a:ea typeface="+mn-ea"/>
                 <a:cs typeface="+mn-cs"/>
               </a:rPr>
-              <a:t>帮扶管理信息系统 v1.18.15</a:t>
+              <a:t>帮扶管理信息系统 v1.18.16</a:t>
             </a:r>
           </a:p>
         </p:txBody>
@@ -23592,7 +23592,7 @@
                 <a:ea typeface="+mn-ea"/>
                 <a:cs typeface="+mn-cs"/>
               </a:rPr>
-              <a:t>帮扶管理信息系统 v1.18.15</a:t>
+              <a:t>帮扶管理信息系统 v1.18.16</a:t>
             </a:r>
           </a:p>
         </p:txBody>
@@ -24833,7 +24833,7 @@
                 <a:ea typeface="+mn-ea"/>
                 <a:cs typeface="+mn-cs"/>
               </a:rPr>
-              <a:t>帮扶管理信息系统 v1.18.15</a:t>
+              <a:t>帮扶管理信息系统 v1.18.16</a:t>
             </a:r>
           </a:p>
         </p:txBody>
@@ -25748,7 +25748,7 @@
                 <a:ea typeface="+mn-ea"/>
                 <a:cs typeface="+mn-cs"/>
               </a:rPr>
-              <a:t>帮扶管理信息系统 v1.18.15</a:t>
+              <a:t>帮扶管理信息系统 v1.18.16</a:t>
             </a:r>
           </a:p>
         </p:txBody>
@@ -26489,7 +26489,7 @@
                 <a:ea typeface="+mn-ea"/>
                 <a:cs typeface="+mn-cs"/>
               </a:rPr>
-              <a:t>帮扶管理信息系统 v1.18.15</a:t>
+              <a:t>帮扶管理信息系统 v1.18.16</a:t>
             </a:r>
           </a:p>
         </p:txBody>
@@ -27596,7 +27596,7 @@
                 <a:ea typeface="+mn-ea"/>
                 <a:cs typeface="+mn-cs"/>
               </a:rPr>
-              <a:t>帮扶管理信息系统 v1.18.15</a:t>
+              <a:t>帮扶管理信息系统 v1.18.16</a:t>
             </a:r>
           </a:p>
         </p:txBody>
@@ -28561,7 +28561,7 @@
                 <a:ea typeface="+mn-ea"/>
                 <a:cs typeface="+mn-cs"/>
               </a:rPr>
-              <a:t>帮扶管理信息系统 v1.18.15</a:t>
+              <a:t>帮扶管理信息系统 v1.18.16</a:t>
             </a:r>
           </a:p>
         </p:txBody>
@@ -29370,7 +29370,7 @@
                 <a:ea typeface="+mn-ea"/>
                 <a:cs typeface="+mn-cs"/>
               </a:rPr>
-              <a:t>帮扶管理信息系统 v1.18.15</a:t>
+              <a:t>帮扶管理信息系统 v1.18.16</a:t>
             </a:r>
           </a:p>
         </p:txBody>
@@ -30545,7 +30545,7 @@
                 <a:ea typeface="+mn-ea"/>
                 <a:cs typeface="+mn-cs"/>
               </a:rPr>
-              <a:t>帮扶管理信息系统 v1.18.15</a:t>
+              <a:t>帮扶管理信息系统 v1.18.16</a:t>
             </a:r>
           </a:p>
         </p:txBody>
@@ -31927,7 +31927,7 @@
                 <a:ea typeface="+mn-ea"/>
                 <a:cs typeface="+mn-cs"/>
               </a:rPr>
-              <a:t>帮扶管理信息系统 v1.18.15</a:t>
+              <a:t>帮扶管理信息系统 v1.18.16</a:t>
             </a:r>
           </a:p>
         </p:txBody>
@@ -32736,7 +32736,7 @@
                 <a:ea typeface="+mn-ea"/>
                 <a:cs typeface="+mn-cs"/>
               </a:rPr>
-              <a:t>帮扶管理信息系统 v1.18.15</a:t>
+              <a:t>帮扶管理信息系统 v1.18.16</a:t>
             </a:r>
           </a:p>
         </p:txBody>
@@ -33691,7 +33691,7 @@
                 <a:ea typeface="+mn-ea"/>
                 <a:cs typeface="+mn-cs"/>
               </a:rPr>
-              <a:t>帮扶管理信息系统 v1.18.15</a:t>
+              <a:t>帮扶管理信息系统 v1.18.16</a:t>
             </a:r>
           </a:p>
         </p:txBody>
@@ -34866,7 +34866,7 @@
                 <a:ea typeface="+mn-ea"/>
                 <a:cs typeface="+mn-cs"/>
               </a:rPr>
-              <a:t>帮扶管理信息系统 v1.18.15</a:t>
+              <a:t>帮扶管理信息系统 v1.18.16</a:t>
             </a:r>
           </a:p>
         </p:txBody>
@@ -35675,7 +35675,7 @@
                 <a:ea typeface="+mn-ea"/>
                 <a:cs typeface="+mn-cs"/>
               </a:rPr>
-              <a:t>帮扶管理信息系统 v1.18.15</a:t>
+              <a:t>帮扶管理信息系统 v1.18.16</a:t>
             </a:r>
           </a:p>
         </p:txBody>
@@ -36416,7 +36416,7 @@
                 <a:ea typeface="+mn-ea"/>
                 <a:cs typeface="+mn-cs"/>
               </a:rPr>
-              <a:t>帮扶管理信息系统 v1.18.15</a:t>
+              <a:t>帮扶管理信息系统 v1.18.16</a:t>
             </a:r>
           </a:p>
         </p:txBody>
@@ -37669,7 +37669,7 @@
                 <a:ea typeface="+mn-ea"/>
                 <a:cs typeface="+mn-cs"/>
               </a:rPr>
-              <a:t>帮扶管理信息系统 v1.18.15</a:t>
+              <a:t>帮扶管理信息系统 v1.18.16</a:t>
             </a:r>
           </a:p>
         </p:txBody>
@@ -38478,7 +38478,7 @@
                 <a:ea typeface="+mn-ea"/>
                 <a:cs typeface="+mn-cs"/>
               </a:rPr>
-              <a:t>帮扶管理信息系统 v1.18.15</a:t>
+              <a:t>帮扶管理信息系统 v1.18.16</a:t>
             </a:r>
           </a:p>
         </p:txBody>
@@ -39761,7 +39761,7 @@
                 <a:ea typeface="+mn-ea"/>
                 <a:cs typeface="+mn-cs"/>
               </a:rPr>
-              <a:t>帮扶管理信息系统 v1.18.15</a:t>
+              <a:t>帮扶管理信息系统 v1.18.16</a:t>
             </a:r>
           </a:p>
         </p:txBody>
@@ -40676,7 +40676,7 @@
                 <a:ea typeface="+mn-ea"/>
                 <a:cs typeface="+mn-cs"/>
               </a:rPr>
-              <a:t>帮扶管理信息系统 v1.18.15</a:t>
+              <a:t>帮扶管理信息系统 v1.18.16</a:t>
             </a:r>
           </a:p>
         </p:txBody>
@@ -42146,7 +42146,7 @@
                 <a:ea typeface="+mn-ea"/>
                 <a:cs typeface="+mn-cs"/>
               </a:rPr>
-              <a:t>帮扶管理信息系统 v1.18.15</a:t>
+              <a:t>帮扶管理信息系统 v1.18.16</a:t>
             </a:r>
           </a:p>
         </p:txBody>
@@ -43429,7 +43429,7 @@
                 <a:ea typeface="+mn-ea"/>
                 <a:cs typeface="+mn-cs"/>
               </a:rPr>
-              <a:t>帮扶管理信息系统 v1.18.15</a:t>
+              <a:t>帮扶管理信息系统 v1.18.16</a:t>
             </a:r>
           </a:p>
         </p:txBody>
@@ -44484,7 +44484,7 @@
                 <a:ea typeface="+mn-ea"/>
                 <a:cs typeface="+mn-cs"/>
               </a:rPr>
-              <a:t>帮扶管理信息系统 v1.18.15</a:t>
+              <a:t>帮扶管理信息系统 v1.18.16</a:t>
             </a:r>
           </a:p>
         </p:txBody>
@@ -45383,7 +45383,7 @@
                 <a:ea typeface="+mn-ea"/>
                 <a:cs typeface="+mn-cs"/>
               </a:rPr>
-              <a:t>帮扶管理信息系统 v1.18.15</a:t>
+              <a:t>帮扶管理信息系统 v1.18.16</a:t>
             </a:r>
           </a:p>
         </p:txBody>
@@ -46270,7 +46270,7 @@
                 <a:ea typeface="+mn-ea"/>
                 <a:cs typeface="+mn-cs"/>
               </a:rPr>
-              <a:t>帮扶管理信息系统 v1.18.15</a:t>
+              <a:t>帮扶管理信息系统 v1.18.16</a:t>
             </a:r>
           </a:p>
         </p:txBody>
@@ -47325,7 +47325,7 @@
                 <a:ea typeface="+mn-ea"/>
                 <a:cs typeface="+mn-cs"/>
               </a:rPr>
-              <a:t>帮扶管理信息系统 v1.18.15</a:t>
+              <a:t>帮扶管理信息系统 v1.18.16</a:t>
             </a:r>
           </a:p>
         </p:txBody>
@@ -49588,7 +49588,7 @@
                 <a:ea typeface="+mn-ea"/>
                 <a:cs typeface="+mn-cs"/>
               </a:rPr>
-              <a:t>帮扶管理信息系统 v1.18.15</a:t>
+              <a:t>帮扶管理信息系统 v1.18.16</a:t>
             </a:r>
           </a:p>
         </p:txBody>
@@ -50397,7 +50397,7 @@
                 <a:ea typeface="+mn-ea"/>
                 <a:cs typeface="+mn-cs"/>
               </a:rPr>
-              <a:t>帮扶管理信息系统 v1.18.15</a:t>
+              <a:t>帮扶管理信息系统 v1.18.16</a:t>
             </a:r>
           </a:p>
         </p:txBody>
@@ -51138,7 +51138,7 @@
                 <a:ea typeface="+mn-ea"/>
                 <a:cs typeface="+mn-cs"/>
               </a:rPr>
-              <a:t>帮扶管理信息系统 v1.18.15</a:t>
+              <a:t>帮扶管理信息系统 v1.18.16</a:t>
             </a:r>
           </a:p>
         </p:txBody>
@@ -52053,7 +52053,7 @@
                 <a:ea typeface="+mn-ea"/>
                 <a:cs typeface="+mn-cs"/>
               </a:rPr>
-              <a:t>帮扶管理信息系统 v1.18.15</a:t>
+              <a:t>帮扶管理信息系统 v1.18.16</a:t>
             </a:r>
           </a:p>
         </p:txBody>
@@ -53108,7 +53108,7 @@
                 <a:ea typeface="+mn-ea"/>
                 <a:cs typeface="+mn-cs"/>
               </a:rPr>
-              <a:t>帮扶管理信息系统 v1.18.15</a:t>
+              <a:t>帮扶管理信息系统 v1.18.16</a:t>
             </a:r>
           </a:p>
         </p:txBody>
@@ -54063,7 +54063,7 @@
                 <a:ea typeface="+mn-ea"/>
                 <a:cs typeface="+mn-cs"/>
               </a:rPr>
-              <a:t>帮扶管理信息系统 v1.18.15</a:t>
+              <a:t>帮扶管理信息系统 v1.18.16</a:t>
             </a:r>
           </a:p>
         </p:txBody>
@@ -54804,7 +54804,7 @@
                 <a:ea typeface="+mn-ea"/>
                 <a:cs typeface="+mn-cs"/>
               </a:rPr>
-              <a:t>帮扶管理信息系统 v1.18.15</a:t>
+              <a:t>帮扶管理信息系统 v1.18.16</a:t>
             </a:r>
           </a:p>
         </p:txBody>
@@ -55855,7 +55855,7 @@
                 <a:ea typeface="+mn-ea"/>
                 <a:cs typeface="+mn-cs"/>
               </a:rPr>
-              <a:t>帮扶管理信息系统 v1.18.15</a:t>
+              <a:t>帮扶管理信息系统 v1.18.16</a:t>
             </a:r>
           </a:p>
         </p:txBody>
@@ -56976,7 +56976,7 @@
                 <a:ea typeface="+mn-ea"/>
                 <a:cs typeface="+mn-cs"/>
               </a:rPr>
-              <a:t>帮扶管理信息系统 v1.18.15</a:t>
+              <a:t>帮扶管理信息系统 v1.18.16</a:t>
             </a:r>
           </a:p>
         </p:txBody>
@@ -57941,7 +57941,7 @@
                 <a:ea typeface="+mn-ea"/>
                 <a:cs typeface="+mn-cs"/>
               </a:rPr>
-              <a:t>帮扶管理信息系统 v1.18.15</a:t>
+              <a:t>帮扶管理信息系统 v1.18.16</a:t>
             </a:r>
           </a:p>
         </p:txBody>
@@ -58281,7 +58281,7 @@
                 <a:ea typeface="+mn-ea"/>
                 <a:cs typeface="+mn-cs"/>
               </a:rPr>
-              <a:t>帮扶管理信息系统 v1.18.15 · 仓库：github.com/lzh745200/MRRS · 完整文档见 docs/ 目录</a:t>
+              <a:t>帮扶管理信息系统 v1.18.16 · 仓库：github.com/lzh745200/MRRS · 完整文档见 docs/ 目录</a:t>
             </a:r>
           </a:p>
         </p:txBody>
@@ -58321,7 +58321,7 @@
                 <a:ea typeface="+mn-ea"/>
                 <a:cs typeface="+mn-cs"/>
               </a:rPr>
-              <a:t>V1.18.15 | 2026-10-27</a:t>
+              <a:t>V1.18.16 | 2026-10-27</a:t>
             </a:r>
           </a:p>
         </p:txBody>
@@ -59234,7 +59234,7 @@
                 <a:ea typeface="+mn-ea"/>
                 <a:cs typeface="+mn-cs"/>
               </a:rPr>
-              <a:t>帮扶管理信息系统 v1.18.15</a:t>
+              <a:t>帮扶管理信息系统 v1.18.16</a:t>
             </a:r>
           </a:p>
         </p:txBody>
@@ -60781,7 +60781,7 @@
                 <a:ea typeface="+mn-ea"/>
                 <a:cs typeface="+mn-cs"/>
               </a:rPr>
-              <a:t>帮扶管理信息系统 v1.18.15</a:t>
+              <a:t>帮扶管理信息系统 v1.18.16</a:t>
             </a:r>
           </a:p>
         </p:txBody>
@@ -62224,7 +62224,7 @@
                 <a:ea typeface="+mn-ea"/>
                 <a:cs typeface="+mn-cs"/>
               </a:rPr>
-              <a:t>帮扶管理信息系统 v1.18.15</a:t>
+              <a:t>帮扶管理信息系统 v1.18.16</a:t>
             </a:r>
           </a:p>
         </p:txBody>

--- a/docs/帮扶管理信息系统-操作培训.pptx
+++ b/docs/帮扶管理信息系统-操作培训.pptx
@@ -5352,7 +5352,7 @@
                 <a:ea typeface="+mn-ea"/>
                 <a:cs typeface="+mn-cs"/>
               </a:rPr>
-              <a:t>V1.18.16 | 2026-10-27 | FastAPI + Vue 3 + Electron + SQLite</a:t>
+              <a:t>V1.18.17 | 2026-10-27 | FastAPI + Vue 3 + Electron + SQLite</a:t>
             </a:r>
           </a:p>
         </p:txBody>
@@ -6185,7 +6185,7 @@
                 <a:ea typeface="+mn-ea"/>
                 <a:cs typeface="+mn-cs"/>
               </a:rPr>
-              <a:t>帮扶管理信息系统 v1.18.16</a:t>
+              <a:t>帮扶管理信息系统 v1.18.17</a:t>
             </a:r>
           </a:p>
         </p:txBody>
@@ -8153,7 +8153,7 @@
                 <a:ea typeface="+mn-ea"/>
                 <a:cs typeface="+mn-cs"/>
               </a:rPr>
-              <a:t>帮扶管理信息系统 v1.18.16</a:t>
+              <a:t>帮扶管理信息系统 v1.18.17</a:t>
             </a:r>
           </a:p>
         </p:txBody>
@@ -9040,7 +9040,7 @@
                 <a:ea typeface="+mn-ea"/>
                 <a:cs typeface="+mn-cs"/>
               </a:rPr>
-              <a:t>帮扶管理信息系统 v1.18.16</a:t>
+              <a:t>帮扶管理信息系统 v1.18.17</a:t>
             </a:r>
           </a:p>
         </p:txBody>
@@ -10005,7 +10005,7 @@
                 <a:ea typeface="+mn-ea"/>
                 <a:cs typeface="+mn-cs"/>
               </a:rPr>
-              <a:t>帮扶管理信息系统 v1.18.16</a:t>
+              <a:t>帮扶管理信息系统 v1.18.17</a:t>
             </a:r>
           </a:p>
         </p:txBody>
@@ -10920,7 +10920,7 @@
                 <a:ea typeface="+mn-ea"/>
                 <a:cs typeface="+mn-cs"/>
               </a:rPr>
-              <a:t>帮扶管理信息系统 v1.18.16</a:t>
+              <a:t>帮扶管理信息系统 v1.18.17</a:t>
             </a:r>
           </a:p>
         </p:txBody>
@@ -11875,7 +11875,7 @@
                 <a:ea typeface="+mn-ea"/>
                 <a:cs typeface="+mn-cs"/>
               </a:rPr>
-              <a:t>帮扶管理信息系统 v1.18.16</a:t>
+              <a:t>帮扶管理信息系统 v1.18.17</a:t>
             </a:r>
           </a:p>
         </p:txBody>
@@ -13116,7 +13116,7 @@
                 <a:ea typeface="+mn-ea"/>
                 <a:cs typeface="+mn-cs"/>
               </a:rPr>
-              <a:t>帮扶管理信息系统 v1.18.16</a:t>
+              <a:t>帮扶管理信息系统 v1.18.17</a:t>
             </a:r>
           </a:p>
         </p:txBody>
@@ -14237,7 +14237,7 @@
                 <a:ea typeface="+mn-ea"/>
                 <a:cs typeface="+mn-cs"/>
               </a:rPr>
-              <a:t>帮扶管理信息系统 v1.18.16</a:t>
+              <a:t>帮扶管理信息系统 v1.18.17</a:t>
             </a:r>
           </a:p>
         </p:txBody>
@@ -15136,7 +15136,7 @@
                 <a:ea typeface="+mn-ea"/>
                 <a:cs typeface="+mn-cs"/>
               </a:rPr>
-              <a:t>帮扶管理信息系统 v1.18.16</a:t>
+              <a:t>帮扶管理信息系统 v1.18.17</a:t>
             </a:r>
           </a:p>
         </p:txBody>
@@ -16545,7 +16545,7 @@
                 <a:ea typeface="+mn-ea"/>
                 <a:cs typeface="+mn-cs"/>
               </a:rPr>
-              <a:t>帮扶管理信息系统 v1.18.16</a:t>
+              <a:t>帮扶管理信息系统 v1.18.17</a:t>
             </a:r>
           </a:p>
         </p:txBody>
@@ -17600,7 +17600,7 @@
                 <a:ea typeface="+mn-ea"/>
                 <a:cs typeface="+mn-cs"/>
               </a:rPr>
-              <a:t>帮扶管理信息系统 v1.18.16</a:t>
+              <a:t>帮扶管理信息系统 v1.18.17</a:t>
             </a:r>
           </a:p>
         </p:txBody>
@@ -19622,7 +19622,7 @@
                 <a:ea typeface="+mn-ea"/>
                 <a:cs typeface="+mn-cs"/>
               </a:rPr>
-              <a:t>帮扶管理信息系统 v1.18.16</a:t>
+              <a:t>帮扶管理信息系统 v1.18.17</a:t>
             </a:r>
           </a:p>
         </p:txBody>
@@ -20759,7 +20759,7 @@
                 <a:ea typeface="+mn-ea"/>
                 <a:cs typeface="+mn-cs"/>
               </a:rPr>
-              <a:t>帮扶管理信息系统 v1.18.16</a:t>
+              <a:t>帮扶管理信息系统 v1.18.17</a:t>
             </a:r>
           </a:p>
         </p:txBody>
@@ -21672,7 +21672,7 @@
                 <a:ea typeface="+mn-ea"/>
                 <a:cs typeface="+mn-cs"/>
               </a:rPr>
-              <a:t>帮扶管理信息系统 v1.18.16</a:t>
+              <a:t>帮扶管理信息系统 v1.18.17</a:t>
             </a:r>
           </a:p>
         </p:txBody>
@@ -22627,7 +22627,7 @@
                 <a:ea typeface="+mn-ea"/>
                 <a:cs typeface="+mn-cs"/>
               </a:rPr>
-              <a:t>帮扶管理信息系统 v1.18.16</a:t>
+              <a:t>帮扶管理信息系统 v1.18.17</a:t>
             </a:r>
           </a:p>
         </p:txBody>
@@ -23592,7 +23592,7 @@
                 <a:ea typeface="+mn-ea"/>
                 <a:cs typeface="+mn-cs"/>
               </a:rPr>
-              <a:t>帮扶管理信息系统 v1.18.16</a:t>
+              <a:t>帮扶管理信息系统 v1.18.17</a:t>
             </a:r>
           </a:p>
         </p:txBody>
@@ -24833,7 +24833,7 @@
                 <a:ea typeface="+mn-ea"/>
                 <a:cs typeface="+mn-cs"/>
               </a:rPr>
-              <a:t>帮扶管理信息系统 v1.18.16</a:t>
+              <a:t>帮扶管理信息系统 v1.18.17</a:t>
             </a:r>
           </a:p>
         </p:txBody>
@@ -25748,7 +25748,7 @@
                 <a:ea typeface="+mn-ea"/>
                 <a:cs typeface="+mn-cs"/>
               </a:rPr>
-              <a:t>帮扶管理信息系统 v1.18.16</a:t>
+              <a:t>帮扶管理信息系统 v1.18.17</a:t>
             </a:r>
           </a:p>
         </p:txBody>
@@ -26489,7 +26489,7 @@
                 <a:ea typeface="+mn-ea"/>
                 <a:cs typeface="+mn-cs"/>
               </a:rPr>
-              <a:t>帮扶管理信息系统 v1.18.16</a:t>
+              <a:t>帮扶管理信息系统 v1.18.17</a:t>
             </a:r>
           </a:p>
         </p:txBody>
@@ -27596,7 +27596,7 @@
                 <a:ea typeface="+mn-ea"/>
                 <a:cs typeface="+mn-cs"/>
               </a:rPr>
-              <a:t>帮扶管理信息系统 v1.18.16</a:t>
+              <a:t>帮扶管理信息系统 v1.18.17</a:t>
             </a:r>
           </a:p>
         </p:txBody>
@@ -28561,7 +28561,7 @@
                 <a:ea typeface="+mn-ea"/>
                 <a:cs typeface="+mn-cs"/>
               </a:rPr>
-              <a:t>帮扶管理信息系统 v1.18.16</a:t>
+              <a:t>帮扶管理信息系统 v1.18.17</a:t>
             </a:r>
           </a:p>
         </p:txBody>
@@ -29370,7 +29370,7 @@
                 <a:ea typeface="+mn-ea"/>
                 <a:cs typeface="+mn-cs"/>
               </a:rPr>
-              <a:t>帮扶管理信息系统 v1.18.16</a:t>
+              <a:t>帮扶管理信息系统 v1.18.17</a:t>
             </a:r>
           </a:p>
         </p:txBody>
@@ -30545,7 +30545,7 @@
                 <a:ea typeface="+mn-ea"/>
                 <a:cs typeface="+mn-cs"/>
               </a:rPr>
-              <a:t>帮扶管理信息系统 v1.18.16</a:t>
+              <a:t>帮扶管理信息系统 v1.18.17</a:t>
             </a:r>
           </a:p>
         </p:txBody>
@@ -31927,7 +31927,7 @@
                 <a:ea typeface="+mn-ea"/>
                 <a:cs typeface="+mn-cs"/>
               </a:rPr>
-              <a:t>帮扶管理信息系统 v1.18.16</a:t>
+              <a:t>帮扶管理信息系统 v1.18.17</a:t>
             </a:r>
           </a:p>
         </p:txBody>
@@ -32736,7 +32736,7 @@
                 <a:ea typeface="+mn-ea"/>
                 <a:cs typeface="+mn-cs"/>
               </a:rPr>
-              <a:t>帮扶管理信息系统 v1.18.16</a:t>
+              <a:t>帮扶管理信息系统 v1.18.17</a:t>
             </a:r>
           </a:p>
         </p:txBody>
@@ -33691,7 +33691,7 @@
                 <a:ea typeface="+mn-ea"/>
                 <a:cs typeface="+mn-cs"/>
               </a:rPr>
-              <a:t>帮扶管理信息系统 v1.18.16</a:t>
+              <a:t>帮扶管理信息系统 v1.18.17</a:t>
             </a:r>
           </a:p>
         </p:txBody>
@@ -34866,7 +34866,7 @@
                 <a:ea typeface="+mn-ea"/>
                 <a:cs typeface="+mn-cs"/>
               </a:rPr>
-              <a:t>帮扶管理信息系统 v1.18.16</a:t>
+              <a:t>帮扶管理信息系统 v1.18.17</a:t>
             </a:r>
           </a:p>
         </p:txBody>
@@ -35675,7 +35675,7 @@
                 <a:ea typeface="+mn-ea"/>
                 <a:cs typeface="+mn-cs"/>
               </a:rPr>
-              <a:t>帮扶管理信息系统 v1.18.16</a:t>
+              <a:t>帮扶管理信息系统 v1.18.17</a:t>
             </a:r>
           </a:p>
         </p:txBody>
@@ -36416,7 +36416,7 @@
                 <a:ea typeface="+mn-ea"/>
                 <a:cs typeface="+mn-cs"/>
               </a:rPr>
-              <a:t>帮扶管理信息系统 v1.18.16</a:t>
+              <a:t>帮扶管理信息系统 v1.18.17</a:t>
             </a:r>
           </a:p>
         </p:txBody>
@@ -37669,7 +37669,7 @@
                 <a:ea typeface="+mn-ea"/>
                 <a:cs typeface="+mn-cs"/>
               </a:rPr>
-              <a:t>帮扶管理信息系统 v1.18.16</a:t>
+              <a:t>帮扶管理信息系统 v1.18.17</a:t>
             </a:r>
           </a:p>
         </p:txBody>
@@ -38478,7 +38478,7 @@
                 <a:ea typeface="+mn-ea"/>
                 <a:cs typeface="+mn-cs"/>
               </a:rPr>
-              <a:t>帮扶管理信息系统 v1.18.16</a:t>
+              <a:t>帮扶管理信息系统 v1.18.17</a:t>
             </a:r>
           </a:p>
         </p:txBody>
@@ -39761,7 +39761,7 @@
                 <a:ea typeface="+mn-ea"/>
                 <a:cs typeface="+mn-cs"/>
               </a:rPr>
-              <a:t>帮扶管理信息系统 v1.18.16</a:t>
+              <a:t>帮扶管理信息系统 v1.18.17</a:t>
             </a:r>
           </a:p>
         </p:txBody>
@@ -40676,7 +40676,7 @@
                 <a:ea typeface="+mn-ea"/>
                 <a:cs typeface="+mn-cs"/>
               </a:rPr>
-              <a:t>帮扶管理信息系统 v1.18.16</a:t>
+              <a:t>帮扶管理信息系统 v1.18.17</a:t>
             </a:r>
           </a:p>
         </p:txBody>
@@ -42146,7 +42146,7 @@
                 <a:ea typeface="+mn-ea"/>
                 <a:cs typeface="+mn-cs"/>
               </a:rPr>
-              <a:t>帮扶管理信息系统 v1.18.16</a:t>
+              <a:t>帮扶管理信息系统 v1.18.17</a:t>
             </a:r>
           </a:p>
         </p:txBody>
@@ -43429,7 +43429,7 @@
                 <a:ea typeface="+mn-ea"/>
                 <a:cs typeface="+mn-cs"/>
               </a:rPr>
-              <a:t>帮扶管理信息系统 v1.18.16</a:t>
+              <a:t>帮扶管理信息系统 v1.18.17</a:t>
             </a:r>
           </a:p>
         </p:txBody>
@@ -44484,7 +44484,7 @@
                 <a:ea typeface="+mn-ea"/>
                 <a:cs typeface="+mn-cs"/>
               </a:rPr>
-              <a:t>帮扶管理信息系统 v1.18.16</a:t>
+              <a:t>帮扶管理信息系统 v1.18.17</a:t>
             </a:r>
           </a:p>
         </p:txBody>
@@ -45383,7 +45383,7 @@
                 <a:ea typeface="+mn-ea"/>
                 <a:cs typeface="+mn-cs"/>
               </a:rPr>
-              <a:t>帮扶管理信息系统 v1.18.16</a:t>
+              <a:t>帮扶管理信息系统 v1.18.17</a:t>
             </a:r>
           </a:p>
         </p:txBody>
@@ -46270,7 +46270,7 @@
                 <a:ea typeface="+mn-ea"/>
                 <a:cs typeface="+mn-cs"/>
               </a:rPr>
-              <a:t>帮扶管理信息系统 v1.18.16</a:t>
+              <a:t>帮扶管理信息系统 v1.18.17</a:t>
             </a:r>
           </a:p>
         </p:txBody>
@@ -47325,7 +47325,7 @@
                 <a:ea typeface="+mn-ea"/>
                 <a:cs typeface="+mn-cs"/>
               </a:rPr>
-              <a:t>帮扶管理信息系统 v1.18.16</a:t>
+              <a:t>帮扶管理信息系统 v1.18.17</a:t>
             </a:r>
           </a:p>
         </p:txBody>
@@ -49588,7 +49588,7 @@
                 <a:ea typeface="+mn-ea"/>
                 <a:cs typeface="+mn-cs"/>
               </a:rPr>
-              <a:t>帮扶管理信息系统 v1.18.16</a:t>
+              <a:t>帮扶管理信息系统 v1.18.17</a:t>
             </a:r>
           </a:p>
         </p:txBody>
@@ -50397,7 +50397,7 @@
                 <a:ea typeface="+mn-ea"/>
                 <a:cs typeface="+mn-cs"/>
               </a:rPr>
-              <a:t>帮扶管理信息系统 v1.18.16</a:t>
+              <a:t>帮扶管理信息系统 v1.18.17</a:t>
             </a:r>
           </a:p>
         </p:txBody>
@@ -51138,7 +51138,7 @@
                 <a:ea typeface="+mn-ea"/>
                 <a:cs typeface="+mn-cs"/>
               </a:rPr>
-              <a:t>帮扶管理信息系统 v1.18.16</a:t>
+              <a:t>帮扶管理信息系统 v1.18.17</a:t>
             </a:r>
           </a:p>
         </p:txBody>
@@ -52053,7 +52053,7 @@
                 <a:ea typeface="+mn-ea"/>
                 <a:cs typeface="+mn-cs"/>
               </a:rPr>
-              <a:t>帮扶管理信息系统 v1.18.16</a:t>
+              <a:t>帮扶管理信息系统 v1.18.17</a:t>
             </a:r>
           </a:p>
         </p:txBody>
@@ -53108,7 +53108,7 @@
                 <a:ea typeface="+mn-ea"/>
                 <a:cs typeface="+mn-cs"/>
               </a:rPr>
-              <a:t>帮扶管理信息系统 v1.18.16</a:t>
+              <a:t>帮扶管理信息系统 v1.18.17</a:t>
             </a:r>
           </a:p>
         </p:txBody>
@@ -54063,7 +54063,7 @@
                 <a:ea typeface="+mn-ea"/>
                 <a:cs typeface="+mn-cs"/>
               </a:rPr>
-              <a:t>帮扶管理信息系统 v1.18.16</a:t>
+              <a:t>帮扶管理信息系统 v1.18.17</a:t>
             </a:r>
           </a:p>
         </p:txBody>
@@ -54804,7 +54804,7 @@
                 <a:ea typeface="+mn-ea"/>
                 <a:cs typeface="+mn-cs"/>
               </a:rPr>
-              <a:t>帮扶管理信息系统 v1.18.16</a:t>
+              <a:t>帮扶管理信息系统 v1.18.17</a:t>
             </a:r>
           </a:p>
         </p:txBody>
@@ -55855,7 +55855,7 @@
                 <a:ea typeface="+mn-ea"/>
                 <a:cs typeface="+mn-cs"/>
               </a:rPr>
-              <a:t>帮扶管理信息系统 v1.18.16</a:t>
+              <a:t>帮扶管理信息系统 v1.18.17</a:t>
             </a:r>
           </a:p>
         </p:txBody>
@@ -56976,7 +56976,7 @@
                 <a:ea typeface="+mn-ea"/>
                 <a:cs typeface="+mn-cs"/>
               </a:rPr>
-              <a:t>帮扶管理信息系统 v1.18.16</a:t>
+              <a:t>帮扶管理信息系统 v1.18.17</a:t>
             </a:r>
           </a:p>
         </p:txBody>
@@ -57941,7 +57941,7 @@
                 <a:ea typeface="+mn-ea"/>
                 <a:cs typeface="+mn-cs"/>
               </a:rPr>
-              <a:t>帮扶管理信息系统 v1.18.16</a:t>
+              <a:t>帮扶管理信息系统 v1.18.17</a:t>
             </a:r>
           </a:p>
         </p:txBody>
@@ -58281,7 +58281,7 @@
                 <a:ea typeface="+mn-ea"/>
                 <a:cs typeface="+mn-cs"/>
               </a:rPr>
-              <a:t>帮扶管理信息系统 v1.18.16 · 仓库：github.com/lzh745200/MRRS · 完整文档见 docs/ 目录</a:t>
+              <a:t>帮扶管理信息系统 v1.18.17 · 仓库：github.com/lzh745200/MRRS · 完整文档见 docs/ 目录</a:t>
             </a:r>
           </a:p>
         </p:txBody>
@@ -58321,7 +58321,7 @@
                 <a:ea typeface="+mn-ea"/>
                 <a:cs typeface="+mn-cs"/>
               </a:rPr>
-              <a:t>V1.18.16 | 2026-10-27</a:t>
+              <a:t>V1.18.17 | 2026-10-27</a:t>
             </a:r>
           </a:p>
         </p:txBody>
@@ -59234,7 +59234,7 @@
                 <a:ea typeface="+mn-ea"/>
                 <a:cs typeface="+mn-cs"/>
               </a:rPr>
-              <a:t>帮扶管理信息系统 v1.18.16</a:t>
+              <a:t>帮扶管理信息系统 v1.18.17</a:t>
             </a:r>
           </a:p>
         </p:txBody>
@@ -60781,7 +60781,7 @@
                 <a:ea typeface="+mn-ea"/>
                 <a:cs typeface="+mn-cs"/>
               </a:rPr>
-              <a:t>帮扶管理信息系统 v1.18.16</a:t>
+              <a:t>帮扶管理信息系统 v1.18.17</a:t>
             </a:r>
           </a:p>
         </p:txBody>
@@ -62224,7 +62224,7 @@
                 <a:ea typeface="+mn-ea"/>
                 <a:cs typeface="+mn-cs"/>
               </a:rPr>
-              <a:t>帮扶管理信息系统 v1.18.16</a:t>
+              <a:t>帮扶管理信息系统 v1.18.17</a:t>
             </a:r>
           </a:p>
         </p:txBody>

--- a/docs/帮扶管理信息系统-操作培训.pptx
+++ b/docs/帮扶管理信息系统-操作培训.pptx
@@ -5352,7 +5352,7 @@
                 <a:ea typeface="+mn-ea"/>
                 <a:cs typeface="+mn-cs"/>
               </a:rPr>
-              <a:t>V1.18.17 | 2026-10-27 | FastAPI + Vue 3 + Electron + SQLite</a:t>
+              <a:t>V1.18.18 | 2026-10-27 | FastAPI + Vue 3 + Electron + SQLite</a:t>
             </a:r>
           </a:p>
         </p:txBody>
@@ -6185,7 +6185,7 @@
                 <a:ea typeface="+mn-ea"/>
                 <a:cs typeface="+mn-cs"/>
               </a:rPr>
-              <a:t>帮扶管理信息系统 v1.18.17</a:t>
+              <a:t>帮扶管理信息系统 v1.18.18</a:t>
             </a:r>
           </a:p>
         </p:txBody>
@@ -8153,7 +8153,7 @@
                 <a:ea typeface="+mn-ea"/>
                 <a:cs typeface="+mn-cs"/>
               </a:rPr>
-              <a:t>帮扶管理信息系统 v1.18.17</a:t>
+              <a:t>帮扶管理信息系统 v1.18.18</a:t>
             </a:r>
           </a:p>
         </p:txBody>
@@ -9040,7 +9040,7 @@
                 <a:ea typeface="+mn-ea"/>
                 <a:cs typeface="+mn-cs"/>
               </a:rPr>
-              <a:t>帮扶管理信息系统 v1.18.17</a:t>
+              <a:t>帮扶管理信息系统 v1.18.18</a:t>
             </a:r>
           </a:p>
         </p:txBody>
@@ -10005,7 +10005,7 @@
                 <a:ea typeface="+mn-ea"/>
                 <a:cs typeface="+mn-cs"/>
               </a:rPr>
-              <a:t>帮扶管理信息系统 v1.18.17</a:t>
+              <a:t>帮扶管理信息系统 v1.18.18</a:t>
             </a:r>
           </a:p>
         </p:txBody>
@@ -10920,7 +10920,7 @@
                 <a:ea typeface="+mn-ea"/>
                 <a:cs typeface="+mn-cs"/>
               </a:rPr>
-              <a:t>帮扶管理信息系统 v1.18.17</a:t>
+              <a:t>帮扶管理信息系统 v1.18.18</a:t>
             </a:r>
           </a:p>
         </p:txBody>
@@ -11875,7 +11875,7 @@
                 <a:ea typeface="+mn-ea"/>
                 <a:cs typeface="+mn-cs"/>
               </a:rPr>
-              <a:t>帮扶管理信息系统 v1.18.17</a:t>
+              <a:t>帮扶管理信息系统 v1.18.18</a:t>
             </a:r>
           </a:p>
         </p:txBody>
@@ -13116,7 +13116,7 @@
                 <a:ea typeface="+mn-ea"/>
                 <a:cs typeface="+mn-cs"/>
               </a:rPr>
-              <a:t>帮扶管理信息系统 v1.18.17</a:t>
+              <a:t>帮扶管理信息系统 v1.18.18</a:t>
             </a:r>
           </a:p>
         </p:txBody>
@@ -14237,7 +14237,7 @@
                 <a:ea typeface="+mn-ea"/>
                 <a:cs typeface="+mn-cs"/>
               </a:rPr>
-              <a:t>帮扶管理信息系统 v1.18.17</a:t>
+              <a:t>帮扶管理信息系统 v1.18.18</a:t>
             </a:r>
           </a:p>
         </p:txBody>
@@ -15136,7 +15136,7 @@
                 <a:ea typeface="+mn-ea"/>
                 <a:cs typeface="+mn-cs"/>
               </a:rPr>
-              <a:t>帮扶管理信息系统 v1.18.17</a:t>
+              <a:t>帮扶管理信息系统 v1.18.18</a:t>
             </a:r>
           </a:p>
         </p:txBody>
@@ -16545,7 +16545,7 @@
                 <a:ea typeface="+mn-ea"/>
                 <a:cs typeface="+mn-cs"/>
               </a:rPr>
-              <a:t>帮扶管理信息系统 v1.18.17</a:t>
+              <a:t>帮扶管理信息系统 v1.18.18</a:t>
             </a:r>
           </a:p>
         </p:txBody>
@@ -17600,7 +17600,7 @@
                 <a:ea typeface="+mn-ea"/>
                 <a:cs typeface="+mn-cs"/>
               </a:rPr>
-              <a:t>帮扶管理信息系统 v1.18.17</a:t>
+              <a:t>帮扶管理信息系统 v1.18.18</a:t>
             </a:r>
           </a:p>
         </p:txBody>
@@ -19622,7 +19622,7 @@
                 <a:ea typeface="+mn-ea"/>
                 <a:cs typeface="+mn-cs"/>
               </a:rPr>
-              <a:t>帮扶管理信息系统 v1.18.17</a:t>
+              <a:t>帮扶管理信息系统 v1.18.18</a:t>
             </a:r>
           </a:p>
         </p:txBody>
@@ -20759,7 +20759,7 @@
                 <a:ea typeface="+mn-ea"/>
                 <a:cs typeface="+mn-cs"/>
               </a:rPr>
-              <a:t>帮扶管理信息系统 v1.18.17</a:t>
+              <a:t>帮扶管理信息系统 v1.18.18</a:t>
             </a:r>
           </a:p>
         </p:txBody>
@@ -21672,7 +21672,7 @@
                 <a:ea typeface="+mn-ea"/>
                 <a:cs typeface="+mn-cs"/>
               </a:rPr>
-              <a:t>帮扶管理信息系统 v1.18.17</a:t>
+              <a:t>帮扶管理信息系统 v1.18.18</a:t>
             </a:r>
           </a:p>
         </p:txBody>
@@ -22627,7 +22627,7 @@
                 <a:ea typeface="+mn-ea"/>
                 <a:cs typeface="+mn-cs"/>
               </a:rPr>
-              <a:t>帮扶管理信息系统 v1.18.17</a:t>
+              <a:t>帮扶管理信息系统 v1.18.18</a:t>
             </a:r>
           </a:p>
         </p:txBody>
@@ -23592,7 +23592,7 @@
                 <a:ea typeface="+mn-ea"/>
                 <a:cs typeface="+mn-cs"/>
               </a:rPr>
-              <a:t>帮扶管理信息系统 v1.18.17</a:t>
+              <a:t>帮扶管理信息系统 v1.18.18</a:t>
             </a:r>
           </a:p>
         </p:txBody>
@@ -24833,7 +24833,7 @@
                 <a:ea typeface="+mn-ea"/>
                 <a:cs typeface="+mn-cs"/>
               </a:rPr>
-              <a:t>帮扶管理信息系统 v1.18.17</a:t>
+              <a:t>帮扶管理信息系统 v1.18.18</a:t>
             </a:r>
           </a:p>
         </p:txBody>
@@ -25748,7 +25748,7 @@
                 <a:ea typeface="+mn-ea"/>
                 <a:cs typeface="+mn-cs"/>
               </a:rPr>
-              <a:t>帮扶管理信息系统 v1.18.17</a:t>
+              <a:t>帮扶管理信息系统 v1.18.18</a:t>
             </a:r>
           </a:p>
         </p:txBody>
@@ -26489,7 +26489,7 @@
                 <a:ea typeface="+mn-ea"/>
                 <a:cs typeface="+mn-cs"/>
               </a:rPr>
-              <a:t>帮扶管理信息系统 v1.18.17</a:t>
+              <a:t>帮扶管理信息系统 v1.18.18</a:t>
             </a:r>
           </a:p>
         </p:txBody>
@@ -27596,7 +27596,7 @@
                 <a:ea typeface="+mn-ea"/>
                 <a:cs typeface="+mn-cs"/>
               </a:rPr>
-              <a:t>帮扶管理信息系统 v1.18.17</a:t>
+              <a:t>帮扶管理信息系统 v1.18.18</a:t>
             </a:r>
           </a:p>
         </p:txBody>
@@ -28561,7 +28561,7 @@
                 <a:ea typeface="+mn-ea"/>
                 <a:cs typeface="+mn-cs"/>
               </a:rPr>
-              <a:t>帮扶管理信息系统 v1.18.17</a:t>
+              <a:t>帮扶管理信息系统 v1.18.18</a:t>
             </a:r>
           </a:p>
         </p:txBody>
@@ -29370,7 +29370,7 @@
                 <a:ea typeface="+mn-ea"/>
                 <a:cs typeface="+mn-cs"/>
               </a:rPr>
-              <a:t>帮扶管理信息系统 v1.18.17</a:t>
+              <a:t>帮扶管理信息系统 v1.18.18</a:t>
             </a:r>
           </a:p>
         </p:txBody>
@@ -30545,7 +30545,7 @@
                 <a:ea typeface="+mn-ea"/>
                 <a:cs typeface="+mn-cs"/>
               </a:rPr>
-              <a:t>帮扶管理信息系统 v1.18.17</a:t>
+              <a:t>帮扶管理信息系统 v1.18.18</a:t>
             </a:r>
           </a:p>
         </p:txBody>
@@ -31927,7 +31927,7 @@
                 <a:ea typeface="+mn-ea"/>
                 <a:cs typeface="+mn-cs"/>
               </a:rPr>
-              <a:t>帮扶管理信息系统 v1.18.17</a:t>
+              <a:t>帮扶管理信息系统 v1.18.18</a:t>
             </a:r>
           </a:p>
         </p:txBody>
@@ -32736,7 +32736,7 @@
                 <a:ea typeface="+mn-ea"/>
                 <a:cs typeface="+mn-cs"/>
               </a:rPr>
-              <a:t>帮扶管理信息系统 v1.18.17</a:t>
+              <a:t>帮扶管理信息系统 v1.18.18</a:t>
             </a:r>
           </a:p>
         </p:txBody>
@@ -33691,7 +33691,7 @@
                 <a:ea typeface="+mn-ea"/>
                 <a:cs typeface="+mn-cs"/>
               </a:rPr>
-              <a:t>帮扶管理信息系统 v1.18.17</a:t>
+              <a:t>帮扶管理信息系统 v1.18.18</a:t>
             </a:r>
           </a:p>
         </p:txBody>
@@ -34866,7 +34866,7 @@
                 <a:ea typeface="+mn-ea"/>
                 <a:cs typeface="+mn-cs"/>
               </a:rPr>
-              <a:t>帮扶管理信息系统 v1.18.17</a:t>
+              <a:t>帮扶管理信息系统 v1.18.18</a:t>
             </a:r>
           </a:p>
         </p:txBody>
@@ -35675,7 +35675,7 @@
                 <a:ea typeface="+mn-ea"/>
                 <a:cs typeface="+mn-cs"/>
               </a:rPr>
-              <a:t>帮扶管理信息系统 v1.18.17</a:t>
+              <a:t>帮扶管理信息系统 v1.18.18</a:t>
             </a:r>
           </a:p>
         </p:txBody>
@@ -36416,7 +36416,7 @@
                 <a:ea typeface="+mn-ea"/>
                 <a:cs typeface="+mn-cs"/>
               </a:rPr>
-              <a:t>帮扶管理信息系统 v1.18.17</a:t>
+              <a:t>帮扶管理信息系统 v1.18.18</a:t>
             </a:r>
           </a:p>
         </p:txBody>
@@ -37669,7 +37669,7 @@
                 <a:ea typeface="+mn-ea"/>
                 <a:cs typeface="+mn-cs"/>
               </a:rPr>
-              <a:t>帮扶管理信息系统 v1.18.17</a:t>
+              <a:t>帮扶管理信息系统 v1.18.18</a:t>
             </a:r>
           </a:p>
         </p:txBody>
@@ -38478,7 +38478,7 @@
                 <a:ea typeface="+mn-ea"/>
                 <a:cs typeface="+mn-cs"/>
               </a:rPr>
-              <a:t>帮扶管理信息系统 v1.18.17</a:t>
+              <a:t>帮扶管理信息系统 v1.18.18</a:t>
             </a:r>
           </a:p>
         </p:txBody>
@@ -39761,7 +39761,7 @@
                 <a:ea typeface="+mn-ea"/>
                 <a:cs typeface="+mn-cs"/>
               </a:rPr>
-              <a:t>帮扶管理信息系统 v1.18.17</a:t>
+              <a:t>帮扶管理信息系统 v1.18.18</a:t>
             </a:r>
           </a:p>
         </p:txBody>
@@ -40676,7 +40676,7 @@
                 <a:ea typeface="+mn-ea"/>
                 <a:cs typeface="+mn-cs"/>
               </a:rPr>
-              <a:t>帮扶管理信息系统 v1.18.17</a:t>
+              <a:t>帮扶管理信息系统 v1.18.18</a:t>
             </a:r>
           </a:p>
         </p:txBody>
@@ -42146,7 +42146,7 @@
                 <a:ea typeface="+mn-ea"/>
                 <a:cs typeface="+mn-cs"/>
               </a:rPr>
-              <a:t>帮扶管理信息系统 v1.18.17</a:t>
+              <a:t>帮扶管理信息系统 v1.18.18</a:t>
             </a:r>
           </a:p>
         </p:txBody>
@@ -43429,7 +43429,7 @@
                 <a:ea typeface="+mn-ea"/>
                 <a:cs typeface="+mn-cs"/>
               </a:rPr>
-              <a:t>帮扶管理信息系统 v1.18.17</a:t>
+              <a:t>帮扶管理信息系统 v1.18.18</a:t>
             </a:r>
           </a:p>
         </p:txBody>
@@ -44484,7 +44484,7 @@
                 <a:ea typeface="+mn-ea"/>
                 <a:cs typeface="+mn-cs"/>
               </a:rPr>
-              <a:t>帮扶管理信息系统 v1.18.17</a:t>
+              <a:t>帮扶管理信息系统 v1.18.18</a:t>
             </a:r>
           </a:p>
         </p:txBody>
@@ -45383,7 +45383,7 @@
                 <a:ea typeface="+mn-ea"/>
                 <a:cs typeface="+mn-cs"/>
               </a:rPr>
-              <a:t>帮扶管理信息系统 v1.18.17</a:t>
+              <a:t>帮扶管理信息系统 v1.18.18</a:t>
             </a:r>
           </a:p>
         </p:txBody>
@@ -46270,7 +46270,7 @@
                 <a:ea typeface="+mn-ea"/>
                 <a:cs typeface="+mn-cs"/>
               </a:rPr>
-              <a:t>帮扶管理信息系统 v1.18.17</a:t>
+              <a:t>帮扶管理信息系统 v1.18.18</a:t>
             </a:r>
           </a:p>
         </p:txBody>
@@ -47325,7 +47325,7 @@
                 <a:ea typeface="+mn-ea"/>
                 <a:cs typeface="+mn-cs"/>
               </a:rPr>
-              <a:t>帮扶管理信息系统 v1.18.17</a:t>
+              <a:t>帮扶管理信息系统 v1.18.18</a:t>
             </a:r>
           </a:p>
         </p:txBody>
@@ -49588,7 +49588,7 @@
                 <a:ea typeface="+mn-ea"/>
                 <a:cs typeface="+mn-cs"/>
               </a:rPr>
-              <a:t>帮扶管理信息系统 v1.18.17</a:t>
+              <a:t>帮扶管理信息系统 v1.18.18</a:t>
             </a:r>
           </a:p>
         </p:txBody>
@@ -50397,7 +50397,7 @@
                 <a:ea typeface="+mn-ea"/>
                 <a:cs typeface="+mn-cs"/>
               </a:rPr>
-              <a:t>帮扶管理信息系统 v1.18.17</a:t>
+              <a:t>帮扶管理信息系统 v1.18.18</a:t>
             </a:r>
           </a:p>
         </p:txBody>
@@ -51138,7 +51138,7 @@
                 <a:ea typeface="+mn-ea"/>
                 <a:cs typeface="+mn-cs"/>
               </a:rPr>
-              <a:t>帮扶管理信息系统 v1.18.17</a:t>
+              <a:t>帮扶管理信息系统 v1.18.18</a:t>
             </a:r>
           </a:p>
         </p:txBody>
@@ -52053,7 +52053,7 @@
                 <a:ea typeface="+mn-ea"/>
                 <a:cs typeface="+mn-cs"/>
               </a:rPr>
-              <a:t>帮扶管理信息系统 v1.18.17</a:t>
+              <a:t>帮扶管理信息系统 v1.18.18</a:t>
             </a:r>
           </a:p>
         </p:txBody>
@@ -53108,7 +53108,7 @@
                 <a:ea typeface="+mn-ea"/>
                 <a:cs typeface="+mn-cs"/>
               </a:rPr>
-              <a:t>帮扶管理信息系统 v1.18.17</a:t>
+              <a:t>帮扶管理信息系统 v1.18.18</a:t>
             </a:r>
           </a:p>
         </p:txBody>
@@ -54063,7 +54063,7 @@
                 <a:ea typeface="+mn-ea"/>
                 <a:cs typeface="+mn-cs"/>
               </a:rPr>
-              <a:t>帮扶管理信息系统 v1.18.17</a:t>
+              <a:t>帮扶管理信息系统 v1.18.18</a:t>
             </a:r>
           </a:p>
         </p:txBody>
@@ -54804,7 +54804,7 @@
                 <a:ea typeface="+mn-ea"/>
                 <a:cs typeface="+mn-cs"/>
               </a:rPr>
-              <a:t>帮扶管理信息系统 v1.18.17</a:t>
+              <a:t>帮扶管理信息系统 v1.18.18</a:t>
             </a:r>
           </a:p>
         </p:txBody>
@@ -55855,7 +55855,7 @@
                 <a:ea typeface="+mn-ea"/>
                 <a:cs typeface="+mn-cs"/>
               </a:rPr>
-              <a:t>帮扶管理信息系统 v1.18.17</a:t>
+              <a:t>帮扶管理信息系统 v1.18.18</a:t>
             </a:r>
           </a:p>
         </p:txBody>
@@ -56976,7 +56976,7 @@
                 <a:ea typeface="+mn-ea"/>
                 <a:cs typeface="+mn-cs"/>
               </a:rPr>
-              <a:t>帮扶管理信息系统 v1.18.17</a:t>
+              <a:t>帮扶管理信息系统 v1.18.18</a:t>
             </a:r>
           </a:p>
         </p:txBody>
@@ -57941,7 +57941,7 @@
                 <a:ea typeface="+mn-ea"/>
                 <a:cs typeface="+mn-cs"/>
               </a:rPr>
-              <a:t>帮扶管理信息系统 v1.18.17</a:t>
+              <a:t>帮扶管理信息系统 v1.18.18</a:t>
             </a:r>
           </a:p>
         </p:txBody>
@@ -58281,7 +58281,7 @@
                 <a:ea typeface="+mn-ea"/>
                 <a:cs typeface="+mn-cs"/>
               </a:rPr>
-              <a:t>帮扶管理信息系统 v1.18.17 · 仓库：github.com/lzh745200/MRRS · 完整文档见 docs/ 目录</a:t>
+              <a:t>帮扶管理信息系统 v1.18.18 · 仓库：github.com/lzh745200/MRRS · 完整文档见 docs/ 目录</a:t>
             </a:r>
           </a:p>
         </p:txBody>
@@ -58321,7 +58321,7 @@
                 <a:ea typeface="+mn-ea"/>
                 <a:cs typeface="+mn-cs"/>
               </a:rPr>
-              <a:t>V1.18.17 | 2026-10-27</a:t>
+              <a:t>V1.18.18 | 2026-10-27</a:t>
             </a:r>
           </a:p>
         </p:txBody>
@@ -59234,7 +59234,7 @@
                 <a:ea typeface="+mn-ea"/>
                 <a:cs typeface="+mn-cs"/>
               </a:rPr>
-              <a:t>帮扶管理信息系统 v1.18.17</a:t>
+              <a:t>帮扶管理信息系统 v1.18.18</a:t>
             </a:r>
           </a:p>
         </p:txBody>
@@ -60781,7 +60781,7 @@
                 <a:ea typeface="+mn-ea"/>
                 <a:cs typeface="+mn-cs"/>
               </a:rPr>
-              <a:t>帮扶管理信息系统 v1.18.17</a:t>
+              <a:t>帮扶管理信息系统 v1.18.18</a:t>
             </a:r>
           </a:p>
         </p:txBody>
@@ -62224,7 +62224,7 @@
                 <a:ea typeface="+mn-ea"/>
                 <a:cs typeface="+mn-cs"/>
               </a:rPr>
-              <a:t>帮扶管理信息系统 v1.18.17</a:t>
+              <a:t>帮扶管理信息系统 v1.18.18</a:t>
             </a:r>
           </a:p>
         </p:txBody>

--- a/docs/帮扶管理信息系统-操作培训.pptx
+++ b/docs/帮扶管理信息系统-操作培训.pptx
@@ -5352,7 +5352,7 @@
                 <a:ea typeface="+mn-ea"/>
                 <a:cs typeface="+mn-cs"/>
               </a:rPr>
-              <a:t>V1.18.18 | 2026-10-27 | FastAPI + Vue 3 + Electron + SQLite</a:t>
+              <a:t>V1.18.22 | 2026-10-28 | FastAPI + Vue 3 + Electron + SQLite</a:t>
             </a:r>
           </a:p>
         </p:txBody>
@@ -6185,7 +6185,7 @@
                 <a:ea typeface="+mn-ea"/>
                 <a:cs typeface="+mn-cs"/>
               </a:rPr>
-              <a:t>帮扶管理信息系统 v1.18.18</a:t>
+              <a:t>帮扶管理信息系统 v1.18.22</a:t>
             </a:r>
           </a:p>
         </p:txBody>
@@ -8153,7 +8153,7 @@
                 <a:ea typeface="+mn-ea"/>
                 <a:cs typeface="+mn-cs"/>
               </a:rPr>
-              <a:t>帮扶管理信息系统 v1.18.18</a:t>
+              <a:t>帮扶管理信息系统 v1.18.22</a:t>
             </a:r>
           </a:p>
         </p:txBody>
@@ -9040,7 +9040,7 @@
                 <a:ea typeface="+mn-ea"/>
                 <a:cs typeface="+mn-cs"/>
               </a:rPr>
-              <a:t>帮扶管理信息系统 v1.18.18</a:t>
+              <a:t>帮扶管理信息系统 v1.18.22</a:t>
             </a:r>
           </a:p>
         </p:txBody>
@@ -10005,7 +10005,7 @@
                 <a:ea typeface="+mn-ea"/>
                 <a:cs typeface="+mn-cs"/>
               </a:rPr>
-              <a:t>帮扶管理信息系统 v1.18.18</a:t>
+              <a:t>帮扶管理信息系统 v1.18.22</a:t>
             </a:r>
           </a:p>
         </p:txBody>
@@ -10920,7 +10920,7 @@
                 <a:ea typeface="+mn-ea"/>
                 <a:cs typeface="+mn-cs"/>
               </a:rPr>
-              <a:t>帮扶管理信息系统 v1.18.18</a:t>
+              <a:t>帮扶管理信息系统 v1.18.22</a:t>
             </a:r>
           </a:p>
         </p:txBody>
@@ -11875,7 +11875,7 @@
                 <a:ea typeface="+mn-ea"/>
                 <a:cs typeface="+mn-cs"/>
               </a:rPr>
-              <a:t>帮扶管理信息系统 v1.18.18</a:t>
+              <a:t>帮扶管理信息系统 v1.18.22</a:t>
             </a:r>
           </a:p>
         </p:txBody>
@@ -13116,7 +13116,7 @@
                 <a:ea typeface="+mn-ea"/>
                 <a:cs typeface="+mn-cs"/>
               </a:rPr>
-              <a:t>帮扶管理信息系统 v1.18.18</a:t>
+              <a:t>帮扶管理信息系统 v1.18.22</a:t>
             </a:r>
           </a:p>
         </p:txBody>
@@ -14237,7 +14237,7 @@
                 <a:ea typeface="+mn-ea"/>
                 <a:cs typeface="+mn-cs"/>
               </a:rPr>
-              <a:t>帮扶管理信息系统 v1.18.18</a:t>
+              <a:t>帮扶管理信息系统 v1.18.22</a:t>
             </a:r>
           </a:p>
         </p:txBody>
@@ -15136,7 +15136,7 @@
                 <a:ea typeface="+mn-ea"/>
                 <a:cs typeface="+mn-cs"/>
               </a:rPr>
-              <a:t>帮扶管理信息系统 v1.18.18</a:t>
+              <a:t>帮扶管理信息系统 v1.18.22</a:t>
             </a:r>
           </a:p>
         </p:txBody>
@@ -16545,7 +16545,7 @@
                 <a:ea typeface="+mn-ea"/>
                 <a:cs typeface="+mn-cs"/>
               </a:rPr>
-              <a:t>帮扶管理信息系统 v1.18.18</a:t>
+              <a:t>帮扶管理信息系统 v1.18.22</a:t>
             </a:r>
           </a:p>
         </p:txBody>
@@ -17600,7 +17600,7 @@
                 <a:ea typeface="+mn-ea"/>
                 <a:cs typeface="+mn-cs"/>
               </a:rPr>
-              <a:t>帮扶管理信息系统 v1.18.18</a:t>
+              <a:t>帮扶管理信息系统 v1.18.22</a:t>
             </a:r>
           </a:p>
         </p:txBody>
@@ -19622,7 +19622,7 @@
                 <a:ea typeface="+mn-ea"/>
                 <a:cs typeface="+mn-cs"/>
               </a:rPr>
-              <a:t>帮扶管理信息系统 v1.18.18</a:t>
+              <a:t>帮扶管理信息系统 v1.18.22</a:t>
             </a:r>
           </a:p>
         </p:txBody>
@@ -20759,7 +20759,7 @@
                 <a:ea typeface="+mn-ea"/>
                 <a:cs typeface="+mn-cs"/>
               </a:rPr>
-              <a:t>帮扶管理信息系统 v1.18.18</a:t>
+              <a:t>帮扶管理信息系统 v1.18.22</a:t>
             </a:r>
           </a:p>
         </p:txBody>
@@ -21672,7 +21672,7 @@
                 <a:ea typeface="+mn-ea"/>
                 <a:cs typeface="+mn-cs"/>
               </a:rPr>
-              <a:t>帮扶管理信息系统 v1.18.18</a:t>
+              <a:t>帮扶管理信息系统 v1.18.22</a:t>
             </a:r>
           </a:p>
         </p:txBody>
@@ -22627,7 +22627,7 @@
                 <a:ea typeface="+mn-ea"/>
                 <a:cs typeface="+mn-cs"/>
               </a:rPr>
-              <a:t>帮扶管理信息系统 v1.18.18</a:t>
+              <a:t>帮扶管理信息系统 v1.18.22</a:t>
             </a:r>
           </a:p>
         </p:txBody>
@@ -23592,7 +23592,7 @@
                 <a:ea typeface="+mn-ea"/>
                 <a:cs typeface="+mn-cs"/>
               </a:rPr>
-              <a:t>帮扶管理信息系统 v1.18.18</a:t>
+              <a:t>帮扶管理信息系统 v1.18.22</a:t>
             </a:r>
           </a:p>
         </p:txBody>
@@ -24833,7 +24833,7 @@
                 <a:ea typeface="+mn-ea"/>
                 <a:cs typeface="+mn-cs"/>
               </a:rPr>
-              <a:t>帮扶管理信息系统 v1.18.18</a:t>
+              <a:t>帮扶管理信息系统 v1.18.22</a:t>
             </a:r>
           </a:p>
         </p:txBody>
@@ -25748,7 +25748,7 @@
                 <a:ea typeface="+mn-ea"/>
                 <a:cs typeface="+mn-cs"/>
               </a:rPr>
-              <a:t>帮扶管理信息系统 v1.18.18</a:t>
+              <a:t>帮扶管理信息系统 v1.18.22</a:t>
             </a:r>
           </a:p>
         </p:txBody>
@@ -26489,7 +26489,7 @@
                 <a:ea typeface="+mn-ea"/>
                 <a:cs typeface="+mn-cs"/>
               </a:rPr>
-              <a:t>帮扶管理信息系统 v1.18.18</a:t>
+              <a:t>帮扶管理信息系统 v1.18.22</a:t>
             </a:r>
           </a:p>
         </p:txBody>
@@ -27596,7 +27596,7 @@
                 <a:ea typeface="+mn-ea"/>
                 <a:cs typeface="+mn-cs"/>
               </a:rPr>
-              <a:t>帮扶管理信息系统 v1.18.18</a:t>
+              <a:t>帮扶管理信息系统 v1.18.22</a:t>
             </a:r>
           </a:p>
         </p:txBody>
@@ -28561,7 +28561,7 @@
                 <a:ea typeface="+mn-ea"/>
                 <a:cs typeface="+mn-cs"/>
               </a:rPr>
-              <a:t>帮扶管理信息系统 v1.18.18</a:t>
+              <a:t>帮扶管理信息系统 v1.18.22</a:t>
             </a:r>
           </a:p>
         </p:txBody>
@@ -29370,7 +29370,7 @@
                 <a:ea typeface="+mn-ea"/>
                 <a:cs typeface="+mn-cs"/>
               </a:rPr>
-              <a:t>帮扶管理信息系统 v1.18.18</a:t>
+              <a:t>帮扶管理信息系统 v1.18.22</a:t>
             </a:r>
           </a:p>
         </p:txBody>
@@ -30545,7 +30545,7 @@
                 <a:ea typeface="+mn-ea"/>
                 <a:cs typeface="+mn-cs"/>
               </a:rPr>
-              <a:t>帮扶管理信息系统 v1.18.18</a:t>
+              <a:t>帮扶管理信息系统 v1.18.22</a:t>
             </a:r>
           </a:p>
         </p:txBody>
@@ -31927,7 +31927,7 @@
                 <a:ea typeface="+mn-ea"/>
                 <a:cs typeface="+mn-cs"/>
               </a:rPr>
-              <a:t>帮扶管理信息系统 v1.18.18</a:t>
+              <a:t>帮扶管理信息系统 v1.18.22</a:t>
             </a:r>
           </a:p>
         </p:txBody>
@@ -32736,7 +32736,7 @@
                 <a:ea typeface="+mn-ea"/>
                 <a:cs typeface="+mn-cs"/>
               </a:rPr>
-              <a:t>帮扶管理信息系统 v1.18.18</a:t>
+              <a:t>帮扶管理信息系统 v1.18.22</a:t>
             </a:r>
           </a:p>
         </p:txBody>
@@ -33691,7 +33691,7 @@
                 <a:ea typeface="+mn-ea"/>
                 <a:cs typeface="+mn-cs"/>
               </a:rPr>
-              <a:t>帮扶管理信息系统 v1.18.18</a:t>
+              <a:t>帮扶管理信息系统 v1.18.22</a:t>
             </a:r>
           </a:p>
         </p:txBody>
@@ -34866,7 +34866,7 @@
                 <a:ea typeface="+mn-ea"/>
                 <a:cs typeface="+mn-cs"/>
               </a:rPr>
-              <a:t>帮扶管理信息系统 v1.18.18</a:t>
+              <a:t>帮扶管理信息系统 v1.18.22</a:t>
             </a:r>
           </a:p>
         </p:txBody>
@@ -35675,7 +35675,7 @@
                 <a:ea typeface="+mn-ea"/>
                 <a:cs typeface="+mn-cs"/>
               </a:rPr>
-              <a:t>帮扶管理信息系统 v1.18.18</a:t>
+              <a:t>帮扶管理信息系统 v1.18.22</a:t>
             </a:r>
           </a:p>
         </p:txBody>
@@ -36416,7 +36416,7 @@
                 <a:ea typeface="+mn-ea"/>
                 <a:cs typeface="+mn-cs"/>
               </a:rPr>
-              <a:t>帮扶管理信息系统 v1.18.18</a:t>
+              <a:t>帮扶管理信息系统 v1.18.22</a:t>
             </a:r>
           </a:p>
         </p:txBody>
@@ -37669,7 +37669,7 @@
                 <a:ea typeface="+mn-ea"/>
                 <a:cs typeface="+mn-cs"/>
               </a:rPr>
-              <a:t>帮扶管理信息系统 v1.18.18</a:t>
+              <a:t>帮扶管理信息系统 v1.18.22</a:t>
             </a:r>
           </a:p>
         </p:txBody>
@@ -38478,7 +38478,7 @@
                 <a:ea typeface="+mn-ea"/>
                 <a:cs typeface="+mn-cs"/>
               </a:rPr>
-              <a:t>帮扶管理信息系统 v1.18.18</a:t>
+              <a:t>帮扶管理信息系统 v1.18.22</a:t>
             </a:r>
           </a:p>
         </p:txBody>
@@ -39761,7 +39761,7 @@
                 <a:ea typeface="+mn-ea"/>
                 <a:cs typeface="+mn-cs"/>
               </a:rPr>
-              <a:t>帮扶管理信息系统 v1.18.18</a:t>
+              <a:t>帮扶管理信息系统 v1.18.22</a:t>
             </a:r>
           </a:p>
         </p:txBody>
@@ -40676,7 +40676,7 @@
                 <a:ea typeface="+mn-ea"/>
                 <a:cs typeface="+mn-cs"/>
               </a:rPr>
-              <a:t>帮扶管理信息系统 v1.18.18</a:t>
+              <a:t>帮扶管理信息系统 v1.18.22</a:t>
             </a:r>
           </a:p>
         </p:txBody>
@@ -42146,7 +42146,7 @@
                 <a:ea typeface="+mn-ea"/>
                 <a:cs typeface="+mn-cs"/>
               </a:rPr>
-              <a:t>帮扶管理信息系统 v1.18.18</a:t>
+              <a:t>帮扶管理信息系统 v1.18.22</a:t>
             </a:r>
           </a:p>
         </p:txBody>
@@ -43429,7 +43429,7 @@
                 <a:ea typeface="+mn-ea"/>
                 <a:cs typeface="+mn-cs"/>
               </a:rPr>
-              <a:t>帮扶管理信息系统 v1.18.18</a:t>
+              <a:t>帮扶管理信息系统 v1.18.22</a:t>
             </a:r>
           </a:p>
         </p:txBody>
@@ -44484,7 +44484,7 @@
                 <a:ea typeface="+mn-ea"/>
                 <a:cs typeface="+mn-cs"/>
               </a:rPr>
-              <a:t>帮扶管理信息系统 v1.18.18</a:t>
+              <a:t>帮扶管理信息系统 v1.18.22</a:t>
             </a:r>
           </a:p>
         </p:txBody>
@@ -45383,7 +45383,7 @@
                 <a:ea typeface="+mn-ea"/>
                 <a:cs typeface="+mn-cs"/>
               </a:rPr>
-              <a:t>帮扶管理信息系统 v1.18.18</a:t>
+              <a:t>帮扶管理信息系统 v1.18.22</a:t>
             </a:r>
           </a:p>
         </p:txBody>
@@ -46270,7 +46270,7 @@
                 <a:ea typeface="+mn-ea"/>
                 <a:cs typeface="+mn-cs"/>
               </a:rPr>
-              <a:t>帮扶管理信息系统 v1.18.18</a:t>
+              <a:t>帮扶管理信息系统 v1.18.22</a:t>
             </a:r>
           </a:p>
         </p:txBody>
@@ -47325,7 +47325,7 @@
                 <a:ea typeface="+mn-ea"/>
                 <a:cs typeface="+mn-cs"/>
               </a:rPr>
-              <a:t>帮扶管理信息系统 v1.18.18</a:t>
+              <a:t>帮扶管理信息系统 v1.18.22</a:t>
             </a:r>
           </a:p>
         </p:txBody>
@@ -49588,7 +49588,7 @@
                 <a:ea typeface="+mn-ea"/>
                 <a:cs typeface="+mn-cs"/>
               </a:rPr>
-              <a:t>帮扶管理信息系统 v1.18.18</a:t>
+              <a:t>帮扶管理信息系统 v1.18.22</a:t>
             </a:r>
           </a:p>
         </p:txBody>
@@ -50397,7 +50397,7 @@
                 <a:ea typeface="+mn-ea"/>
                 <a:cs typeface="+mn-cs"/>
               </a:rPr>
-              <a:t>帮扶管理信息系统 v1.18.18</a:t>
+              <a:t>帮扶管理信息系统 v1.18.22</a:t>
             </a:r>
           </a:p>
         </p:txBody>
@@ -51138,7 +51138,7 @@
                 <a:ea typeface="+mn-ea"/>
                 <a:cs typeface="+mn-cs"/>
               </a:rPr>
-              <a:t>帮扶管理信息系统 v1.18.18</a:t>
+              <a:t>帮扶管理信息系统 v1.18.22</a:t>
             </a:r>
           </a:p>
         </p:txBody>
@@ -52053,7 +52053,7 @@
                 <a:ea typeface="+mn-ea"/>
                 <a:cs typeface="+mn-cs"/>
               </a:rPr>
-              <a:t>帮扶管理信息系统 v1.18.18</a:t>
+              <a:t>帮扶管理信息系统 v1.18.22</a:t>
             </a:r>
           </a:p>
         </p:txBody>
@@ -53108,7 +53108,7 @@
                 <a:ea typeface="+mn-ea"/>
                 <a:cs typeface="+mn-cs"/>
               </a:rPr>
-              <a:t>帮扶管理信息系统 v1.18.18</a:t>
+              <a:t>帮扶管理信息系统 v1.18.22</a:t>
             </a:r>
           </a:p>
         </p:txBody>
@@ -54063,7 +54063,7 @@
                 <a:ea typeface="+mn-ea"/>
                 <a:cs typeface="+mn-cs"/>
               </a:rPr>
-              <a:t>帮扶管理信息系统 v1.18.18</a:t>
+              <a:t>帮扶管理信息系统 v1.18.22</a:t>
             </a:r>
           </a:p>
         </p:txBody>
@@ -54804,7 +54804,7 @@
                 <a:ea typeface="+mn-ea"/>
                 <a:cs typeface="+mn-cs"/>
               </a:rPr>
-              <a:t>帮扶管理信息系统 v1.18.18</a:t>
+              <a:t>帮扶管理信息系统 v1.18.22</a:t>
             </a:r>
           </a:p>
         </p:txBody>
@@ -55855,7 +55855,7 @@
                 <a:ea typeface="+mn-ea"/>
                 <a:cs typeface="+mn-cs"/>
               </a:rPr>
-              <a:t>帮扶管理信息系统 v1.18.18</a:t>
+              <a:t>帮扶管理信息系统 v1.18.22</a:t>
             </a:r>
           </a:p>
         </p:txBody>
@@ -56976,7 +56976,7 @@
                 <a:ea typeface="+mn-ea"/>
                 <a:cs typeface="+mn-cs"/>
               </a:rPr>
-              <a:t>帮扶管理信息系统 v1.18.18</a:t>
+              <a:t>帮扶管理信息系统 v1.18.22</a:t>
             </a:r>
           </a:p>
         </p:txBody>
@@ -57941,7 +57941,7 @@
                 <a:ea typeface="+mn-ea"/>
                 <a:cs typeface="+mn-cs"/>
               </a:rPr>
-              <a:t>帮扶管理信息系统 v1.18.18</a:t>
+              <a:t>帮扶管理信息系统 v1.18.22</a:t>
             </a:r>
           </a:p>
         </p:txBody>
@@ -58281,7 +58281,7 @@
                 <a:ea typeface="+mn-ea"/>
                 <a:cs typeface="+mn-cs"/>
               </a:rPr>
-              <a:t>帮扶管理信息系统 v1.18.18 · 仓库：github.com/lzh745200/MRRS · 完整文档见 docs/ 目录</a:t>
+              <a:t>帮扶管理信息系统 v1.18.22 · 仓库：github.com/lzh745200/MRRS · 完整文档见 docs/ 目录</a:t>
             </a:r>
           </a:p>
         </p:txBody>
@@ -58321,7 +58321,7 @@
                 <a:ea typeface="+mn-ea"/>
                 <a:cs typeface="+mn-cs"/>
               </a:rPr>
-              <a:t>V1.18.18 | 2026-10-27</a:t>
+              <a:t>V1.18.22 | 2026-10-28</a:t>
             </a:r>
           </a:p>
         </p:txBody>
@@ -59234,7 +59234,7 @@
                 <a:ea typeface="+mn-ea"/>
                 <a:cs typeface="+mn-cs"/>
               </a:rPr>
-              <a:t>帮扶管理信息系统 v1.18.18</a:t>
+              <a:t>帮扶管理信息系统 v1.18.22</a:t>
             </a:r>
           </a:p>
         </p:txBody>
@@ -60781,7 +60781,7 @@
                 <a:ea typeface="+mn-ea"/>
                 <a:cs typeface="+mn-cs"/>
               </a:rPr>
-              <a:t>帮扶管理信息系统 v1.18.18</a:t>
+              <a:t>帮扶管理信息系统 v1.18.22</a:t>
             </a:r>
           </a:p>
         </p:txBody>
@@ -62224,7 +62224,7 @@
                 <a:ea typeface="+mn-ea"/>
                 <a:cs typeface="+mn-cs"/>
               </a:rPr>
-              <a:t>帮扶管理信息系统 v1.18.18</a:t>
+              <a:t>帮扶管理信息系统 v1.18.22</a:t>
             </a:r>
           </a:p>
         </p:txBody>

--- a/docs/帮扶管理信息系统-操作培训.pptx
+++ b/docs/帮扶管理信息系统-操作培训.pptx
@@ -5352,7 +5352,7 @@
                 <a:ea typeface="+mn-ea"/>
                 <a:cs typeface="+mn-cs"/>
               </a:rPr>
-              <a:t>V1.18.22 | 2026-10-28 | FastAPI + Vue 3 + Electron + SQLite</a:t>
+              <a:t>V1.18.23 | 2026-10-28 | FastAPI + Vue 3 + Electron + SQLite</a:t>
             </a:r>
           </a:p>
         </p:txBody>
@@ -6185,7 +6185,7 @@
                 <a:ea typeface="+mn-ea"/>
                 <a:cs typeface="+mn-cs"/>
               </a:rPr>
-              <a:t>帮扶管理信息系统 v1.18.22</a:t>
+              <a:t>帮扶管理信息系统 v1.18.23</a:t>
             </a:r>
           </a:p>
         </p:txBody>
@@ -8153,7 +8153,7 @@
                 <a:ea typeface="+mn-ea"/>
                 <a:cs typeface="+mn-cs"/>
               </a:rPr>
-              <a:t>帮扶管理信息系统 v1.18.22</a:t>
+              <a:t>帮扶管理信息系统 v1.18.23</a:t>
             </a:r>
           </a:p>
         </p:txBody>
@@ -9040,7 +9040,7 @@
                 <a:ea typeface="+mn-ea"/>
                 <a:cs typeface="+mn-cs"/>
               </a:rPr>
-              <a:t>帮扶管理信息系统 v1.18.22</a:t>
+              <a:t>帮扶管理信息系统 v1.18.23</a:t>
             </a:r>
           </a:p>
         </p:txBody>
@@ -10005,7 +10005,7 @@
                 <a:ea typeface="+mn-ea"/>
                 <a:cs typeface="+mn-cs"/>
               </a:rPr>
-              <a:t>帮扶管理信息系统 v1.18.22</a:t>
+              <a:t>帮扶管理信息系统 v1.18.23</a:t>
             </a:r>
           </a:p>
         </p:txBody>
@@ -10920,7 +10920,7 @@
                 <a:ea typeface="+mn-ea"/>
                 <a:cs typeface="+mn-cs"/>
               </a:rPr>
-              <a:t>帮扶管理信息系统 v1.18.22</a:t>
+              <a:t>帮扶管理信息系统 v1.18.23</a:t>
             </a:r>
           </a:p>
         </p:txBody>
@@ -11875,7 +11875,7 @@
                 <a:ea typeface="+mn-ea"/>
                 <a:cs typeface="+mn-cs"/>
               </a:rPr>
-              <a:t>帮扶管理信息系统 v1.18.22</a:t>
+              <a:t>帮扶管理信息系统 v1.18.23</a:t>
             </a:r>
           </a:p>
         </p:txBody>
@@ -13116,7 +13116,7 @@
                 <a:ea typeface="+mn-ea"/>
                 <a:cs typeface="+mn-cs"/>
               </a:rPr>
-              <a:t>帮扶管理信息系统 v1.18.22</a:t>
+              <a:t>帮扶管理信息系统 v1.18.23</a:t>
             </a:r>
           </a:p>
         </p:txBody>
@@ -14237,7 +14237,7 @@
                 <a:ea typeface="+mn-ea"/>
                 <a:cs typeface="+mn-cs"/>
               </a:rPr>
-              <a:t>帮扶管理信息系统 v1.18.22</a:t>
+              <a:t>帮扶管理信息系统 v1.18.23</a:t>
             </a:r>
           </a:p>
         </p:txBody>
@@ -15136,7 +15136,7 @@
                 <a:ea typeface="+mn-ea"/>
                 <a:cs typeface="+mn-cs"/>
               </a:rPr>
-              <a:t>帮扶管理信息系统 v1.18.22</a:t>
+              <a:t>帮扶管理信息系统 v1.18.23</a:t>
             </a:r>
           </a:p>
         </p:txBody>
@@ -16545,7 +16545,7 @@
                 <a:ea typeface="+mn-ea"/>
                 <a:cs typeface="+mn-cs"/>
               </a:rPr>
-              <a:t>帮扶管理信息系统 v1.18.22</a:t>
+              <a:t>帮扶管理信息系统 v1.18.23</a:t>
             </a:r>
           </a:p>
         </p:txBody>
@@ -17600,7 +17600,7 @@
                 <a:ea typeface="+mn-ea"/>
                 <a:cs typeface="+mn-cs"/>
               </a:rPr>
-              <a:t>帮扶管理信息系统 v1.18.22</a:t>
+              <a:t>帮扶管理信息系统 v1.18.23</a:t>
             </a:r>
           </a:p>
         </p:txBody>
@@ -19622,7 +19622,7 @@
                 <a:ea typeface="+mn-ea"/>
                 <a:cs typeface="+mn-cs"/>
               </a:rPr>
-              <a:t>帮扶管理信息系统 v1.18.22</a:t>
+              <a:t>帮扶管理信息系统 v1.18.23</a:t>
             </a:r>
           </a:p>
         </p:txBody>
@@ -20759,7 +20759,7 @@
                 <a:ea typeface="+mn-ea"/>
                 <a:cs typeface="+mn-cs"/>
               </a:rPr>
-              <a:t>帮扶管理信息系统 v1.18.22</a:t>
+              <a:t>帮扶管理信息系统 v1.18.23</a:t>
             </a:r>
           </a:p>
         </p:txBody>
@@ -21672,7 +21672,7 @@
                 <a:ea typeface="+mn-ea"/>
                 <a:cs typeface="+mn-cs"/>
               </a:rPr>
-              <a:t>帮扶管理信息系统 v1.18.22</a:t>
+              <a:t>帮扶管理信息系统 v1.18.23</a:t>
             </a:r>
           </a:p>
         </p:txBody>
@@ -22627,7 +22627,7 @@
                 <a:ea typeface="+mn-ea"/>
                 <a:cs typeface="+mn-cs"/>
               </a:rPr>
-              <a:t>帮扶管理信息系统 v1.18.22</a:t>
+              <a:t>帮扶管理信息系统 v1.18.23</a:t>
             </a:r>
           </a:p>
         </p:txBody>
@@ -23592,7 +23592,7 @@
                 <a:ea typeface="+mn-ea"/>
                 <a:cs typeface="+mn-cs"/>
               </a:rPr>
-              <a:t>帮扶管理信息系统 v1.18.22</a:t>
+              <a:t>帮扶管理信息系统 v1.18.23</a:t>
             </a:r>
           </a:p>
         </p:txBody>
@@ -24833,7 +24833,7 @@
                 <a:ea typeface="+mn-ea"/>
                 <a:cs typeface="+mn-cs"/>
               </a:rPr>
-              <a:t>帮扶管理信息系统 v1.18.22</a:t>
+              <a:t>帮扶管理信息系统 v1.18.23</a:t>
             </a:r>
           </a:p>
         </p:txBody>
@@ -25748,7 +25748,7 @@
                 <a:ea typeface="+mn-ea"/>
                 <a:cs typeface="+mn-cs"/>
               </a:rPr>
-              <a:t>帮扶管理信息系统 v1.18.22</a:t>
+              <a:t>帮扶管理信息系统 v1.18.23</a:t>
             </a:r>
           </a:p>
         </p:txBody>
@@ -26489,7 +26489,7 @@
                 <a:ea typeface="+mn-ea"/>
                 <a:cs typeface="+mn-cs"/>
               </a:rPr>
-              <a:t>帮扶管理信息系统 v1.18.22</a:t>
+              <a:t>帮扶管理信息系统 v1.18.23</a:t>
             </a:r>
           </a:p>
         </p:txBody>
@@ -27596,7 +27596,7 @@
                 <a:ea typeface="+mn-ea"/>
                 <a:cs typeface="+mn-cs"/>
               </a:rPr>
-              <a:t>帮扶管理信息系统 v1.18.22</a:t>
+              <a:t>帮扶管理信息系统 v1.18.23</a:t>
             </a:r>
           </a:p>
         </p:txBody>
@@ -28561,7 +28561,7 @@
                 <a:ea typeface="+mn-ea"/>
                 <a:cs typeface="+mn-cs"/>
               </a:rPr>
-              <a:t>帮扶管理信息系统 v1.18.22</a:t>
+              <a:t>帮扶管理信息系统 v1.18.23</a:t>
             </a:r>
           </a:p>
         </p:txBody>
@@ -29370,7 +29370,7 @@
                 <a:ea typeface="+mn-ea"/>
                 <a:cs typeface="+mn-cs"/>
               </a:rPr>
-              <a:t>帮扶管理信息系统 v1.18.22</a:t>
+              <a:t>帮扶管理信息系统 v1.18.23</a:t>
             </a:r>
           </a:p>
         </p:txBody>
@@ -30545,7 +30545,7 @@
                 <a:ea typeface="+mn-ea"/>
                 <a:cs typeface="+mn-cs"/>
               </a:rPr>
-              <a:t>帮扶管理信息系统 v1.18.22</a:t>
+              <a:t>帮扶管理信息系统 v1.18.23</a:t>
             </a:r>
           </a:p>
         </p:txBody>
@@ -31927,7 +31927,7 @@
                 <a:ea typeface="+mn-ea"/>
                 <a:cs typeface="+mn-cs"/>
               </a:rPr>
-              <a:t>帮扶管理信息系统 v1.18.22</a:t>
+              <a:t>帮扶管理信息系统 v1.18.23</a:t>
             </a:r>
           </a:p>
         </p:txBody>
@@ -32736,7 +32736,7 @@
                 <a:ea typeface="+mn-ea"/>
                 <a:cs typeface="+mn-cs"/>
               </a:rPr>
-              <a:t>帮扶管理信息系统 v1.18.22</a:t>
+              <a:t>帮扶管理信息系统 v1.18.23</a:t>
             </a:r>
           </a:p>
         </p:txBody>
@@ -33691,7 +33691,7 @@
                 <a:ea typeface="+mn-ea"/>
                 <a:cs typeface="+mn-cs"/>
               </a:rPr>
-              <a:t>帮扶管理信息系统 v1.18.22</a:t>
+              <a:t>帮扶管理信息系统 v1.18.23</a:t>
             </a:r>
           </a:p>
         </p:txBody>
@@ -34866,7 +34866,7 @@
                 <a:ea typeface="+mn-ea"/>
                 <a:cs typeface="+mn-cs"/>
               </a:rPr>
-              <a:t>帮扶管理信息系统 v1.18.22</a:t>
+              <a:t>帮扶管理信息系统 v1.18.23</a:t>
             </a:r>
           </a:p>
         </p:txBody>
@@ -35675,7 +35675,7 @@
                 <a:ea typeface="+mn-ea"/>
                 <a:cs typeface="+mn-cs"/>
               </a:rPr>
-              <a:t>帮扶管理信息系统 v1.18.22</a:t>
+              <a:t>帮扶管理信息系统 v1.18.23</a:t>
             </a:r>
           </a:p>
         </p:txBody>
@@ -36416,7 +36416,7 @@
                 <a:ea typeface="+mn-ea"/>
                 <a:cs typeface="+mn-cs"/>
               </a:rPr>
-              <a:t>帮扶管理信息系统 v1.18.22</a:t>
+              <a:t>帮扶管理信息系统 v1.18.23</a:t>
             </a:r>
           </a:p>
         </p:txBody>
@@ -37669,7 +37669,7 @@
                 <a:ea typeface="+mn-ea"/>
                 <a:cs typeface="+mn-cs"/>
               </a:rPr>
-              <a:t>帮扶管理信息系统 v1.18.22</a:t>
+              <a:t>帮扶管理信息系统 v1.18.23</a:t>
             </a:r>
           </a:p>
         </p:txBody>
@@ -38478,7 +38478,7 @@
                 <a:ea typeface="+mn-ea"/>
                 <a:cs typeface="+mn-cs"/>
               </a:rPr>
-              <a:t>帮扶管理信息系统 v1.18.22</a:t>
+              <a:t>帮扶管理信息系统 v1.18.23</a:t>
             </a:r>
           </a:p>
         </p:txBody>
@@ -39761,7 +39761,7 @@
                 <a:ea typeface="+mn-ea"/>
                 <a:cs typeface="+mn-cs"/>
               </a:rPr>
-              <a:t>帮扶管理信息系统 v1.18.22</a:t>
+              <a:t>帮扶管理信息系统 v1.18.23</a:t>
             </a:r>
           </a:p>
         </p:txBody>
@@ -40676,7 +40676,7 @@
                 <a:ea typeface="+mn-ea"/>
                 <a:cs typeface="+mn-cs"/>
               </a:rPr>
-              <a:t>帮扶管理信息系统 v1.18.22</a:t>
+              <a:t>帮扶管理信息系统 v1.18.23</a:t>
             </a:r>
           </a:p>
         </p:txBody>
@@ -42146,7 +42146,7 @@
                 <a:ea typeface="+mn-ea"/>
                 <a:cs typeface="+mn-cs"/>
               </a:rPr>
-              <a:t>帮扶管理信息系统 v1.18.22</a:t>
+              <a:t>帮扶管理信息系统 v1.18.23</a:t>
             </a:r>
           </a:p>
         </p:txBody>
@@ -43429,7 +43429,7 @@
                 <a:ea typeface="+mn-ea"/>
                 <a:cs typeface="+mn-cs"/>
               </a:rPr>
-              <a:t>帮扶管理信息系统 v1.18.22</a:t>
+              <a:t>帮扶管理信息系统 v1.18.23</a:t>
             </a:r>
           </a:p>
         </p:txBody>
@@ -44484,7 +44484,7 @@
                 <a:ea typeface="+mn-ea"/>
                 <a:cs typeface="+mn-cs"/>
               </a:rPr>
-              <a:t>帮扶管理信息系统 v1.18.22</a:t>
+              <a:t>帮扶管理信息系统 v1.18.23</a:t>
             </a:r>
           </a:p>
         </p:txBody>
@@ -45383,7 +45383,7 @@
                 <a:ea typeface="+mn-ea"/>
                 <a:cs typeface="+mn-cs"/>
               </a:rPr>
-              <a:t>帮扶管理信息系统 v1.18.22</a:t>
+              <a:t>帮扶管理信息系统 v1.18.23</a:t>
             </a:r>
           </a:p>
         </p:txBody>
@@ -46270,7 +46270,7 @@
                 <a:ea typeface="+mn-ea"/>
                 <a:cs typeface="+mn-cs"/>
               </a:rPr>
-              <a:t>帮扶管理信息系统 v1.18.22</a:t>
+              <a:t>帮扶管理信息系统 v1.18.23</a:t>
             </a:r>
           </a:p>
         </p:txBody>
@@ -47325,7 +47325,7 @@
                 <a:ea typeface="+mn-ea"/>
                 <a:cs typeface="+mn-cs"/>
               </a:rPr>
-              <a:t>帮扶管理信息系统 v1.18.22</a:t>
+              <a:t>帮扶管理信息系统 v1.18.23</a:t>
             </a:r>
           </a:p>
         </p:txBody>
@@ -49588,7 +49588,7 @@
                 <a:ea typeface="+mn-ea"/>
                 <a:cs typeface="+mn-cs"/>
               </a:rPr>
-              <a:t>帮扶管理信息系统 v1.18.22</a:t>
+              <a:t>帮扶管理信息系统 v1.18.23</a:t>
             </a:r>
           </a:p>
         </p:txBody>
@@ -50397,7 +50397,7 @@
                 <a:ea typeface="+mn-ea"/>
                 <a:cs typeface="+mn-cs"/>
               </a:rPr>
-              <a:t>帮扶管理信息系统 v1.18.22</a:t>
+              <a:t>帮扶管理信息系统 v1.18.23</a:t>
             </a:r>
           </a:p>
         </p:txBody>
@@ -51138,7 +51138,7 @@
                 <a:ea typeface="+mn-ea"/>
                 <a:cs typeface="+mn-cs"/>
               </a:rPr>
-              <a:t>帮扶管理信息系统 v1.18.22</a:t>
+              <a:t>帮扶管理信息系统 v1.18.23</a:t>
             </a:r>
           </a:p>
         </p:txBody>
@@ -52053,7 +52053,7 @@
                 <a:ea typeface="+mn-ea"/>
                 <a:cs typeface="+mn-cs"/>
               </a:rPr>
-              <a:t>帮扶管理信息系统 v1.18.22</a:t>
+              <a:t>帮扶管理信息系统 v1.18.23</a:t>
             </a:r>
           </a:p>
         </p:txBody>
@@ -53108,7 +53108,7 @@
                 <a:ea typeface="+mn-ea"/>
                 <a:cs typeface="+mn-cs"/>
               </a:rPr>
-              <a:t>帮扶管理信息系统 v1.18.22</a:t>
+              <a:t>帮扶管理信息系统 v1.18.23</a:t>
             </a:r>
           </a:p>
         </p:txBody>
@@ -54063,7 +54063,7 @@
                 <a:ea typeface="+mn-ea"/>
                 <a:cs typeface="+mn-cs"/>
               </a:rPr>
-              <a:t>帮扶管理信息系统 v1.18.22</a:t>
+              <a:t>帮扶管理信息系统 v1.18.23</a:t>
             </a:r>
           </a:p>
         </p:txBody>
@@ -54804,7 +54804,7 @@
                 <a:ea typeface="+mn-ea"/>
                 <a:cs typeface="+mn-cs"/>
               </a:rPr>
-              <a:t>帮扶管理信息系统 v1.18.22</a:t>
+              <a:t>帮扶管理信息系统 v1.18.23</a:t>
             </a:r>
           </a:p>
         </p:txBody>
@@ -55855,7 +55855,7 @@
                 <a:ea typeface="+mn-ea"/>
                 <a:cs typeface="+mn-cs"/>
               </a:rPr>
-              <a:t>帮扶管理信息系统 v1.18.22</a:t>
+              <a:t>帮扶管理信息系统 v1.18.23</a:t>
             </a:r>
           </a:p>
         </p:txBody>
@@ -56976,7 +56976,7 @@
                 <a:ea typeface="+mn-ea"/>
                 <a:cs typeface="+mn-cs"/>
               </a:rPr>
-              <a:t>帮扶管理信息系统 v1.18.22</a:t>
+              <a:t>帮扶管理信息系统 v1.18.23</a:t>
             </a:r>
           </a:p>
         </p:txBody>
@@ -57941,7 +57941,7 @@
                 <a:ea typeface="+mn-ea"/>
                 <a:cs typeface="+mn-cs"/>
               </a:rPr>
-              <a:t>帮扶管理信息系统 v1.18.22</a:t>
+              <a:t>帮扶管理信息系统 v1.18.23</a:t>
             </a:r>
           </a:p>
         </p:txBody>
@@ -58281,7 +58281,7 @@
                 <a:ea typeface="+mn-ea"/>
                 <a:cs typeface="+mn-cs"/>
               </a:rPr>
-              <a:t>帮扶管理信息系统 v1.18.22 · 仓库：github.com/lzh745200/MRRS · 完整文档见 docs/ 目录</a:t>
+              <a:t>帮扶管理信息系统 v1.18.23 · 仓库：github.com/lzh745200/MRRS · 完整文档见 docs/ 目录</a:t>
             </a:r>
           </a:p>
         </p:txBody>
@@ -58321,7 +58321,7 @@
                 <a:ea typeface="+mn-ea"/>
                 <a:cs typeface="+mn-cs"/>
               </a:rPr>
-              <a:t>V1.18.22 | 2026-10-28</a:t>
+              <a:t>V1.18.23 | 2026-10-28</a:t>
             </a:r>
           </a:p>
         </p:txBody>
@@ -59234,7 +59234,7 @@
                 <a:ea typeface="+mn-ea"/>
                 <a:cs typeface="+mn-cs"/>
               </a:rPr>
-              <a:t>帮扶管理信息系统 v1.18.22</a:t>
+              <a:t>帮扶管理信息系统 v1.18.23</a:t>
             </a:r>
           </a:p>
         </p:txBody>
@@ -60781,7 +60781,7 @@
                 <a:ea typeface="+mn-ea"/>
                 <a:cs typeface="+mn-cs"/>
               </a:rPr>
-              <a:t>帮扶管理信息系统 v1.18.22</a:t>
+              <a:t>帮扶管理信息系统 v1.18.23</a:t>
             </a:r>
           </a:p>
         </p:txBody>
@@ -62224,7 +62224,7 @@
                 <a:ea typeface="+mn-ea"/>
                 <a:cs typeface="+mn-cs"/>
               </a:rPr>
-              <a:t>帮扶管理信息系统 v1.18.22</a:t>
+              <a:t>帮扶管理信息系统 v1.18.23</a:t>
             </a:r>
           </a:p>
         </p:txBody>

--- a/docs/帮扶管理信息系统-操作培训.pptx
+++ b/docs/帮扶管理信息系统-操作培训.pptx
@@ -5352,7 +5352,7 @@
                 <a:ea typeface="+mn-ea"/>
                 <a:cs typeface="+mn-cs"/>
               </a:rPr>
-              <a:t>V1.18.23 | 2026-10-28 | FastAPI + Vue 3 + Electron + SQLite</a:t>
+              <a:t>V1.18.24 | 2026-10-28 | FastAPI + Vue 3 + Electron + SQLite</a:t>
             </a:r>
           </a:p>
         </p:txBody>
@@ -6185,7 +6185,7 @@
                 <a:ea typeface="+mn-ea"/>
                 <a:cs typeface="+mn-cs"/>
               </a:rPr>
-              <a:t>帮扶管理信息系统 v1.18.23</a:t>
+              <a:t>帮扶管理信息系统 v1.18.24</a:t>
             </a:r>
           </a:p>
         </p:txBody>
@@ -8153,7 +8153,7 @@
                 <a:ea typeface="+mn-ea"/>
                 <a:cs typeface="+mn-cs"/>
               </a:rPr>
-              <a:t>帮扶管理信息系统 v1.18.23</a:t>
+              <a:t>帮扶管理信息系统 v1.18.24</a:t>
             </a:r>
           </a:p>
         </p:txBody>
@@ -9040,7 +9040,7 @@
                 <a:ea typeface="+mn-ea"/>
                 <a:cs typeface="+mn-cs"/>
               </a:rPr>
-              <a:t>帮扶管理信息系统 v1.18.23</a:t>
+              <a:t>帮扶管理信息系统 v1.18.24</a:t>
             </a:r>
           </a:p>
         </p:txBody>
@@ -10005,7 +10005,7 @@
                 <a:ea typeface="+mn-ea"/>
                 <a:cs typeface="+mn-cs"/>
               </a:rPr>
-              <a:t>帮扶管理信息系统 v1.18.23</a:t>
+              <a:t>帮扶管理信息系统 v1.18.24</a:t>
             </a:r>
           </a:p>
         </p:txBody>
@@ -10920,7 +10920,7 @@
                 <a:ea typeface="+mn-ea"/>
                 <a:cs typeface="+mn-cs"/>
               </a:rPr>
-              <a:t>帮扶管理信息系统 v1.18.23</a:t>
+              <a:t>帮扶管理信息系统 v1.18.24</a:t>
             </a:r>
           </a:p>
         </p:txBody>
@@ -11875,7 +11875,7 @@
                 <a:ea typeface="+mn-ea"/>
                 <a:cs typeface="+mn-cs"/>
               </a:rPr>
-              <a:t>帮扶管理信息系统 v1.18.23</a:t>
+              <a:t>帮扶管理信息系统 v1.18.24</a:t>
             </a:r>
           </a:p>
         </p:txBody>
@@ -13116,7 +13116,7 @@
                 <a:ea typeface="+mn-ea"/>
                 <a:cs typeface="+mn-cs"/>
               </a:rPr>
-              <a:t>帮扶管理信息系统 v1.18.23</a:t>
+              <a:t>帮扶管理信息系统 v1.18.24</a:t>
             </a:r>
           </a:p>
         </p:txBody>
@@ -14237,7 +14237,7 @@
                 <a:ea typeface="+mn-ea"/>
                 <a:cs typeface="+mn-cs"/>
               </a:rPr>
-              <a:t>帮扶管理信息系统 v1.18.23</a:t>
+              <a:t>帮扶管理信息系统 v1.18.24</a:t>
             </a:r>
           </a:p>
         </p:txBody>
@@ -15136,7 +15136,7 @@
                 <a:ea typeface="+mn-ea"/>
                 <a:cs typeface="+mn-cs"/>
               </a:rPr>
-              <a:t>帮扶管理信息系统 v1.18.23</a:t>
+              <a:t>帮扶管理信息系统 v1.18.24</a:t>
             </a:r>
           </a:p>
         </p:txBody>
@@ -16545,7 +16545,7 @@
                 <a:ea typeface="+mn-ea"/>
                 <a:cs typeface="+mn-cs"/>
               </a:rPr>
-              <a:t>帮扶管理信息系统 v1.18.23</a:t>
+              <a:t>帮扶管理信息系统 v1.18.24</a:t>
             </a:r>
           </a:p>
         </p:txBody>
@@ -17600,7 +17600,7 @@
                 <a:ea typeface="+mn-ea"/>
                 <a:cs typeface="+mn-cs"/>
               </a:rPr>
-              <a:t>帮扶管理信息系统 v1.18.23</a:t>
+              <a:t>帮扶管理信息系统 v1.18.24</a:t>
             </a:r>
           </a:p>
         </p:txBody>
@@ -19622,7 +19622,7 @@
                 <a:ea typeface="+mn-ea"/>
                 <a:cs typeface="+mn-cs"/>
               </a:rPr>
-              <a:t>帮扶管理信息系统 v1.18.23</a:t>
+              <a:t>帮扶管理信息系统 v1.18.24</a:t>
             </a:r>
           </a:p>
         </p:txBody>
@@ -20759,7 +20759,7 @@
                 <a:ea typeface="+mn-ea"/>
                 <a:cs typeface="+mn-cs"/>
               </a:rPr>
-              <a:t>帮扶管理信息系统 v1.18.23</a:t>
+              <a:t>帮扶管理信息系统 v1.18.24</a:t>
             </a:r>
           </a:p>
         </p:txBody>
@@ -21672,7 +21672,7 @@
                 <a:ea typeface="+mn-ea"/>
                 <a:cs typeface="+mn-cs"/>
               </a:rPr>
-              <a:t>帮扶管理信息系统 v1.18.23</a:t>
+              <a:t>帮扶管理信息系统 v1.18.24</a:t>
             </a:r>
           </a:p>
         </p:txBody>
@@ -22627,7 +22627,7 @@
                 <a:ea typeface="+mn-ea"/>
                 <a:cs typeface="+mn-cs"/>
               </a:rPr>
-              <a:t>帮扶管理信息系统 v1.18.23</a:t>
+              <a:t>帮扶管理信息系统 v1.18.24</a:t>
             </a:r>
           </a:p>
         </p:txBody>
@@ -23592,7 +23592,7 @@
                 <a:ea typeface="+mn-ea"/>
                 <a:cs typeface="+mn-cs"/>
               </a:rPr>
-              <a:t>帮扶管理信息系统 v1.18.23</a:t>
+              <a:t>帮扶管理信息系统 v1.18.24</a:t>
             </a:r>
           </a:p>
         </p:txBody>
@@ -24833,7 +24833,7 @@
                 <a:ea typeface="+mn-ea"/>
                 <a:cs typeface="+mn-cs"/>
               </a:rPr>
-              <a:t>帮扶管理信息系统 v1.18.23</a:t>
+              <a:t>帮扶管理信息系统 v1.18.24</a:t>
             </a:r>
           </a:p>
         </p:txBody>
@@ -25748,7 +25748,7 @@
                 <a:ea typeface="+mn-ea"/>
                 <a:cs typeface="+mn-cs"/>
               </a:rPr>
-              <a:t>帮扶管理信息系统 v1.18.23</a:t>
+              <a:t>帮扶管理信息系统 v1.18.24</a:t>
             </a:r>
           </a:p>
         </p:txBody>
@@ -26489,7 +26489,7 @@
                 <a:ea typeface="+mn-ea"/>
                 <a:cs typeface="+mn-cs"/>
               </a:rPr>
-              <a:t>帮扶管理信息系统 v1.18.23</a:t>
+              <a:t>帮扶管理信息系统 v1.18.24</a:t>
             </a:r>
           </a:p>
         </p:txBody>
@@ -27596,7 +27596,7 @@
                 <a:ea typeface="+mn-ea"/>
                 <a:cs typeface="+mn-cs"/>
               </a:rPr>
-              <a:t>帮扶管理信息系统 v1.18.23</a:t>
+              <a:t>帮扶管理信息系统 v1.18.24</a:t>
             </a:r>
           </a:p>
         </p:txBody>
@@ -28561,7 +28561,7 @@
                 <a:ea typeface="+mn-ea"/>
                 <a:cs typeface="+mn-cs"/>
               </a:rPr>
-              <a:t>帮扶管理信息系统 v1.18.23</a:t>
+              <a:t>帮扶管理信息系统 v1.18.24</a:t>
             </a:r>
           </a:p>
         </p:txBody>
@@ -29370,7 +29370,7 @@
                 <a:ea typeface="+mn-ea"/>
                 <a:cs typeface="+mn-cs"/>
               </a:rPr>
-              <a:t>帮扶管理信息系统 v1.18.23</a:t>
+              <a:t>帮扶管理信息系统 v1.18.24</a:t>
             </a:r>
           </a:p>
         </p:txBody>
@@ -30545,7 +30545,7 @@
                 <a:ea typeface="+mn-ea"/>
                 <a:cs typeface="+mn-cs"/>
               </a:rPr>
-              <a:t>帮扶管理信息系统 v1.18.23</a:t>
+              <a:t>帮扶管理信息系统 v1.18.24</a:t>
             </a:r>
           </a:p>
         </p:txBody>
@@ -31927,7 +31927,7 @@
                 <a:ea typeface="+mn-ea"/>
                 <a:cs typeface="+mn-cs"/>
               </a:rPr>
-              <a:t>帮扶管理信息系统 v1.18.23</a:t>
+              <a:t>帮扶管理信息系统 v1.18.24</a:t>
             </a:r>
           </a:p>
         </p:txBody>
@@ -32736,7 +32736,7 @@
                 <a:ea typeface="+mn-ea"/>
                 <a:cs typeface="+mn-cs"/>
               </a:rPr>
-              <a:t>帮扶管理信息系统 v1.18.23</a:t>
+              <a:t>帮扶管理信息系统 v1.18.24</a:t>
             </a:r>
           </a:p>
         </p:txBody>
@@ -33691,7 +33691,7 @@
                 <a:ea typeface="+mn-ea"/>
                 <a:cs typeface="+mn-cs"/>
               </a:rPr>
-              <a:t>帮扶管理信息系统 v1.18.23</a:t>
+              <a:t>帮扶管理信息系统 v1.18.24</a:t>
             </a:r>
           </a:p>
         </p:txBody>
@@ -34866,7 +34866,7 @@
                 <a:ea typeface="+mn-ea"/>
                 <a:cs typeface="+mn-cs"/>
               </a:rPr>
-              <a:t>帮扶管理信息系统 v1.18.23</a:t>
+              <a:t>帮扶管理信息系统 v1.18.24</a:t>
             </a:r>
           </a:p>
         </p:txBody>
@@ -35675,7 +35675,7 @@
                 <a:ea typeface="+mn-ea"/>
                 <a:cs typeface="+mn-cs"/>
               </a:rPr>
-              <a:t>帮扶管理信息系统 v1.18.23</a:t>
+              <a:t>帮扶管理信息系统 v1.18.24</a:t>
             </a:r>
           </a:p>
         </p:txBody>
@@ -36416,7 +36416,7 @@
                 <a:ea typeface="+mn-ea"/>
                 <a:cs typeface="+mn-cs"/>
               </a:rPr>
-              <a:t>帮扶管理信息系统 v1.18.23</a:t>
+              <a:t>帮扶管理信息系统 v1.18.24</a:t>
             </a:r>
           </a:p>
         </p:txBody>
@@ -37669,7 +37669,7 @@
                 <a:ea typeface="+mn-ea"/>
                 <a:cs typeface="+mn-cs"/>
               </a:rPr>
-              <a:t>帮扶管理信息系统 v1.18.23</a:t>
+              <a:t>帮扶管理信息系统 v1.18.24</a:t>
             </a:r>
           </a:p>
         </p:txBody>
@@ -38478,7 +38478,7 @@
                 <a:ea typeface="+mn-ea"/>
                 <a:cs typeface="+mn-cs"/>
               </a:rPr>
-              <a:t>帮扶管理信息系统 v1.18.23</a:t>
+              <a:t>帮扶管理信息系统 v1.18.24</a:t>
             </a:r>
           </a:p>
         </p:txBody>
@@ -39761,7 +39761,7 @@
                 <a:ea typeface="+mn-ea"/>
                 <a:cs typeface="+mn-cs"/>
               </a:rPr>
-              <a:t>帮扶管理信息系统 v1.18.23</a:t>
+              <a:t>帮扶管理信息系统 v1.18.24</a:t>
             </a:r>
           </a:p>
         </p:txBody>
@@ -40676,7 +40676,7 @@
                 <a:ea typeface="+mn-ea"/>
                 <a:cs typeface="+mn-cs"/>
               </a:rPr>
-              <a:t>帮扶管理信息系统 v1.18.23</a:t>
+              <a:t>帮扶管理信息系统 v1.18.24</a:t>
             </a:r>
           </a:p>
         </p:txBody>
@@ -42146,7 +42146,7 @@
                 <a:ea typeface="+mn-ea"/>
                 <a:cs typeface="+mn-cs"/>
               </a:rPr>
-              <a:t>帮扶管理信息系统 v1.18.23</a:t>
+              <a:t>帮扶管理信息系统 v1.18.24</a:t>
             </a:r>
           </a:p>
         </p:txBody>
@@ -43429,7 +43429,7 @@
                 <a:ea typeface="+mn-ea"/>
                 <a:cs typeface="+mn-cs"/>
               </a:rPr>
-              <a:t>帮扶管理信息系统 v1.18.23</a:t>
+              <a:t>帮扶管理信息系统 v1.18.24</a:t>
             </a:r>
           </a:p>
         </p:txBody>
@@ -44484,7 +44484,7 @@
                 <a:ea typeface="+mn-ea"/>
                 <a:cs typeface="+mn-cs"/>
               </a:rPr>
-              <a:t>帮扶管理信息系统 v1.18.23</a:t>
+              <a:t>帮扶管理信息系统 v1.18.24</a:t>
             </a:r>
           </a:p>
         </p:txBody>
@@ -45383,7 +45383,7 @@
                 <a:ea typeface="+mn-ea"/>
                 <a:cs typeface="+mn-cs"/>
               </a:rPr>
-              <a:t>帮扶管理信息系统 v1.18.23</a:t>
+              <a:t>帮扶管理信息系统 v1.18.24</a:t>
             </a:r>
           </a:p>
         </p:txBody>
@@ -46270,7 +46270,7 @@
                 <a:ea typeface="+mn-ea"/>
                 <a:cs typeface="+mn-cs"/>
               </a:rPr>
-              <a:t>帮扶管理信息系统 v1.18.23</a:t>
+              <a:t>帮扶管理信息系统 v1.18.24</a:t>
             </a:r>
           </a:p>
         </p:txBody>
@@ -47325,7 +47325,7 @@
                 <a:ea typeface="+mn-ea"/>
                 <a:cs typeface="+mn-cs"/>
               </a:rPr>
-              <a:t>帮扶管理信息系统 v1.18.23</a:t>
+              <a:t>帮扶管理信息系统 v1.18.24</a:t>
             </a:r>
           </a:p>
         </p:txBody>
@@ -49588,7 +49588,7 @@
                 <a:ea typeface="+mn-ea"/>
                 <a:cs typeface="+mn-cs"/>
               </a:rPr>
-              <a:t>帮扶管理信息系统 v1.18.23</a:t>
+              <a:t>帮扶管理信息系统 v1.18.24</a:t>
             </a:r>
           </a:p>
         </p:txBody>
@@ -50397,7 +50397,7 @@
                 <a:ea typeface="+mn-ea"/>
                 <a:cs typeface="+mn-cs"/>
               </a:rPr>
-              <a:t>帮扶管理信息系统 v1.18.23</a:t>
+              <a:t>帮扶管理信息系统 v1.18.24</a:t>
             </a:r>
           </a:p>
         </p:txBody>
@@ -51138,7 +51138,7 @@
                 <a:ea typeface="+mn-ea"/>
                 <a:cs typeface="+mn-cs"/>
               </a:rPr>
-              <a:t>帮扶管理信息系统 v1.18.23</a:t>
+              <a:t>帮扶管理信息系统 v1.18.24</a:t>
             </a:r>
           </a:p>
         </p:txBody>
@@ -52053,7 +52053,7 @@
                 <a:ea typeface="+mn-ea"/>
                 <a:cs typeface="+mn-cs"/>
               </a:rPr>
-              <a:t>帮扶管理信息系统 v1.18.23</a:t>
+              <a:t>帮扶管理信息系统 v1.18.24</a:t>
             </a:r>
           </a:p>
         </p:txBody>
@@ -53108,7 +53108,7 @@
                 <a:ea typeface="+mn-ea"/>
                 <a:cs typeface="+mn-cs"/>
               </a:rPr>
-              <a:t>帮扶管理信息系统 v1.18.23</a:t>
+              <a:t>帮扶管理信息系统 v1.18.24</a:t>
             </a:r>
           </a:p>
         </p:txBody>
@@ -54063,7 +54063,7 @@
                 <a:ea typeface="+mn-ea"/>
                 <a:cs typeface="+mn-cs"/>
               </a:rPr>
-              <a:t>帮扶管理信息系统 v1.18.23</a:t>
+              <a:t>帮扶管理信息系统 v1.18.24</a:t>
             </a:r>
           </a:p>
         </p:txBody>
@@ -54804,7 +54804,7 @@
                 <a:ea typeface="+mn-ea"/>
                 <a:cs typeface="+mn-cs"/>
               </a:rPr>
-              <a:t>帮扶管理信息系统 v1.18.23</a:t>
+              <a:t>帮扶管理信息系统 v1.18.24</a:t>
             </a:r>
           </a:p>
         </p:txBody>
@@ -55855,7 +55855,7 @@
                 <a:ea typeface="+mn-ea"/>
                 <a:cs typeface="+mn-cs"/>
               </a:rPr>
-              <a:t>帮扶管理信息系统 v1.18.23</a:t>
+              <a:t>帮扶管理信息系统 v1.18.24</a:t>
             </a:r>
           </a:p>
         </p:txBody>
@@ -56976,7 +56976,7 @@
                 <a:ea typeface="+mn-ea"/>
                 <a:cs typeface="+mn-cs"/>
               </a:rPr>
-              <a:t>帮扶管理信息系统 v1.18.23</a:t>
+              <a:t>帮扶管理信息系统 v1.18.24</a:t>
             </a:r>
           </a:p>
         </p:txBody>
@@ -57941,7 +57941,7 @@
                 <a:ea typeface="+mn-ea"/>
                 <a:cs typeface="+mn-cs"/>
               </a:rPr>
-              <a:t>帮扶管理信息系统 v1.18.23</a:t>
+              <a:t>帮扶管理信息系统 v1.18.24</a:t>
             </a:r>
           </a:p>
         </p:txBody>
@@ -58281,7 +58281,7 @@
                 <a:ea typeface="+mn-ea"/>
                 <a:cs typeface="+mn-cs"/>
               </a:rPr>
-              <a:t>帮扶管理信息系统 v1.18.23 · 仓库：github.com/lzh745200/MRRS · 完整文档见 docs/ 目录</a:t>
+              <a:t>帮扶管理信息系统 v1.18.24 · 仓库：github.com/lzh745200/MRRS · 完整文档见 docs/ 目录</a:t>
             </a:r>
           </a:p>
         </p:txBody>
@@ -58321,7 +58321,7 @@
                 <a:ea typeface="+mn-ea"/>
                 <a:cs typeface="+mn-cs"/>
               </a:rPr>
-              <a:t>V1.18.23 | 2026-10-28</a:t>
+              <a:t>V1.18.24 | 2026-10-28</a:t>
             </a:r>
           </a:p>
         </p:txBody>
@@ -59234,7 +59234,7 @@
                 <a:ea typeface="+mn-ea"/>
                 <a:cs typeface="+mn-cs"/>
               </a:rPr>
-              <a:t>帮扶管理信息系统 v1.18.23</a:t>
+              <a:t>帮扶管理信息系统 v1.18.24</a:t>
             </a:r>
           </a:p>
         </p:txBody>
@@ -60781,7 +60781,7 @@
                 <a:ea typeface="+mn-ea"/>
                 <a:cs typeface="+mn-cs"/>
               </a:rPr>
-              <a:t>帮扶管理信息系统 v1.18.23</a:t>
+              <a:t>帮扶管理信息系统 v1.18.24</a:t>
             </a:r>
           </a:p>
         </p:txBody>
@@ -62224,7 +62224,7 @@
                 <a:ea typeface="+mn-ea"/>
                 <a:cs typeface="+mn-cs"/>
               </a:rPr>
-              <a:t>帮扶管理信息系统 v1.18.23</a:t>
+              <a:t>帮扶管理信息系统 v1.18.24</a:t>
             </a:r>
           </a:p>
         </p:txBody>

--- a/docs/帮扶管理信息系统-操作培训.pptx
+++ b/docs/帮扶管理信息系统-操作培训.pptx
@@ -5352,7 +5352,7 @@
                 <a:ea typeface="+mn-ea"/>
                 <a:cs typeface="+mn-cs"/>
               </a:rPr>
-              <a:t>V1.18.24 | 2026-10-28 | FastAPI + Vue 3 + Electron + SQLite</a:t>
+              <a:t>V1.18.25 | 2026-10-28 | FastAPI + Vue 3 + Electron + SQLite</a:t>
             </a:r>
           </a:p>
         </p:txBody>
@@ -6185,7 +6185,7 @@
                 <a:ea typeface="+mn-ea"/>
                 <a:cs typeface="+mn-cs"/>
               </a:rPr>
-              <a:t>帮扶管理信息系统 v1.18.24</a:t>
+              <a:t>帮扶管理信息系统 v1.18.25</a:t>
             </a:r>
           </a:p>
         </p:txBody>
@@ -8153,7 +8153,7 @@
                 <a:ea typeface="+mn-ea"/>
                 <a:cs typeface="+mn-cs"/>
               </a:rPr>
-              <a:t>帮扶管理信息系统 v1.18.24</a:t>
+              <a:t>帮扶管理信息系统 v1.18.25</a:t>
             </a:r>
           </a:p>
         </p:txBody>
@@ -9040,7 +9040,7 @@
                 <a:ea typeface="+mn-ea"/>
                 <a:cs typeface="+mn-cs"/>
               </a:rPr>
-              <a:t>帮扶管理信息系统 v1.18.24</a:t>
+              <a:t>帮扶管理信息系统 v1.18.25</a:t>
             </a:r>
           </a:p>
         </p:txBody>
@@ -10005,7 +10005,7 @@
                 <a:ea typeface="+mn-ea"/>
                 <a:cs typeface="+mn-cs"/>
               </a:rPr>
-              <a:t>帮扶管理信息系统 v1.18.24</a:t>
+              <a:t>帮扶管理信息系统 v1.18.25</a:t>
             </a:r>
           </a:p>
         </p:txBody>
@@ -10920,7 +10920,7 @@
                 <a:ea typeface="+mn-ea"/>
                 <a:cs typeface="+mn-cs"/>
               </a:rPr>
-              <a:t>帮扶管理信息系统 v1.18.24</a:t>
+              <a:t>帮扶管理信息系统 v1.18.25</a:t>
             </a:r>
           </a:p>
         </p:txBody>
@@ -11875,7 +11875,7 @@
                 <a:ea typeface="+mn-ea"/>
                 <a:cs typeface="+mn-cs"/>
               </a:rPr>
-              <a:t>帮扶管理信息系统 v1.18.24</a:t>
+              <a:t>帮扶管理信息系统 v1.18.25</a:t>
             </a:r>
           </a:p>
         </p:txBody>
@@ -13116,7 +13116,7 @@
                 <a:ea typeface="+mn-ea"/>
                 <a:cs typeface="+mn-cs"/>
               </a:rPr>
-              <a:t>帮扶管理信息系统 v1.18.24</a:t>
+              <a:t>帮扶管理信息系统 v1.18.25</a:t>
             </a:r>
           </a:p>
         </p:txBody>
@@ -14237,7 +14237,7 @@
                 <a:ea typeface="+mn-ea"/>
                 <a:cs typeface="+mn-cs"/>
               </a:rPr>
-              <a:t>帮扶管理信息系统 v1.18.24</a:t>
+              <a:t>帮扶管理信息系统 v1.18.25</a:t>
             </a:r>
           </a:p>
         </p:txBody>
@@ -15136,7 +15136,7 @@
                 <a:ea typeface="+mn-ea"/>
                 <a:cs typeface="+mn-cs"/>
               </a:rPr>
-              <a:t>帮扶管理信息系统 v1.18.24</a:t>
+              <a:t>帮扶管理信息系统 v1.18.25</a:t>
             </a:r>
           </a:p>
         </p:txBody>
@@ -16545,7 +16545,7 @@
                 <a:ea typeface="+mn-ea"/>
                 <a:cs typeface="+mn-cs"/>
               </a:rPr>
-              <a:t>帮扶管理信息系统 v1.18.24</a:t>
+              <a:t>帮扶管理信息系统 v1.18.25</a:t>
             </a:r>
           </a:p>
         </p:txBody>
@@ -17600,7 +17600,7 @@
                 <a:ea typeface="+mn-ea"/>
                 <a:cs typeface="+mn-cs"/>
               </a:rPr>
-              <a:t>帮扶管理信息系统 v1.18.24</a:t>
+              <a:t>帮扶管理信息系统 v1.18.25</a:t>
             </a:r>
           </a:p>
         </p:txBody>
@@ -19622,7 +19622,7 @@
                 <a:ea typeface="+mn-ea"/>
                 <a:cs typeface="+mn-cs"/>
               </a:rPr>
-              <a:t>帮扶管理信息系统 v1.18.24</a:t>
+              <a:t>帮扶管理信息系统 v1.18.25</a:t>
             </a:r>
           </a:p>
         </p:txBody>
@@ -20759,7 +20759,7 @@
                 <a:ea typeface="+mn-ea"/>
                 <a:cs typeface="+mn-cs"/>
               </a:rPr>
-              <a:t>帮扶管理信息系统 v1.18.24</a:t>
+              <a:t>帮扶管理信息系统 v1.18.25</a:t>
             </a:r>
           </a:p>
         </p:txBody>
@@ -21672,7 +21672,7 @@
                 <a:ea typeface="+mn-ea"/>
                 <a:cs typeface="+mn-cs"/>
               </a:rPr>
-              <a:t>帮扶管理信息系统 v1.18.24</a:t>
+              <a:t>帮扶管理信息系统 v1.18.25</a:t>
             </a:r>
           </a:p>
         </p:txBody>
@@ -22627,7 +22627,7 @@
                 <a:ea typeface="+mn-ea"/>
                 <a:cs typeface="+mn-cs"/>
               </a:rPr>
-              <a:t>帮扶管理信息系统 v1.18.24</a:t>
+              <a:t>帮扶管理信息系统 v1.18.25</a:t>
             </a:r>
           </a:p>
         </p:txBody>
@@ -23592,7 +23592,7 @@
                 <a:ea typeface="+mn-ea"/>
                 <a:cs typeface="+mn-cs"/>
               </a:rPr>
-              <a:t>帮扶管理信息系统 v1.18.24</a:t>
+              <a:t>帮扶管理信息系统 v1.18.25</a:t>
             </a:r>
           </a:p>
         </p:txBody>
@@ -24833,7 +24833,7 @@
                 <a:ea typeface="+mn-ea"/>
                 <a:cs typeface="+mn-cs"/>
               </a:rPr>
-              <a:t>帮扶管理信息系统 v1.18.24</a:t>
+              <a:t>帮扶管理信息系统 v1.18.25</a:t>
             </a:r>
           </a:p>
         </p:txBody>
@@ -25748,7 +25748,7 @@
                 <a:ea typeface="+mn-ea"/>
                 <a:cs typeface="+mn-cs"/>
               </a:rPr>
-              <a:t>帮扶管理信息系统 v1.18.24</a:t>
+              <a:t>帮扶管理信息系统 v1.18.25</a:t>
             </a:r>
           </a:p>
         </p:txBody>
@@ -26489,7 +26489,7 @@
                 <a:ea typeface="+mn-ea"/>
                 <a:cs typeface="+mn-cs"/>
               </a:rPr>
-              <a:t>帮扶管理信息系统 v1.18.24</a:t>
+              <a:t>帮扶管理信息系统 v1.18.25</a:t>
             </a:r>
           </a:p>
         </p:txBody>
@@ -27596,7 +27596,7 @@
                 <a:ea typeface="+mn-ea"/>
                 <a:cs typeface="+mn-cs"/>
               </a:rPr>
-              <a:t>帮扶管理信息系统 v1.18.24</a:t>
+              <a:t>帮扶管理信息系统 v1.18.25</a:t>
             </a:r>
           </a:p>
         </p:txBody>
@@ -28561,7 +28561,7 @@
                 <a:ea typeface="+mn-ea"/>
                 <a:cs typeface="+mn-cs"/>
               </a:rPr>
-              <a:t>帮扶管理信息系统 v1.18.24</a:t>
+              <a:t>帮扶管理信息系统 v1.18.25</a:t>
             </a:r>
           </a:p>
         </p:txBody>
@@ -29370,7 +29370,7 @@
                 <a:ea typeface="+mn-ea"/>
                 <a:cs typeface="+mn-cs"/>
               </a:rPr>
-              <a:t>帮扶管理信息系统 v1.18.24</a:t>
+              <a:t>帮扶管理信息系统 v1.18.25</a:t>
             </a:r>
           </a:p>
         </p:txBody>
@@ -30545,7 +30545,7 @@
                 <a:ea typeface="+mn-ea"/>
                 <a:cs typeface="+mn-cs"/>
               </a:rPr>
-              <a:t>帮扶管理信息系统 v1.18.24</a:t>
+              <a:t>帮扶管理信息系统 v1.18.25</a:t>
             </a:r>
           </a:p>
         </p:txBody>
@@ -31927,7 +31927,7 @@
                 <a:ea typeface="+mn-ea"/>
                 <a:cs typeface="+mn-cs"/>
               </a:rPr>
-              <a:t>帮扶管理信息系统 v1.18.24</a:t>
+              <a:t>帮扶管理信息系统 v1.18.25</a:t>
             </a:r>
           </a:p>
         </p:txBody>
@@ -32736,7 +32736,7 @@
                 <a:ea typeface="+mn-ea"/>
                 <a:cs typeface="+mn-cs"/>
               </a:rPr>
-              <a:t>帮扶管理信息系统 v1.18.24</a:t>
+              <a:t>帮扶管理信息系统 v1.18.25</a:t>
             </a:r>
           </a:p>
         </p:txBody>
@@ -33691,7 +33691,7 @@
                 <a:ea typeface="+mn-ea"/>
                 <a:cs typeface="+mn-cs"/>
               </a:rPr>
-              <a:t>帮扶管理信息系统 v1.18.24</a:t>
+              <a:t>帮扶管理信息系统 v1.18.25</a:t>
             </a:r>
           </a:p>
         </p:txBody>
@@ -34866,7 +34866,7 @@
                 <a:ea typeface="+mn-ea"/>
                 <a:cs typeface="+mn-cs"/>
               </a:rPr>
-              <a:t>帮扶管理信息系统 v1.18.24</a:t>
+              <a:t>帮扶管理信息系统 v1.18.25</a:t>
             </a:r>
           </a:p>
         </p:txBody>
@@ -35675,7 +35675,7 @@
                 <a:ea typeface="+mn-ea"/>
                 <a:cs typeface="+mn-cs"/>
               </a:rPr>
-              <a:t>帮扶管理信息系统 v1.18.24</a:t>
+              <a:t>帮扶管理信息系统 v1.18.25</a:t>
             </a:r>
           </a:p>
         </p:txBody>
@@ -36416,7 +36416,7 @@
                 <a:ea typeface="+mn-ea"/>
                 <a:cs typeface="+mn-cs"/>
               </a:rPr>
-              <a:t>帮扶管理信息系统 v1.18.24</a:t>
+              <a:t>帮扶管理信息系统 v1.18.25</a:t>
             </a:r>
           </a:p>
         </p:txBody>
@@ -37669,7 +37669,7 @@
                 <a:ea typeface="+mn-ea"/>
                 <a:cs typeface="+mn-cs"/>
               </a:rPr>
-              <a:t>帮扶管理信息系统 v1.18.24</a:t>
+              <a:t>帮扶管理信息系统 v1.18.25</a:t>
             </a:r>
           </a:p>
         </p:txBody>
@@ -38478,7 +38478,7 @@
                 <a:ea typeface="+mn-ea"/>
                 <a:cs typeface="+mn-cs"/>
               </a:rPr>
-              <a:t>帮扶管理信息系统 v1.18.24</a:t>
+              <a:t>帮扶管理信息系统 v1.18.25</a:t>
             </a:r>
           </a:p>
         </p:txBody>
@@ -39761,7 +39761,7 @@
                 <a:ea typeface="+mn-ea"/>
                 <a:cs typeface="+mn-cs"/>
               </a:rPr>
-              <a:t>帮扶管理信息系统 v1.18.24</a:t>
+              <a:t>帮扶管理信息系统 v1.18.25</a:t>
             </a:r>
           </a:p>
         </p:txBody>
@@ -40676,7 +40676,7 @@
                 <a:ea typeface="+mn-ea"/>
                 <a:cs typeface="+mn-cs"/>
               </a:rPr>
-              <a:t>帮扶管理信息系统 v1.18.24</a:t>
+              <a:t>帮扶管理信息系统 v1.18.25</a:t>
             </a:r>
           </a:p>
         </p:txBody>
@@ -42146,7 +42146,7 @@
                 <a:ea typeface="+mn-ea"/>
                 <a:cs typeface="+mn-cs"/>
               </a:rPr>
-              <a:t>帮扶管理信息系统 v1.18.24</a:t>
+              <a:t>帮扶管理信息系统 v1.18.25</a:t>
             </a:r>
           </a:p>
         </p:txBody>
@@ -43429,7 +43429,7 @@
                 <a:ea typeface="+mn-ea"/>
                 <a:cs typeface="+mn-cs"/>
               </a:rPr>
-              <a:t>帮扶管理信息系统 v1.18.24</a:t>
+              <a:t>帮扶管理信息系统 v1.18.25</a:t>
             </a:r>
           </a:p>
         </p:txBody>
@@ -44484,7 +44484,7 @@
                 <a:ea typeface="+mn-ea"/>
                 <a:cs typeface="+mn-cs"/>
               </a:rPr>
-              <a:t>帮扶管理信息系统 v1.18.24</a:t>
+              <a:t>帮扶管理信息系统 v1.18.25</a:t>
             </a:r>
           </a:p>
         </p:txBody>
@@ -45383,7 +45383,7 @@
                 <a:ea typeface="+mn-ea"/>
                 <a:cs typeface="+mn-cs"/>
               </a:rPr>
-              <a:t>帮扶管理信息系统 v1.18.24</a:t>
+              <a:t>帮扶管理信息系统 v1.18.25</a:t>
             </a:r>
           </a:p>
         </p:txBody>
@@ -46270,7 +46270,7 @@
                 <a:ea typeface="+mn-ea"/>
                 <a:cs typeface="+mn-cs"/>
               </a:rPr>
-              <a:t>帮扶管理信息系统 v1.18.24</a:t>
+              <a:t>帮扶管理信息系统 v1.18.25</a:t>
             </a:r>
           </a:p>
         </p:txBody>
@@ -47325,7 +47325,7 @@
                 <a:ea typeface="+mn-ea"/>
                 <a:cs typeface="+mn-cs"/>
               </a:rPr>
-              <a:t>帮扶管理信息系统 v1.18.24</a:t>
+              <a:t>帮扶管理信息系统 v1.18.25</a:t>
             </a:r>
           </a:p>
         </p:txBody>
@@ -49588,7 +49588,7 @@
                 <a:ea typeface="+mn-ea"/>
                 <a:cs typeface="+mn-cs"/>
               </a:rPr>
-              <a:t>帮扶管理信息系统 v1.18.24</a:t>
+              <a:t>帮扶管理信息系统 v1.18.25</a:t>
             </a:r>
           </a:p>
         </p:txBody>
@@ -50397,7 +50397,7 @@
                 <a:ea typeface="+mn-ea"/>
                 <a:cs typeface="+mn-cs"/>
               </a:rPr>
-              <a:t>帮扶管理信息系统 v1.18.24</a:t>
+              <a:t>帮扶管理信息系统 v1.18.25</a:t>
             </a:r>
           </a:p>
         </p:txBody>
@@ -51138,7 +51138,7 @@
                 <a:ea typeface="+mn-ea"/>
                 <a:cs typeface="+mn-cs"/>
               </a:rPr>
-              <a:t>帮扶管理信息系统 v1.18.24</a:t>
+              <a:t>帮扶管理信息系统 v1.18.25</a:t>
             </a:r>
           </a:p>
         </p:txBody>
@@ -52053,7 +52053,7 @@
                 <a:ea typeface="+mn-ea"/>
                 <a:cs typeface="+mn-cs"/>
               </a:rPr>
-              <a:t>帮扶管理信息系统 v1.18.24</a:t>
+              <a:t>帮扶管理信息系统 v1.18.25</a:t>
             </a:r>
           </a:p>
         </p:txBody>
@@ -53108,7 +53108,7 @@
                 <a:ea typeface="+mn-ea"/>
                 <a:cs typeface="+mn-cs"/>
               </a:rPr>
-              <a:t>帮扶管理信息系统 v1.18.24</a:t>
+              <a:t>帮扶管理信息系统 v1.18.25</a:t>
             </a:r>
           </a:p>
         </p:txBody>
@@ -54063,7 +54063,7 @@
                 <a:ea typeface="+mn-ea"/>
                 <a:cs typeface="+mn-cs"/>
               </a:rPr>
-              <a:t>帮扶管理信息系统 v1.18.24</a:t>
+              <a:t>帮扶管理信息系统 v1.18.25</a:t>
             </a:r>
           </a:p>
         </p:txBody>
@@ -54804,7 +54804,7 @@
                 <a:ea typeface="+mn-ea"/>
                 <a:cs typeface="+mn-cs"/>
               </a:rPr>
-              <a:t>帮扶管理信息系统 v1.18.24</a:t>
+              <a:t>帮扶管理信息系统 v1.18.25</a:t>
             </a:r>
           </a:p>
         </p:txBody>
@@ -55855,7 +55855,7 @@
                 <a:ea typeface="+mn-ea"/>
                 <a:cs typeface="+mn-cs"/>
               </a:rPr>
-              <a:t>帮扶管理信息系统 v1.18.24</a:t>
+              <a:t>帮扶管理信息系统 v1.18.25</a:t>
             </a:r>
           </a:p>
         </p:txBody>
@@ -56976,7 +56976,7 @@
                 <a:ea typeface="+mn-ea"/>
                 <a:cs typeface="+mn-cs"/>
               </a:rPr>
-              <a:t>帮扶管理信息系统 v1.18.24</a:t>
+              <a:t>帮扶管理信息系统 v1.18.25</a:t>
             </a:r>
           </a:p>
         </p:txBody>
@@ -57941,7 +57941,7 @@
                 <a:ea typeface="+mn-ea"/>
                 <a:cs typeface="+mn-cs"/>
               </a:rPr>
-              <a:t>帮扶管理信息系统 v1.18.24</a:t>
+              <a:t>帮扶管理信息系统 v1.18.25</a:t>
             </a:r>
           </a:p>
         </p:txBody>
@@ -58281,7 +58281,7 @@
                 <a:ea typeface="+mn-ea"/>
                 <a:cs typeface="+mn-cs"/>
               </a:rPr>
-              <a:t>帮扶管理信息系统 v1.18.24 · 仓库：github.com/lzh745200/MRRS · 完整文档见 docs/ 目录</a:t>
+              <a:t>帮扶管理信息系统 v1.18.25 · 仓库：github.com/lzh745200/MRRS · 完整文档见 docs/ 目录</a:t>
             </a:r>
           </a:p>
         </p:txBody>
@@ -58321,7 +58321,7 @@
                 <a:ea typeface="+mn-ea"/>
                 <a:cs typeface="+mn-cs"/>
               </a:rPr>
-              <a:t>V1.18.24 | 2026-10-28</a:t>
+              <a:t>V1.18.25 | 2026-10-28</a:t>
             </a:r>
           </a:p>
         </p:txBody>
@@ -59234,7 +59234,7 @@
                 <a:ea typeface="+mn-ea"/>
                 <a:cs typeface="+mn-cs"/>
               </a:rPr>
-              <a:t>帮扶管理信息系统 v1.18.24</a:t>
+              <a:t>帮扶管理信息系统 v1.18.25</a:t>
             </a:r>
           </a:p>
         </p:txBody>
@@ -60781,7 +60781,7 @@
                 <a:ea typeface="+mn-ea"/>
                 <a:cs typeface="+mn-cs"/>
               </a:rPr>
-              <a:t>帮扶管理信息系统 v1.18.24</a:t>
+              <a:t>帮扶管理信息系统 v1.18.25</a:t>
             </a:r>
           </a:p>
         </p:txBody>
@@ -62224,7 +62224,7 @@
                 <a:ea typeface="+mn-ea"/>
                 <a:cs typeface="+mn-cs"/>
               </a:rPr>
-              <a:t>帮扶管理信息系统 v1.18.24</a:t>
+              <a:t>帮扶管理信息系统 v1.18.25</a:t>
             </a:r>
           </a:p>
         </p:txBody>

--- a/docs/帮扶管理信息系统-操作培训.pptx
+++ b/docs/帮扶管理信息系统-操作培训.pptx
@@ -5352,7 +5352,7 @@
                 <a:ea typeface="+mn-ea"/>
                 <a:cs typeface="+mn-cs"/>
               </a:rPr>
-              <a:t>V1.18.25 | 2026-10-28 | FastAPI + Vue 3 + Electron + SQLite</a:t>
+              <a:t>V1.18.26 | 2026-10-29 | FastAPI + Vue 3 + Electron + SQLite</a:t>
             </a:r>
           </a:p>
         </p:txBody>
@@ -6185,7 +6185,7 @@
                 <a:ea typeface="+mn-ea"/>
                 <a:cs typeface="+mn-cs"/>
               </a:rPr>
-              <a:t>帮扶管理信息系统 v1.18.25</a:t>
+              <a:t>帮扶管理信息系统 v1.18.26</a:t>
             </a:r>
           </a:p>
         </p:txBody>
@@ -8153,7 +8153,7 @@
                 <a:ea typeface="+mn-ea"/>
                 <a:cs typeface="+mn-cs"/>
               </a:rPr>
-              <a:t>帮扶管理信息系统 v1.18.25</a:t>
+              <a:t>帮扶管理信息系统 v1.18.26</a:t>
             </a:r>
           </a:p>
         </p:txBody>
@@ -9040,7 +9040,7 @@
                 <a:ea typeface="+mn-ea"/>
                 <a:cs typeface="+mn-cs"/>
               </a:rPr>
-              <a:t>帮扶管理信息系统 v1.18.25</a:t>
+              <a:t>帮扶管理信息系统 v1.18.26</a:t>
             </a:r>
           </a:p>
         </p:txBody>
@@ -10005,7 +10005,7 @@
                 <a:ea typeface="+mn-ea"/>
                 <a:cs typeface="+mn-cs"/>
               </a:rPr>
-              <a:t>帮扶管理信息系统 v1.18.25</a:t>
+              <a:t>帮扶管理信息系统 v1.18.26</a:t>
             </a:r>
           </a:p>
         </p:txBody>
@@ -10920,7 +10920,7 @@
                 <a:ea typeface="+mn-ea"/>
                 <a:cs typeface="+mn-cs"/>
               </a:rPr>
-              <a:t>帮扶管理信息系统 v1.18.25</a:t>
+              <a:t>帮扶管理信息系统 v1.18.26</a:t>
             </a:r>
           </a:p>
         </p:txBody>
@@ -11875,7 +11875,7 @@
                 <a:ea typeface="+mn-ea"/>
                 <a:cs typeface="+mn-cs"/>
               </a:rPr>
-              <a:t>帮扶管理信息系统 v1.18.25</a:t>
+              <a:t>帮扶管理信息系统 v1.18.26</a:t>
             </a:r>
           </a:p>
         </p:txBody>
@@ -13116,7 +13116,7 @@
                 <a:ea typeface="+mn-ea"/>
                 <a:cs typeface="+mn-cs"/>
               </a:rPr>
-              <a:t>帮扶管理信息系统 v1.18.25</a:t>
+              <a:t>帮扶管理信息系统 v1.18.26</a:t>
             </a:r>
           </a:p>
         </p:txBody>
@@ -14237,7 +14237,7 @@
                 <a:ea typeface="+mn-ea"/>
                 <a:cs typeface="+mn-cs"/>
               </a:rPr>
-              <a:t>帮扶管理信息系统 v1.18.25</a:t>
+              <a:t>帮扶管理信息系统 v1.18.26</a:t>
             </a:r>
           </a:p>
         </p:txBody>
@@ -15136,7 +15136,7 @@
                 <a:ea typeface="+mn-ea"/>
                 <a:cs typeface="+mn-cs"/>
               </a:rPr>
-              <a:t>帮扶管理信息系统 v1.18.25</a:t>
+              <a:t>帮扶管理信息系统 v1.18.26</a:t>
             </a:r>
           </a:p>
         </p:txBody>
@@ -16545,7 +16545,7 @@
                 <a:ea typeface="+mn-ea"/>
                 <a:cs typeface="+mn-cs"/>
               </a:rPr>
-              <a:t>帮扶管理信息系统 v1.18.25</a:t>
+              <a:t>帮扶管理信息系统 v1.18.26</a:t>
             </a:r>
           </a:p>
         </p:txBody>
@@ -17600,7 +17600,7 @@
                 <a:ea typeface="+mn-ea"/>
                 <a:cs typeface="+mn-cs"/>
               </a:rPr>
-              <a:t>帮扶管理信息系统 v1.18.25</a:t>
+              <a:t>帮扶管理信息系统 v1.18.26</a:t>
             </a:r>
           </a:p>
         </p:txBody>
@@ -19622,7 +19622,7 @@
                 <a:ea typeface="+mn-ea"/>
                 <a:cs typeface="+mn-cs"/>
               </a:rPr>
-              <a:t>帮扶管理信息系统 v1.18.25</a:t>
+              <a:t>帮扶管理信息系统 v1.18.26</a:t>
             </a:r>
           </a:p>
         </p:txBody>
@@ -20759,7 +20759,7 @@
                 <a:ea typeface="+mn-ea"/>
                 <a:cs typeface="+mn-cs"/>
               </a:rPr>
-              <a:t>帮扶管理信息系统 v1.18.25</a:t>
+              <a:t>帮扶管理信息系统 v1.18.26</a:t>
             </a:r>
           </a:p>
         </p:txBody>
@@ -21672,7 +21672,7 @@
                 <a:ea typeface="+mn-ea"/>
                 <a:cs typeface="+mn-cs"/>
               </a:rPr>
-              <a:t>帮扶管理信息系统 v1.18.25</a:t>
+              <a:t>帮扶管理信息系统 v1.18.26</a:t>
             </a:r>
           </a:p>
         </p:txBody>
@@ -22627,7 +22627,7 @@
                 <a:ea typeface="+mn-ea"/>
                 <a:cs typeface="+mn-cs"/>
               </a:rPr>
-              <a:t>帮扶管理信息系统 v1.18.25</a:t>
+              <a:t>帮扶管理信息系统 v1.18.26</a:t>
             </a:r>
           </a:p>
         </p:txBody>
@@ -23592,7 +23592,7 @@
                 <a:ea typeface="+mn-ea"/>
                 <a:cs typeface="+mn-cs"/>
               </a:rPr>
-              <a:t>帮扶管理信息系统 v1.18.25</a:t>
+              <a:t>帮扶管理信息系统 v1.18.26</a:t>
             </a:r>
           </a:p>
         </p:txBody>
@@ -24833,7 +24833,7 @@
                 <a:ea typeface="+mn-ea"/>
                 <a:cs typeface="+mn-cs"/>
               </a:rPr>
-              <a:t>帮扶管理信息系统 v1.18.25</a:t>
+              <a:t>帮扶管理信息系统 v1.18.26</a:t>
             </a:r>
           </a:p>
         </p:txBody>
@@ -25748,7 +25748,7 @@
                 <a:ea typeface="+mn-ea"/>
                 <a:cs typeface="+mn-cs"/>
               </a:rPr>
-              <a:t>帮扶管理信息系统 v1.18.25</a:t>
+              <a:t>帮扶管理信息系统 v1.18.26</a:t>
             </a:r>
           </a:p>
         </p:txBody>
@@ -26489,7 +26489,7 @@
                 <a:ea typeface="+mn-ea"/>
                 <a:cs typeface="+mn-cs"/>
               </a:rPr>
-              <a:t>帮扶管理信息系统 v1.18.25</a:t>
+              <a:t>帮扶管理信息系统 v1.18.26</a:t>
             </a:r>
           </a:p>
         </p:txBody>
@@ -27596,7 +27596,7 @@
                 <a:ea typeface="+mn-ea"/>
                 <a:cs typeface="+mn-cs"/>
               </a:rPr>
-              <a:t>帮扶管理信息系统 v1.18.25</a:t>
+              <a:t>帮扶管理信息系统 v1.18.26</a:t>
             </a:r>
           </a:p>
         </p:txBody>
@@ -28561,7 +28561,7 @@
                 <a:ea typeface="+mn-ea"/>
                 <a:cs typeface="+mn-cs"/>
               </a:rPr>
-              <a:t>帮扶管理信息系统 v1.18.25</a:t>
+              <a:t>帮扶管理信息系统 v1.18.26</a:t>
             </a:r>
           </a:p>
         </p:txBody>
@@ -29370,7 +29370,7 @@
                 <a:ea typeface="+mn-ea"/>
                 <a:cs typeface="+mn-cs"/>
               </a:rPr>
-              <a:t>帮扶管理信息系统 v1.18.25</a:t>
+              <a:t>帮扶管理信息系统 v1.18.26</a:t>
             </a:r>
           </a:p>
         </p:txBody>
@@ -30545,7 +30545,7 @@
                 <a:ea typeface="+mn-ea"/>
                 <a:cs typeface="+mn-cs"/>
               </a:rPr>
-              <a:t>帮扶管理信息系统 v1.18.25</a:t>
+              <a:t>帮扶管理信息系统 v1.18.26</a:t>
             </a:r>
           </a:p>
         </p:txBody>
@@ -31927,7 +31927,7 @@
                 <a:ea typeface="+mn-ea"/>
                 <a:cs typeface="+mn-cs"/>
               </a:rPr>
-              <a:t>帮扶管理信息系统 v1.18.25</a:t>
+              <a:t>帮扶管理信息系统 v1.18.26</a:t>
             </a:r>
           </a:p>
         </p:txBody>
@@ -32736,7 +32736,7 @@
                 <a:ea typeface="+mn-ea"/>
                 <a:cs typeface="+mn-cs"/>
               </a:rPr>
-              <a:t>帮扶管理信息系统 v1.18.25</a:t>
+              <a:t>帮扶管理信息系统 v1.18.26</a:t>
             </a:r>
           </a:p>
         </p:txBody>
@@ -33691,7 +33691,7 @@
                 <a:ea typeface="+mn-ea"/>
                 <a:cs typeface="+mn-cs"/>
               </a:rPr>
-              <a:t>帮扶管理信息系统 v1.18.25</a:t>
+              <a:t>帮扶管理信息系统 v1.18.26</a:t>
             </a:r>
           </a:p>
         </p:txBody>
@@ -34866,7 +34866,7 @@
                 <a:ea typeface="+mn-ea"/>
                 <a:cs typeface="+mn-cs"/>
               </a:rPr>
-              <a:t>帮扶管理信息系统 v1.18.25</a:t>
+              <a:t>帮扶管理信息系统 v1.18.26</a:t>
             </a:r>
           </a:p>
         </p:txBody>
@@ -35675,7 +35675,7 @@
                 <a:ea typeface="+mn-ea"/>
                 <a:cs typeface="+mn-cs"/>
               </a:rPr>
-              <a:t>帮扶管理信息系统 v1.18.25</a:t>
+              <a:t>帮扶管理信息系统 v1.18.26</a:t>
             </a:r>
           </a:p>
         </p:txBody>
@@ -36416,7 +36416,7 @@
                 <a:ea typeface="+mn-ea"/>
                 <a:cs typeface="+mn-cs"/>
               </a:rPr>
-              <a:t>帮扶管理信息系统 v1.18.25</a:t>
+              <a:t>帮扶管理信息系统 v1.18.26</a:t>
             </a:r>
           </a:p>
         </p:txBody>
@@ -37669,7 +37669,7 @@
                 <a:ea typeface="+mn-ea"/>
                 <a:cs typeface="+mn-cs"/>
               </a:rPr>
-              <a:t>帮扶管理信息系统 v1.18.25</a:t>
+              <a:t>帮扶管理信息系统 v1.18.26</a:t>
             </a:r>
           </a:p>
         </p:txBody>
@@ -38478,7 +38478,7 @@
                 <a:ea typeface="+mn-ea"/>
                 <a:cs typeface="+mn-cs"/>
               </a:rPr>
-              <a:t>帮扶管理信息系统 v1.18.25</a:t>
+              <a:t>帮扶管理信息系统 v1.18.26</a:t>
             </a:r>
           </a:p>
         </p:txBody>
@@ -39761,7 +39761,7 @@
                 <a:ea typeface="+mn-ea"/>
                 <a:cs typeface="+mn-cs"/>
               </a:rPr>
-              <a:t>帮扶管理信息系统 v1.18.25</a:t>
+              <a:t>帮扶管理信息系统 v1.18.26</a:t>
             </a:r>
           </a:p>
         </p:txBody>
@@ -40676,7 +40676,7 @@
                 <a:ea typeface="+mn-ea"/>
                 <a:cs typeface="+mn-cs"/>
               </a:rPr>
-              <a:t>帮扶管理信息系统 v1.18.25</a:t>
+              <a:t>帮扶管理信息系统 v1.18.26</a:t>
             </a:r>
           </a:p>
         </p:txBody>
@@ -42146,7 +42146,7 @@
                 <a:ea typeface="+mn-ea"/>
                 <a:cs typeface="+mn-cs"/>
               </a:rPr>
-              <a:t>帮扶管理信息系统 v1.18.25</a:t>
+              <a:t>帮扶管理信息系统 v1.18.26</a:t>
             </a:r>
           </a:p>
         </p:txBody>
@@ -43429,7 +43429,7 @@
                 <a:ea typeface="+mn-ea"/>
                 <a:cs typeface="+mn-cs"/>
               </a:rPr>
-              <a:t>帮扶管理信息系统 v1.18.25</a:t>
+              <a:t>帮扶管理信息系统 v1.18.26</a:t>
             </a:r>
           </a:p>
         </p:txBody>
@@ -44484,7 +44484,7 @@
                 <a:ea typeface="+mn-ea"/>
                 <a:cs typeface="+mn-cs"/>
               </a:rPr>
-              <a:t>帮扶管理信息系统 v1.18.25</a:t>
+              <a:t>帮扶管理信息系统 v1.18.26</a:t>
             </a:r>
           </a:p>
         </p:txBody>
@@ -45383,7 +45383,7 @@
                 <a:ea typeface="+mn-ea"/>
                 <a:cs typeface="+mn-cs"/>
               </a:rPr>
-              <a:t>帮扶管理信息系统 v1.18.25</a:t>
+              <a:t>帮扶管理信息系统 v1.18.26</a:t>
             </a:r>
           </a:p>
         </p:txBody>
@@ -46270,7 +46270,7 @@
                 <a:ea typeface="+mn-ea"/>
                 <a:cs typeface="+mn-cs"/>
               </a:rPr>
-              <a:t>帮扶管理信息系统 v1.18.25</a:t>
+              <a:t>帮扶管理信息系统 v1.18.26</a:t>
             </a:r>
           </a:p>
         </p:txBody>
@@ -47325,7 +47325,7 @@
                 <a:ea typeface="+mn-ea"/>
                 <a:cs typeface="+mn-cs"/>
               </a:rPr>
-              <a:t>帮扶管理信息系统 v1.18.25</a:t>
+              <a:t>帮扶管理信息系统 v1.18.26</a:t>
             </a:r>
           </a:p>
         </p:txBody>
@@ -49588,7 +49588,7 @@
                 <a:ea typeface="+mn-ea"/>
                 <a:cs typeface="+mn-cs"/>
               </a:rPr>
-              <a:t>帮扶管理信息系统 v1.18.25</a:t>
+              <a:t>帮扶管理信息系统 v1.18.26</a:t>
             </a:r>
           </a:p>
         </p:txBody>
@@ -50397,7 +50397,7 @@
                 <a:ea typeface="+mn-ea"/>
                 <a:cs typeface="+mn-cs"/>
               </a:rPr>
-              <a:t>帮扶管理信息系统 v1.18.25</a:t>
+              <a:t>帮扶管理信息系统 v1.18.26</a:t>
             </a:r>
           </a:p>
         </p:txBody>
@@ -51138,7 +51138,7 @@
                 <a:ea typeface="+mn-ea"/>
                 <a:cs typeface="+mn-cs"/>
               </a:rPr>
-              <a:t>帮扶管理信息系统 v1.18.25</a:t>
+              <a:t>帮扶管理信息系统 v1.18.26</a:t>
             </a:r>
           </a:p>
         </p:txBody>
@@ -52053,7 +52053,7 @@
                 <a:ea typeface="+mn-ea"/>
                 <a:cs typeface="+mn-cs"/>
               </a:rPr>
-              <a:t>帮扶管理信息系统 v1.18.25</a:t>
+              <a:t>帮扶管理信息系统 v1.18.26</a:t>
             </a:r>
           </a:p>
         </p:txBody>
@@ -53108,7 +53108,7 @@
                 <a:ea typeface="+mn-ea"/>
                 <a:cs typeface="+mn-cs"/>
               </a:rPr>
-              <a:t>帮扶管理信息系统 v1.18.25</a:t>
+              <a:t>帮扶管理信息系统 v1.18.26</a:t>
             </a:r>
           </a:p>
         </p:txBody>
@@ -54063,7 +54063,7 @@
                 <a:ea typeface="+mn-ea"/>
                 <a:cs typeface="+mn-cs"/>
               </a:rPr>
-              <a:t>帮扶管理信息系统 v1.18.25</a:t>
+              <a:t>帮扶管理信息系统 v1.18.26</a:t>
             </a:r>
           </a:p>
         </p:txBody>
@@ -54804,7 +54804,7 @@
                 <a:ea typeface="+mn-ea"/>
                 <a:cs typeface="+mn-cs"/>
               </a:rPr>
-              <a:t>帮扶管理信息系统 v1.18.25</a:t>
+              <a:t>帮扶管理信息系统 v1.18.26</a:t>
             </a:r>
           </a:p>
         </p:txBody>
@@ -55855,7 +55855,7 @@
                 <a:ea typeface="+mn-ea"/>
                 <a:cs typeface="+mn-cs"/>
               </a:rPr>
-              <a:t>帮扶管理信息系统 v1.18.25</a:t>
+              <a:t>帮扶管理信息系统 v1.18.26</a:t>
             </a:r>
           </a:p>
         </p:txBody>
@@ -56976,7 +56976,7 @@
                 <a:ea typeface="+mn-ea"/>
                 <a:cs typeface="+mn-cs"/>
               </a:rPr>
-              <a:t>帮扶管理信息系统 v1.18.25</a:t>
+              <a:t>帮扶管理信息系统 v1.18.26</a:t>
             </a:r>
           </a:p>
         </p:txBody>
@@ -57941,7 +57941,7 @@
                 <a:ea typeface="+mn-ea"/>
                 <a:cs typeface="+mn-cs"/>
               </a:rPr>
-              <a:t>帮扶管理信息系统 v1.18.25</a:t>
+              <a:t>帮扶管理信息系统 v1.18.26</a:t>
             </a:r>
           </a:p>
         </p:txBody>
@@ -58281,7 +58281,7 @@
                 <a:ea typeface="+mn-ea"/>
                 <a:cs typeface="+mn-cs"/>
               </a:rPr>
-              <a:t>帮扶管理信息系统 v1.18.25 · 仓库：github.com/lzh745200/MRRS · 完整文档见 docs/ 目录</a:t>
+              <a:t>帮扶管理信息系统 v1.18.26 · 仓库：github.com/lzh745200/MRRS · 完整文档见 docs/ 目录</a:t>
             </a:r>
           </a:p>
         </p:txBody>
@@ -58321,7 +58321,7 @@
                 <a:ea typeface="+mn-ea"/>
                 <a:cs typeface="+mn-cs"/>
               </a:rPr>
-              <a:t>V1.18.25 | 2026-10-28</a:t>
+              <a:t>V1.18.26 | 2026-10-29</a:t>
             </a:r>
           </a:p>
         </p:txBody>
@@ -59234,7 +59234,7 @@
                 <a:ea typeface="+mn-ea"/>
                 <a:cs typeface="+mn-cs"/>
               </a:rPr>
-              <a:t>帮扶管理信息系统 v1.18.25</a:t>
+              <a:t>帮扶管理信息系统 v1.18.26</a:t>
             </a:r>
           </a:p>
         </p:txBody>
@@ -60781,7 +60781,7 @@
                 <a:ea typeface="+mn-ea"/>
                 <a:cs typeface="+mn-cs"/>
               </a:rPr>
-              <a:t>帮扶管理信息系统 v1.18.25</a:t>
+              <a:t>帮扶管理信息系统 v1.18.26</a:t>
             </a:r>
           </a:p>
         </p:txBody>
@@ -62224,7 +62224,7 @@
                 <a:ea typeface="+mn-ea"/>
                 <a:cs typeface="+mn-cs"/>
               </a:rPr>
-              <a:t>帮扶管理信息系统 v1.18.25</a:t>
+              <a:t>帮扶管理信息系统 v1.18.26</a:t>
             </a:r>
           </a:p>
         </p:txBody>
